--- a/Progression_P6/P6-L06_Paper_3_Role_Play.pptx
+++ b/Progression_P6/P6-L06_Paper_3_Role_Play.pptx
@@ -1,6 +1,6 @@
 
 <file path=ppt/presentation.xml><?xml version="1.0" encoding="utf-8"?>
-<p:presentation xmlns:a="http://schemas.openxmlformats.org/drawingml/2006/main" xmlns:r="http://schemas.openxmlformats.org/officeDocument/2006/relationships" xmlns:p="http://schemas.openxmlformats.org/presentationml/2006/main" saveSubsetFonts="1" autoCompressPictures="0">
+<p:presentation xmlns:a="http://schemas.openxmlformats.org/drawingml/2006/main" xmlns:r="http://schemas.openxmlformats.org/officeDocument/2006/relationships" xmlns:p="http://schemas.openxmlformats.org/presentationml/2006/main" embedTrueTypeFonts="1" saveSubsetFonts="1" autoCompressPictures="0">
   <p:sldMasterIdLst>
     <p:sldMasterId id="2147483648" r:id="rId1"/>
   </p:sldMasterIdLst>
@@ -32,6 +32,13 @@
   </p:notesMasterIdLst>
   <p:sldSz cx="12192000" cy="6858000"/>
   <p:notesSz cx="6858000" cy="12192000"/>
+  <p:embeddedFontLst>
+    <p:embeddedFont>
+      <p:font typeface="Amiri" pitchFamily="2" charset="-78"/>
+      <p:regular r:id="rIdFont1"/>
+      <p:bold r:id="rIdFont2"/>
+    </p:embeddedFont>
+  </p:embeddedFontLst>
   <p:defaultTextStyle>
     <a:lvl1pPr marL="0" algn="l" defTabSz="914400" rtl="0" eaLnBrk="1" latinLnBrk="0" hangingPunct="1">
       <a:defRPr sz="1800" kern="1200">
@@ -388,8 +395,7 @@
           <a:schemeClr val="tx1"/>
         </a:solidFill>
         <a:latin typeface="+mn-lt"/>
-        <a:ea typeface="+mn-ea"/>
-        <a:cs typeface="+mn-cs"/>
+        <a:cs typeface="Amiri" pitchFamily="2" charset="-78"/>
       </a:defRPr>
     </a:lvl1pPr>
     <a:lvl2pPr marL="457200" algn="l" defTabSz="914400" rtl="0" eaLnBrk="1" latinLnBrk="0" hangingPunct="1">
@@ -398,8 +404,7 @@
           <a:schemeClr val="tx1"/>
         </a:solidFill>
         <a:latin typeface="+mn-lt"/>
-        <a:ea typeface="+mn-ea"/>
-        <a:cs typeface="+mn-cs"/>
+        <a:cs typeface="Amiri" pitchFamily="2" charset="-78"/>
       </a:defRPr>
     </a:lvl2pPr>
     <a:lvl3pPr marL="914400" algn="l" defTabSz="914400" rtl="0" eaLnBrk="1" latinLnBrk="0" hangingPunct="1">
@@ -408,8 +413,7 @@
           <a:schemeClr val="tx1"/>
         </a:solidFill>
         <a:latin typeface="+mn-lt"/>
-        <a:ea typeface="+mn-ea"/>
-        <a:cs typeface="+mn-cs"/>
+        <a:cs typeface="Amiri" pitchFamily="2" charset="-78"/>
       </a:defRPr>
     </a:lvl3pPr>
     <a:lvl4pPr marL="1371600" algn="l" defTabSz="914400" rtl="0" eaLnBrk="1" latinLnBrk="0" hangingPunct="1">
@@ -418,8 +422,7 @@
           <a:schemeClr val="tx1"/>
         </a:solidFill>
         <a:latin typeface="+mn-lt"/>
-        <a:ea typeface="+mn-ea"/>
-        <a:cs typeface="+mn-cs"/>
+        <a:cs typeface="Amiri" pitchFamily="2" charset="-78"/>
       </a:defRPr>
     </a:lvl4pPr>
     <a:lvl5pPr marL="1828800" algn="l" defTabSz="914400" rtl="0" eaLnBrk="1" latinLnBrk="0" hangingPunct="1">
@@ -428,8 +431,7 @@
           <a:schemeClr val="tx1"/>
         </a:solidFill>
         <a:latin typeface="+mn-lt"/>
-        <a:ea typeface="+mn-ea"/>
-        <a:cs typeface="+mn-cs"/>
+        <a:cs typeface="Amiri" pitchFamily="2" charset="-78"/>
       </a:defRPr>
     </a:lvl5pPr>
     <a:lvl6pPr marL="2286000" algn="l" defTabSz="914400" rtl="0" eaLnBrk="1" latinLnBrk="0" hangingPunct="1">
@@ -438,8 +440,7 @@
           <a:schemeClr val="tx1"/>
         </a:solidFill>
         <a:latin typeface="+mn-lt"/>
-        <a:ea typeface="+mn-ea"/>
-        <a:cs typeface="+mn-cs"/>
+        <a:cs typeface="Amiri" pitchFamily="2" charset="-78"/>
       </a:defRPr>
     </a:lvl6pPr>
     <a:lvl7pPr marL="2743200" algn="l" defTabSz="914400" rtl="0" eaLnBrk="1" latinLnBrk="0" hangingPunct="1">
@@ -448,8 +449,7 @@
           <a:schemeClr val="tx1"/>
         </a:solidFill>
         <a:latin typeface="+mn-lt"/>
-        <a:ea typeface="+mn-ea"/>
-        <a:cs typeface="+mn-cs"/>
+        <a:cs typeface="Amiri" pitchFamily="2" charset="-78"/>
       </a:defRPr>
     </a:lvl7pPr>
     <a:lvl8pPr marL="3200400" algn="l" defTabSz="914400" rtl="0" eaLnBrk="1" latinLnBrk="0" hangingPunct="1">
@@ -458,8 +458,7 @@
           <a:schemeClr val="tx1"/>
         </a:solidFill>
         <a:latin typeface="+mn-lt"/>
-        <a:ea typeface="+mn-ea"/>
-        <a:cs typeface="+mn-cs"/>
+        <a:cs typeface="Amiri" pitchFamily="2" charset="-78"/>
       </a:defRPr>
     </a:lvl8pPr>
     <a:lvl9pPr marL="3657600" algn="l" defTabSz="914400" rtl="0" eaLnBrk="1" latinLnBrk="0" hangingPunct="1">
@@ -468,8 +467,7 @@
           <a:schemeClr val="tx1"/>
         </a:solidFill>
         <a:latin typeface="+mn-lt"/>
-        <a:ea typeface="+mn-ea"/>
-        <a:cs typeface="+mn-cs"/>
+        <a:cs typeface="Amiri" pitchFamily="2" charset="-78"/>
       </a:defRPr>
     </a:lvl9pPr>
   </p:notesStyle>
@@ -2440,8 +2438,7 @@
             <a:schemeClr val="tx1"/>
           </a:solidFill>
           <a:latin typeface="+mj-lt"/>
-          <a:ea typeface="+mj-ea"/>
-          <a:cs typeface="+mj-cs"/>
+          <a:cs typeface="Amiri" pitchFamily="2" charset="-78"/>
         </a:defRPr>
       </a:lvl1pPr>
     </p:titleStyle>
@@ -2457,8 +2454,7 @@
             <a:schemeClr val="tx1"/>
           </a:solidFill>
           <a:latin typeface="+mn-lt"/>
-          <a:ea typeface="+mn-ea"/>
-          <a:cs typeface="+mn-cs"/>
+          <a:cs typeface="Amiri" pitchFamily="2" charset="-78"/>
         </a:defRPr>
       </a:lvl1pPr>
       <a:lvl2pPr marL="742950" indent="-285750" algn="l" defTabSz="914400" rtl="0" eaLnBrk="1" latinLnBrk="0" hangingPunct="1">
@@ -2472,8 +2468,7 @@
             <a:schemeClr val="tx1"/>
           </a:solidFill>
           <a:latin typeface="+mn-lt"/>
-          <a:ea typeface="+mn-ea"/>
-          <a:cs typeface="+mn-cs"/>
+          <a:cs typeface="Amiri" pitchFamily="2" charset="-78"/>
         </a:defRPr>
       </a:lvl2pPr>
       <a:lvl3pPr marL="1143000" indent="-228600" algn="l" defTabSz="914400" rtl="0" eaLnBrk="1" latinLnBrk="0" hangingPunct="1">
@@ -2487,8 +2482,7 @@
             <a:schemeClr val="tx1"/>
           </a:solidFill>
           <a:latin typeface="+mn-lt"/>
-          <a:ea typeface="+mn-ea"/>
-          <a:cs typeface="+mn-cs"/>
+          <a:cs typeface="Amiri" pitchFamily="2" charset="-78"/>
         </a:defRPr>
       </a:lvl3pPr>
       <a:lvl4pPr marL="1600200" indent="-228600" algn="l" defTabSz="914400" rtl="0" eaLnBrk="1" latinLnBrk="0" hangingPunct="1">
@@ -2502,8 +2496,7 @@
             <a:schemeClr val="tx1"/>
           </a:solidFill>
           <a:latin typeface="+mn-lt"/>
-          <a:ea typeface="+mn-ea"/>
-          <a:cs typeface="+mn-cs"/>
+          <a:cs typeface="Amiri" pitchFamily="2" charset="-78"/>
         </a:defRPr>
       </a:lvl4pPr>
       <a:lvl5pPr marL="2057400" indent="-228600" algn="l" defTabSz="914400" rtl="0" eaLnBrk="1" latinLnBrk="0" hangingPunct="1">
@@ -2517,8 +2510,7 @@
             <a:schemeClr val="tx1"/>
           </a:solidFill>
           <a:latin typeface="+mn-lt"/>
-          <a:ea typeface="+mn-ea"/>
-          <a:cs typeface="+mn-cs"/>
+          <a:cs typeface="Amiri" pitchFamily="2" charset="-78"/>
         </a:defRPr>
       </a:lvl5pPr>
       <a:lvl6pPr marL="2514600" indent="-228600" algn="l" defTabSz="914400" rtl="0" eaLnBrk="1" latinLnBrk="0" hangingPunct="1">
@@ -2532,8 +2524,7 @@
             <a:schemeClr val="tx1"/>
           </a:solidFill>
           <a:latin typeface="+mn-lt"/>
-          <a:ea typeface="+mn-ea"/>
-          <a:cs typeface="+mn-cs"/>
+          <a:cs typeface="Amiri" pitchFamily="2" charset="-78"/>
         </a:defRPr>
       </a:lvl6pPr>
       <a:lvl7pPr marL="2971800" indent="-228600" algn="l" defTabSz="914400" rtl="0" eaLnBrk="1" latinLnBrk="0" hangingPunct="1">
@@ -2547,8 +2538,7 @@
             <a:schemeClr val="tx1"/>
           </a:solidFill>
           <a:latin typeface="+mn-lt"/>
-          <a:ea typeface="+mn-ea"/>
-          <a:cs typeface="+mn-cs"/>
+          <a:cs typeface="Amiri" pitchFamily="2" charset="-78"/>
         </a:defRPr>
       </a:lvl7pPr>
       <a:lvl8pPr marL="3429000" indent="-228600" algn="l" defTabSz="914400" rtl="0" eaLnBrk="1" latinLnBrk="0" hangingPunct="1">
@@ -2562,8 +2552,7 @@
             <a:schemeClr val="tx1"/>
           </a:solidFill>
           <a:latin typeface="+mn-lt"/>
-          <a:ea typeface="+mn-ea"/>
-          <a:cs typeface="+mn-cs"/>
+          <a:cs typeface="Amiri" pitchFamily="2" charset="-78"/>
         </a:defRPr>
       </a:lvl8pPr>
       <a:lvl9pPr marL="3886200" indent="-228600" algn="l" defTabSz="914400" rtl="0" eaLnBrk="1" latinLnBrk="0" hangingPunct="1">
@@ -2577,8 +2566,7 @@
             <a:schemeClr val="tx1"/>
           </a:solidFill>
           <a:latin typeface="+mn-lt"/>
-          <a:ea typeface="+mn-ea"/>
-          <a:cs typeface="+mn-cs"/>
+          <a:cs typeface="Amiri" pitchFamily="2" charset="-78"/>
         </a:defRPr>
       </a:lvl9pPr>
     </p:bodyStyle>
@@ -2592,8 +2580,7 @@
             <a:schemeClr val="tx1"/>
           </a:solidFill>
           <a:latin typeface="+mn-lt"/>
-          <a:ea typeface="+mn-ea"/>
-          <a:cs typeface="+mn-cs"/>
+          <a:cs typeface="Amiri" pitchFamily="2" charset="-78"/>
         </a:defRPr>
       </a:lvl1pPr>
       <a:lvl2pPr marL="457200" algn="l" defTabSz="914400" rtl="0" eaLnBrk="1" latinLnBrk="0" hangingPunct="1">
@@ -2602,8 +2589,7 @@
             <a:schemeClr val="tx1"/>
           </a:solidFill>
           <a:latin typeface="+mn-lt"/>
-          <a:ea typeface="+mn-ea"/>
-          <a:cs typeface="+mn-cs"/>
+          <a:cs typeface="Amiri" pitchFamily="2" charset="-78"/>
         </a:defRPr>
       </a:lvl2pPr>
       <a:lvl3pPr marL="914400" algn="l" defTabSz="914400" rtl="0" eaLnBrk="1" latinLnBrk="0" hangingPunct="1">
@@ -2612,8 +2598,7 @@
             <a:schemeClr val="tx1"/>
           </a:solidFill>
           <a:latin typeface="+mn-lt"/>
-          <a:ea typeface="+mn-ea"/>
-          <a:cs typeface="+mn-cs"/>
+          <a:cs typeface="Amiri" pitchFamily="2" charset="-78"/>
         </a:defRPr>
       </a:lvl3pPr>
       <a:lvl4pPr marL="1371600" algn="l" defTabSz="914400" rtl="0" eaLnBrk="1" latinLnBrk="0" hangingPunct="1">
@@ -2622,8 +2607,7 @@
             <a:schemeClr val="tx1"/>
           </a:solidFill>
           <a:latin typeface="+mn-lt"/>
-          <a:ea typeface="+mn-ea"/>
-          <a:cs typeface="+mn-cs"/>
+          <a:cs typeface="Amiri" pitchFamily="2" charset="-78"/>
         </a:defRPr>
       </a:lvl4pPr>
       <a:lvl5pPr marL="1828800" algn="l" defTabSz="914400" rtl="0" eaLnBrk="1" latinLnBrk="0" hangingPunct="1">
@@ -2632,8 +2616,7 @@
             <a:schemeClr val="tx1"/>
           </a:solidFill>
           <a:latin typeface="+mn-lt"/>
-          <a:ea typeface="+mn-ea"/>
-          <a:cs typeface="+mn-cs"/>
+          <a:cs typeface="Amiri" pitchFamily="2" charset="-78"/>
         </a:defRPr>
       </a:lvl5pPr>
       <a:lvl6pPr marL="2286000" algn="l" defTabSz="914400" rtl="0" eaLnBrk="1" latinLnBrk="0" hangingPunct="1">
@@ -2642,8 +2625,7 @@
             <a:schemeClr val="tx1"/>
           </a:solidFill>
           <a:latin typeface="+mn-lt"/>
-          <a:ea typeface="+mn-ea"/>
-          <a:cs typeface="+mn-cs"/>
+          <a:cs typeface="Amiri" pitchFamily="2" charset="-78"/>
         </a:defRPr>
       </a:lvl6pPr>
       <a:lvl7pPr marL="2743200" algn="l" defTabSz="914400" rtl="0" eaLnBrk="1" latinLnBrk="0" hangingPunct="1">
@@ -2652,8 +2634,7 @@
             <a:schemeClr val="tx1"/>
           </a:solidFill>
           <a:latin typeface="+mn-lt"/>
-          <a:ea typeface="+mn-ea"/>
-          <a:cs typeface="+mn-cs"/>
+          <a:cs typeface="Amiri" pitchFamily="2" charset="-78"/>
         </a:defRPr>
       </a:lvl7pPr>
       <a:lvl8pPr marL="3200400" algn="l" defTabSz="914400" rtl="0" eaLnBrk="1" latinLnBrk="0" hangingPunct="1">
@@ -2662,8 +2643,7 @@
             <a:schemeClr val="tx1"/>
           </a:solidFill>
           <a:latin typeface="+mn-lt"/>
-          <a:ea typeface="+mn-ea"/>
-          <a:cs typeface="+mn-cs"/>
+          <a:cs typeface="Amiri" pitchFamily="2" charset="-78"/>
         </a:defRPr>
       </a:lvl8pPr>
       <a:lvl9pPr marL="3657600" algn="l" defTabSz="914400" rtl="0" eaLnBrk="1" latinLnBrk="0" hangingPunct="1">
@@ -2672,8 +2652,7 @@
             <a:schemeClr val="tx1"/>
           </a:solidFill>
           <a:latin typeface="+mn-lt"/>
-          <a:ea typeface="+mn-ea"/>
-          <a:cs typeface="+mn-cs"/>
+          <a:cs typeface="Amiri" pitchFamily="2" charset="-78"/>
         </a:defRPr>
       </a:lvl9pPr>
     </p:otherStyle>
@@ -2833,9 +2812,8 @@
                 <a:solidFill>
                   <a:srgbClr val="D4AF37"/>
                 </a:solidFill>
-                <a:latin typeface="Amiri" pitchFamily="34" charset="0"/>
-                <a:ea typeface="Amiri" pitchFamily="34" charset="-122"/>
-                <a:cs typeface="Amiri" pitchFamily="34" charset="-120"/>
+                <a:latin typeface="Amiri" pitchFamily="2" charset="-78"/>
+                <a:cs typeface="Amiri" pitchFamily="2" charset="-78"/>
               </a:rPr>
               <a:t>م</a:t>
             </a:r>
@@ -2873,8 +2851,7 @@
                   <a:srgbClr val="FFFFFF"/>
                 </a:solidFill>
                 <a:latin typeface="Cambria" pitchFamily="34" charset="0"/>
-                <a:ea typeface="Cambria" pitchFamily="34" charset="-122"/>
-                <a:cs typeface="Cambria" pitchFamily="34" charset="-120"/>
+                <a:cs typeface="Amiri" pitchFamily="2" charset="-78"/>
               </a:rPr>
               <a:t>Al Madina Online School</a:t>
             </a:r>
@@ -2890,8 +2867,7 @@
                   <a:srgbClr val="D4AF37"/>
                 </a:solidFill>
                 <a:latin typeface="Calibri" pitchFamily="34" charset="0"/>
-                <a:ea typeface="Calibri" pitchFamily="34" charset="-122"/>
-                <a:cs typeface="Calibri" pitchFamily="34" charset="-120"/>
+                <a:cs typeface="Amiri" pitchFamily="2" charset="-78"/>
               </a:rPr>
               <a:t>ARABIC DEPARTMENT · MIFTAH ARABIC</a:t>
             </a:r>
@@ -2929,8 +2905,7 @@
                   <a:srgbClr val="D4AF37"/>
                 </a:solidFill>
                 <a:latin typeface="Calibri" pitchFamily="34" charset="0"/>
-                <a:ea typeface="Calibri" pitchFamily="34" charset="-122"/>
-                <a:cs typeface="Calibri" pitchFamily="34" charset="-120"/>
+                <a:cs typeface="Amiri" pitchFamily="2" charset="-78"/>
               </a:rPr>
               <a:t>CAMBRIDGE IGCSE ARABIC 0544  ·  YEAR 9  ·  PROGRESSION P6  ·  P6-L06</a:t>
             </a:r>
@@ -2968,8 +2943,7 @@
                   <a:srgbClr val="9FB3D1"/>
                 </a:solidFill>
                 <a:latin typeface="Cambria" pitchFamily="34" charset="0"/>
-                <a:ea typeface="Cambria" pitchFamily="34" charset="-122"/>
-                <a:cs typeface="Cambria" pitchFamily="34" charset="-120"/>
+                <a:cs typeface="Amiri" pitchFamily="2" charset="-78"/>
               </a:rPr>
               <a:t>P6-L06</a:t>
             </a:r>
@@ -3007,8 +2981,7 @@
                   <a:srgbClr val="FFFFFF"/>
                 </a:solidFill>
                 <a:latin typeface="Cambria" pitchFamily="34" charset="0"/>
-                <a:ea typeface="Cambria" pitchFamily="34" charset="-122"/>
-                <a:cs typeface="Cambria" pitchFamily="34" charset="-120"/>
+                <a:cs typeface="Amiri" pitchFamily="2" charset="-78"/>
               </a:rPr>
               <a:t>Paper 3 Role Play — Transactional Language at IGCSE Standard</a:t>
             </a:r>
@@ -3045,9 +3018,8 @@
                 <a:solidFill>
                   <a:srgbClr val="D4AF37"/>
                 </a:solidFill>
-                <a:latin typeface="Amiri" pitchFamily="34" charset="0"/>
-                <a:ea typeface="Amiri" pitchFamily="34" charset="-122"/>
-                <a:cs typeface="Amiri" pitchFamily="34" charset="-120"/>
+                <a:latin typeface="Amiri" pitchFamily="2" charset="-78"/>
+                <a:cs typeface="Amiri" pitchFamily="2" charset="-78"/>
               </a:rPr>
               <a:t>الوَرَقَةُ الثَّالِثَةُ — تَمْثِيلُ الدَّوْرِ: اللُّغَةُ التَّعَامُلِيَّةُ</a:t>
             </a:r>
@@ -3085,8 +3057,7 @@
                   <a:srgbClr val="C6D2E6"/>
                 </a:solidFill>
                 <a:latin typeface="Calibri" pitchFamily="34" charset="0"/>
-                <a:ea typeface="Calibri" pitchFamily="34" charset="-122"/>
-                <a:cs typeface="Calibri" pitchFamily="34" charset="-120"/>
+                <a:cs typeface="Amiri" pitchFamily="2" charset="-78"/>
               </a:rPr>
               <a:t>Score full Communication in the role play: answer EXACTLY what each prompt asks, in two or three full sentences, in the right tense and structure — book, ask, request, negotiate, report, propose — across five IGCSE situations.</a:t>
             </a:r>
@@ -3151,8 +3122,7 @@
                   <a:srgbClr val="D4AF37"/>
                 </a:solidFill>
                 <a:latin typeface="Calibri" pitchFamily="34" charset="0"/>
-                <a:ea typeface="Calibri" pitchFamily="34" charset="-122"/>
-                <a:cs typeface="Calibri" pitchFamily="34" charset="-120"/>
+                <a:cs typeface="Amiri" pitchFamily="2" charset="-78"/>
               </a:rPr>
               <a:t>LESSON</a:t>
             </a:r>
@@ -3168,8 +3138,7 @@
                   <a:srgbClr val="FFFFFF"/>
                 </a:solidFill>
                 <a:latin typeface="Calibri" pitchFamily="34" charset="0"/>
-                <a:ea typeface="Calibri" pitchFamily="34" charset="-122"/>
-                <a:cs typeface="Calibri" pitchFamily="34" charset="-120"/>
+                <a:cs typeface="Amiri" pitchFamily="2" charset="-78"/>
               </a:rPr>
               <a:t>P6-L06 · Progression P6 · IGCSE Bridge</a:t>
             </a:r>
@@ -3234,8 +3203,7 @@
                   <a:srgbClr val="D4AF37"/>
                 </a:solidFill>
                 <a:latin typeface="Calibri" pitchFamily="34" charset="0"/>
-                <a:ea typeface="Calibri" pitchFamily="34" charset="-122"/>
-                <a:cs typeface="Calibri" pitchFamily="34" charset="-120"/>
+                <a:cs typeface="Amiri" pitchFamily="2" charset="-78"/>
               </a:rPr>
               <a:t>DURATION</a:t>
             </a:r>
@@ -3251,8 +3219,7 @@
                   <a:srgbClr val="FFFFFF"/>
                 </a:solidFill>
                 <a:latin typeface="Calibri" pitchFamily="34" charset="0"/>
-                <a:ea typeface="Calibri" pitchFamily="34" charset="-122"/>
-                <a:cs typeface="Calibri" pitchFamily="34" charset="-120"/>
+                <a:cs typeface="Amiri" pitchFamily="2" charset="-78"/>
               </a:rPr>
               <a:t>60 minutes · Teams</a:t>
             </a:r>
@@ -3317,8 +3284,7 @@
                   <a:srgbClr val="D4AF37"/>
                 </a:solidFill>
                 <a:latin typeface="Calibri" pitchFamily="34" charset="0"/>
-                <a:ea typeface="Calibri" pitchFamily="34" charset="-122"/>
-                <a:cs typeface="Calibri" pitchFamily="34" charset="-120"/>
+                <a:cs typeface="Amiri" pitchFamily="2" charset="-78"/>
               </a:rPr>
               <a:t>LEVEL</a:t>
             </a:r>
@@ -3334,8 +3300,7 @@
                   <a:srgbClr val="FFFFFF"/>
                 </a:solidFill>
                 <a:latin typeface="Calibri" pitchFamily="34" charset="0"/>
-                <a:ea typeface="Calibri" pitchFamily="34" charset="-122"/>
-                <a:cs typeface="Calibri" pitchFamily="34" charset="-120"/>
+                <a:cs typeface="Amiri" pitchFamily="2" charset="-78"/>
               </a:rPr>
               <a:t>Progression · B1 → B2</a:t>
             </a:r>
@@ -3400,8 +3365,7 @@
                   <a:srgbClr val="D4AF37"/>
                 </a:solidFill>
                 <a:latin typeface="Calibri" pitchFamily="34" charset="0"/>
-                <a:ea typeface="Calibri" pitchFamily="34" charset="-122"/>
-                <a:cs typeface="Calibri" pitchFamily="34" charset="-120"/>
+                <a:cs typeface="Amiri" pitchFamily="2" charset="-78"/>
               </a:rPr>
               <a:t>ON THE WEBSITE</a:t>
             </a:r>
@@ -3417,8 +3381,7 @@
                   <a:srgbClr val="FFFFFF"/>
                 </a:solidFill>
                 <a:latin typeface="Calibri" pitchFamily="34" charset="0"/>
-                <a:ea typeface="Calibri" pitchFamily="34" charset="-122"/>
-                <a:cs typeface="Calibri" pitchFamily="34" charset="-120"/>
+                <a:cs typeface="Amiri" pitchFamily="2" charset="-78"/>
               </a:rPr>
               <a:t>Pathways › Progression › P6 › P6-L06</a:t>
             </a:r>
@@ -3512,9 +3475,8 @@
                 <a:solidFill>
                   <a:srgbClr val="D4AF37"/>
                 </a:solidFill>
-                <a:latin typeface="Amiri" pitchFamily="34" charset="0"/>
-                <a:ea typeface="Amiri" pitchFamily="34" charset="-122"/>
-                <a:cs typeface="Amiri" pitchFamily="34" charset="-120"/>
+                <a:latin typeface="Amiri" pitchFamily="2" charset="-78"/>
+                <a:cs typeface="Amiri" pitchFamily="2" charset="-78"/>
               </a:rPr>
               <a:t>م</a:t>
             </a:r>
@@ -3552,8 +3514,7 @@
                   <a:srgbClr val="1B3B6F"/>
                 </a:solidFill>
                 <a:latin typeface="Cambria" pitchFamily="34" charset="0"/>
-                <a:ea typeface="Cambria" pitchFamily="34" charset="-122"/>
-                <a:cs typeface="Cambria" pitchFamily="34" charset="-120"/>
+                <a:cs typeface="Amiri" pitchFamily="2" charset="-78"/>
               </a:rPr>
               <a:t>Al Madina Online School</a:t>
             </a:r>
@@ -3591,8 +3552,7 @@
                   <a:srgbClr val="8A6D1E"/>
                 </a:solidFill>
                 <a:latin typeface="Calibri" pitchFamily="34" charset="0"/>
-                <a:ea typeface="Calibri" pitchFamily="34" charset="-122"/>
-                <a:cs typeface="Calibri" pitchFamily="34" charset="-120"/>
+                <a:cs typeface="Amiri" pitchFamily="2" charset="-78"/>
               </a:rPr>
               <a:t>ARABIC DEPARTMENT · MIFTAH ARABIC · IGCSE 0544</a:t>
             </a:r>
@@ -3657,8 +3617,7 @@
                   <a:srgbClr val="FFFFFF"/>
                 </a:solidFill>
                 <a:latin typeface="Calibri" pitchFamily="34" charset="0"/>
-                <a:ea typeface="Calibri" pitchFamily="34" charset="-122"/>
-                <a:cs typeface="Calibri" pitchFamily="34" charset="-120"/>
+                <a:cs typeface="Amiri" pitchFamily="2" charset="-78"/>
               </a:rPr>
               <a:t>P6-L06 · IGCSE Bridge</a:t>
             </a:r>
@@ -3723,8 +3682,7 @@
                   <a:srgbClr val="FFFFFF"/>
                 </a:solidFill>
                 <a:latin typeface="Calibri" pitchFamily="34" charset="0"/>
-                <a:ea typeface="Calibri" pitchFamily="34" charset="-122"/>
-                <a:cs typeface="Calibri" pitchFamily="34" charset="-120"/>
+                <a:cs typeface="Amiri" pitchFamily="2" charset="-78"/>
               </a:rPr>
               <a:t>TEACHER INSTRUCTION · 3 MIN</a:t>
             </a:r>
@@ -3762,8 +3720,7 @@
                   <a:srgbClr val="1B3B6F"/>
                 </a:solidFill>
                 <a:latin typeface="Calibri" pitchFamily="34" charset="0"/>
-                <a:ea typeface="Calibri" pitchFamily="34" charset="-122"/>
-                <a:cs typeface="Calibri" pitchFamily="34" charset="-120"/>
+                <a:cs typeface="Amiri" pitchFamily="2" charset="-78"/>
               </a:rPr>
               <a:t>TEACH · THE ROLE-PLAY MARK SCHEME, DEMYSTIFIED (WEBSITE)</a:t>
             </a:r>
@@ -3801,8 +3758,7 @@
                   <a:srgbClr val="1B3B6F"/>
                 </a:solidFill>
                 <a:latin typeface="Cambria" pitchFamily="34" charset="0"/>
-                <a:ea typeface="Cambria" pitchFamily="34" charset="-122"/>
-                <a:cs typeface="Cambria" pitchFamily="34" charset="-120"/>
+                <a:cs typeface="Amiri" pitchFamily="2" charset="-78"/>
               </a:rPr>
               <a:t>Ten marks: Communication 6 · Accuracy 4</a:t>
             </a:r>
@@ -3839,9 +3795,8 @@
                 <a:solidFill>
                   <a:srgbClr val="8A6D1E"/>
                 </a:solidFill>
-                <a:latin typeface="Amiri" pitchFamily="34" charset="0"/>
-                <a:ea typeface="Amiri" pitchFamily="34" charset="-122"/>
-                <a:cs typeface="Amiri" pitchFamily="34" charset="-120"/>
+                <a:latin typeface="Amiri" pitchFamily="2" charset="-78"/>
+                <a:cs typeface="Amiri" pitchFamily="2" charset="-78"/>
               </a:rPr>
               <a:t>مِعْيَارُ التَّقْيِيمِ</a:t>
             </a:r>
@@ -3879,8 +3834,7 @@
                   <a:srgbClr val="8A93A0"/>
                 </a:solidFill>
                 <a:latin typeface="Calibri" pitchFamily="34" charset="0"/>
-                <a:ea typeface="Calibri" pitchFamily="34" charset="-122"/>
-                <a:cs typeface="Calibri" pitchFamily="34" charset="-120"/>
+                <a:cs typeface="Amiri" pitchFamily="2" charset="-78"/>
               </a:rPr>
               <a:t>Miftah Arabic · Progression P6 · IGCSE Bridge · P6-L06</a:t>
             </a:r>
@@ -3952,8 +3906,7 @@
                   <a:srgbClr val="1B3B6F"/>
                 </a:solidFill>
                 <a:latin typeface="Calibri" pitchFamily="34" charset="0"/>
-                <a:ea typeface="Calibri" pitchFamily="34" charset="-122"/>
-                <a:cs typeface="Calibri" pitchFamily="34" charset="-120"/>
+                <a:cs typeface="Amiri" pitchFamily="2" charset="-78"/>
               </a:rPr>
               <a:t>THE ROLE-PLAY MARK SCHEME, DEMYSTIFIED</a:t>
             </a:r>
@@ -4016,8 +3969,7 @@
                   <a:srgbClr val="D4AF37"/>
                 </a:solidFill>
                 <a:latin typeface="Calibri" pitchFamily="34" charset="0"/>
-                <a:ea typeface="Calibri" pitchFamily="34" charset="-122"/>
-                <a:cs typeface="Calibri" pitchFamily="34" charset="-120"/>
+                <a:cs typeface="Amiri" pitchFamily="2" charset="-78"/>
               </a:rPr>
               <a:t>1</a:t>
             </a:r>
@@ -4055,8 +4007,7 @@
                   <a:srgbClr val="1F2A37"/>
                 </a:solidFill>
                 <a:latin typeface="Calibri" pitchFamily="34" charset="0"/>
-                <a:ea typeface="Calibri" pitchFamily="34" charset="-122"/>
-                <a:cs typeface="Calibri" pitchFamily="34" charset="-120"/>
+                <a:cs typeface="Amiri" pitchFamily="2" charset="-78"/>
               </a:rPr>
               <a:t>Communication (6 marks) — One mark per prompt successfully communicated — up to six prompts.</a:t>
             </a:r>
@@ -4119,8 +4070,7 @@
                   <a:srgbClr val="D4AF37"/>
                 </a:solidFill>
                 <a:latin typeface="Calibri" pitchFamily="34" charset="0"/>
-                <a:ea typeface="Calibri" pitchFamily="34" charset="-122"/>
-                <a:cs typeface="Calibri" pitchFamily="34" charset="-120"/>
+                <a:cs typeface="Amiri" pitchFamily="2" charset="-78"/>
               </a:rPr>
               <a:t>2</a:t>
             </a:r>
@@ -4158,8 +4108,7 @@
                   <a:srgbClr val="1F2A37"/>
                 </a:solidFill>
                 <a:latin typeface="Calibri" pitchFamily="34" charset="0"/>
-                <a:ea typeface="Calibri" pitchFamily="34" charset="-122"/>
-                <a:cs typeface="Calibri" pitchFamily="34" charset="-120"/>
+                <a:cs typeface="Amiri" pitchFamily="2" charset="-78"/>
               </a:rPr>
               <a:t>Accuracy (4 marks) — An overall score for language accuracy: 4 = consistently accurate, down to 1 = frequent errors that obscure meaning.</a:t>
             </a:r>
@@ -4222,8 +4171,7 @@
                   <a:srgbClr val="D4AF37"/>
                 </a:solidFill>
                 <a:latin typeface="Calibri" pitchFamily="34" charset="0"/>
-                <a:ea typeface="Calibri" pitchFamily="34" charset="-122"/>
-                <a:cs typeface="Calibri" pitchFamily="34" charset="-120"/>
+                <a:cs typeface="Amiri" pitchFamily="2" charset="-78"/>
               </a:rPr>
               <a:t>3</a:t>
             </a:r>
@@ -4261,8 +4209,7 @@
                   <a:srgbClr val="1F2A37"/>
                 </a:solidFill>
                 <a:latin typeface="Calibri" pitchFamily="34" charset="0"/>
-                <a:ea typeface="Calibri" pitchFamily="34" charset="-122"/>
-                <a:cs typeface="Calibri" pitchFamily="34" charset="-120"/>
+                <a:cs typeface="Amiri" pitchFamily="2" charset="-78"/>
               </a:rPr>
               <a:t>What costs you marks — Not answering the prompt; answering a different question; or using one word where a sentence is needed.</a:t>
             </a:r>
@@ -4334,8 +4281,7 @@
                   <a:srgbClr val="8A6D1E"/>
                 </a:solidFill>
                 <a:latin typeface="Calibri" pitchFamily="34" charset="0"/>
-                <a:ea typeface="Calibri" pitchFamily="34" charset="-122"/>
-                <a:cs typeface="Calibri" pitchFamily="34" charset="-120"/>
+                <a:cs typeface="Amiri" pitchFamily="2" charset="-78"/>
               </a:rPr>
               <a:t>IN ARABIC</a:t>
             </a:r>
@@ -4372,9 +4318,8 @@
                 <a:solidFill>
                   <a:srgbClr val="1B3B6F"/>
                 </a:solidFill>
-                <a:latin typeface="Amiri" pitchFamily="34" charset="0"/>
-                <a:ea typeface="Amiri" pitchFamily="34" charset="-122"/>
-                <a:cs typeface="Amiri" pitchFamily="34" charset="-120"/>
+                <a:latin typeface="Amiri" pitchFamily="2" charset="-78"/>
+                <a:cs typeface="Amiri" pitchFamily="2" charset="-78"/>
               </a:rPr>
               <a:t>مُحَفِّزٌ وَاحِدٌ = دَرَجَةٌ وَاحِدَةٌ</a:t>
             </a:r>
@@ -4412,8 +4357,7 @@
                   <a:srgbClr val="5A6472"/>
                 </a:solidFill>
                 <a:latin typeface="Calibri" pitchFamily="34" charset="0"/>
-                <a:ea typeface="Calibri" pitchFamily="34" charset="-122"/>
-                <a:cs typeface="Calibri" pitchFamily="34" charset="-120"/>
+                <a:cs typeface="Amiri" pitchFamily="2" charset="-78"/>
               </a:rPr>
               <a:t>one prompt = one Communication mark</a:t>
             </a:r>
@@ -4473,9 +4417,8 @@
                 <a:solidFill>
                   <a:srgbClr val="1B3B6F"/>
                 </a:solidFill>
-                <a:latin typeface="Amiri" pitchFamily="34" charset="0"/>
-                <a:ea typeface="Amiri" pitchFamily="34" charset="-122"/>
-                <a:cs typeface="Amiri" pitchFamily="34" charset="-120"/>
+                <a:latin typeface="Amiri" pitchFamily="2" charset="-78"/>
+                <a:cs typeface="Amiri" pitchFamily="2" charset="-78"/>
               </a:rPr>
               <a:t>✗ «صُدَاعٌ.»</a:t>
             </a:r>
@@ -4513,8 +4456,7 @@
                   <a:srgbClr val="5A6472"/>
                 </a:solidFill>
                 <a:latin typeface="Calibri" pitchFamily="34" charset="0"/>
-                <a:ea typeface="Calibri" pitchFamily="34" charset="-122"/>
-                <a:cs typeface="Calibri" pitchFamily="34" charset="-120"/>
+                <a:cs typeface="Amiri" pitchFamily="2" charset="-78"/>
               </a:rPr>
               <a:t>one word — the prompt may be lost</a:t>
             </a:r>
@@ -4574,9 +4516,8 @@
                 <a:solidFill>
                   <a:srgbClr val="1B3B6F"/>
                 </a:solidFill>
-                <a:latin typeface="Amiri" pitchFamily="34" charset="0"/>
-                <a:ea typeface="Amiri" pitchFamily="34" charset="-122"/>
-                <a:cs typeface="Amiri" pitchFamily="34" charset="-120"/>
+                <a:latin typeface="Amiri" pitchFamily="2" charset="-78"/>
+                <a:cs typeface="Amiri" pitchFamily="2" charset="-78"/>
               </a:rPr>
               <a:t>✓ أَشْعُرُ بِصُدَاعٍ مُنْذُ أُسْبُوعٍ.</a:t>
             </a:r>
@@ -4614,8 +4555,7 @@
                   <a:srgbClr val="5A6472"/>
                 </a:solidFill>
                 <a:latin typeface="Calibri" pitchFamily="34" charset="0"/>
-                <a:ea typeface="Calibri" pitchFamily="34" charset="-122"/>
-                <a:cs typeface="Calibri" pitchFamily="34" charset="-120"/>
+                <a:cs typeface="Amiri" pitchFamily="2" charset="-78"/>
               </a:rPr>
               <a:t>a full, relevant sentence</a:t>
             </a:r>
@@ -4653,8 +4593,7 @@
                   <a:srgbClr val="8A93A0"/>
                 </a:solidFill>
                 <a:latin typeface="Calibri" pitchFamily="34" charset="0"/>
-                <a:ea typeface="Calibri" pitchFamily="34" charset="-122"/>
-                <a:cs typeface="Calibri" pitchFamily="34" charset="-120"/>
+                <a:cs typeface="Amiri" pitchFamily="2" charset="-78"/>
               </a:rPr>
               <a:t>10 / 21</a:t>
             </a:r>
@@ -4748,9 +4687,8 @@
                 <a:solidFill>
                   <a:srgbClr val="D4AF37"/>
                 </a:solidFill>
-                <a:latin typeface="Amiri" pitchFamily="34" charset="0"/>
-                <a:ea typeface="Amiri" pitchFamily="34" charset="-122"/>
-                <a:cs typeface="Amiri" pitchFamily="34" charset="-120"/>
+                <a:latin typeface="Amiri" pitchFamily="2" charset="-78"/>
+                <a:cs typeface="Amiri" pitchFamily="2" charset="-78"/>
               </a:rPr>
               <a:t>م</a:t>
             </a:r>
@@ -4788,8 +4726,7 @@
                   <a:srgbClr val="1B3B6F"/>
                 </a:solidFill>
                 <a:latin typeface="Cambria" pitchFamily="34" charset="0"/>
-                <a:ea typeface="Cambria" pitchFamily="34" charset="-122"/>
-                <a:cs typeface="Cambria" pitchFamily="34" charset="-120"/>
+                <a:cs typeface="Amiri" pitchFamily="2" charset="-78"/>
               </a:rPr>
               <a:t>Al Madina Online School</a:t>
             </a:r>
@@ -4827,8 +4764,7 @@
                   <a:srgbClr val="8A6D1E"/>
                 </a:solidFill>
                 <a:latin typeface="Calibri" pitchFamily="34" charset="0"/>
-                <a:ea typeface="Calibri" pitchFamily="34" charset="-122"/>
-                <a:cs typeface="Calibri" pitchFamily="34" charset="-120"/>
+                <a:cs typeface="Amiri" pitchFamily="2" charset="-78"/>
               </a:rPr>
               <a:t>ARABIC DEPARTMENT · MIFTAH ARABIC · IGCSE 0544</a:t>
             </a:r>
@@ -4893,8 +4829,7 @@
                   <a:srgbClr val="FFFFFF"/>
                 </a:solidFill>
                 <a:latin typeface="Calibri" pitchFamily="34" charset="0"/>
-                <a:ea typeface="Calibri" pitchFamily="34" charset="-122"/>
-                <a:cs typeface="Calibri" pitchFamily="34" charset="-120"/>
+                <a:cs typeface="Amiri" pitchFamily="2" charset="-78"/>
               </a:rPr>
               <a:t>P6-L06 · IGCSE Bridge</a:t>
             </a:r>
@@ -4959,8 +4894,7 @@
                   <a:srgbClr val="FFFFFF"/>
                 </a:solidFill>
                 <a:latin typeface="Calibri" pitchFamily="34" charset="0"/>
-                <a:ea typeface="Calibri" pitchFamily="34" charset="-122"/>
-                <a:cs typeface="Calibri" pitchFamily="34" charset="-120"/>
+                <a:cs typeface="Amiri" pitchFamily="2" charset="-78"/>
               </a:rPr>
               <a:t>TEACHER INSTRUCTION · 3 MIN</a:t>
             </a:r>
@@ -4998,8 +4932,7 @@
                   <a:srgbClr val="1B3B6F"/>
                 </a:solidFill>
                 <a:latin typeface="Calibri" pitchFamily="34" charset="0"/>
-                <a:ea typeface="Calibri" pitchFamily="34" charset="-122"/>
-                <a:cs typeface="Calibri" pitchFamily="34" charset="-120"/>
+                <a:cs typeface="Amiri" pitchFamily="2" charset="-78"/>
               </a:rPr>
               <a:t>TEACH · HOW TO SCORE FULL COMMUNICATION (WEBSITE) · REPAIR PHRASES</a:t>
             </a:r>
@@ -5037,8 +4970,7 @@
                   <a:srgbClr val="1B3B6F"/>
                 </a:solidFill>
                 <a:latin typeface="Cambria" pitchFamily="34" charset="0"/>
-                <a:ea typeface="Cambria" pitchFamily="34" charset="-122"/>
-                <a:cs typeface="Cambria" pitchFamily="34" charset="-120"/>
+                <a:cs typeface="Amiri" pitchFamily="2" charset="-78"/>
               </a:rPr>
               <a:t>How to score full Communication</a:t>
             </a:r>
@@ -5075,9 +5007,8 @@
                 <a:solidFill>
                   <a:srgbClr val="8A6D1E"/>
                 </a:solidFill>
-                <a:latin typeface="Amiri" pitchFamily="34" charset="0"/>
-                <a:ea typeface="Amiri" pitchFamily="34" charset="-122"/>
-                <a:cs typeface="Amiri" pitchFamily="34" charset="-120"/>
+                <a:latin typeface="Amiri" pitchFamily="2" charset="-78"/>
+                <a:cs typeface="Amiri" pitchFamily="2" charset="-78"/>
               </a:rPr>
               <a:t>التَّوَاصُلُ الكَامِلُ</a:t>
             </a:r>
@@ -5115,8 +5046,7 @@
                   <a:srgbClr val="8A93A0"/>
                 </a:solidFill>
                 <a:latin typeface="Calibri" pitchFamily="34" charset="0"/>
-                <a:ea typeface="Calibri" pitchFamily="34" charset="-122"/>
-                <a:cs typeface="Calibri" pitchFamily="34" charset="-120"/>
+                <a:cs typeface="Amiri" pitchFamily="2" charset="-78"/>
               </a:rPr>
               <a:t>Miftah Arabic · Progression P6 · IGCSE Bridge · P6-L06</a:t>
             </a:r>
@@ -5188,8 +5118,7 @@
                   <a:srgbClr val="1B3B6F"/>
                 </a:solidFill>
                 <a:latin typeface="Calibri" pitchFamily="34" charset="0"/>
-                <a:ea typeface="Calibri" pitchFamily="34" charset="-122"/>
-                <a:cs typeface="Calibri" pitchFamily="34" charset="-120"/>
+                <a:cs typeface="Amiri" pitchFamily="2" charset="-78"/>
               </a:rPr>
               <a:t>WHAT YOU NEED TO KNOW</a:t>
             </a:r>
@@ -5252,8 +5181,7 @@
                   <a:srgbClr val="D4AF37"/>
                 </a:solidFill>
                 <a:latin typeface="Calibri" pitchFamily="34" charset="0"/>
-                <a:ea typeface="Calibri" pitchFamily="34" charset="-122"/>
-                <a:cs typeface="Calibri" pitchFamily="34" charset="-120"/>
+                <a:cs typeface="Amiri" pitchFamily="2" charset="-78"/>
               </a:rPr>
               <a:t>1</a:t>
             </a:r>
@@ -5291,8 +5219,7 @@
                   <a:srgbClr val="1F2A37"/>
                 </a:solidFill>
                 <a:latin typeface="Calibri" pitchFamily="34" charset="0"/>
-                <a:ea typeface="Calibri" pitchFamily="34" charset="-122"/>
-                <a:cs typeface="Calibri" pitchFamily="34" charset="-120"/>
+                <a:cs typeface="Amiri" pitchFamily="2" charset="-78"/>
               </a:rPr>
               <a:t>Each prompt needs a RELEVANT response with enough language to communicate clearly.</a:t>
             </a:r>
@@ -5355,8 +5282,7 @@
                   <a:srgbClr val="D4AF37"/>
                 </a:solidFill>
                 <a:latin typeface="Calibri" pitchFamily="34" charset="0"/>
-                <a:ea typeface="Calibri" pitchFamily="34" charset="-122"/>
-                <a:cs typeface="Calibri" pitchFamily="34" charset="-120"/>
+                <a:cs typeface="Amiri" pitchFamily="2" charset="-78"/>
               </a:rPr>
               <a:t>2</a:t>
             </a:r>
@@ -5394,8 +5320,7 @@
                   <a:srgbClr val="1F2A37"/>
                 </a:solidFill>
                 <a:latin typeface="Calibri" pitchFamily="34" charset="0"/>
-                <a:ea typeface="Calibri" pitchFamily="34" charset="-122"/>
-                <a:cs typeface="Calibri" pitchFamily="34" charset="-120"/>
+                <a:cs typeface="Amiri" pitchFamily="2" charset="-78"/>
               </a:rPr>
               <a:t>Perfect grammar is not required for the Communication mark — but a serious error that causes misunderstanding loses that prompt.</a:t>
             </a:r>
@@ -5458,8 +5383,7 @@
                   <a:srgbClr val="D4AF37"/>
                 </a:solidFill>
                 <a:latin typeface="Calibri" pitchFamily="34" charset="0"/>
-                <a:ea typeface="Calibri" pitchFamily="34" charset="-122"/>
-                <a:cs typeface="Calibri" pitchFamily="34" charset="-120"/>
+                <a:cs typeface="Amiri" pitchFamily="2" charset="-78"/>
               </a:rPr>
               <a:t>3</a:t>
             </a:r>
@@ -5497,8 +5421,7 @@
                   <a:srgbClr val="1F2A37"/>
                 </a:solidFill>
                 <a:latin typeface="Calibri" pitchFamily="34" charset="0"/>
-                <a:ea typeface="Calibri" pitchFamily="34" charset="-122"/>
-                <a:cs typeface="Calibri" pitchFamily="34" charset="-120"/>
+                <a:cs typeface="Amiri" pitchFamily="2" charset="-78"/>
               </a:rPr>
               <a:t>Give two to three sentences per prompt, delivered confidently.</a:t>
             </a:r>
@@ -5561,8 +5484,7 @@
                   <a:srgbClr val="D4AF37"/>
                 </a:solidFill>
                 <a:latin typeface="Calibri" pitchFamily="34" charset="0"/>
-                <a:ea typeface="Calibri" pitchFamily="34" charset="-122"/>
-                <a:cs typeface="Calibri" pitchFamily="34" charset="-120"/>
+                <a:cs typeface="Amiri" pitchFamily="2" charset="-78"/>
               </a:rPr>
               <a:t>4</a:t>
             </a:r>
@@ -5600,8 +5522,7 @@
                   <a:srgbClr val="1F2A37"/>
                 </a:solidFill>
                 <a:latin typeface="Calibri" pitchFamily="34" charset="0"/>
-                <a:ea typeface="Calibri" pitchFamily="34" charset="-122"/>
-                <a:cs typeface="Calibri" pitchFamily="34" charset="-120"/>
+                <a:cs typeface="Amiri" pitchFamily="2" charset="-78"/>
               </a:rPr>
               <a:t>If you did not understand: ask, then answer. Silence scores zero; a repair phrase keeps you in the conversation.</a:t>
             </a:r>
@@ -5673,8 +5594,7 @@
                   <a:srgbClr val="8A6D1E"/>
                 </a:solidFill>
                 <a:latin typeface="Calibri" pitchFamily="34" charset="0"/>
-                <a:ea typeface="Calibri" pitchFamily="34" charset="-122"/>
-                <a:cs typeface="Calibri" pitchFamily="34" charset="-120"/>
+                <a:cs typeface="Amiri" pitchFamily="2" charset="-78"/>
               </a:rPr>
               <a:t>REPAIR PHRASES (TEACHER)</a:t>
             </a:r>
@@ -5711,9 +5631,8 @@
                 <a:solidFill>
                   <a:srgbClr val="1B3B6F"/>
                 </a:solidFill>
-                <a:latin typeface="Amiri" pitchFamily="34" charset="0"/>
-                <a:ea typeface="Amiri" pitchFamily="34" charset="-122"/>
-                <a:cs typeface="Amiri" pitchFamily="34" charset="-120"/>
+                <a:latin typeface="Amiri" pitchFamily="2" charset="-78"/>
+                <a:cs typeface="Amiri" pitchFamily="2" charset="-78"/>
               </a:rPr>
               <a:t>عَفْوًا، هَلْ يُمْكِنُ أَنْ تُعِيدَ السُّؤَالَ؟</a:t>
             </a:r>
@@ -5751,8 +5670,7 @@
                   <a:srgbClr val="5A6472"/>
                 </a:solidFill>
                 <a:latin typeface="Calibri" pitchFamily="34" charset="0"/>
-                <a:ea typeface="Calibri" pitchFamily="34" charset="-122"/>
-                <a:cs typeface="Calibri" pitchFamily="34" charset="-120"/>
+                <a:cs typeface="Amiri" pitchFamily="2" charset="-78"/>
               </a:rPr>
               <a:t>Sorry, could you repeat the question?</a:t>
             </a:r>
@@ -5812,9 +5730,8 @@
                 <a:solidFill>
                   <a:srgbClr val="1B3B6F"/>
                 </a:solidFill>
-                <a:latin typeface="Amiri" pitchFamily="34" charset="0"/>
-                <a:ea typeface="Amiri" pitchFamily="34" charset="-122"/>
-                <a:cs typeface="Amiri" pitchFamily="34" charset="-120"/>
+                <a:latin typeface="Amiri" pitchFamily="2" charset="-78"/>
+                <a:cs typeface="Amiri" pitchFamily="2" charset="-78"/>
               </a:rPr>
               <a:t>سُؤَالٌ مُهِمٌّ … دَعْنِي أُفَكِّرُ.</a:t>
             </a:r>
@@ -5852,8 +5769,7 @@
                   <a:srgbClr val="5A6472"/>
                 </a:solidFill>
                 <a:latin typeface="Calibri" pitchFamily="34" charset="0"/>
-                <a:ea typeface="Calibri" pitchFamily="34" charset="-122"/>
-                <a:cs typeface="Calibri" pitchFamily="34" charset="-120"/>
+                <a:cs typeface="Amiri" pitchFamily="2" charset="-78"/>
               </a:rPr>
               <a:t>An important question … let me think.</a:t>
             </a:r>
@@ -5913,9 +5829,8 @@
                 <a:solidFill>
                   <a:srgbClr val="1B3B6F"/>
                 </a:solidFill>
-                <a:latin typeface="Amiri" pitchFamily="34" charset="0"/>
-                <a:ea typeface="Amiri" pitchFamily="34" charset="-122"/>
-                <a:cs typeface="Amiri" pitchFamily="34" charset="-120"/>
+                <a:latin typeface="Amiri" pitchFamily="2" charset="-78"/>
+                <a:cs typeface="Amiri" pitchFamily="2" charset="-78"/>
               </a:rPr>
               <a:t>عَفْوًا، أَقْصِدُ …</a:t>
             </a:r>
@@ -5953,8 +5868,7 @@
                   <a:srgbClr val="5A6472"/>
                 </a:solidFill>
                 <a:latin typeface="Calibri" pitchFamily="34" charset="0"/>
-                <a:ea typeface="Calibri" pitchFamily="34" charset="-122"/>
-                <a:cs typeface="Calibri" pitchFamily="34" charset="-120"/>
+                <a:cs typeface="Amiri" pitchFamily="2" charset="-78"/>
               </a:rPr>
               <a:t>Sorry, I mean …</a:t>
             </a:r>
@@ -5992,8 +5906,7 @@
                   <a:srgbClr val="8A93A0"/>
                 </a:solidFill>
                 <a:latin typeface="Calibri" pitchFamily="34" charset="0"/>
-                <a:ea typeface="Calibri" pitchFamily="34" charset="-122"/>
-                <a:cs typeface="Calibri" pitchFamily="34" charset="-120"/>
+                <a:cs typeface="Amiri" pitchFamily="2" charset="-78"/>
               </a:rPr>
               <a:t>11 / 21</a:t>
             </a:r>
@@ -6087,9 +6000,8 @@
                 <a:solidFill>
                   <a:srgbClr val="D4AF37"/>
                 </a:solidFill>
-                <a:latin typeface="Amiri" pitchFamily="34" charset="0"/>
-                <a:ea typeface="Amiri" pitchFamily="34" charset="-122"/>
-                <a:cs typeface="Amiri" pitchFamily="34" charset="-120"/>
+                <a:latin typeface="Amiri" pitchFamily="2" charset="-78"/>
+                <a:cs typeface="Amiri" pitchFamily="2" charset="-78"/>
               </a:rPr>
               <a:t>م</a:t>
             </a:r>
@@ -6127,8 +6039,7 @@
                   <a:srgbClr val="1B3B6F"/>
                 </a:solidFill>
                 <a:latin typeface="Cambria" pitchFamily="34" charset="0"/>
-                <a:ea typeface="Cambria" pitchFamily="34" charset="-122"/>
-                <a:cs typeface="Cambria" pitchFamily="34" charset="-120"/>
+                <a:cs typeface="Amiri" pitchFamily="2" charset="-78"/>
               </a:rPr>
               <a:t>Al Madina Online School</a:t>
             </a:r>
@@ -6166,8 +6077,7 @@
                   <a:srgbClr val="8A6D1E"/>
                 </a:solidFill>
                 <a:latin typeface="Calibri" pitchFamily="34" charset="0"/>
-                <a:ea typeface="Calibri" pitchFamily="34" charset="-122"/>
-                <a:cs typeface="Calibri" pitchFamily="34" charset="-120"/>
+                <a:cs typeface="Amiri" pitchFamily="2" charset="-78"/>
               </a:rPr>
               <a:t>ARABIC DEPARTMENT · MIFTAH ARABIC · IGCSE 0544</a:t>
             </a:r>
@@ -6232,8 +6142,7 @@
                   <a:srgbClr val="FFFFFF"/>
                 </a:solidFill>
                 <a:latin typeface="Calibri" pitchFamily="34" charset="0"/>
-                <a:ea typeface="Calibri" pitchFamily="34" charset="-122"/>
-                <a:cs typeface="Calibri" pitchFamily="34" charset="-120"/>
+                <a:cs typeface="Amiri" pitchFamily="2" charset="-78"/>
               </a:rPr>
               <a:t>P6-L06 · IGCSE Bridge</a:t>
             </a:r>
@@ -6298,8 +6207,7 @@
                   <a:srgbClr val="FFFFFF"/>
                 </a:solidFill>
                 <a:latin typeface="Calibri" pitchFamily="34" charset="0"/>
-                <a:ea typeface="Calibri" pitchFamily="34" charset="-122"/>
-                <a:cs typeface="Calibri" pitchFamily="34" charset="-120"/>
+                <a:cs typeface="Amiri" pitchFamily="2" charset="-78"/>
               </a:rPr>
               <a:t>YOU DO · 4 MIN</a:t>
             </a:r>
@@ -6337,8 +6245,7 @@
                   <a:srgbClr val="1E6B52"/>
                 </a:solidFill>
                 <a:latin typeface="Calibri" pitchFamily="34" charset="0"/>
-                <a:ea typeface="Calibri" pitchFamily="34" charset="-122"/>
-                <a:cs typeface="Calibri" pitchFamily="34" charset="-120"/>
+                <a:cs typeface="Amiri" pitchFamily="2" charset="-78"/>
               </a:rPr>
               <a:t>YOU DO · ROLE PLAY 1 · HEALTH CENTRE (WEBSITE)</a:t>
             </a:r>
@@ -6376,8 +6283,7 @@
                   <a:srgbClr val="1B3B6F"/>
                 </a:solidFill>
                 <a:latin typeface="Cambria" pitchFamily="34" charset="0"/>
-                <a:ea typeface="Cambria" pitchFamily="34" charset="-122"/>
-                <a:cs typeface="Cambria" pitchFamily="34" charset="-120"/>
+                <a:cs typeface="Amiri" pitchFamily="2" charset="-78"/>
               </a:rPr>
               <a:t>Role play 1 — At the health centre</a:t>
             </a:r>
@@ -6414,9 +6320,8 @@
                 <a:solidFill>
                   <a:srgbClr val="8A6D1E"/>
                 </a:solidFill>
-                <a:latin typeface="Amiri" pitchFamily="34" charset="0"/>
-                <a:ea typeface="Amiri" pitchFamily="34" charset="-122"/>
-                <a:cs typeface="Amiri" pitchFamily="34" charset="-120"/>
+                <a:latin typeface="Amiri" pitchFamily="2" charset="-78"/>
+                <a:cs typeface="Amiri" pitchFamily="2" charset="-78"/>
               </a:rPr>
               <a:t>فِي المَرْكَزِ الصِّحِّيِّ</a:t>
             </a:r>
@@ -6454,8 +6359,7 @@
                   <a:srgbClr val="8A93A0"/>
                 </a:solidFill>
                 <a:latin typeface="Calibri" pitchFamily="34" charset="0"/>
-                <a:ea typeface="Calibri" pitchFamily="34" charset="-122"/>
-                <a:cs typeface="Calibri" pitchFamily="34" charset="-120"/>
+                <a:cs typeface="Amiri" pitchFamily="2" charset="-78"/>
               </a:rPr>
               <a:t>Miftah Arabic · Progression P6 · IGCSE Bridge · P6-L06</a:t>
             </a:r>
@@ -6518,8 +6422,7 @@
                   <a:srgbClr val="FFFFFF"/>
                 </a:solidFill>
                 <a:latin typeface="Calibri" pitchFamily="34" charset="0"/>
-                <a:ea typeface="Calibri" pitchFamily="34" charset="-122"/>
-                <a:cs typeface="Calibri" pitchFamily="34" charset="-120"/>
+                <a:cs typeface="Amiri" pitchFamily="2" charset="-78"/>
               </a:rPr>
               <a:t>Start like this</a:t>
             </a:r>
@@ -6557,8 +6460,7 @@
                   <a:srgbClr val="FFFFFF"/>
                 </a:solidFill>
                 <a:latin typeface="Calibri" pitchFamily="34" charset="0"/>
-                <a:ea typeface="Calibri" pitchFamily="34" charset="-122"/>
-                <a:cs typeface="Calibri" pitchFamily="34" charset="-120"/>
+                <a:cs typeface="Amiri" pitchFamily="2" charset="-78"/>
               </a:rPr>
               <a:t>Meaning</a:t>
             </a:r>
@@ -6596,8 +6498,7 @@
                   <a:srgbClr val="FFFFFF"/>
                 </a:solidFill>
                 <a:latin typeface="Calibri" pitchFamily="34" charset="0"/>
-                <a:ea typeface="Calibri" pitchFamily="34" charset="-122"/>
-                <a:cs typeface="Calibri" pitchFamily="34" charset="-120"/>
+                <a:cs typeface="Amiri" pitchFamily="2" charset="-78"/>
               </a:rPr>
               <a:t>Prompt (website)</a:t>
             </a:r>
@@ -6661,9 +6562,8 @@
                 <a:solidFill>
                   <a:srgbClr val="1B3B6F"/>
                 </a:solidFill>
-                <a:latin typeface="Amiri" pitchFamily="34" charset="0"/>
-                <a:ea typeface="Amiri" pitchFamily="34" charset="-122"/>
-                <a:cs typeface="Amiri" pitchFamily="34" charset="-120"/>
+                <a:latin typeface="Amiri" pitchFamily="2" charset="-78"/>
+                <a:cs typeface="Amiri" pitchFamily="2" charset="-78"/>
               </a:rPr>
               <a:t>أَشْعُرُ بِصُدَاعٍ وَأُعَانِي مِنَ الأَرَقِ مُنْذُ أُسْبُوعٍ.</a:t>
             </a:r>
@@ -6701,8 +6601,7 @@
                   <a:srgbClr val="5A6472"/>
                 </a:solidFill>
                 <a:latin typeface="Calibri" pitchFamily="34" charset="0"/>
-                <a:ea typeface="Calibri" pitchFamily="34" charset="-122"/>
-                <a:cs typeface="Calibri" pitchFamily="34" charset="-120"/>
+                <a:cs typeface="Amiri" pitchFamily="2" charset="-78"/>
               </a:rPr>
               <a:t>Describe your symptoms to the doctor.</a:t>
             </a:r>
@@ -6739,9 +6638,8 @@
                 <a:solidFill>
                   <a:srgbClr val="1B3B6F"/>
                 </a:solidFill>
-                <a:latin typeface="Amiri" pitchFamily="34" charset="0"/>
-                <a:ea typeface="Amiri" pitchFamily="34" charset="-122"/>
-                <a:cs typeface="Amiri" pitchFamily="34" charset="-120"/>
+                <a:latin typeface="Amiri" pitchFamily="2" charset="-78"/>
+                <a:cs typeface="Amiri" pitchFamily="2" charset="-78"/>
               </a:rPr>
               <a:t>صِفْ أَعْرَاضَكَ لِلطَّبِيبِ.</a:t>
             </a:r>
@@ -6806,8 +6704,7 @@
                   <a:srgbClr val="FFFFFF"/>
                 </a:solidFill>
                 <a:latin typeface="Calibri" pitchFamily="34" charset="0"/>
-                <a:ea typeface="Calibri" pitchFamily="34" charset="-122"/>
-                <a:cs typeface="Calibri" pitchFamily="34" charset="-120"/>
+                <a:cs typeface="Amiri" pitchFamily="2" charset="-78"/>
               </a:rPr>
               <a:t>CORE</a:t>
             </a:r>
@@ -6871,9 +6768,8 @@
                 <a:solidFill>
                   <a:srgbClr val="1B3B6F"/>
                 </a:solidFill>
-                <a:latin typeface="Amiri" pitchFamily="34" charset="0"/>
-                <a:ea typeface="Amiri" pitchFamily="34" charset="-122"/>
-                <a:cs typeface="Amiri" pitchFamily="34" charset="-120"/>
+                <a:latin typeface="Amiri" pitchFamily="2" charset="-78"/>
+                <a:cs typeface="Amiri" pitchFamily="2" charset="-78"/>
               </a:rPr>
               <a:t>مَا العِلَاجُ المُنَاسِبُ؟ هَلْ يَجِبُ أَنْ آخُذَ دَوَاءً؟</a:t>
             </a:r>
@@ -6911,8 +6807,7 @@
                   <a:srgbClr val="5A6472"/>
                 </a:solidFill>
                 <a:latin typeface="Calibri" pitchFamily="34" charset="0"/>
-                <a:ea typeface="Calibri" pitchFamily="34" charset="-122"/>
-                <a:cs typeface="Calibri" pitchFamily="34" charset="-120"/>
+                <a:cs typeface="Amiri" pitchFamily="2" charset="-78"/>
               </a:rPr>
               <a:t>Ask about the appropriate treatment.</a:t>
             </a:r>
@@ -6949,9 +6844,8 @@
                 <a:solidFill>
                   <a:srgbClr val="1B3B6F"/>
                 </a:solidFill>
-                <a:latin typeface="Amiri" pitchFamily="34" charset="0"/>
-                <a:ea typeface="Amiri" pitchFamily="34" charset="-122"/>
-                <a:cs typeface="Amiri" pitchFamily="34" charset="-120"/>
+                <a:latin typeface="Amiri" pitchFamily="2" charset="-78"/>
+                <a:cs typeface="Amiri" pitchFamily="2" charset="-78"/>
               </a:rPr>
               <a:t>اسْأَلْ عَنِ العِلَاجِ المُنَاسِبِ.</a:t>
             </a:r>
@@ -7016,8 +6910,7 @@
                   <a:srgbClr val="FFFFFF"/>
                 </a:solidFill>
                 <a:latin typeface="Calibri" pitchFamily="34" charset="0"/>
-                <a:ea typeface="Calibri" pitchFamily="34" charset="-122"/>
-                <a:cs typeface="Calibri" pitchFamily="34" charset="-120"/>
+                <a:cs typeface="Amiri" pitchFamily="2" charset="-78"/>
               </a:rPr>
               <a:t>CORE</a:t>
             </a:r>
@@ -7081,9 +6974,8 @@
                 <a:solidFill>
                   <a:srgbClr val="1B3B6F"/>
                 </a:solidFill>
-                <a:latin typeface="Amiri" pitchFamily="34" charset="0"/>
-                <a:ea typeface="Amiri" pitchFamily="34" charset="-122"/>
-                <a:cs typeface="Amiri" pitchFamily="34" charset="-120"/>
+                <a:latin typeface="Amiri" pitchFamily="2" charset="-78"/>
+                <a:cs typeface="Amiri" pitchFamily="2" charset="-78"/>
               </a:rPr>
               <a:t>مَاذَا يَنْبَغِي أَنْ أَفْعَلَ لِكَيْ لَا يَتَكَرَّرَ ذٰلِكَ؟</a:t>
             </a:r>
@@ -7121,8 +7013,7 @@
                   <a:srgbClr val="5A6472"/>
                 </a:solidFill>
                 <a:latin typeface="Calibri" pitchFamily="34" charset="0"/>
-                <a:ea typeface="Calibri" pitchFamily="34" charset="-122"/>
-                <a:cs typeface="Calibri" pitchFamily="34" charset="-120"/>
+                <a:cs typeface="Amiri" pitchFamily="2" charset="-78"/>
               </a:rPr>
               <a:t>Ask for prevention advice.</a:t>
             </a:r>
@@ -7159,9 +7050,8 @@
                 <a:solidFill>
                   <a:srgbClr val="1B3B6F"/>
                 </a:solidFill>
-                <a:latin typeface="Amiri" pitchFamily="34" charset="0"/>
-                <a:ea typeface="Amiri" pitchFamily="34" charset="-122"/>
-                <a:cs typeface="Amiri" pitchFamily="34" charset="-120"/>
+                <a:latin typeface="Amiri" pitchFamily="2" charset="-78"/>
+                <a:cs typeface="Amiri" pitchFamily="2" charset="-78"/>
               </a:rPr>
               <a:t>اطْلُبْ نَصِيحَةً لِلْوِقَايَةِ.</a:t>
             </a:r>
@@ -7226,8 +7116,7 @@
                   <a:srgbClr val="FFFFFF"/>
                 </a:solidFill>
                 <a:latin typeface="Calibri" pitchFamily="34" charset="0"/>
-                <a:ea typeface="Calibri" pitchFamily="34" charset="-122"/>
-                <a:cs typeface="Calibri" pitchFamily="34" charset="-120"/>
+                <a:cs typeface="Amiri" pitchFamily="2" charset="-78"/>
               </a:rPr>
               <a:t>CORE</a:t>
             </a:r>
@@ -7291,9 +7180,8 @@
                 <a:solidFill>
                   <a:srgbClr val="1B3B6F"/>
                 </a:solidFill>
-                <a:latin typeface="Amiri" pitchFamily="34" charset="0"/>
-                <a:ea typeface="Amiri" pitchFamily="34" charset="-122"/>
-                <a:cs typeface="Amiri" pitchFamily="34" charset="-120"/>
+                <a:latin typeface="Amiri" pitchFamily="2" charset="-78"/>
+                <a:cs typeface="Amiri" pitchFamily="2" charset="-78"/>
               </a:rPr>
               <a:t>هَلْ يُمْكِنُ أَنْ أَحْجِزَ مَوْعِدًا يَوْمَ الخَمِيسِ؟</a:t>
             </a:r>
@@ -7331,8 +7219,7 @@
                   <a:srgbClr val="5A6472"/>
                 </a:solidFill>
                 <a:latin typeface="Calibri" pitchFamily="34" charset="0"/>
-                <a:ea typeface="Calibri" pitchFamily="34" charset="-122"/>
-                <a:cs typeface="Calibri" pitchFamily="34" charset="-120"/>
+                <a:cs typeface="Amiri" pitchFamily="2" charset="-78"/>
               </a:rPr>
               <a:t>Agree on a follow-up appointment.</a:t>
             </a:r>
@@ -7369,9 +7256,8 @@
                 <a:solidFill>
                   <a:srgbClr val="1B3B6F"/>
                 </a:solidFill>
-                <a:latin typeface="Amiri" pitchFamily="34" charset="0"/>
-                <a:ea typeface="Amiri" pitchFamily="34" charset="-122"/>
-                <a:cs typeface="Amiri" pitchFamily="34" charset="-120"/>
+                <a:latin typeface="Amiri" pitchFamily="2" charset="-78"/>
+                <a:cs typeface="Amiri" pitchFamily="2" charset="-78"/>
               </a:rPr>
               <a:t>اتَّفِقْ عَلَى مَوْعِدٍ لِلْمُتَابَعَةِ.</a:t>
             </a:r>
@@ -7436,8 +7322,7 @@
                   <a:srgbClr val="FFFFFF"/>
                 </a:solidFill>
                 <a:latin typeface="Calibri" pitchFamily="34" charset="0"/>
-                <a:ea typeface="Calibri" pitchFamily="34" charset="-122"/>
-                <a:cs typeface="Calibri" pitchFamily="34" charset="-120"/>
+                <a:cs typeface="Amiri" pitchFamily="2" charset="-78"/>
               </a:rPr>
               <a:t>CORE</a:t>
             </a:r>
@@ -7475,8 +7360,7 @@
                   <a:srgbClr val="1B3B6F"/>
                 </a:solidFill>
                 <a:latin typeface="Calibri" pitchFamily="34" charset="0"/>
-                <a:ea typeface="Calibri" pitchFamily="34" charset="-122"/>
-                <a:cs typeface="Calibri" pitchFamily="34" charset="-120"/>
+                <a:cs typeface="Amiri" pitchFamily="2" charset="-78"/>
               </a:rPr>
               <a:t>Marks (website): Communication 6 · Accuracy 4.</a:t>
             </a:r>
@@ -7514,8 +7398,7 @@
                   <a:srgbClr val="8A93A0"/>
                 </a:solidFill>
                 <a:latin typeface="Calibri" pitchFamily="34" charset="0"/>
-                <a:ea typeface="Calibri" pitchFamily="34" charset="-122"/>
-                <a:cs typeface="Calibri" pitchFamily="34" charset="-120"/>
+                <a:cs typeface="Amiri" pitchFamily="2" charset="-78"/>
               </a:rPr>
               <a:t>12 / 21</a:t>
             </a:r>
@@ -7609,9 +7492,8 @@
                 <a:solidFill>
                   <a:srgbClr val="D4AF37"/>
                 </a:solidFill>
-                <a:latin typeface="Amiri" pitchFamily="34" charset="0"/>
-                <a:ea typeface="Amiri" pitchFamily="34" charset="-122"/>
-                <a:cs typeface="Amiri" pitchFamily="34" charset="-120"/>
+                <a:latin typeface="Amiri" pitchFamily="2" charset="-78"/>
+                <a:cs typeface="Amiri" pitchFamily="2" charset="-78"/>
               </a:rPr>
               <a:t>م</a:t>
             </a:r>
@@ -7649,8 +7531,7 @@
                   <a:srgbClr val="1B3B6F"/>
                 </a:solidFill>
                 <a:latin typeface="Cambria" pitchFamily="34" charset="0"/>
-                <a:ea typeface="Cambria" pitchFamily="34" charset="-122"/>
-                <a:cs typeface="Cambria" pitchFamily="34" charset="-120"/>
+                <a:cs typeface="Amiri" pitchFamily="2" charset="-78"/>
               </a:rPr>
               <a:t>Al Madina Online School</a:t>
             </a:r>
@@ -7688,8 +7569,7 @@
                   <a:srgbClr val="8A6D1E"/>
                 </a:solidFill>
                 <a:latin typeface="Calibri" pitchFamily="34" charset="0"/>
-                <a:ea typeface="Calibri" pitchFamily="34" charset="-122"/>
-                <a:cs typeface="Calibri" pitchFamily="34" charset="-120"/>
+                <a:cs typeface="Amiri" pitchFamily="2" charset="-78"/>
               </a:rPr>
               <a:t>ARABIC DEPARTMENT · MIFTAH ARABIC · IGCSE 0544</a:t>
             </a:r>
@@ -7754,8 +7634,7 @@
                   <a:srgbClr val="FFFFFF"/>
                 </a:solidFill>
                 <a:latin typeface="Calibri" pitchFamily="34" charset="0"/>
-                <a:ea typeface="Calibri" pitchFamily="34" charset="-122"/>
-                <a:cs typeface="Calibri" pitchFamily="34" charset="-120"/>
+                <a:cs typeface="Amiri" pitchFamily="2" charset="-78"/>
               </a:rPr>
               <a:t>P6-L06 · IGCSE Bridge</a:t>
             </a:r>
@@ -7820,8 +7699,7 @@
                   <a:srgbClr val="FFFFFF"/>
                 </a:solidFill>
                 <a:latin typeface="Calibri" pitchFamily="34" charset="0"/>
-                <a:ea typeface="Calibri" pitchFamily="34" charset="-122"/>
-                <a:cs typeface="Calibri" pitchFamily="34" charset="-120"/>
+                <a:cs typeface="Amiri" pitchFamily="2" charset="-78"/>
               </a:rPr>
               <a:t>YOU DO · 4 MIN</a:t>
             </a:r>
@@ -7859,8 +7737,7 @@
                   <a:srgbClr val="1E6B52"/>
                 </a:solidFill>
                 <a:latin typeface="Calibri" pitchFamily="34" charset="0"/>
-                <a:ea typeface="Calibri" pitchFamily="34" charset="-122"/>
-                <a:cs typeface="Calibri" pitchFamily="34" charset="-120"/>
+                <a:cs typeface="Amiri" pitchFamily="2" charset="-78"/>
               </a:rPr>
               <a:t>YOU DO · ROLE PLAY 2 · TRAVEL AGENCY (WEBSITE)</a:t>
             </a:r>
@@ -7898,8 +7775,7 @@
                   <a:srgbClr val="1B3B6F"/>
                 </a:solidFill>
                 <a:latin typeface="Cambria" pitchFamily="34" charset="0"/>
-                <a:ea typeface="Cambria" pitchFamily="34" charset="-122"/>
-                <a:cs typeface="Cambria" pitchFamily="34" charset="-120"/>
+                <a:cs typeface="Amiri" pitchFamily="2" charset="-78"/>
               </a:rPr>
               <a:t>Role play 2 — At the travel agency</a:t>
             </a:r>
@@ -7936,9 +7812,8 @@
                 <a:solidFill>
                   <a:srgbClr val="8A6D1E"/>
                 </a:solidFill>
-                <a:latin typeface="Amiri" pitchFamily="34" charset="0"/>
-                <a:ea typeface="Amiri" pitchFamily="34" charset="-122"/>
-                <a:cs typeface="Amiri" pitchFamily="34" charset="-120"/>
+                <a:latin typeface="Amiri" pitchFamily="2" charset="-78"/>
+                <a:cs typeface="Amiri" pitchFamily="2" charset="-78"/>
               </a:rPr>
               <a:t>فِي وَكَالَةِ السَّفَرِ</a:t>
             </a:r>
@@ -7976,8 +7851,7 @@
                   <a:srgbClr val="8A93A0"/>
                 </a:solidFill>
                 <a:latin typeface="Calibri" pitchFamily="34" charset="0"/>
-                <a:ea typeface="Calibri" pitchFamily="34" charset="-122"/>
-                <a:cs typeface="Calibri" pitchFamily="34" charset="-120"/>
+                <a:cs typeface="Amiri" pitchFamily="2" charset="-78"/>
               </a:rPr>
               <a:t>Miftah Arabic · Progression P6 · IGCSE Bridge · P6-L06</a:t>
             </a:r>
@@ -8040,8 +7914,7 @@
                   <a:srgbClr val="FFFFFF"/>
                 </a:solidFill>
                 <a:latin typeface="Calibri" pitchFamily="34" charset="0"/>
-                <a:ea typeface="Calibri" pitchFamily="34" charset="-122"/>
-                <a:cs typeface="Calibri" pitchFamily="34" charset="-120"/>
+                <a:cs typeface="Amiri" pitchFamily="2" charset="-78"/>
               </a:rPr>
               <a:t>Start like this</a:t>
             </a:r>
@@ -8079,8 +7952,7 @@
                   <a:srgbClr val="FFFFFF"/>
                 </a:solidFill>
                 <a:latin typeface="Calibri" pitchFamily="34" charset="0"/>
-                <a:ea typeface="Calibri" pitchFamily="34" charset="-122"/>
-                <a:cs typeface="Calibri" pitchFamily="34" charset="-120"/>
+                <a:cs typeface="Amiri" pitchFamily="2" charset="-78"/>
               </a:rPr>
               <a:t>Meaning</a:t>
             </a:r>
@@ -8118,8 +7990,7 @@
                   <a:srgbClr val="FFFFFF"/>
                 </a:solidFill>
                 <a:latin typeface="Calibri" pitchFamily="34" charset="0"/>
-                <a:ea typeface="Calibri" pitchFamily="34" charset="-122"/>
-                <a:cs typeface="Calibri" pitchFamily="34" charset="-120"/>
+                <a:cs typeface="Amiri" pitchFamily="2" charset="-78"/>
               </a:rPr>
               <a:t>Prompt (website)</a:t>
             </a:r>
@@ -8183,9 +8054,8 @@
                 <a:solidFill>
                   <a:srgbClr val="1B3B6F"/>
                 </a:solidFill>
-                <a:latin typeface="Amiri" pitchFamily="34" charset="0"/>
-                <a:ea typeface="Amiri" pitchFamily="34" charset="-122"/>
-                <a:cs typeface="Amiri" pitchFamily="34" charset="-120"/>
+                <a:latin typeface="Amiri" pitchFamily="2" charset="-78"/>
+                <a:cs typeface="Amiri" pitchFamily="2" charset="-78"/>
               </a:rPr>
               <a:t>أُرِيدُ أَنْ أَحْجِزَ رِحْلَةً إِلَى عَمَّانَ. مَتَى تُغَادِرُ الطَّائِرَةُ؟</a:t>
             </a:r>
@@ -8223,8 +8093,7 @@
                   <a:srgbClr val="5A6472"/>
                 </a:solidFill>
                 <a:latin typeface="Calibri" pitchFamily="34" charset="0"/>
-                <a:ea typeface="Calibri" pitchFamily="34" charset="-122"/>
-                <a:cs typeface="Calibri" pitchFamily="34" charset="-120"/>
+                <a:cs typeface="Amiri" pitchFamily="2" charset="-78"/>
               </a:rPr>
               <a:t>Book a trip and ask about the schedule.</a:t>
             </a:r>
@@ -8261,9 +8130,8 @@
                 <a:solidFill>
                   <a:srgbClr val="1B3B6F"/>
                 </a:solidFill>
-                <a:latin typeface="Amiri" pitchFamily="34" charset="0"/>
-                <a:ea typeface="Amiri" pitchFamily="34" charset="-122"/>
-                <a:cs typeface="Amiri" pitchFamily="34" charset="-120"/>
+                <a:latin typeface="Amiri" pitchFamily="2" charset="-78"/>
+                <a:cs typeface="Amiri" pitchFamily="2" charset="-78"/>
               </a:rPr>
               <a:t>احْجِزْ رِحْلَةً وَاسْأَلْ عَنِ المَوَاعِيدِ.</a:t>
             </a:r>
@@ -8328,8 +8196,7 @@
                   <a:srgbClr val="FFFFFF"/>
                 </a:solidFill>
                 <a:latin typeface="Calibri" pitchFamily="34" charset="0"/>
-                <a:ea typeface="Calibri" pitchFamily="34" charset="-122"/>
-                <a:cs typeface="Calibri" pitchFamily="34" charset="-120"/>
+                <a:cs typeface="Amiri" pitchFamily="2" charset="-78"/>
               </a:rPr>
               <a:t>CORE</a:t>
             </a:r>
@@ -8393,9 +8260,8 @@
                 <a:solidFill>
                   <a:srgbClr val="1B3B6F"/>
                 </a:solidFill>
-                <a:latin typeface="Amiri" pitchFamily="34" charset="0"/>
-                <a:ea typeface="Amiri" pitchFamily="34" charset="-122"/>
-                <a:cs typeface="Amiri" pitchFamily="34" charset="-120"/>
+                <a:latin typeface="Amiri" pitchFamily="2" charset="-78"/>
+                <a:cs typeface="Amiri" pitchFamily="2" charset="-78"/>
               </a:rPr>
               <a:t>هَلْ تُوجَدُ فَنَادِقُ قَرِيبَةٌ مِنْ وَسَطِ المَدِينَةِ؟</a:t>
             </a:r>
@@ -8433,8 +8299,7 @@
                   <a:srgbClr val="5A6472"/>
                 </a:solidFill>
                 <a:latin typeface="Calibri" pitchFamily="34" charset="0"/>
-                <a:ea typeface="Calibri" pitchFamily="34" charset="-122"/>
-                <a:cs typeface="Calibri" pitchFamily="34" charset="-120"/>
+                <a:cs typeface="Amiri" pitchFamily="2" charset="-78"/>
               </a:rPr>
               <a:t>Ask about accommodation options.</a:t>
             </a:r>
@@ -8471,9 +8336,8 @@
                 <a:solidFill>
                   <a:srgbClr val="1B3B6F"/>
                 </a:solidFill>
-                <a:latin typeface="Amiri" pitchFamily="34" charset="0"/>
-                <a:ea typeface="Amiri" pitchFamily="34" charset="-122"/>
-                <a:cs typeface="Amiri" pitchFamily="34" charset="-120"/>
+                <a:latin typeface="Amiri" pitchFamily="2" charset="-78"/>
+                <a:cs typeface="Amiri" pitchFamily="2" charset="-78"/>
               </a:rPr>
               <a:t>اسْأَلْ عَنْ خِيَارَاتِ الإِقَامَةِ.</a:t>
             </a:r>
@@ -8538,8 +8402,7 @@
                   <a:srgbClr val="FFFFFF"/>
                 </a:solidFill>
                 <a:latin typeface="Calibri" pitchFamily="34" charset="0"/>
-                <a:ea typeface="Calibri" pitchFamily="34" charset="-122"/>
-                <a:cs typeface="Calibri" pitchFamily="34" charset="-120"/>
+                <a:cs typeface="Amiri" pitchFamily="2" charset="-78"/>
               </a:rPr>
               <a:t>CORE</a:t>
             </a:r>
@@ -8603,9 +8466,8 @@
                 <a:solidFill>
                   <a:srgbClr val="1B3B6F"/>
                 </a:solidFill>
-                <a:latin typeface="Amiri" pitchFamily="34" charset="0"/>
-                <a:ea typeface="Amiri" pitchFamily="34" charset="-122"/>
-                <a:cs typeface="Amiri" pitchFamily="34" charset="-120"/>
+                <a:latin typeface="Amiri" pitchFamily="2" charset="-78"/>
+                <a:cs typeface="Amiri" pitchFamily="2" charset="-78"/>
               </a:rPr>
               <a:t>أُفَضِّلُ خِيَارًا صَدِيقًا لِلْبِيئَةِ، كَالقِطَارِ مَثَلًا.</a:t>
             </a:r>
@@ -8643,8 +8505,7 @@
                   <a:srgbClr val="5A6472"/>
                 </a:solidFill>
                 <a:latin typeface="Calibri" pitchFamily="34" charset="0"/>
-                <a:ea typeface="Calibri" pitchFamily="34" charset="-122"/>
-                <a:cs typeface="Calibri" pitchFamily="34" charset="-120"/>
+                <a:cs typeface="Amiri" pitchFamily="2" charset="-78"/>
               </a:rPr>
               <a:t>Request an environmentally friendly option.</a:t>
             </a:r>
@@ -8681,9 +8542,8 @@
                 <a:solidFill>
                   <a:srgbClr val="1B3B6F"/>
                 </a:solidFill>
-                <a:latin typeface="Amiri" pitchFamily="34" charset="0"/>
-                <a:ea typeface="Amiri" pitchFamily="34" charset="-122"/>
-                <a:cs typeface="Amiri" pitchFamily="34" charset="-120"/>
+                <a:latin typeface="Amiri" pitchFamily="2" charset="-78"/>
+                <a:cs typeface="Amiri" pitchFamily="2" charset="-78"/>
               </a:rPr>
               <a:t>اطْلُبْ خِيَارًا صَدِيقًا لِلْبِيئَةِ.</a:t>
             </a:r>
@@ -8747,9 +8607,8 @@
                 <a:solidFill>
                   <a:srgbClr val="1B3B6F"/>
                 </a:solidFill>
-                <a:latin typeface="Amiri" pitchFamily="34" charset="0"/>
-                <a:ea typeface="Amiri" pitchFamily="34" charset="-122"/>
-                <a:cs typeface="Amiri" pitchFamily="34" charset="-120"/>
+                <a:latin typeface="Amiri" pitchFamily="2" charset="-78"/>
+                <a:cs typeface="Amiri" pitchFamily="2" charset="-78"/>
               </a:rPr>
               <a:t>السِّعْرُ مُرْتَفِعٌ قَلِيلًا؛ هَلْ يُمْكِنُ أَنْ تُخَفِّضُوهُ؟</a:t>
             </a:r>
@@ -8787,8 +8646,7 @@
                   <a:srgbClr val="5A6472"/>
                 </a:solidFill>
                 <a:latin typeface="Calibri" pitchFamily="34" charset="0"/>
-                <a:ea typeface="Calibri" pitchFamily="34" charset="-122"/>
-                <a:cs typeface="Calibri" pitchFamily="34" charset="-120"/>
+                <a:cs typeface="Amiri" pitchFamily="2" charset="-78"/>
               </a:rPr>
               <a:t>Negotiate on the price.</a:t>
             </a:r>
@@ -8825,9 +8683,8 @@
                 <a:solidFill>
                   <a:srgbClr val="1B3B6F"/>
                 </a:solidFill>
-                <a:latin typeface="Amiri" pitchFamily="34" charset="0"/>
-                <a:ea typeface="Amiri" pitchFamily="34" charset="-122"/>
-                <a:cs typeface="Amiri" pitchFamily="34" charset="-120"/>
+                <a:latin typeface="Amiri" pitchFamily="2" charset="-78"/>
+                <a:cs typeface="Amiri" pitchFamily="2" charset="-78"/>
               </a:rPr>
               <a:t>تَفَاوَضْ عَلَى السِّعْرِ.</a:t>
             </a:r>
@@ -8865,8 +8722,7 @@
                   <a:srgbClr val="1B3B6F"/>
                 </a:solidFill>
                 <a:latin typeface="Calibri" pitchFamily="34" charset="0"/>
-                <a:ea typeface="Calibri" pitchFamily="34" charset="-122"/>
-                <a:cs typeface="Calibri" pitchFamily="34" charset="-120"/>
+                <a:cs typeface="Amiri" pitchFamily="2" charset="-78"/>
               </a:rPr>
               <a:t>Marks (website): Communication 6 · Accuracy 4.</a:t>
             </a:r>
@@ -8904,8 +8760,7 @@
                   <a:srgbClr val="8A93A0"/>
                 </a:solidFill>
                 <a:latin typeface="Calibri" pitchFamily="34" charset="0"/>
-                <a:ea typeface="Calibri" pitchFamily="34" charset="-122"/>
-                <a:cs typeface="Calibri" pitchFamily="34" charset="-120"/>
+                <a:cs typeface="Amiri" pitchFamily="2" charset="-78"/>
               </a:rPr>
               <a:t>13 / 21</a:t>
             </a:r>
@@ -8999,9 +8854,8 @@
                 <a:solidFill>
                   <a:srgbClr val="D4AF37"/>
                 </a:solidFill>
-                <a:latin typeface="Amiri" pitchFamily="34" charset="0"/>
-                <a:ea typeface="Amiri" pitchFamily="34" charset="-122"/>
-                <a:cs typeface="Amiri" pitchFamily="34" charset="-120"/>
+                <a:latin typeface="Amiri" pitchFamily="2" charset="-78"/>
+                <a:cs typeface="Amiri" pitchFamily="2" charset="-78"/>
               </a:rPr>
               <a:t>م</a:t>
             </a:r>
@@ -9039,8 +8893,7 @@
                   <a:srgbClr val="1B3B6F"/>
                 </a:solidFill>
                 <a:latin typeface="Cambria" pitchFamily="34" charset="0"/>
-                <a:ea typeface="Cambria" pitchFamily="34" charset="-122"/>
-                <a:cs typeface="Cambria" pitchFamily="34" charset="-120"/>
+                <a:cs typeface="Amiri" pitchFamily="2" charset="-78"/>
               </a:rPr>
               <a:t>Al Madina Online School</a:t>
             </a:r>
@@ -9078,8 +8931,7 @@
                   <a:srgbClr val="8A6D1E"/>
                 </a:solidFill>
                 <a:latin typeface="Calibri" pitchFamily="34" charset="0"/>
-                <a:ea typeface="Calibri" pitchFamily="34" charset="-122"/>
-                <a:cs typeface="Calibri" pitchFamily="34" charset="-120"/>
+                <a:cs typeface="Amiri" pitchFamily="2" charset="-78"/>
               </a:rPr>
               <a:t>ARABIC DEPARTMENT · MIFTAH ARABIC · IGCSE 0544</a:t>
             </a:r>
@@ -9144,8 +8996,7 @@
                   <a:srgbClr val="FFFFFF"/>
                 </a:solidFill>
                 <a:latin typeface="Calibri" pitchFamily="34" charset="0"/>
-                <a:ea typeface="Calibri" pitchFamily="34" charset="-122"/>
-                <a:cs typeface="Calibri" pitchFamily="34" charset="-120"/>
+                <a:cs typeface="Amiri" pitchFamily="2" charset="-78"/>
               </a:rPr>
               <a:t>P6-L06 · IGCSE Bridge</a:t>
             </a:r>
@@ -9210,8 +9061,7 @@
                   <a:srgbClr val="FFFFFF"/>
                 </a:solidFill>
                 <a:latin typeface="Calibri" pitchFamily="34" charset="0"/>
-                <a:ea typeface="Calibri" pitchFamily="34" charset="-122"/>
-                <a:cs typeface="Calibri" pitchFamily="34" charset="-120"/>
+                <a:cs typeface="Amiri" pitchFamily="2" charset="-78"/>
               </a:rPr>
               <a:t>YOU DO · 4 MIN</a:t>
             </a:r>
@@ -9249,8 +9099,7 @@
                   <a:srgbClr val="1E6B52"/>
                 </a:solidFill>
                 <a:latin typeface="Calibri" pitchFamily="34" charset="0"/>
-                <a:ea typeface="Calibri" pitchFamily="34" charset="-122"/>
-                <a:cs typeface="Calibri" pitchFamily="34" charset="-120"/>
+                <a:cs typeface="Amiri" pitchFamily="2" charset="-78"/>
               </a:rPr>
               <a:t>YOU DO · ROLE PLAY 3 · UNIVERSITY ADMISSIONS (WEBSITE)</a:t>
             </a:r>
@@ -9288,8 +9137,7 @@
                   <a:srgbClr val="1B3B6F"/>
                 </a:solidFill>
                 <a:latin typeface="Cambria" pitchFamily="34" charset="0"/>
-                <a:ea typeface="Cambria" pitchFamily="34" charset="-122"/>
-                <a:cs typeface="Cambria" pitchFamily="34" charset="-120"/>
+                <a:cs typeface="Amiri" pitchFamily="2" charset="-78"/>
               </a:rPr>
               <a:t>Role play 3 — University admissions</a:t>
             </a:r>
@@ -9326,9 +9174,8 @@
                 <a:solidFill>
                   <a:srgbClr val="8A6D1E"/>
                 </a:solidFill>
-                <a:latin typeface="Amiri" pitchFamily="34" charset="0"/>
-                <a:ea typeface="Amiri" pitchFamily="34" charset="-122"/>
-                <a:cs typeface="Amiri" pitchFamily="34" charset="-120"/>
+                <a:latin typeface="Amiri" pitchFamily="2" charset="-78"/>
+                <a:cs typeface="Amiri" pitchFamily="2" charset="-78"/>
               </a:rPr>
               <a:t>فِي مَكْتَبِ القَبُولِ</a:t>
             </a:r>
@@ -9366,8 +9213,7 @@
                   <a:srgbClr val="8A93A0"/>
                 </a:solidFill>
                 <a:latin typeface="Calibri" pitchFamily="34" charset="0"/>
-                <a:ea typeface="Calibri" pitchFamily="34" charset="-122"/>
-                <a:cs typeface="Calibri" pitchFamily="34" charset="-120"/>
+                <a:cs typeface="Amiri" pitchFamily="2" charset="-78"/>
               </a:rPr>
               <a:t>Miftah Arabic · Progression P6 · IGCSE Bridge · P6-L06</a:t>
             </a:r>
@@ -9430,8 +9276,7 @@
                   <a:srgbClr val="FFFFFF"/>
                 </a:solidFill>
                 <a:latin typeface="Calibri" pitchFamily="34" charset="0"/>
-                <a:ea typeface="Calibri" pitchFamily="34" charset="-122"/>
-                <a:cs typeface="Calibri" pitchFamily="34" charset="-120"/>
+                <a:cs typeface="Amiri" pitchFamily="2" charset="-78"/>
               </a:rPr>
               <a:t>Start like this</a:t>
             </a:r>
@@ -9469,8 +9314,7 @@
                   <a:srgbClr val="FFFFFF"/>
                 </a:solidFill>
                 <a:latin typeface="Calibri" pitchFamily="34" charset="0"/>
-                <a:ea typeface="Calibri" pitchFamily="34" charset="-122"/>
-                <a:cs typeface="Calibri" pitchFamily="34" charset="-120"/>
+                <a:cs typeface="Amiri" pitchFamily="2" charset="-78"/>
               </a:rPr>
               <a:t>Meaning</a:t>
             </a:r>
@@ -9508,8 +9352,7 @@
                   <a:srgbClr val="FFFFFF"/>
                 </a:solidFill>
                 <a:latin typeface="Calibri" pitchFamily="34" charset="0"/>
-                <a:ea typeface="Calibri" pitchFamily="34" charset="-122"/>
-                <a:cs typeface="Calibri" pitchFamily="34" charset="-120"/>
+                <a:cs typeface="Amiri" pitchFamily="2" charset="-78"/>
               </a:rPr>
               <a:t>Prompt (website)</a:t>
             </a:r>
@@ -9573,9 +9416,8 @@
                 <a:solidFill>
                   <a:srgbClr val="1B3B6F"/>
                 </a:solidFill>
-                <a:latin typeface="Amiri" pitchFamily="34" charset="0"/>
-                <a:ea typeface="Amiri" pitchFamily="34" charset="-122"/>
-                <a:cs typeface="Amiri" pitchFamily="34" charset="-120"/>
+                <a:latin typeface="Amiri" pitchFamily="2" charset="-78"/>
+                <a:cs typeface="Amiri" pitchFamily="2" charset="-78"/>
               </a:rPr>
               <a:t>كُنْتُ قَدْ دَرَسْتُ العُلُومَ وَالعَرَبِيَّةَ فِي المَدْرَسَةِ الثَّانَوِيَّةِ.</a:t>
             </a:r>
@@ -9613,8 +9455,7 @@
                   <a:srgbClr val="5A6472"/>
                 </a:solidFill>
                 <a:latin typeface="Calibri" pitchFamily="34" charset="0"/>
-                <a:ea typeface="Calibri" pitchFamily="34" charset="-122"/>
-                <a:cs typeface="Calibri" pitchFamily="34" charset="-120"/>
+                <a:cs typeface="Amiri" pitchFamily="2" charset="-78"/>
               </a:rPr>
               <a:t>Describe your academic background (past perfect).</a:t>
             </a:r>
@@ -9651,9 +9492,8 @@
                 <a:solidFill>
                   <a:srgbClr val="1B3B6F"/>
                 </a:solidFill>
-                <a:latin typeface="Amiri" pitchFamily="34" charset="0"/>
-                <a:ea typeface="Amiri" pitchFamily="34" charset="-122"/>
-                <a:cs typeface="Amiri" pitchFamily="34" charset="-120"/>
+                <a:latin typeface="Amiri" pitchFamily="2" charset="-78"/>
+                <a:cs typeface="Amiri" pitchFamily="2" charset="-78"/>
               </a:rPr>
               <a:t>صِفْ خَلْفِيَّتَكَ الدِّرَاسِيَّةَ (المَاضِي التَّامُّ).</a:t>
             </a:r>
@@ -9718,8 +9558,7 @@
                   <a:srgbClr val="FFFFFF"/>
                 </a:solidFill>
                 <a:latin typeface="Calibri" pitchFamily="34" charset="0"/>
-                <a:ea typeface="Calibri" pitchFamily="34" charset="-122"/>
-                <a:cs typeface="Calibri" pitchFamily="34" charset="-120"/>
+                <a:cs typeface="Amiri" pitchFamily="2" charset="-78"/>
               </a:rPr>
               <a:t>CORE</a:t>
             </a:r>
@@ -9783,9 +9622,8 @@
                 <a:solidFill>
                   <a:srgbClr val="1B3B6F"/>
                 </a:solidFill>
-                <a:latin typeface="Amiri" pitchFamily="34" charset="0"/>
-                <a:ea typeface="Amiri" pitchFamily="34" charset="-122"/>
-                <a:cs typeface="Amiri" pitchFamily="34" charset="-120"/>
+                <a:latin typeface="Amiri" pitchFamily="2" charset="-78"/>
+                <a:cs typeface="Amiri" pitchFamily="2" charset="-78"/>
               </a:rPr>
               <a:t>مَا البَرَامِجُ المُتَاحَةُ فِي كُلِّيَّةِ الطِّبِّ؟</a:t>
             </a:r>
@@ -9823,8 +9661,7 @@
                   <a:srgbClr val="5A6472"/>
                 </a:solidFill>
                 <a:latin typeface="Calibri" pitchFamily="34" charset="0"/>
-                <a:ea typeface="Calibri" pitchFamily="34" charset="-122"/>
-                <a:cs typeface="Calibri" pitchFamily="34" charset="-120"/>
+                <a:cs typeface="Amiri" pitchFamily="2" charset="-78"/>
               </a:rPr>
               <a:t>Ask about the available programmes.</a:t>
             </a:r>
@@ -9861,9 +9698,8 @@
                 <a:solidFill>
                   <a:srgbClr val="1B3B6F"/>
                 </a:solidFill>
-                <a:latin typeface="Amiri" pitchFamily="34" charset="0"/>
-                <a:ea typeface="Amiri" pitchFamily="34" charset="-122"/>
-                <a:cs typeface="Amiri" pitchFamily="34" charset="-120"/>
+                <a:latin typeface="Amiri" pitchFamily="2" charset="-78"/>
+                <a:cs typeface="Amiri" pitchFamily="2" charset="-78"/>
               </a:rPr>
               <a:t>اسْأَلْ عَنِ البَرَامِجِ المُتَاحَةِ.</a:t>
             </a:r>
@@ -9928,8 +9764,7 @@
                   <a:srgbClr val="FFFFFF"/>
                 </a:solidFill>
                 <a:latin typeface="Calibri" pitchFamily="34" charset="0"/>
-                <a:ea typeface="Calibri" pitchFamily="34" charset="-122"/>
-                <a:cs typeface="Calibri" pitchFamily="34" charset="-120"/>
+                <a:cs typeface="Amiri" pitchFamily="2" charset="-78"/>
               </a:rPr>
               <a:t>CORE</a:t>
             </a:r>
@@ -9993,9 +9828,8 @@
                 <a:solidFill>
                   <a:srgbClr val="1B3B6F"/>
                 </a:solidFill>
-                <a:latin typeface="Amiri" pitchFamily="34" charset="0"/>
-                <a:ea typeface="Amiri" pitchFamily="34" charset="-122"/>
-                <a:cs typeface="Amiri" pitchFamily="34" charset="-120"/>
+                <a:latin typeface="Amiri" pitchFamily="2" charset="-78"/>
+                <a:cs typeface="Amiri" pitchFamily="2" charset="-78"/>
               </a:rPr>
               <a:t>إِذَا قُبِلْتُ، سَأَدْرُسُ الطِّبَّ لِكَيْ أُسَاعِدَ النَّاسَ.</a:t>
             </a:r>
@@ -10033,8 +9867,7 @@
                   <a:srgbClr val="5A6472"/>
                 </a:solidFill>
                 <a:latin typeface="Calibri" pitchFamily="34" charset="0"/>
-                <a:ea typeface="Calibri" pitchFamily="34" charset="-122"/>
-                <a:cs typeface="Calibri" pitchFamily="34" charset="-120"/>
+                <a:cs typeface="Amiri" pitchFamily="2" charset="-78"/>
               </a:rPr>
               <a:t>Talk about your future plans (a conditional).</a:t>
             </a:r>
@@ -10071,9 +9904,8 @@
                 <a:solidFill>
                   <a:srgbClr val="1B3B6F"/>
                 </a:solidFill>
-                <a:latin typeface="Amiri" pitchFamily="34" charset="0"/>
-                <a:ea typeface="Amiri" pitchFamily="34" charset="-122"/>
-                <a:cs typeface="Amiri" pitchFamily="34" charset="-120"/>
+                <a:latin typeface="Amiri" pitchFamily="2" charset="-78"/>
+                <a:cs typeface="Amiri" pitchFamily="2" charset="-78"/>
               </a:rPr>
               <a:t>تَحَدَّثْ عَنْ خُطَطِكَ المُسْتَقْبَلِيَّةِ (شَرْطٌ).</a:t>
             </a:r>
@@ -10137,9 +9969,8 @@
                 <a:solidFill>
                   <a:srgbClr val="1B3B6F"/>
                 </a:solidFill>
-                <a:latin typeface="Amiri" pitchFamily="34" charset="0"/>
-                <a:ea typeface="Amiri" pitchFamily="34" charset="-122"/>
-                <a:cs typeface="Amiri" pitchFamily="34" charset="-120"/>
+                <a:latin typeface="Amiri" pitchFamily="2" charset="-78"/>
+                <a:cs typeface="Amiri" pitchFamily="2" charset="-78"/>
               </a:rPr>
               <a:t>هَلْ تُوجَدُ مِنَحٌ لِلطُّلَّابِ الدَّوْلِيِّينَ؟</a:t>
             </a:r>
@@ -10177,8 +10008,7 @@
                   <a:srgbClr val="5A6472"/>
                 </a:solidFill>
                 <a:latin typeface="Calibri" pitchFamily="34" charset="0"/>
-                <a:ea typeface="Calibri" pitchFamily="34" charset="-122"/>
-                <a:cs typeface="Calibri" pitchFamily="34" charset="-120"/>
+                <a:cs typeface="Amiri" pitchFamily="2" charset="-78"/>
               </a:rPr>
               <a:t>Ask for scholarship information.</a:t>
             </a:r>
@@ -10215,9 +10045,8 @@
                 <a:solidFill>
                   <a:srgbClr val="1B3B6F"/>
                 </a:solidFill>
-                <a:latin typeface="Amiri" pitchFamily="34" charset="0"/>
-                <a:ea typeface="Amiri" pitchFamily="34" charset="-122"/>
-                <a:cs typeface="Amiri" pitchFamily="34" charset="-120"/>
+                <a:latin typeface="Amiri" pitchFamily="2" charset="-78"/>
+                <a:cs typeface="Amiri" pitchFamily="2" charset="-78"/>
               </a:rPr>
               <a:t>اطْلُبْ مَعْلُومَاتٍ عَنِ المِنَحِ.</a:t>
             </a:r>
@@ -10255,8 +10084,7 @@
                   <a:srgbClr val="1B3B6F"/>
                 </a:solidFill>
                 <a:latin typeface="Calibri" pitchFamily="34" charset="0"/>
-                <a:ea typeface="Calibri" pitchFamily="34" charset="-122"/>
-                <a:cs typeface="Calibri" pitchFamily="34" charset="-120"/>
+                <a:cs typeface="Amiri" pitchFamily="2" charset="-78"/>
               </a:rPr>
               <a:t>Marks (website): Communication 6 · Accuracy 4.</a:t>
             </a:r>
@@ -10294,8 +10122,7 @@
                   <a:srgbClr val="8A93A0"/>
                 </a:solidFill>
                 <a:latin typeface="Calibri" pitchFamily="34" charset="0"/>
-                <a:ea typeface="Calibri" pitchFamily="34" charset="-122"/>
-                <a:cs typeface="Calibri" pitchFamily="34" charset="-120"/>
+                <a:cs typeface="Amiri" pitchFamily="2" charset="-78"/>
               </a:rPr>
               <a:t>14 / 21</a:t>
             </a:r>
@@ -10389,9 +10216,8 @@
                 <a:solidFill>
                   <a:srgbClr val="D4AF37"/>
                 </a:solidFill>
-                <a:latin typeface="Amiri" pitchFamily="34" charset="0"/>
-                <a:ea typeface="Amiri" pitchFamily="34" charset="-122"/>
-                <a:cs typeface="Amiri" pitchFamily="34" charset="-120"/>
+                <a:latin typeface="Amiri" pitchFamily="2" charset="-78"/>
+                <a:cs typeface="Amiri" pitchFamily="2" charset="-78"/>
               </a:rPr>
               <a:t>م</a:t>
             </a:r>
@@ -10429,8 +10255,7 @@
                   <a:srgbClr val="1B3B6F"/>
                 </a:solidFill>
                 <a:latin typeface="Cambria" pitchFamily="34" charset="0"/>
-                <a:ea typeface="Cambria" pitchFamily="34" charset="-122"/>
-                <a:cs typeface="Cambria" pitchFamily="34" charset="-120"/>
+                <a:cs typeface="Amiri" pitchFamily="2" charset="-78"/>
               </a:rPr>
               <a:t>Al Madina Online School</a:t>
             </a:r>
@@ -10468,8 +10293,7 @@
                   <a:srgbClr val="8A6D1E"/>
                 </a:solidFill>
                 <a:latin typeface="Calibri" pitchFamily="34" charset="0"/>
-                <a:ea typeface="Calibri" pitchFamily="34" charset="-122"/>
-                <a:cs typeface="Calibri" pitchFamily="34" charset="-120"/>
+                <a:cs typeface="Amiri" pitchFamily="2" charset="-78"/>
               </a:rPr>
               <a:t>ARABIC DEPARTMENT · MIFTAH ARABIC · IGCSE 0544</a:t>
             </a:r>
@@ -10534,8 +10358,7 @@
                   <a:srgbClr val="FFFFFF"/>
                 </a:solidFill>
                 <a:latin typeface="Calibri" pitchFamily="34" charset="0"/>
-                <a:ea typeface="Calibri" pitchFamily="34" charset="-122"/>
-                <a:cs typeface="Calibri" pitchFamily="34" charset="-120"/>
+                <a:cs typeface="Amiri" pitchFamily="2" charset="-78"/>
               </a:rPr>
               <a:t>P6-L06 · IGCSE Bridge</a:t>
             </a:r>
@@ -10600,8 +10423,7 @@
                   <a:srgbClr val="FFFFFF"/>
                 </a:solidFill>
                 <a:latin typeface="Calibri" pitchFamily="34" charset="0"/>
-                <a:ea typeface="Calibri" pitchFamily="34" charset="-122"/>
-                <a:cs typeface="Calibri" pitchFamily="34" charset="-120"/>
+                <a:cs typeface="Amiri" pitchFamily="2" charset="-78"/>
               </a:rPr>
               <a:t>YOU DO · 4 MIN</a:t>
             </a:r>
@@ -10639,8 +10461,7 @@
                   <a:srgbClr val="1E6B52"/>
                 </a:solidFill>
                 <a:latin typeface="Calibri" pitchFamily="34" charset="0"/>
-                <a:ea typeface="Calibri" pitchFamily="34" charset="-122"/>
-                <a:cs typeface="Calibri" pitchFamily="34" charset="-120"/>
+                <a:cs typeface="Amiri" pitchFamily="2" charset="-78"/>
               </a:rPr>
               <a:t>YOU DO · ROLE PLAY 4 · COMMUNITY ENVIRONMENT MEETING (WEBSITE)</a:t>
             </a:r>
@@ -10678,8 +10499,7 @@
                   <a:srgbClr val="1B3B6F"/>
                 </a:solidFill>
                 <a:latin typeface="Cambria" pitchFamily="34" charset="0"/>
-                <a:ea typeface="Cambria" pitchFamily="34" charset="-122"/>
-                <a:cs typeface="Cambria" pitchFamily="34" charset="-120"/>
+                <a:cs typeface="Amiri" pitchFamily="2" charset="-78"/>
               </a:rPr>
               <a:t>Role play 4 — Community environment meeting</a:t>
             </a:r>
@@ -10716,9 +10536,8 @@
                 <a:solidFill>
                   <a:srgbClr val="8A6D1E"/>
                 </a:solidFill>
-                <a:latin typeface="Amiri" pitchFamily="34" charset="0"/>
-                <a:ea typeface="Amiri" pitchFamily="34" charset="-122"/>
-                <a:cs typeface="Amiri" pitchFamily="34" charset="-120"/>
+                <a:latin typeface="Amiri" pitchFamily="2" charset="-78"/>
+                <a:cs typeface="Amiri" pitchFamily="2" charset="-78"/>
               </a:rPr>
               <a:t>فِي اجْتِمَاعِ الحَيِّ</a:t>
             </a:r>
@@ -10756,8 +10575,7 @@
                   <a:srgbClr val="8A93A0"/>
                 </a:solidFill>
                 <a:latin typeface="Calibri" pitchFamily="34" charset="0"/>
-                <a:ea typeface="Calibri" pitchFamily="34" charset="-122"/>
-                <a:cs typeface="Calibri" pitchFamily="34" charset="-120"/>
+                <a:cs typeface="Amiri" pitchFamily="2" charset="-78"/>
               </a:rPr>
               <a:t>Miftah Arabic · Progression P6 · IGCSE Bridge · P6-L06</a:t>
             </a:r>
@@ -10820,8 +10638,7 @@
                   <a:srgbClr val="FFFFFF"/>
                 </a:solidFill>
                 <a:latin typeface="Calibri" pitchFamily="34" charset="0"/>
-                <a:ea typeface="Calibri" pitchFamily="34" charset="-122"/>
-                <a:cs typeface="Calibri" pitchFamily="34" charset="-120"/>
+                <a:cs typeface="Amiri" pitchFamily="2" charset="-78"/>
               </a:rPr>
               <a:t>Start like this</a:t>
             </a:r>
@@ -10859,8 +10676,7 @@
                   <a:srgbClr val="FFFFFF"/>
                 </a:solidFill>
                 <a:latin typeface="Calibri" pitchFamily="34" charset="0"/>
-                <a:ea typeface="Calibri" pitchFamily="34" charset="-122"/>
-                <a:cs typeface="Calibri" pitchFamily="34" charset="-120"/>
+                <a:cs typeface="Amiri" pitchFamily="2" charset="-78"/>
               </a:rPr>
               <a:t>Meaning</a:t>
             </a:r>
@@ -10898,8 +10714,7 @@
                   <a:srgbClr val="FFFFFF"/>
                 </a:solidFill>
                 <a:latin typeface="Calibri" pitchFamily="34" charset="0"/>
-                <a:ea typeface="Calibri" pitchFamily="34" charset="-122"/>
-                <a:cs typeface="Calibri" pitchFamily="34" charset="-120"/>
+                <a:cs typeface="Amiri" pitchFamily="2" charset="-78"/>
               </a:rPr>
               <a:t>Prompt (website)</a:t>
             </a:r>
@@ -10963,9 +10778,8 @@
                 <a:solidFill>
                   <a:srgbClr val="1B3B6F"/>
                 </a:solidFill>
-                <a:latin typeface="Amiri" pitchFamily="34" charset="0"/>
-                <a:ea typeface="Amiri" pitchFamily="34" charset="-122"/>
-                <a:cs typeface="Amiri" pitchFamily="34" charset="-120"/>
+                <a:latin typeface="Amiri" pitchFamily="2" charset="-78"/>
+                <a:cs typeface="Amiri" pitchFamily="2" charset="-78"/>
               </a:rPr>
               <a:t>تُرْمَى النُّفَايَاتُ فِي الحَدِيقَةِ، وَقَدْ لُوِّثَ النَّهْرُ.</a:t>
             </a:r>
@@ -11003,8 +10817,7 @@
                   <a:srgbClr val="5A6472"/>
                 </a:solidFill>
                 <a:latin typeface="Calibri" pitchFamily="34" charset="0"/>
-                <a:ea typeface="Calibri" pitchFamily="34" charset="-122"/>
-                <a:cs typeface="Calibri" pitchFamily="34" charset="-120"/>
+                <a:cs typeface="Amiri" pitchFamily="2" charset="-78"/>
               </a:rPr>
               <a:t>Report a local environmental problem (passive).</a:t>
             </a:r>
@@ -11041,9 +10854,8 @@
                 <a:solidFill>
                   <a:srgbClr val="1B3B6F"/>
                 </a:solidFill>
-                <a:latin typeface="Amiri" pitchFamily="34" charset="0"/>
-                <a:ea typeface="Amiri" pitchFamily="34" charset="-122"/>
-                <a:cs typeface="Amiri" pitchFamily="34" charset="-120"/>
+                <a:latin typeface="Amiri" pitchFamily="2" charset="-78"/>
+                <a:cs typeface="Amiri" pitchFamily="2" charset="-78"/>
               </a:rPr>
               <a:t>أَبْلِغْ عَنْ مُشْكِلَةٍ بِيئِيَّةٍ مَحَلِّيَّةٍ (المَبْنِيُّ لِلْمَجْهُولِ).</a:t>
             </a:r>
@@ -11108,8 +10920,7 @@
                   <a:srgbClr val="FFFFFF"/>
                 </a:solidFill>
                 <a:latin typeface="Calibri" pitchFamily="34" charset="0"/>
-                <a:ea typeface="Calibri" pitchFamily="34" charset="-122"/>
-                <a:cs typeface="Calibri" pitchFamily="34" charset="-120"/>
+                <a:cs typeface="Amiri" pitchFamily="2" charset="-78"/>
               </a:rPr>
               <a:t>CORE</a:t>
             </a:r>
@@ -11173,9 +10984,8 @@
                 <a:solidFill>
                   <a:srgbClr val="1B3B6F"/>
                 </a:solidFill>
-                <a:latin typeface="Amiri" pitchFamily="34" charset="0"/>
-                <a:ea typeface="Amiri" pitchFamily="34" charset="-122"/>
-                <a:cs typeface="Amiri" pitchFamily="34" charset="-120"/>
+                <a:latin typeface="Amiri" pitchFamily="2" charset="-78"/>
+                <a:cs typeface="Amiri" pitchFamily="2" charset="-78"/>
               </a:rPr>
               <a:t>أَقْتَرِحُ أَنْ تُوضَعَ حَاوِيَاتٌ لِإِعَادَةِ التَّدْوِيرِ.</a:t>
             </a:r>
@@ -11213,8 +11023,7 @@
                   <a:srgbClr val="5A6472"/>
                 </a:solidFill>
                 <a:latin typeface="Calibri" pitchFamily="34" charset="0"/>
-                <a:ea typeface="Calibri" pitchFamily="34" charset="-122"/>
-                <a:cs typeface="Calibri" pitchFamily="34" charset="-120"/>
+                <a:cs typeface="Amiri" pitchFamily="2" charset="-78"/>
               </a:rPr>
               <a:t>Suggest solutions (a subjunctive trigger).</a:t>
             </a:r>
@@ -11251,9 +11060,8 @@
                 <a:solidFill>
                   <a:srgbClr val="1B3B6F"/>
                 </a:solidFill>
-                <a:latin typeface="Amiri" pitchFamily="34" charset="0"/>
-                <a:ea typeface="Amiri" pitchFamily="34" charset="-122"/>
-                <a:cs typeface="Amiri" pitchFamily="34" charset="-120"/>
+                <a:latin typeface="Amiri" pitchFamily="2" charset="-78"/>
+                <a:cs typeface="Amiri" pitchFamily="2" charset="-78"/>
               </a:rPr>
               <a:t>اقْتَرِحْ حُلُولًا (مُسَبِّبُ نَصْبٍ).</a:t>
             </a:r>
@@ -11318,8 +11126,7 @@
                   <a:srgbClr val="FFFFFF"/>
                 </a:solidFill>
                 <a:latin typeface="Calibri" pitchFamily="34" charset="0"/>
-                <a:ea typeface="Calibri" pitchFamily="34" charset="-122"/>
-                <a:cs typeface="Calibri" pitchFamily="34" charset="-120"/>
+                <a:cs typeface="Amiri" pitchFamily="2" charset="-78"/>
               </a:rPr>
               <a:t>CORE</a:t>
             </a:r>
@@ -11383,9 +11190,8 @@
                 <a:solidFill>
                   <a:srgbClr val="1B3B6F"/>
                 </a:solidFill>
-                <a:latin typeface="Amiri" pitchFamily="34" charset="0"/>
-                <a:ea typeface="Amiri" pitchFamily="34" charset="-122"/>
-                <a:cs typeface="Amiri" pitchFamily="34" charset="-120"/>
+                <a:latin typeface="Amiri" pitchFamily="2" charset="-78"/>
+                <a:cs typeface="Amiri" pitchFamily="2" charset="-78"/>
               </a:rPr>
               <a:t>مَا اللَّوَائِحُ الَّتِي تَمْنَعُ رَمْيَ النُّفَايَاتِ؟</a:t>
             </a:r>
@@ -11423,8 +11229,7 @@
                   <a:srgbClr val="5A6472"/>
                 </a:solidFill>
                 <a:latin typeface="Calibri" pitchFamily="34" charset="0"/>
-                <a:ea typeface="Calibri" pitchFamily="34" charset="-122"/>
-                <a:cs typeface="Calibri" pitchFamily="34" charset="-120"/>
+                <a:cs typeface="Amiri" pitchFamily="2" charset="-78"/>
               </a:rPr>
               <a:t>Ask about the regulations.</a:t>
             </a:r>
@@ -11461,9 +11266,8 @@
                 <a:solidFill>
                   <a:srgbClr val="1B3B6F"/>
                 </a:solidFill>
-                <a:latin typeface="Amiri" pitchFamily="34" charset="0"/>
-                <a:ea typeface="Amiri" pitchFamily="34" charset="-122"/>
-                <a:cs typeface="Amiri" pitchFamily="34" charset="-120"/>
+                <a:latin typeface="Amiri" pitchFamily="2" charset="-78"/>
+                <a:cs typeface="Amiri" pitchFamily="2" charset="-78"/>
               </a:rPr>
               <a:t>اسْأَلْ عَنِ اللَّوَائِحِ.</a:t>
             </a:r>
@@ -11527,9 +11331,8 @@
                 <a:solidFill>
                   <a:srgbClr val="1B3B6F"/>
                 </a:solidFill>
-                <a:latin typeface="Amiri" pitchFamily="34" charset="0"/>
-                <a:ea typeface="Amiri" pitchFamily="34" charset="-122"/>
-                <a:cs typeface="Amiri" pitchFamily="34" charset="-120"/>
+                <a:latin typeface="Amiri" pitchFamily="2" charset="-78"/>
+                <a:cs typeface="Amiri" pitchFamily="2" charset="-78"/>
               </a:rPr>
               <a:t>نَرْجُو أَنْ تَدْعَمَ البَلَدِيَّةُ حَمْلَةَ تَنْظِيفٍ.</a:t>
             </a:r>
@@ -11567,8 +11370,7 @@
                   <a:srgbClr val="5A6472"/>
                 </a:solidFill>
                 <a:latin typeface="Calibri" pitchFamily="34" charset="0"/>
-                <a:ea typeface="Calibri" pitchFamily="34" charset="-122"/>
-                <a:cs typeface="Calibri" pitchFamily="34" charset="-120"/>
+                <a:cs typeface="Amiri" pitchFamily="2" charset="-78"/>
               </a:rPr>
               <a:t>Request the council’s support.</a:t>
             </a:r>
@@ -11605,9 +11407,8 @@
                 <a:solidFill>
                   <a:srgbClr val="1B3B6F"/>
                 </a:solidFill>
-                <a:latin typeface="Amiri" pitchFamily="34" charset="0"/>
-                <a:ea typeface="Amiri" pitchFamily="34" charset="-122"/>
-                <a:cs typeface="Amiri" pitchFamily="34" charset="-120"/>
+                <a:latin typeface="Amiri" pitchFamily="2" charset="-78"/>
+                <a:cs typeface="Amiri" pitchFamily="2" charset="-78"/>
               </a:rPr>
               <a:t>اطْلُبْ دَعْمَ البَلَدِيَّةِ.</a:t>
             </a:r>
@@ -11645,8 +11446,7 @@
                   <a:srgbClr val="1B3B6F"/>
                 </a:solidFill>
                 <a:latin typeface="Calibri" pitchFamily="34" charset="0"/>
-                <a:ea typeface="Calibri" pitchFamily="34" charset="-122"/>
-                <a:cs typeface="Calibri" pitchFamily="34" charset="-120"/>
+                <a:cs typeface="Amiri" pitchFamily="2" charset="-78"/>
               </a:rPr>
               <a:t>Marks (website): Communication 6 · Accuracy 4.</a:t>
             </a:r>
@@ -11684,8 +11484,7 @@
                   <a:srgbClr val="8A93A0"/>
                 </a:solidFill>
                 <a:latin typeface="Calibri" pitchFamily="34" charset="0"/>
-                <a:ea typeface="Calibri" pitchFamily="34" charset="-122"/>
-                <a:cs typeface="Calibri" pitchFamily="34" charset="-120"/>
+                <a:cs typeface="Amiri" pitchFamily="2" charset="-78"/>
               </a:rPr>
               <a:t>15 / 21</a:t>
             </a:r>
@@ -11779,9 +11578,8 @@
                 <a:solidFill>
                   <a:srgbClr val="D4AF37"/>
                 </a:solidFill>
-                <a:latin typeface="Amiri" pitchFamily="34" charset="0"/>
-                <a:ea typeface="Amiri" pitchFamily="34" charset="-122"/>
-                <a:cs typeface="Amiri" pitchFamily="34" charset="-120"/>
+                <a:latin typeface="Amiri" pitchFamily="2" charset="-78"/>
+                <a:cs typeface="Amiri" pitchFamily="2" charset="-78"/>
               </a:rPr>
               <a:t>م</a:t>
             </a:r>
@@ -11819,8 +11617,7 @@
                   <a:srgbClr val="1B3B6F"/>
                 </a:solidFill>
                 <a:latin typeface="Cambria" pitchFamily="34" charset="0"/>
-                <a:ea typeface="Cambria" pitchFamily="34" charset="-122"/>
-                <a:cs typeface="Cambria" pitchFamily="34" charset="-120"/>
+                <a:cs typeface="Amiri" pitchFamily="2" charset="-78"/>
               </a:rPr>
               <a:t>Al Madina Online School</a:t>
             </a:r>
@@ -11858,8 +11655,7 @@
                   <a:srgbClr val="8A6D1E"/>
                 </a:solidFill>
                 <a:latin typeface="Calibri" pitchFamily="34" charset="0"/>
-                <a:ea typeface="Calibri" pitchFamily="34" charset="-122"/>
-                <a:cs typeface="Calibri" pitchFamily="34" charset="-120"/>
+                <a:cs typeface="Amiri" pitchFamily="2" charset="-78"/>
               </a:rPr>
               <a:t>ARABIC DEPARTMENT · MIFTAH ARABIC · IGCSE 0544</a:t>
             </a:r>
@@ -11924,8 +11720,7 @@
                   <a:srgbClr val="FFFFFF"/>
                 </a:solidFill>
                 <a:latin typeface="Calibri" pitchFamily="34" charset="0"/>
-                <a:ea typeface="Calibri" pitchFamily="34" charset="-122"/>
-                <a:cs typeface="Calibri" pitchFamily="34" charset="-120"/>
+                <a:cs typeface="Amiri" pitchFamily="2" charset="-78"/>
               </a:rPr>
               <a:t>P6-L06 · IGCSE Bridge</a:t>
             </a:r>
@@ -11990,8 +11785,7 @@
                   <a:srgbClr val="FFFFFF"/>
                 </a:solidFill>
                 <a:latin typeface="Calibri" pitchFamily="34" charset="0"/>
-                <a:ea typeface="Calibri" pitchFamily="34" charset="-122"/>
-                <a:cs typeface="Calibri" pitchFamily="34" charset="-120"/>
+                <a:cs typeface="Amiri" pitchFamily="2" charset="-78"/>
               </a:rPr>
               <a:t>YOU DO · 4 MIN</a:t>
             </a:r>
@@ -12029,8 +11823,7 @@
                   <a:srgbClr val="1E6B52"/>
                 </a:solidFill>
                 <a:latin typeface="Calibri" pitchFamily="34" charset="0"/>
-                <a:ea typeface="Calibri" pitchFamily="34" charset="-122"/>
-                <a:cs typeface="Calibri" pitchFamily="34" charset="-120"/>
+                <a:cs typeface="Amiri" pitchFamily="2" charset="-78"/>
               </a:rPr>
               <a:t>YOU DO · ROLE PLAY 5 · INTERNATIONAL CONFERENCE (WEBSITE)</a:t>
             </a:r>
@@ -12068,8 +11861,7 @@
                   <a:srgbClr val="1B3B6F"/>
                 </a:solidFill>
                 <a:latin typeface="Cambria" pitchFamily="34" charset="0"/>
-                <a:ea typeface="Cambria" pitchFamily="34" charset="-122"/>
-                <a:cs typeface="Cambria" pitchFamily="34" charset="-120"/>
+                <a:cs typeface="Amiri" pitchFamily="2" charset="-78"/>
               </a:rPr>
               <a:t>Role play 5 — International conference</a:t>
             </a:r>
@@ -12106,9 +11898,8 @@
                 <a:solidFill>
                   <a:srgbClr val="8A6D1E"/>
                 </a:solidFill>
-                <a:latin typeface="Amiri" pitchFamily="34" charset="0"/>
-                <a:ea typeface="Amiri" pitchFamily="34" charset="-122"/>
-                <a:cs typeface="Amiri" pitchFamily="34" charset="-120"/>
+                <a:latin typeface="Amiri" pitchFamily="2" charset="-78"/>
+                <a:cs typeface="Amiri" pitchFamily="2" charset="-78"/>
               </a:rPr>
               <a:t>فِي المُؤْتَمَرِ الدَّوْلِيِّ</a:t>
             </a:r>
@@ -12146,8 +11937,7 @@
                   <a:srgbClr val="8A93A0"/>
                 </a:solidFill>
                 <a:latin typeface="Calibri" pitchFamily="34" charset="0"/>
-                <a:ea typeface="Calibri" pitchFamily="34" charset="-122"/>
-                <a:cs typeface="Calibri" pitchFamily="34" charset="-120"/>
+                <a:cs typeface="Amiri" pitchFamily="2" charset="-78"/>
               </a:rPr>
               <a:t>Miftah Arabic · Progression P6 · IGCSE Bridge · P6-L06</a:t>
             </a:r>
@@ -12210,8 +12000,7 @@
                   <a:srgbClr val="FFFFFF"/>
                 </a:solidFill>
                 <a:latin typeface="Calibri" pitchFamily="34" charset="0"/>
-                <a:ea typeface="Calibri" pitchFamily="34" charset="-122"/>
-                <a:cs typeface="Calibri" pitchFamily="34" charset="-120"/>
+                <a:cs typeface="Amiri" pitchFamily="2" charset="-78"/>
               </a:rPr>
               <a:t>Start like this</a:t>
             </a:r>
@@ -12249,8 +12038,7 @@
                   <a:srgbClr val="FFFFFF"/>
                 </a:solidFill>
                 <a:latin typeface="Calibri" pitchFamily="34" charset="0"/>
-                <a:ea typeface="Calibri" pitchFamily="34" charset="-122"/>
-                <a:cs typeface="Calibri" pitchFamily="34" charset="-120"/>
+                <a:cs typeface="Amiri" pitchFamily="2" charset="-78"/>
               </a:rPr>
               <a:t>Meaning</a:t>
             </a:r>
@@ -12288,8 +12076,7 @@
                   <a:srgbClr val="FFFFFF"/>
                 </a:solidFill>
                 <a:latin typeface="Calibri" pitchFamily="34" charset="0"/>
-                <a:ea typeface="Calibri" pitchFamily="34" charset="-122"/>
-                <a:cs typeface="Calibri" pitchFamily="34" charset="-120"/>
+                <a:cs typeface="Amiri" pitchFamily="2" charset="-78"/>
               </a:rPr>
               <a:t>Prompt (website)</a:t>
             </a:r>
@@ -12353,9 +12140,8 @@
                 <a:solidFill>
                   <a:srgbClr val="1B3B6F"/>
                 </a:solidFill>
-                <a:latin typeface="Amiri" pitchFamily="34" charset="0"/>
-                <a:ea typeface="Amiri" pitchFamily="34" charset="-122"/>
-                <a:cs typeface="Amiri" pitchFamily="34" charset="-120"/>
+                <a:latin typeface="Amiri" pitchFamily="2" charset="-78"/>
+                <a:cs typeface="Amiri" pitchFamily="2" charset="-78"/>
               </a:rPr>
               <a:t>أَرَى أَنَّ الفَجْوَةَ الرَّقْمِيَّةَ تُعَمِّقُ عَدَمَ المُسَاوَاةِ.</a:t>
             </a:r>
@@ -12393,8 +12179,7 @@
                   <a:srgbClr val="5A6472"/>
                 </a:solidFill>
                 <a:latin typeface="Calibri" pitchFamily="34" charset="0"/>
-                <a:ea typeface="Calibri" pitchFamily="34" charset="-122"/>
-                <a:cs typeface="Calibri" pitchFamily="34" charset="-120"/>
+                <a:cs typeface="Amiri" pitchFamily="2" charset="-78"/>
               </a:rPr>
               <a:t>Present your position on a social issue.</a:t>
             </a:r>
@@ -12431,9 +12216,8 @@
                 <a:solidFill>
                   <a:srgbClr val="1B3B6F"/>
                 </a:solidFill>
-                <a:latin typeface="Amiri" pitchFamily="34" charset="0"/>
-                <a:ea typeface="Amiri" pitchFamily="34" charset="-122"/>
-                <a:cs typeface="Amiri" pitchFamily="34" charset="-120"/>
+                <a:latin typeface="Amiri" pitchFamily="2" charset="-78"/>
+                <a:cs typeface="Amiri" pitchFamily="2" charset="-78"/>
               </a:rPr>
               <a:t>اعْرِضْ مَوْقِفَكَ مِنْ قَضِيَّةٍ اجْتِمَاعِيَّةٍ.</a:t>
             </a:r>
@@ -12498,8 +12282,7 @@
                   <a:srgbClr val="FFFFFF"/>
                 </a:solidFill>
                 <a:latin typeface="Calibri" pitchFamily="34" charset="0"/>
-                <a:ea typeface="Calibri" pitchFamily="34" charset="-122"/>
-                <a:cs typeface="Calibri" pitchFamily="34" charset="-120"/>
+                <a:cs typeface="Amiri" pitchFamily="2" charset="-78"/>
               </a:rPr>
               <a:t>CORE</a:t>
             </a:r>
@@ -12563,9 +12346,8 @@
                 <a:solidFill>
                   <a:srgbClr val="1B3B6F"/>
                 </a:solidFill>
-                <a:latin typeface="Amiri" pitchFamily="34" charset="0"/>
-                <a:ea typeface="Amiri" pitchFamily="34" charset="-122"/>
-                <a:cs typeface="Amiri" pitchFamily="34" charset="-120"/>
+                <a:latin typeface="Amiri" pitchFamily="2" charset="-78"/>
+                <a:cs typeface="Amiri" pitchFamily="2" charset="-78"/>
               </a:rPr>
               <a:t>صَحِيحٌ أَنَّ التِّقْنِيَّةَ تُوَفِّرُ فُرَصًا، غَيْرَ أَنَّ …</a:t>
             </a:r>
@@ -12603,8 +12385,7 @@
                   <a:srgbClr val="5A6472"/>
                 </a:solidFill>
                 <a:latin typeface="Calibri" pitchFamily="34" charset="0"/>
-                <a:ea typeface="Calibri" pitchFamily="34" charset="-122"/>
-                <a:cs typeface="Calibri" pitchFamily="34" charset="-120"/>
+                <a:cs typeface="Amiri" pitchFamily="2" charset="-78"/>
               </a:rPr>
               <a:t>Concede the opposing view (ṣaḥīḥun anna).</a:t>
             </a:r>
@@ -12641,9 +12422,8 @@
                 <a:solidFill>
                   <a:srgbClr val="1B3B6F"/>
                 </a:solidFill>
-                <a:latin typeface="Amiri" pitchFamily="34" charset="0"/>
-                <a:ea typeface="Amiri" pitchFamily="34" charset="-122"/>
-                <a:cs typeface="Amiri" pitchFamily="34" charset="-120"/>
+                <a:latin typeface="Amiri" pitchFamily="2" charset="-78"/>
+                <a:cs typeface="Amiri" pitchFamily="2" charset="-78"/>
               </a:rPr>
               <a:t>سَلِّمْ بِرَأْيِ الطَّرَفِ الآخَرِ (صَحِيحٌ أَنَّ).</a:t>
             </a:r>
@@ -12708,8 +12488,7 @@
                   <a:srgbClr val="FFFFFF"/>
                 </a:solidFill>
                 <a:latin typeface="Calibri" pitchFamily="34" charset="0"/>
-                <a:ea typeface="Calibri" pitchFamily="34" charset="-122"/>
-                <a:cs typeface="Calibri" pitchFamily="34" charset="-120"/>
+                <a:cs typeface="Amiri" pitchFamily="2" charset="-78"/>
               </a:rPr>
               <a:t>CORE</a:t>
             </a:r>
@@ -12773,9 +12552,8 @@
                 <a:solidFill>
                   <a:srgbClr val="1B3B6F"/>
                 </a:solidFill>
-                <a:latin typeface="Amiri" pitchFamily="34" charset="0"/>
-                <a:ea typeface="Amiri" pitchFamily="34" charset="-122"/>
-                <a:cs typeface="Amiri" pitchFamily="34" charset="-120"/>
+                <a:latin typeface="Amiri" pitchFamily="2" charset="-78"/>
+                <a:cs typeface="Amiri" pitchFamily="2" charset="-78"/>
               </a:rPr>
               <a:t>يَتَطَلَّبُ الأَمْرُ أَنْ تُوَفِّرَ الحُكُومَاتُ الإِنْتِرْنِتَ لِلْجَمِيعِ.</a:t>
             </a:r>
@@ -12813,8 +12591,7 @@
                   <a:srgbClr val="5A6472"/>
                 </a:solidFill>
                 <a:latin typeface="Calibri" pitchFamily="34" charset="0"/>
-                <a:ea typeface="Calibri" pitchFamily="34" charset="-122"/>
-                <a:cs typeface="Calibri" pitchFamily="34" charset="-120"/>
+                <a:cs typeface="Amiri" pitchFamily="2" charset="-78"/>
               </a:rPr>
               <a:t>Request action (yataṭallabu an).</a:t>
             </a:r>
@@ -12851,9 +12628,8 @@
                 <a:solidFill>
                   <a:srgbClr val="1B3B6F"/>
                 </a:solidFill>
-                <a:latin typeface="Amiri" pitchFamily="34" charset="0"/>
-                <a:ea typeface="Amiri" pitchFamily="34" charset="-122"/>
-                <a:cs typeface="Amiri" pitchFamily="34" charset="-120"/>
+                <a:latin typeface="Amiri" pitchFamily="2" charset="-78"/>
+                <a:cs typeface="Amiri" pitchFamily="2" charset="-78"/>
               </a:rPr>
               <a:t>اطْلُبْ إِجْرَاءً (يَتَطَلَّبُ أَنْ).</a:t>
             </a:r>
@@ -12917,9 +12693,8 @@
                 <a:solidFill>
                   <a:srgbClr val="1B3B6F"/>
                 </a:solidFill>
-                <a:latin typeface="Amiri" pitchFamily="34" charset="0"/>
-                <a:ea typeface="Amiri" pitchFamily="34" charset="-122"/>
-                <a:cs typeface="Amiri" pitchFamily="34" charset="-120"/>
+                <a:latin typeface="Amiri" pitchFamily="2" charset="-78"/>
+                <a:cs typeface="Amiri" pitchFamily="2" charset="-78"/>
               </a:rPr>
               <a:t>وَبِنَاءً عَلَى مَا سَبَقَ، أُوصِي بِأَنْ نَسْتَثْمِرَ فِي التَّعْلِيمِ.</a:t>
             </a:r>
@@ -12957,8 +12732,7 @@
                   <a:srgbClr val="5A6472"/>
                 </a:solidFill>
                 <a:latin typeface="Calibri" pitchFamily="34" charset="0"/>
-                <a:ea typeface="Calibri" pitchFamily="34" charset="-122"/>
-                <a:cs typeface="Calibri" pitchFamily="34" charset="-120"/>
+                <a:cs typeface="Amiri" pitchFamily="2" charset="-78"/>
               </a:rPr>
               <a:t>Close with a recommendation.</a:t>
             </a:r>
@@ -12995,9 +12769,8 @@
                 <a:solidFill>
                   <a:srgbClr val="1B3B6F"/>
                 </a:solidFill>
-                <a:latin typeface="Amiri" pitchFamily="34" charset="0"/>
-                <a:ea typeface="Amiri" pitchFamily="34" charset="-122"/>
-                <a:cs typeface="Amiri" pitchFamily="34" charset="-120"/>
+                <a:latin typeface="Amiri" pitchFamily="2" charset="-78"/>
+                <a:cs typeface="Amiri" pitchFamily="2" charset="-78"/>
               </a:rPr>
               <a:t>اخْتِمْ بِتَوْصِيَةٍ.</a:t>
             </a:r>
@@ -13035,8 +12808,7 @@
                   <a:srgbClr val="1B3B6F"/>
                 </a:solidFill>
                 <a:latin typeface="Calibri" pitchFamily="34" charset="0"/>
-                <a:ea typeface="Calibri" pitchFamily="34" charset="-122"/>
-                <a:cs typeface="Calibri" pitchFamily="34" charset="-120"/>
+                <a:cs typeface="Amiri" pitchFamily="2" charset="-78"/>
               </a:rPr>
               <a:t>Marks (website): Communication 6 · Accuracy 4.</a:t>
             </a:r>
@@ -13074,8 +12846,7 @@
                   <a:srgbClr val="8A93A0"/>
                 </a:solidFill>
                 <a:latin typeface="Calibri" pitchFamily="34" charset="0"/>
-                <a:ea typeface="Calibri" pitchFamily="34" charset="-122"/>
-                <a:cs typeface="Calibri" pitchFamily="34" charset="-120"/>
+                <a:cs typeface="Amiri" pitchFamily="2" charset="-78"/>
               </a:rPr>
               <a:t>16 / 21</a:t>
             </a:r>
@@ -13169,9 +12940,8 @@
                 <a:solidFill>
                   <a:srgbClr val="D4AF37"/>
                 </a:solidFill>
-                <a:latin typeface="Amiri" pitchFamily="34" charset="0"/>
-                <a:ea typeface="Amiri" pitchFamily="34" charset="-122"/>
-                <a:cs typeface="Amiri" pitchFamily="34" charset="-120"/>
+                <a:latin typeface="Amiri" pitchFamily="2" charset="-78"/>
+                <a:cs typeface="Amiri" pitchFamily="2" charset="-78"/>
               </a:rPr>
               <a:t>م</a:t>
             </a:r>
@@ -13209,8 +12979,7 @@
                   <a:srgbClr val="1B3B6F"/>
                 </a:solidFill>
                 <a:latin typeface="Cambria" pitchFamily="34" charset="0"/>
-                <a:ea typeface="Cambria" pitchFamily="34" charset="-122"/>
-                <a:cs typeface="Cambria" pitchFamily="34" charset="-120"/>
+                <a:cs typeface="Amiri" pitchFamily="2" charset="-78"/>
               </a:rPr>
               <a:t>Al Madina Online School</a:t>
             </a:r>
@@ -13248,8 +13017,7 @@
                   <a:srgbClr val="8A6D1E"/>
                 </a:solidFill>
                 <a:latin typeface="Calibri" pitchFamily="34" charset="0"/>
-                <a:ea typeface="Calibri" pitchFamily="34" charset="-122"/>
-                <a:cs typeface="Calibri" pitchFamily="34" charset="-120"/>
+                <a:cs typeface="Amiri" pitchFamily="2" charset="-78"/>
               </a:rPr>
               <a:t>ARABIC DEPARTMENT · MIFTAH ARABIC · IGCSE 0544</a:t>
             </a:r>
@@ -13314,8 +13082,7 @@
                   <a:srgbClr val="FFFFFF"/>
                 </a:solidFill>
                 <a:latin typeface="Calibri" pitchFamily="34" charset="0"/>
-                <a:ea typeface="Calibri" pitchFamily="34" charset="-122"/>
-                <a:cs typeface="Calibri" pitchFamily="34" charset="-120"/>
+                <a:cs typeface="Amiri" pitchFamily="2" charset="-78"/>
               </a:rPr>
               <a:t>P6-L06 · IGCSE Bridge</a:t>
             </a:r>
@@ -13380,8 +13147,7 @@
                   <a:srgbClr val="FFFFFF"/>
                 </a:solidFill>
                 <a:latin typeface="Calibri" pitchFamily="34" charset="0"/>
-                <a:ea typeface="Calibri" pitchFamily="34" charset="-122"/>
-                <a:cs typeface="Calibri" pitchFamily="34" charset="-120"/>
+                <a:cs typeface="Amiri" pitchFamily="2" charset="-78"/>
               </a:rPr>
               <a:t>YOU DO · 3 MIN</a:t>
             </a:r>
@@ -13419,8 +13185,7 @@
                   <a:srgbClr val="1E6B52"/>
                 </a:solidFill>
                 <a:latin typeface="Calibri" pitchFamily="34" charset="0"/>
-                <a:ea typeface="Calibri" pitchFamily="34" charset="-122"/>
-                <a:cs typeface="Calibri" pitchFamily="34" charset="-120"/>
+                <a:cs typeface="Amiri" pitchFamily="2" charset="-78"/>
               </a:rPr>
               <a:t>YOU DO · COMMUNICATION MARK ANALYSIS (WEBSITE)</a:t>
             </a:r>
@@ -13458,8 +13223,7 @@
                   <a:srgbClr val="1B3B6F"/>
                 </a:solidFill>
                 <a:latin typeface="Cambria" pitchFamily="34" charset="0"/>
-                <a:ea typeface="Cambria" pitchFamily="34" charset="-122"/>
-                <a:cs typeface="Cambria" pitchFamily="34" charset="-120"/>
+                <a:cs typeface="Amiri" pitchFamily="2" charset="-78"/>
               </a:rPr>
               <a:t>Communication mark analysis</a:t>
             </a:r>
@@ -13496,9 +13260,8 @@
                 <a:solidFill>
                   <a:srgbClr val="8A6D1E"/>
                 </a:solidFill>
-                <a:latin typeface="Amiri" pitchFamily="34" charset="0"/>
-                <a:ea typeface="Amiri" pitchFamily="34" charset="-122"/>
-                <a:cs typeface="Amiri" pitchFamily="34" charset="-120"/>
+                <a:latin typeface="Amiri" pitchFamily="2" charset="-78"/>
+                <a:cs typeface="Amiri" pitchFamily="2" charset="-78"/>
               </a:rPr>
               <a:t>تَحْلِيلُ التَّوَاصُلِ</a:t>
             </a:r>
@@ -13536,8 +13299,7 @@
                   <a:srgbClr val="8A93A0"/>
                 </a:solidFill>
                 <a:latin typeface="Calibri" pitchFamily="34" charset="0"/>
-                <a:ea typeface="Calibri" pitchFamily="34" charset="-122"/>
-                <a:cs typeface="Calibri" pitchFamily="34" charset="-120"/>
+                <a:cs typeface="Amiri" pitchFamily="2" charset="-78"/>
               </a:rPr>
               <a:t>Miftah Arabic · Progression P6 · IGCSE Bridge · P6-L06</a:t>
             </a:r>
@@ -13600,8 +13362,7 @@
                   <a:srgbClr val="FFFFFF"/>
                 </a:solidFill>
                 <a:latin typeface="Calibri" pitchFamily="34" charset="0"/>
-                <a:ea typeface="Calibri" pitchFamily="34" charset="-122"/>
-                <a:cs typeface="Calibri" pitchFamily="34" charset="-120"/>
+                <a:cs typeface="Amiri" pitchFamily="2" charset="-78"/>
               </a:rPr>
               <a:t>Yours</a:t>
             </a:r>
@@ -13639,8 +13400,7 @@
                   <a:srgbClr val="FFFFFF"/>
                 </a:solidFill>
                 <a:latin typeface="Calibri" pitchFamily="34" charset="0"/>
-                <a:ea typeface="Calibri" pitchFamily="34" charset="-122"/>
-                <a:cs typeface="Calibri" pitchFamily="34" charset="-120"/>
+                <a:cs typeface="Amiri" pitchFamily="2" charset="-78"/>
               </a:rPr>
               <a:t>Example</a:t>
             </a:r>
@@ -13678,8 +13438,7 @@
                   <a:srgbClr val="FFFFFF"/>
                 </a:solidFill>
                 <a:latin typeface="Calibri" pitchFamily="34" charset="0"/>
-                <a:ea typeface="Calibri" pitchFamily="34" charset="-122"/>
-                <a:cs typeface="Calibri" pitchFamily="34" charset="-120"/>
+                <a:cs typeface="Amiri" pitchFamily="2" charset="-78"/>
               </a:rPr>
               <a:t>Record</a:t>
             </a:r>
@@ -13744,8 +13503,7 @@
                   <a:srgbClr val="5A6472"/>
                 </a:solidFill>
                 <a:latin typeface="Calibri" pitchFamily="34" charset="0"/>
-                <a:ea typeface="Calibri" pitchFamily="34" charset="-122"/>
-                <a:cs typeface="Calibri" pitchFamily="34" charset="-120"/>
+                <a:cs typeface="Amiri" pitchFamily="2" charset="-78"/>
               </a:rPr>
               <a:t>______________</a:t>
             </a:r>
@@ -13783,8 +13541,7 @@
                   <a:srgbClr val="5A6472"/>
                 </a:solidFill>
                 <a:latin typeface="Calibri" pitchFamily="34" charset="0"/>
-                <a:ea typeface="Calibri" pitchFamily="34" charset="-122"/>
-                <a:cs typeface="Calibri" pitchFamily="34" charset="-120"/>
+                <a:cs typeface="Amiri" pitchFamily="2" charset="-78"/>
               </a:rPr>
               <a:t>…/6</a:t>
             </a:r>
@@ -13822,8 +13579,7 @@
                   <a:srgbClr val="5A6472"/>
                 </a:solidFill>
                 <a:latin typeface="Calibri" pitchFamily="34" charset="0"/>
-                <a:ea typeface="Calibri" pitchFamily="34" charset="-122"/>
-                <a:cs typeface="Calibri" pitchFamily="34" charset="-120"/>
+                <a:cs typeface="Amiri" pitchFamily="2" charset="-78"/>
               </a:rPr>
               <a:t>Average Communication across the tasks (out of 6)</a:t>
             </a:r>
@@ -13888,8 +13644,7 @@
                   <a:srgbClr val="5A6472"/>
                 </a:solidFill>
                 <a:latin typeface="Calibri" pitchFamily="34" charset="0"/>
-                <a:ea typeface="Calibri" pitchFamily="34" charset="-122"/>
-                <a:cs typeface="Calibri" pitchFamily="34" charset="-120"/>
+                <a:cs typeface="Amiri" pitchFamily="2" charset="-78"/>
               </a:rPr>
               <a:t>______________</a:t>
             </a:r>
@@ -13927,8 +13682,7 @@
                   <a:srgbClr val="5A6472"/>
                 </a:solidFill>
                 <a:latin typeface="Calibri" pitchFamily="34" charset="0"/>
-                <a:ea typeface="Calibri" pitchFamily="34" charset="-122"/>
-                <a:cs typeface="Calibri" pitchFamily="34" charset="-120"/>
+                <a:cs typeface="Amiri" pitchFamily="2" charset="-78"/>
               </a:rPr>
               <a:t>…/4</a:t>
             </a:r>
@@ -13966,8 +13720,7 @@
                   <a:srgbClr val="5A6472"/>
                 </a:solidFill>
                 <a:latin typeface="Calibri" pitchFamily="34" charset="0"/>
-                <a:ea typeface="Calibri" pitchFamily="34" charset="-122"/>
-                <a:cs typeface="Calibri" pitchFamily="34" charset="-120"/>
+                <a:cs typeface="Amiri" pitchFamily="2" charset="-78"/>
               </a:rPr>
               <a:t>Average Accuracy across the tasks (out of 4)</a:t>
             </a:r>
@@ -14032,8 +13785,7 @@
                   <a:srgbClr val="5A6472"/>
                 </a:solidFill>
                 <a:latin typeface="Calibri" pitchFamily="34" charset="0"/>
-                <a:ea typeface="Calibri" pitchFamily="34" charset="-122"/>
-                <a:cs typeface="Calibri" pitchFamily="34" charset="-120"/>
+                <a:cs typeface="Amiri" pitchFamily="2" charset="-78"/>
               </a:rPr>
               <a:t>______________</a:t>
             </a:r>
@@ -14071,8 +13823,7 @@
                   <a:srgbClr val="5A6472"/>
                 </a:solidFill>
                 <a:latin typeface="Calibri" pitchFamily="34" charset="0"/>
-                <a:ea typeface="Calibri" pitchFamily="34" charset="-122"/>
-                <a:cs typeface="Calibri" pitchFamily="34" charset="-120"/>
+                <a:cs typeface="Amiri" pitchFamily="2" charset="-78"/>
               </a:rPr>
               <a:t>travel (negotiating)</a:t>
             </a:r>
@@ -14110,8 +13861,7 @@
                   <a:srgbClr val="5A6472"/>
                 </a:solidFill>
                 <a:latin typeface="Calibri" pitchFamily="34" charset="0"/>
-                <a:ea typeface="Calibri" pitchFamily="34" charset="-122"/>
-                <a:cs typeface="Calibri" pitchFamily="34" charset="-120"/>
+                <a:cs typeface="Amiri" pitchFamily="2" charset="-78"/>
               </a:rPr>
               <a:t>My lowest-confidence topic area</a:t>
             </a:r>
@@ -14176,8 +13926,7 @@
                   <a:srgbClr val="5A6472"/>
                 </a:solidFill>
                 <a:latin typeface="Calibri" pitchFamily="34" charset="0"/>
-                <a:ea typeface="Calibri" pitchFamily="34" charset="-122"/>
-                <a:cs typeface="Calibri" pitchFamily="34" charset="-120"/>
+                <a:cs typeface="Amiri" pitchFamily="2" charset="-78"/>
               </a:rPr>
               <a:t>______________</a:t>
             </a:r>
@@ -14215,8 +13964,7 @@
                   <a:srgbClr val="5A6472"/>
                 </a:solidFill>
                 <a:latin typeface="Calibri" pitchFamily="34" charset="0"/>
-                <a:ea typeface="Calibri" pitchFamily="34" charset="-122"/>
-                <a:cs typeface="Calibri" pitchFamily="34" charset="-120"/>
+                <a:cs typeface="Amiri" pitchFamily="2" charset="-78"/>
               </a:rPr>
               <a:t>vocabulary → learn 5 travel phrases</a:t>
             </a:r>
@@ -14254,8 +14002,7 @@
                   <a:srgbClr val="5A6472"/>
                 </a:solidFill>
                 <a:latin typeface="Calibri" pitchFamily="34" charset="0"/>
-                <a:ea typeface="Calibri" pitchFamily="34" charset="-122"/>
-                <a:cs typeface="Calibri" pitchFamily="34" charset="-120"/>
+                <a:cs typeface="Amiri" pitchFamily="2" charset="-78"/>
               </a:rPr>
               <a:t>The cause (prompt recognition / vocabulary / hesitation) and my fix</a:t>
             </a:r>
@@ -14293,8 +14040,7 @@
                   <a:srgbClr val="1B3B6F"/>
                 </a:solidFill>
                 <a:latin typeface="Calibri" pitchFamily="34" charset="0"/>
-                <a:ea typeface="Calibri" pitchFamily="34" charset="-122"/>
-                <a:cs typeface="Calibri" pitchFamily="34" charset="-120"/>
+                <a:cs typeface="Amiri" pitchFamily="2" charset="-78"/>
               </a:rPr>
               <a:t>Is the cause recognising the prompt, missing vocabulary, or hesitation? Each has a different fix.</a:t>
             </a:r>
@@ -14332,8 +14078,7 @@
                   <a:srgbClr val="8A93A0"/>
                 </a:solidFill>
                 <a:latin typeface="Calibri" pitchFamily="34" charset="0"/>
-                <a:ea typeface="Calibri" pitchFamily="34" charset="-122"/>
-                <a:cs typeface="Calibri" pitchFamily="34" charset="-120"/>
+                <a:cs typeface="Amiri" pitchFamily="2" charset="-78"/>
               </a:rPr>
               <a:t>17 / 21</a:t>
             </a:r>
@@ -14427,9 +14172,8 @@
                 <a:solidFill>
                   <a:srgbClr val="D4AF37"/>
                 </a:solidFill>
-                <a:latin typeface="Amiri" pitchFamily="34" charset="0"/>
-                <a:ea typeface="Amiri" pitchFamily="34" charset="-122"/>
-                <a:cs typeface="Amiri" pitchFamily="34" charset="-120"/>
+                <a:latin typeface="Amiri" pitchFamily="2" charset="-78"/>
+                <a:cs typeface="Amiri" pitchFamily="2" charset="-78"/>
               </a:rPr>
               <a:t>م</a:t>
             </a:r>
@@ -14467,8 +14211,7 @@
                   <a:srgbClr val="1B3B6F"/>
                 </a:solidFill>
                 <a:latin typeface="Cambria" pitchFamily="34" charset="0"/>
-                <a:ea typeface="Cambria" pitchFamily="34" charset="-122"/>
-                <a:cs typeface="Cambria" pitchFamily="34" charset="-120"/>
+                <a:cs typeface="Amiri" pitchFamily="2" charset="-78"/>
               </a:rPr>
               <a:t>Al Madina Online School</a:t>
             </a:r>
@@ -14506,8 +14249,7 @@
                   <a:srgbClr val="8A6D1E"/>
                 </a:solidFill>
                 <a:latin typeface="Calibri" pitchFamily="34" charset="0"/>
-                <a:ea typeface="Calibri" pitchFamily="34" charset="-122"/>
-                <a:cs typeface="Calibri" pitchFamily="34" charset="-120"/>
+                <a:cs typeface="Amiri" pitchFamily="2" charset="-78"/>
               </a:rPr>
               <a:t>ARABIC DEPARTMENT · MIFTAH ARABIC · IGCSE 0544</a:t>
             </a:r>
@@ -14572,8 +14314,7 @@
                   <a:srgbClr val="FFFFFF"/>
                 </a:solidFill>
                 <a:latin typeface="Calibri" pitchFamily="34" charset="0"/>
-                <a:ea typeface="Calibri" pitchFamily="34" charset="-122"/>
-                <a:cs typeface="Calibri" pitchFamily="34" charset="-120"/>
+                <a:cs typeface="Amiri" pitchFamily="2" charset="-78"/>
               </a:rPr>
               <a:t>P6-L06 · IGCSE Bridge</a:t>
             </a:r>
@@ -14638,8 +14379,7 @@
                   <a:srgbClr val="FFFFFF"/>
                 </a:solidFill>
                 <a:latin typeface="Calibri" pitchFamily="34" charset="0"/>
-                <a:ea typeface="Calibri" pitchFamily="34" charset="-122"/>
-                <a:cs typeface="Calibri" pitchFamily="34" charset="-120"/>
+                <a:cs typeface="Amiri" pitchFamily="2" charset="-78"/>
               </a:rPr>
               <a:t>FEEDBACK · 2 MIN</a:t>
             </a:r>
@@ -14677,8 +14417,7 @@
                   <a:srgbClr val="8A6D1E"/>
                 </a:solidFill>
                 <a:latin typeface="Calibri" pitchFamily="34" charset="0"/>
-                <a:ea typeface="Calibri" pitchFamily="34" charset="-122"/>
-                <a:cs typeface="Calibri" pitchFamily="34" charset="-120"/>
+                <a:cs typeface="Amiri" pitchFamily="2" charset="-78"/>
               </a:rPr>
               <a:t>FEEDBACK · PRECISE, NOT LONG (WEBSITE)</a:t>
             </a:r>
@@ -14716,8 +14455,7 @@
                   <a:srgbClr val="1B3B6F"/>
                 </a:solidFill>
                 <a:latin typeface="Cambria" pitchFamily="34" charset="0"/>
-                <a:ea typeface="Cambria" pitchFamily="34" charset="-122"/>
-                <a:cs typeface="Cambria" pitchFamily="34" charset="-120"/>
+                <a:cs typeface="Amiri" pitchFamily="2" charset="-78"/>
               </a:rPr>
               <a:t>Role-play reflection</a:t>
             </a:r>
@@ -14754,9 +14492,8 @@
                 <a:solidFill>
                   <a:srgbClr val="8A6D1E"/>
                 </a:solidFill>
-                <a:latin typeface="Amiri" pitchFamily="34" charset="0"/>
-                <a:ea typeface="Amiri" pitchFamily="34" charset="-122"/>
-                <a:cs typeface="Amiri" pitchFamily="34" charset="-120"/>
+                <a:latin typeface="Amiri" pitchFamily="2" charset="-78"/>
+                <a:cs typeface="Amiri" pitchFamily="2" charset="-78"/>
               </a:rPr>
               <a:t>التَّأَمُّلُ</a:t>
             </a:r>
@@ -14794,8 +14531,7 @@
                   <a:srgbClr val="8A93A0"/>
                 </a:solidFill>
                 <a:latin typeface="Calibri" pitchFamily="34" charset="0"/>
-                <a:ea typeface="Calibri" pitchFamily="34" charset="-122"/>
-                <a:cs typeface="Calibri" pitchFamily="34" charset="-120"/>
+                <a:cs typeface="Amiri" pitchFamily="2" charset="-78"/>
               </a:rPr>
               <a:t>Miftah Arabic · Progression P6 · IGCSE Bridge · P6-L06</a:t>
             </a:r>
@@ -14858,8 +14594,7 @@
                   <a:srgbClr val="FFFFFF"/>
                 </a:solidFill>
                 <a:latin typeface="Calibri" pitchFamily="34" charset="0"/>
-                <a:ea typeface="Calibri" pitchFamily="34" charset="-122"/>
-                <a:cs typeface="Calibri" pitchFamily="34" charset="-120"/>
+                <a:cs typeface="Amiri" pitchFamily="2" charset="-78"/>
               </a:rPr>
               <a:t>Model ending</a:t>
             </a:r>
@@ -14897,8 +14632,7 @@
                   <a:srgbClr val="FFFFFF"/>
                 </a:solidFill>
                 <a:latin typeface="Calibri" pitchFamily="34" charset="0"/>
-                <a:ea typeface="Calibri" pitchFamily="34" charset="-122"/>
-                <a:cs typeface="Calibri" pitchFamily="34" charset="-120"/>
+                <a:cs typeface="Amiri" pitchFamily="2" charset="-78"/>
               </a:rPr>
               <a:t>Meaning</a:t>
             </a:r>
@@ -14936,8 +14670,7 @@
                   <a:srgbClr val="FFFFFF"/>
                 </a:solidFill>
                 <a:latin typeface="Calibri" pitchFamily="34" charset="0"/>
-                <a:ea typeface="Calibri" pitchFamily="34" charset="-122"/>
-                <a:cs typeface="Calibri" pitchFamily="34" charset="-120"/>
+                <a:cs typeface="Amiri" pitchFamily="2" charset="-78"/>
               </a:rPr>
               <a:t>Reflection frame (website)</a:t>
             </a:r>
@@ -15001,9 +14734,8 @@
                 <a:solidFill>
                   <a:srgbClr val="1B3B6F"/>
                 </a:solidFill>
-                <a:latin typeface="Amiri" pitchFamily="34" charset="0"/>
-                <a:ea typeface="Amiri" pitchFamily="34" charset="-122"/>
-                <a:cs typeface="Amiri" pitchFamily="34" charset="-120"/>
+                <a:latin typeface="Amiri" pitchFamily="2" charset="-78"/>
+                <a:cs typeface="Amiri" pitchFamily="2" charset="-78"/>
               </a:rPr>
               <a:t>هَلْ يُمْكِنُ أَنْ …؟</a:t>
             </a:r>
@@ -15041,8 +14773,7 @@
                   <a:srgbClr val="5A6472"/>
                 </a:solidFill>
                 <a:latin typeface="Calibri" pitchFamily="34" charset="0"/>
-                <a:ea typeface="Calibri" pitchFamily="34" charset="-122"/>
-                <a:cs typeface="Calibri" pitchFamily="34" charset="-120"/>
+                <a:cs typeface="Amiri" pitchFamily="2" charset="-78"/>
               </a:rPr>
               <a:t>the phrase I use confidently</a:t>
             </a:r>
@@ -15080,8 +14811,7 @@
                   <a:srgbClr val="5A6472"/>
                 </a:solidFill>
                 <a:latin typeface="Calibri" pitchFamily="34" charset="0"/>
-                <a:ea typeface="Calibri" pitchFamily="34" charset="-122"/>
-                <a:cs typeface="Calibri" pitchFamily="34" charset="-120"/>
+                <a:cs typeface="Amiri" pitchFamily="2" charset="-78"/>
               </a:rPr>
               <a:t>The transactional phrase I now use confidently is…</a:t>
             </a:r>
@@ -15146,8 +14876,7 @@
                   <a:srgbClr val="5A6472"/>
                 </a:solidFill>
                 <a:latin typeface="Calibri" pitchFamily="34" charset="0"/>
-                <a:ea typeface="Calibri" pitchFamily="34" charset="-122"/>
-                <a:cs typeface="Calibri" pitchFamily="34" charset="-120"/>
+                <a:cs typeface="Amiri" pitchFamily="2" charset="-78"/>
               </a:rPr>
               <a:t>travel — negotiating the price</a:t>
             </a:r>
@@ -15185,8 +14914,7 @@
                   <a:srgbClr val="5A6472"/>
                 </a:solidFill>
                 <a:latin typeface="Calibri" pitchFamily="34" charset="0"/>
-                <a:ea typeface="Calibri" pitchFamily="34" charset="-122"/>
-                <a:cs typeface="Calibri" pitchFamily="34" charset="-120"/>
+                <a:cs typeface="Amiri" pitchFamily="2" charset="-78"/>
               </a:rPr>
               <a:t>the topic I will practise most</a:t>
             </a:r>
@@ -15224,8 +14952,7 @@
                   <a:srgbClr val="5A6472"/>
                 </a:solidFill>
                 <a:latin typeface="Calibri" pitchFamily="34" charset="0"/>
-                <a:ea typeface="Calibri" pitchFamily="34" charset="-122"/>
-                <a:cs typeface="Calibri" pitchFamily="34" charset="-120"/>
+                <a:cs typeface="Amiri" pitchFamily="2" charset="-78"/>
               </a:rPr>
               <a:t>The topic I will practise most is…</a:t>
             </a:r>
@@ -15289,9 +15016,8 @@
                 <a:solidFill>
                   <a:srgbClr val="1B3B6F"/>
                 </a:solidFill>
-                <a:latin typeface="Amiri" pitchFamily="34" charset="0"/>
-                <a:ea typeface="Amiri" pitchFamily="34" charset="-122"/>
-                <a:cs typeface="Amiri" pitchFamily="34" charset="-120"/>
+                <a:latin typeface="Amiri" pitchFamily="2" charset="-78"/>
+                <a:cs typeface="Amiri" pitchFamily="2" charset="-78"/>
               </a:rPr>
               <a:t>أَطْلُبَ مَعْلُومَاتٍ</a:t>
             </a:r>
@@ -15329,8 +15055,7 @@
                   <a:srgbClr val="5A6472"/>
                 </a:solidFill>
                 <a:latin typeface="Calibri" pitchFamily="34" charset="0"/>
-                <a:ea typeface="Calibri" pitchFamily="34" charset="-122"/>
-                <a:cs typeface="Calibri" pitchFamily="34" charset="-120"/>
+                <a:cs typeface="Amiri" pitchFamily="2" charset="-78"/>
               </a:rPr>
               <a:t>Now I can … confidently.</a:t>
             </a:r>
@@ -15367,9 +15092,8 @@
                 <a:solidFill>
                   <a:srgbClr val="1B3B6F"/>
                 </a:solidFill>
-                <a:latin typeface="Amiri" pitchFamily="34" charset="0"/>
-                <a:ea typeface="Amiri" pitchFamily="34" charset="-122"/>
-                <a:cs typeface="Amiri" pitchFamily="34" charset="-120"/>
+                <a:latin typeface="Amiri" pitchFamily="2" charset="-78"/>
+                <a:cs typeface="Amiri" pitchFamily="2" charset="-78"/>
               </a:rPr>
               <a:t>أَسْتَطِيعُ الآنَ أَنْ ______ بِثِقَةٍ.</a:t>
             </a:r>
@@ -15407,8 +15131,7 @@
                   <a:srgbClr val="1B3B6F"/>
                 </a:solidFill>
                 <a:latin typeface="Calibri" pitchFamily="34" charset="0"/>
-                <a:ea typeface="Calibri" pitchFamily="34" charset="-122"/>
-                <a:cs typeface="Calibri" pitchFamily="34" charset="-120"/>
+                <a:cs typeface="Amiri" pitchFamily="2" charset="-78"/>
               </a:rPr>
               <a:t>Precise, not long: answer exactly what each prompt asks.</a:t>
             </a:r>
@@ -15446,8 +15169,7 @@
                   <a:srgbClr val="8A93A0"/>
                 </a:solidFill>
                 <a:latin typeface="Calibri" pitchFamily="34" charset="0"/>
-                <a:ea typeface="Calibri" pitchFamily="34" charset="-122"/>
-                <a:cs typeface="Calibri" pitchFamily="34" charset="-120"/>
+                <a:cs typeface="Amiri" pitchFamily="2" charset="-78"/>
               </a:rPr>
               <a:t>18 / 21</a:t>
             </a:r>
@@ -15541,9 +15263,8 @@
                 <a:solidFill>
                   <a:srgbClr val="D4AF37"/>
                 </a:solidFill>
-                <a:latin typeface="Amiri" pitchFamily="34" charset="0"/>
-                <a:ea typeface="Amiri" pitchFamily="34" charset="-122"/>
-                <a:cs typeface="Amiri" pitchFamily="34" charset="-120"/>
+                <a:latin typeface="Amiri" pitchFamily="2" charset="-78"/>
+                <a:cs typeface="Amiri" pitchFamily="2" charset="-78"/>
               </a:rPr>
               <a:t>م</a:t>
             </a:r>
@@ -15581,8 +15302,7 @@
                   <a:srgbClr val="1B3B6F"/>
                 </a:solidFill>
                 <a:latin typeface="Cambria" pitchFamily="34" charset="0"/>
-                <a:ea typeface="Cambria" pitchFamily="34" charset="-122"/>
-                <a:cs typeface="Cambria" pitchFamily="34" charset="-120"/>
+                <a:cs typeface="Amiri" pitchFamily="2" charset="-78"/>
               </a:rPr>
               <a:t>Al Madina Online School</a:t>
             </a:r>
@@ -15620,8 +15340,7 @@
                   <a:srgbClr val="8A6D1E"/>
                 </a:solidFill>
                 <a:latin typeface="Calibri" pitchFamily="34" charset="0"/>
-                <a:ea typeface="Calibri" pitchFamily="34" charset="-122"/>
-                <a:cs typeface="Calibri" pitchFamily="34" charset="-120"/>
+                <a:cs typeface="Amiri" pitchFamily="2" charset="-78"/>
               </a:rPr>
               <a:t>ARABIC DEPARTMENT · MIFTAH ARABIC · IGCSE 0544</a:t>
             </a:r>
@@ -15686,8 +15405,7 @@
                   <a:srgbClr val="FFFFFF"/>
                 </a:solidFill>
                 <a:latin typeface="Calibri" pitchFamily="34" charset="0"/>
-                <a:ea typeface="Calibri" pitchFamily="34" charset="-122"/>
-                <a:cs typeface="Calibri" pitchFamily="34" charset="-120"/>
+                <a:cs typeface="Amiri" pitchFamily="2" charset="-78"/>
               </a:rPr>
               <a:t>P6-L06 · IGCSE Bridge</a:t>
             </a:r>
@@ -15752,8 +15470,7 @@
                   <a:srgbClr val="FFFFFF"/>
                 </a:solidFill>
                 <a:latin typeface="Calibri" pitchFamily="34" charset="0"/>
-                <a:ea typeface="Calibri" pitchFamily="34" charset="-122"/>
-                <a:cs typeface="Calibri" pitchFamily="34" charset="-120"/>
+                <a:cs typeface="Amiri" pitchFamily="2" charset="-78"/>
               </a:rPr>
               <a:t>FEEDBACK · 1 MIN</a:t>
             </a:r>
@@ -15791,8 +15508,7 @@
                   <a:srgbClr val="8A6D1E"/>
                 </a:solidFill>
                 <a:latin typeface="Calibri" pitchFamily="34" charset="0"/>
-                <a:ea typeface="Calibri" pitchFamily="34" charset="-122"/>
-                <a:cs typeface="Calibri" pitchFamily="34" charset="-120"/>
+                <a:cs typeface="Amiri" pitchFamily="2" charset="-78"/>
               </a:rPr>
               <a:t>FEEDBACK · SUCCESS CRITERIA</a:t>
             </a:r>
@@ -15830,8 +15546,7 @@
                   <a:srgbClr val="1B3B6F"/>
                 </a:solidFill>
                 <a:latin typeface="Cambria" pitchFamily="34" charset="0"/>
-                <a:ea typeface="Cambria" pitchFamily="34" charset="-122"/>
-                <a:cs typeface="Cambria" pitchFamily="34" charset="-120"/>
+                <a:cs typeface="Amiri" pitchFamily="2" charset="-78"/>
               </a:rPr>
               <a:t>Check your work</a:t>
             </a:r>
@@ -15868,9 +15583,8 @@
                 <a:solidFill>
                   <a:srgbClr val="8A6D1E"/>
                 </a:solidFill>
-                <a:latin typeface="Amiri" pitchFamily="34" charset="0"/>
-                <a:ea typeface="Amiri" pitchFamily="34" charset="-122"/>
-                <a:cs typeface="Amiri" pitchFamily="34" charset="-120"/>
+                <a:latin typeface="Amiri" pitchFamily="2" charset="-78"/>
+                <a:cs typeface="Amiri" pitchFamily="2" charset="-78"/>
               </a:rPr>
               <a:t>قَيِّمْ عَمَلَكَ</a:t>
             </a:r>
@@ -15908,8 +15622,7 @@
                   <a:srgbClr val="8A93A0"/>
                 </a:solidFill>
                 <a:latin typeface="Calibri" pitchFamily="34" charset="0"/>
-                <a:ea typeface="Calibri" pitchFamily="34" charset="-122"/>
-                <a:cs typeface="Calibri" pitchFamily="34" charset="-120"/>
+                <a:cs typeface="Amiri" pitchFamily="2" charset="-78"/>
               </a:rPr>
               <a:t>Miftah Arabic · Progression P6 · IGCSE Bridge · P6-L06</a:t>
             </a:r>
@@ -16006,8 +15719,7 @@
                   <a:srgbClr val="1F2A37"/>
                 </a:solidFill>
                 <a:latin typeface="Calibri" pitchFamily="34" charset="0"/>
-                <a:ea typeface="Calibri" pitchFamily="34" charset="-122"/>
-                <a:cs typeface="Calibri" pitchFamily="34" charset="-120"/>
+                <a:cs typeface="Amiri" pitchFamily="2" charset="-78"/>
               </a:rPr>
               <a:t>I answered the exact question each prompt asks.</a:t>
             </a:r>
@@ -16072,8 +15784,7 @@
                   <a:srgbClr val="FFFFFF"/>
                 </a:solidFill>
                 <a:latin typeface="Calibri" pitchFamily="34" charset="0"/>
-                <a:ea typeface="Calibri" pitchFamily="34" charset="-122"/>
-                <a:cs typeface="Calibri" pitchFamily="34" charset="-120"/>
+                <a:cs typeface="Amiri" pitchFamily="2" charset="-78"/>
               </a:rPr>
               <a:t>CORE</a:t>
             </a:r>
@@ -16170,8 +15881,7 @@
                   <a:srgbClr val="1F2A37"/>
                 </a:solidFill>
                 <a:latin typeface="Calibri" pitchFamily="34" charset="0"/>
-                <a:ea typeface="Calibri" pitchFamily="34" charset="-122"/>
-                <a:cs typeface="Calibri" pitchFamily="34" charset="-120"/>
+                <a:cs typeface="Amiri" pitchFamily="2" charset="-78"/>
               </a:rPr>
               <a:t>I used a full sentence, not one word, for each prompt.</a:t>
             </a:r>
@@ -16236,8 +15946,7 @@
                   <a:srgbClr val="FFFFFF"/>
                 </a:solidFill>
                 <a:latin typeface="Calibri" pitchFamily="34" charset="0"/>
-                <a:ea typeface="Calibri" pitchFamily="34" charset="-122"/>
-                <a:cs typeface="Calibri" pitchFamily="34" charset="-120"/>
+                <a:cs typeface="Amiri" pitchFamily="2" charset="-78"/>
               </a:rPr>
               <a:t>CORE</a:t>
             </a:r>
@@ -16334,8 +16043,7 @@
                   <a:srgbClr val="1F2A37"/>
                 </a:solidFill>
                 <a:latin typeface="Calibri" pitchFamily="34" charset="0"/>
-                <a:ea typeface="Calibri" pitchFamily="34" charset="-122"/>
-                <a:cs typeface="Calibri" pitchFamily="34" charset="-120"/>
+                <a:cs typeface="Amiri" pitchFamily="2" charset="-78"/>
               </a:rPr>
               <a:t>I used the correct tense and structure for the situation.</a:t>
             </a:r>
@@ -16400,8 +16108,7 @@
                   <a:srgbClr val="FFFFFF"/>
                 </a:solidFill>
                 <a:latin typeface="Calibri" pitchFamily="34" charset="0"/>
-                <a:ea typeface="Calibri" pitchFamily="34" charset="-122"/>
-                <a:cs typeface="Calibri" pitchFamily="34" charset="-120"/>
+                <a:cs typeface="Amiri" pitchFamily="2" charset="-78"/>
               </a:rPr>
               <a:t>DEVELOP</a:t>
             </a:r>
@@ -16498,8 +16205,7 @@
                   <a:srgbClr val="1F2A37"/>
                 </a:solidFill>
                 <a:latin typeface="Calibri" pitchFamily="34" charset="0"/>
-                <a:ea typeface="Calibri" pitchFamily="34" charset="-122"/>
-                <a:cs typeface="Calibri" pitchFamily="34" charset="-120"/>
+                <a:cs typeface="Amiri" pitchFamily="2" charset="-78"/>
               </a:rPr>
               <a:t>I used a repair phrase instead of staying silent.</a:t>
             </a:r>
@@ -16564,8 +16270,7 @@
                   <a:srgbClr val="FFFFFF"/>
                 </a:solidFill>
                 <a:latin typeface="Calibri" pitchFamily="34" charset="0"/>
-                <a:ea typeface="Calibri" pitchFamily="34" charset="-122"/>
-                <a:cs typeface="Calibri" pitchFamily="34" charset="-120"/>
+                <a:cs typeface="Amiri" pitchFamily="2" charset="-78"/>
               </a:rPr>
               <a:t>DEVELOP</a:t>
             </a:r>
@@ -16662,8 +16367,7 @@
                   <a:srgbClr val="1F2A37"/>
                 </a:solidFill>
                 <a:latin typeface="Calibri" pitchFamily="34" charset="0"/>
-                <a:ea typeface="Calibri" pitchFamily="34" charset="-122"/>
-                <a:cs typeface="Calibri" pitchFamily="34" charset="-120"/>
+                <a:cs typeface="Amiri" pitchFamily="2" charset="-78"/>
               </a:rPr>
               <a:t>I scored my own role play on Communication and Accuracy.</a:t>
             </a:r>
@@ -16728,8 +16432,7 @@
                   <a:srgbClr val="FFFFFF"/>
                 </a:solidFill>
                 <a:latin typeface="Calibri" pitchFamily="34" charset="0"/>
-                <a:ea typeface="Calibri" pitchFamily="34" charset="-122"/>
-                <a:cs typeface="Calibri" pitchFamily="34" charset="-120"/>
+                <a:cs typeface="Amiri" pitchFamily="2" charset="-78"/>
               </a:rPr>
               <a:t>STRETCH</a:t>
             </a:r>
@@ -16801,8 +16504,7 @@
                   <a:srgbClr val="2E8B57"/>
                 </a:solidFill>
                 <a:latin typeface="Calibri" pitchFamily="34" charset="0"/>
-                <a:ea typeface="Calibri" pitchFamily="34" charset="-122"/>
-                <a:cs typeface="Calibri" pitchFamily="34" charset="-120"/>
+                <a:cs typeface="Amiri" pitchFamily="2" charset="-78"/>
               </a:rPr>
               <a:t>WWW</a:t>
             </a:r>
@@ -16818,8 +16520,7 @@
                   <a:srgbClr val="1F2A37"/>
                 </a:solidFill>
                 <a:latin typeface="Calibri" pitchFamily="34" charset="0"/>
-                <a:ea typeface="Calibri" pitchFamily="34" charset="-122"/>
-                <a:cs typeface="Calibri" pitchFamily="34" charset="-120"/>
+                <a:cs typeface="Amiri" pitchFamily="2" charset="-78"/>
               </a:rPr>
               <a:t>What went well? One thing you did accurately.</a:t>
             </a:r>
@@ -16891,8 +16592,7 @@
                   <a:srgbClr val="C9780A"/>
                 </a:solidFill>
                 <a:latin typeface="Calibri" pitchFamily="34" charset="0"/>
-                <a:ea typeface="Calibri" pitchFamily="34" charset="-122"/>
-                <a:cs typeface="Calibri" pitchFamily="34" charset="-120"/>
+                <a:cs typeface="Amiri" pitchFamily="2" charset="-78"/>
               </a:rPr>
               <a:t>EBI</a:t>
             </a:r>
@@ -16908,8 +16608,7 @@
                   <a:srgbClr val="1F2A37"/>
                 </a:solidFill>
                 <a:latin typeface="Calibri" pitchFamily="34" charset="0"/>
-                <a:ea typeface="Calibri" pitchFamily="34" charset="-122"/>
-                <a:cs typeface="Calibri" pitchFamily="34" charset="-120"/>
+                <a:cs typeface="Amiri" pitchFamily="2" charset="-78"/>
               </a:rPr>
               <a:t>Even better if… One thing you will fix or add.</a:t>
             </a:r>
@@ -16947,8 +16646,7 @@
                   <a:srgbClr val="8A93A0"/>
                 </a:solidFill>
                 <a:latin typeface="Calibri" pitchFamily="34" charset="0"/>
-                <a:ea typeface="Calibri" pitchFamily="34" charset="-122"/>
-                <a:cs typeface="Calibri" pitchFamily="34" charset="-120"/>
+                <a:cs typeface="Amiri" pitchFamily="2" charset="-78"/>
               </a:rPr>
               <a:t>19 / 21</a:t>
             </a:r>
@@ -17042,9 +16740,8 @@
                 <a:solidFill>
                   <a:srgbClr val="D4AF37"/>
                 </a:solidFill>
-                <a:latin typeface="Amiri" pitchFamily="34" charset="0"/>
-                <a:ea typeface="Amiri" pitchFamily="34" charset="-122"/>
-                <a:cs typeface="Amiri" pitchFamily="34" charset="-120"/>
+                <a:latin typeface="Amiri" pitchFamily="2" charset="-78"/>
+                <a:cs typeface="Amiri" pitchFamily="2" charset="-78"/>
               </a:rPr>
               <a:t>م</a:t>
             </a:r>
@@ -17082,8 +16779,7 @@
                   <a:srgbClr val="1B3B6F"/>
                 </a:solidFill>
                 <a:latin typeface="Cambria" pitchFamily="34" charset="0"/>
-                <a:ea typeface="Cambria" pitchFamily="34" charset="-122"/>
-                <a:cs typeface="Cambria" pitchFamily="34" charset="-120"/>
+                <a:cs typeface="Amiri" pitchFamily="2" charset="-78"/>
               </a:rPr>
               <a:t>Al Madina Online School</a:t>
             </a:r>
@@ -17121,8 +16817,7 @@
                   <a:srgbClr val="8A6D1E"/>
                 </a:solidFill>
                 <a:latin typeface="Calibri" pitchFamily="34" charset="0"/>
-                <a:ea typeface="Calibri" pitchFamily="34" charset="-122"/>
-                <a:cs typeface="Calibri" pitchFamily="34" charset="-120"/>
+                <a:cs typeface="Amiri" pitchFamily="2" charset="-78"/>
               </a:rPr>
               <a:t>ARABIC DEPARTMENT · MIFTAH ARABIC · IGCSE 0544</a:t>
             </a:r>
@@ -17187,8 +16882,7 @@
                   <a:srgbClr val="FFFFFF"/>
                 </a:solidFill>
                 <a:latin typeface="Calibri" pitchFamily="34" charset="0"/>
-                <a:ea typeface="Calibri" pitchFamily="34" charset="-122"/>
-                <a:cs typeface="Calibri" pitchFamily="34" charset="-120"/>
+                <a:cs typeface="Amiri" pitchFamily="2" charset="-78"/>
               </a:rPr>
               <a:t>P6-L06 · IGCSE Bridge</a:t>
             </a:r>
@@ -17253,8 +16947,7 @@
                   <a:srgbClr val="FFFFFF"/>
                 </a:solidFill>
                 <a:latin typeface="Calibri" pitchFamily="34" charset="0"/>
-                <a:ea typeface="Calibri" pitchFamily="34" charset="-122"/>
-                <a:cs typeface="Calibri" pitchFamily="34" charset="-120"/>
+                <a:cs typeface="Amiri" pitchFamily="2" charset="-78"/>
               </a:rPr>
               <a:t>WELCOME · 1 MIN</a:t>
             </a:r>
@@ -17292,8 +16985,7 @@
                   <a:srgbClr val="5A6472"/>
                 </a:solidFill>
                 <a:latin typeface="Calibri" pitchFamily="34" charset="0"/>
-                <a:ea typeface="Calibri" pitchFamily="34" charset="-122"/>
-                <a:cs typeface="Calibri" pitchFamily="34" charset="-120"/>
+                <a:cs typeface="Amiri" pitchFamily="2" charset="-78"/>
               </a:rPr>
               <a:t>BEFORE WE BEGIN</a:t>
             </a:r>
@@ -17331,8 +17023,7 @@
                   <a:srgbClr val="1B3B6F"/>
                 </a:solidFill>
                 <a:latin typeface="Cambria" pitchFamily="34" charset="0"/>
-                <a:ea typeface="Cambria" pitchFamily="34" charset="-122"/>
-                <a:cs typeface="Cambria" pitchFamily="34" charset="-120"/>
+                <a:cs typeface="Amiri" pitchFamily="2" charset="-78"/>
               </a:rPr>
               <a:t>Our online classroom</a:t>
             </a:r>
@@ -17369,9 +17060,8 @@
                 <a:solidFill>
                   <a:srgbClr val="8A6D1E"/>
                 </a:solidFill>
-                <a:latin typeface="Amiri" pitchFamily="34" charset="0"/>
-                <a:ea typeface="Amiri" pitchFamily="34" charset="-122"/>
-                <a:cs typeface="Amiri" pitchFamily="34" charset="-120"/>
+                <a:latin typeface="Amiri" pitchFamily="2" charset="-78"/>
+                <a:cs typeface="Amiri" pitchFamily="2" charset="-78"/>
               </a:rPr>
               <a:t>آدَابُ الصَّفِّ</a:t>
             </a:r>
@@ -17409,8 +17099,7 @@
                   <a:srgbClr val="8A93A0"/>
                 </a:solidFill>
                 <a:latin typeface="Calibri" pitchFamily="34" charset="0"/>
-                <a:ea typeface="Calibri" pitchFamily="34" charset="-122"/>
-                <a:cs typeface="Calibri" pitchFamily="34" charset="-120"/>
+                <a:cs typeface="Amiri" pitchFamily="2" charset="-78"/>
               </a:rPr>
               <a:t>Miftah Arabic · Progression P6 · IGCSE Bridge · P6-L06</a:t>
             </a:r>
@@ -17531,8 +17220,7 @@
                   <a:srgbClr val="1B3B6F"/>
                 </a:solidFill>
                 <a:latin typeface="Calibri" pitchFamily="34" charset="0"/>
-                <a:ea typeface="Calibri" pitchFamily="34" charset="-122"/>
-                <a:cs typeface="Calibri" pitchFamily="34" charset="-120"/>
+                <a:cs typeface="Amiri" pitchFamily="2" charset="-78"/>
               </a:rPr>
               <a:t>Camera on</a:t>
             </a:r>
@@ -17548,8 +17236,7 @@
                   <a:srgbClr val="5A6472"/>
                 </a:solidFill>
                 <a:latin typeface="Calibri" pitchFamily="34" charset="0"/>
-                <a:ea typeface="Calibri" pitchFamily="34" charset="-122"/>
-                <a:cs typeface="Calibri" pitchFamily="34" charset="-120"/>
+                <a:cs typeface="Amiri" pitchFamily="2" charset="-78"/>
               </a:rPr>
               <a:t>So I can see you learning and help you quickly.</a:t>
             </a:r>
@@ -17670,8 +17357,7 @@
                   <a:srgbClr val="1B3B6F"/>
                 </a:solidFill>
                 <a:latin typeface="Calibri" pitchFamily="34" charset="0"/>
-                <a:ea typeface="Calibri" pitchFamily="34" charset="-122"/>
-                <a:cs typeface="Calibri" pitchFamily="34" charset="-120"/>
+                <a:cs typeface="Amiri" pitchFamily="2" charset="-78"/>
               </a:rPr>
               <a:t>Mic muted</a:t>
             </a:r>
@@ -17687,8 +17373,7 @@
                   <a:srgbClr val="5A6472"/>
                 </a:solidFill>
                 <a:latin typeface="Calibri" pitchFamily="34" charset="0"/>
-                <a:ea typeface="Calibri" pitchFamily="34" charset="-122"/>
-                <a:cs typeface="Calibri" pitchFamily="34" charset="-120"/>
+                <a:cs typeface="Amiri" pitchFamily="2" charset="-78"/>
               </a:rPr>
               <a:t>Unmute only when invited to speak.</a:t>
             </a:r>
@@ -17809,8 +17494,7 @@
                   <a:srgbClr val="1B3B6F"/>
                 </a:solidFill>
                 <a:latin typeface="Calibri" pitchFamily="34" charset="0"/>
-                <a:ea typeface="Calibri" pitchFamily="34" charset="-122"/>
-                <a:cs typeface="Calibri" pitchFamily="34" charset="-120"/>
+                <a:cs typeface="Amiri" pitchFamily="2" charset="-78"/>
               </a:rPr>
               <a:t>Chat for learning</a:t>
             </a:r>
@@ -17826,8 +17510,7 @@
                   <a:srgbClr val="5A6472"/>
                 </a:solidFill>
                 <a:latin typeface="Calibri" pitchFamily="34" charset="0"/>
-                <a:ea typeface="Calibri" pitchFamily="34" charset="-122"/>
-                <a:cs typeface="Calibri" pitchFamily="34" charset="-120"/>
+                <a:cs typeface="Amiri" pitchFamily="2" charset="-78"/>
               </a:rPr>
               <a:t>Answers, questions and Arabic only.</a:t>
             </a:r>
@@ -17948,8 +17631,7 @@
                   <a:srgbClr val="1B3B6F"/>
                 </a:solidFill>
                 <a:latin typeface="Calibri" pitchFamily="34" charset="0"/>
-                <a:ea typeface="Calibri" pitchFamily="34" charset="-122"/>
-                <a:cs typeface="Calibri" pitchFamily="34" charset="-120"/>
+                <a:cs typeface="Amiri" pitchFamily="2" charset="-78"/>
               </a:rPr>
               <a:t>Raise your hand</a:t>
             </a:r>
@@ -17965,8 +17647,7 @@
                   <a:srgbClr val="5A6472"/>
                 </a:solidFill>
                 <a:latin typeface="Calibri" pitchFamily="34" charset="0"/>
-                <a:ea typeface="Calibri" pitchFamily="34" charset="-122"/>
-                <a:cs typeface="Calibri" pitchFamily="34" charset="-120"/>
+                <a:cs typeface="Amiri" pitchFamily="2" charset="-78"/>
               </a:rPr>
               <a:t>Use the hand button to ask for help.</a:t>
             </a:r>
@@ -18038,8 +17719,7 @@
                   <a:srgbClr val="1B3B6F"/>
                 </a:solidFill>
                 <a:latin typeface="Calibri" pitchFamily="34" charset="0"/>
-                <a:ea typeface="Calibri" pitchFamily="34" charset="-122"/>
-                <a:cs typeface="Calibri" pitchFamily="34" charset="-120"/>
+                <a:cs typeface="Amiri" pitchFamily="2" charset="-78"/>
               </a:rPr>
               <a:t>HOW WE TALK — THE ORACY CODE</a:t>
             </a:r>
@@ -18102,8 +17782,7 @@
                   <a:srgbClr val="D4AF37"/>
                 </a:solidFill>
                 <a:latin typeface="Arial" pitchFamily="34" charset="0"/>
-                <a:ea typeface="Arial" pitchFamily="34" charset="-122"/>
-                <a:cs typeface="Arial" pitchFamily="34" charset="-120"/>
+                <a:cs typeface="Amiri" pitchFamily="2" charset="-78"/>
               </a:rPr>
               <a:t>●</a:t>
             </a:r>
@@ -18141,8 +17820,7 @@
                   <a:srgbClr val="1B3B6F"/>
                 </a:solidFill>
                 <a:latin typeface="Calibri" pitchFamily="34" charset="0"/>
-                <a:ea typeface="Calibri" pitchFamily="34" charset="-122"/>
-                <a:cs typeface="Calibri" pitchFamily="34" charset="-120"/>
+                <a:cs typeface="Amiri" pitchFamily="2" charset="-78"/>
               </a:rPr>
               <a:t>Think</a:t>
             </a:r>
@@ -18158,8 +17836,7 @@
                   <a:srgbClr val="5A6472"/>
                 </a:solidFill>
                 <a:latin typeface="Calibri" pitchFamily="34" charset="0"/>
-                <a:ea typeface="Calibri" pitchFamily="34" charset="-122"/>
-                <a:cs typeface="Calibri" pitchFamily="34" charset="-120"/>
+                <a:cs typeface="Amiri" pitchFamily="2" charset="-78"/>
               </a:rPr>
               <a:t>silent preparation</a:t>
             </a:r>
@@ -18222,8 +17899,7 @@
                   <a:srgbClr val="D4AF37"/>
                 </a:solidFill>
                 <a:latin typeface="Arial" pitchFamily="34" charset="0"/>
-                <a:ea typeface="Arial" pitchFamily="34" charset="-122"/>
-                <a:cs typeface="Arial" pitchFamily="34" charset="-120"/>
+                <a:cs typeface="Amiri" pitchFamily="2" charset="-78"/>
               </a:rPr>
               <a:t>↔</a:t>
             </a:r>
@@ -18261,8 +17937,7 @@
                   <a:srgbClr val="1B3B6F"/>
                 </a:solidFill>
                 <a:latin typeface="Calibri" pitchFamily="34" charset="0"/>
-                <a:ea typeface="Calibri" pitchFamily="34" charset="-122"/>
-                <a:cs typeface="Calibri" pitchFamily="34" charset="-120"/>
+                <a:cs typeface="Amiri" pitchFamily="2" charset="-78"/>
               </a:rPr>
               <a:t>Rehearse</a:t>
             </a:r>
@@ -18278,8 +17953,7 @@
                   <a:srgbClr val="5A6472"/>
                 </a:solidFill>
                 <a:latin typeface="Calibri" pitchFamily="34" charset="0"/>
-                <a:ea typeface="Calibri" pitchFamily="34" charset="-122"/>
-                <a:cs typeface="Calibri" pitchFamily="34" charset="-120"/>
+                <a:cs typeface="Amiri" pitchFamily="2" charset="-78"/>
               </a:rPr>
               <a:t>both partners speak</a:t>
             </a:r>
@@ -18342,8 +18016,7 @@
                   <a:srgbClr val="D4AF37"/>
                 </a:solidFill>
                 <a:latin typeface="Arial" pitchFamily="34" charset="0"/>
-                <a:ea typeface="Arial" pitchFamily="34" charset="-122"/>
-                <a:cs typeface="Arial" pitchFamily="34" charset="-120"/>
+                <a:cs typeface="Amiri" pitchFamily="2" charset="-78"/>
               </a:rPr>
               <a:t>+</a:t>
             </a:r>
@@ -18381,8 +18054,7 @@
                   <a:srgbClr val="1B3B6F"/>
                 </a:solidFill>
                 <a:latin typeface="Calibri" pitchFamily="34" charset="0"/>
-                <a:ea typeface="Calibri" pitchFamily="34" charset="-122"/>
-                <a:cs typeface="Calibri" pitchFamily="34" charset="-120"/>
+                <a:cs typeface="Amiri" pitchFamily="2" charset="-78"/>
               </a:rPr>
               <a:t>Build</a:t>
             </a:r>
@@ -18398,8 +18070,7 @@
                   <a:srgbClr val="5A6472"/>
                 </a:solidFill>
                 <a:latin typeface="Calibri" pitchFamily="34" charset="0"/>
-                <a:ea typeface="Calibri" pitchFamily="34" charset="-122"/>
-                <a:cs typeface="Calibri" pitchFamily="34" charset="-120"/>
+                <a:cs typeface="Amiri" pitchFamily="2" charset="-78"/>
               </a:rPr>
               <a:t>add a reason or detail</a:t>
             </a:r>
@@ -18462,8 +18133,7 @@
                   <a:srgbClr val="D4AF37"/>
                 </a:solidFill>
                 <a:latin typeface="Arial" pitchFamily="34" charset="0"/>
-                <a:ea typeface="Arial" pitchFamily="34" charset="-122"/>
-                <a:cs typeface="Arial" pitchFamily="34" charset="-120"/>
+                <a:cs typeface="Amiri" pitchFamily="2" charset="-78"/>
               </a:rPr>
               <a:t>?</a:t>
             </a:r>
@@ -18501,8 +18171,7 @@
                   <a:srgbClr val="1B3B6F"/>
                 </a:solidFill>
                 <a:latin typeface="Calibri" pitchFamily="34" charset="0"/>
-                <a:ea typeface="Calibri" pitchFamily="34" charset="-122"/>
-                <a:cs typeface="Calibri" pitchFamily="34" charset="-120"/>
+                <a:cs typeface="Amiri" pitchFamily="2" charset="-78"/>
               </a:rPr>
               <a:t>Challenge</a:t>
             </a:r>
@@ -18518,8 +18187,7 @@
                   <a:srgbClr val="5A6472"/>
                 </a:solidFill>
                 <a:latin typeface="Calibri" pitchFamily="34" charset="0"/>
-                <a:ea typeface="Calibri" pitchFamily="34" charset="-122"/>
-                <a:cs typeface="Calibri" pitchFamily="34" charset="-120"/>
+                <a:cs typeface="Amiri" pitchFamily="2" charset="-78"/>
               </a:rPr>
               <a:t>question respectfully</a:t>
             </a:r>
@@ -18582,8 +18250,7 @@
                   <a:srgbClr val="D4AF37"/>
                 </a:solidFill>
                 <a:latin typeface="Arial" pitchFamily="34" charset="0"/>
-                <a:ea typeface="Arial" pitchFamily="34" charset="-122"/>
-                <a:cs typeface="Arial" pitchFamily="34" charset="-120"/>
+                <a:cs typeface="Amiri" pitchFamily="2" charset="-78"/>
               </a:rPr>
               <a:t>◎</a:t>
             </a:r>
@@ -18621,8 +18288,7 @@
                   <a:srgbClr val="1B3B6F"/>
                 </a:solidFill>
                 <a:latin typeface="Calibri" pitchFamily="34" charset="0"/>
-                <a:ea typeface="Calibri" pitchFamily="34" charset="-122"/>
-                <a:cs typeface="Calibri" pitchFamily="34" charset="-120"/>
+                <a:cs typeface="Amiri" pitchFamily="2" charset="-78"/>
               </a:rPr>
               <a:t>Share</a:t>
             </a:r>
@@ -18638,8 +18304,7 @@
                   <a:srgbClr val="5A6472"/>
                 </a:solidFill>
                 <a:latin typeface="Calibri" pitchFamily="34" charset="0"/>
-                <a:ea typeface="Calibri" pitchFamily="34" charset="-122"/>
-                <a:cs typeface="Calibri" pitchFamily="34" charset="-120"/>
+                <a:cs typeface="Amiri" pitchFamily="2" charset="-78"/>
               </a:rPr>
               <a:t>anyone may be invited</a:t>
             </a:r>
@@ -18702,8 +18367,7 @@
                   <a:srgbClr val="D4AF37"/>
                 </a:solidFill>
                 <a:latin typeface="Arial" pitchFamily="34" charset="0"/>
-                <a:ea typeface="Arial" pitchFamily="34" charset="-122"/>
-                <a:cs typeface="Arial" pitchFamily="34" charset="-120"/>
+                <a:cs typeface="Amiri" pitchFamily="2" charset="-78"/>
               </a:rPr>
               <a:t>↺</a:t>
             </a:r>
@@ -18741,8 +18405,7 @@
                   <a:srgbClr val="1B3B6F"/>
                 </a:solidFill>
                 <a:latin typeface="Calibri" pitchFamily="34" charset="0"/>
-                <a:ea typeface="Calibri" pitchFamily="34" charset="-122"/>
-                <a:cs typeface="Calibri" pitchFamily="34" charset="-120"/>
+                <a:cs typeface="Amiri" pitchFamily="2" charset="-78"/>
               </a:rPr>
               <a:t>Summarise</a:t>
             </a:r>
@@ -18758,8 +18421,7 @@
                   <a:srgbClr val="5A6472"/>
                 </a:solidFill>
                 <a:latin typeface="Calibri" pitchFamily="34" charset="0"/>
-                <a:ea typeface="Calibri" pitchFamily="34" charset="-122"/>
-                <a:cs typeface="Calibri" pitchFamily="34" charset="-120"/>
+                <a:cs typeface="Amiri" pitchFamily="2" charset="-78"/>
               </a:rPr>
               <a:t>say it more precisely</a:t>
             </a:r>
@@ -18797,8 +18459,7 @@
                   <a:srgbClr val="8A6D1E"/>
                 </a:solidFill>
                 <a:latin typeface="Calibri" pitchFamily="34" charset="0"/>
-                <a:ea typeface="Calibri" pitchFamily="34" charset="-122"/>
-                <a:cs typeface="Calibri" pitchFamily="34" charset="-120"/>
+                <a:cs typeface="Amiri" pitchFamily="2" charset="-78"/>
               </a:rPr>
               <a:t>I will always give you thinking and practice time before I ask anyone. Reading aloud is by invitation — you can always say “pass, please come back to me”.</a:t>
             </a:r>
@@ -18836,8 +18497,7 @@
                   <a:srgbClr val="8A93A0"/>
                 </a:solidFill>
                 <a:latin typeface="Calibri" pitchFamily="34" charset="0"/>
-                <a:ea typeface="Calibri" pitchFamily="34" charset="-122"/>
-                <a:cs typeface="Calibri" pitchFamily="34" charset="-120"/>
+                <a:cs typeface="Amiri" pitchFamily="2" charset="-78"/>
               </a:rPr>
               <a:t>2 / 21</a:t>
             </a:r>
@@ -18931,9 +18591,8 @@
                 <a:solidFill>
                   <a:srgbClr val="D4AF37"/>
                 </a:solidFill>
-                <a:latin typeface="Amiri" pitchFamily="34" charset="0"/>
-                <a:ea typeface="Amiri" pitchFamily="34" charset="-122"/>
-                <a:cs typeface="Amiri" pitchFamily="34" charset="-120"/>
+                <a:latin typeface="Amiri" pitchFamily="2" charset="-78"/>
+                <a:cs typeface="Amiri" pitchFamily="2" charset="-78"/>
               </a:rPr>
               <a:t>م</a:t>
             </a:r>
@@ -18971,8 +18630,7 @@
                   <a:srgbClr val="1B3B6F"/>
                 </a:solidFill>
                 <a:latin typeface="Cambria" pitchFamily="34" charset="0"/>
-                <a:ea typeface="Cambria" pitchFamily="34" charset="-122"/>
-                <a:cs typeface="Cambria" pitchFamily="34" charset="-120"/>
+                <a:cs typeface="Amiri" pitchFamily="2" charset="-78"/>
               </a:rPr>
               <a:t>Al Madina Online School</a:t>
             </a:r>
@@ -19010,8 +18668,7 @@
                   <a:srgbClr val="8A6D1E"/>
                 </a:solidFill>
                 <a:latin typeface="Calibri" pitchFamily="34" charset="0"/>
-                <a:ea typeface="Calibri" pitchFamily="34" charset="-122"/>
-                <a:cs typeface="Calibri" pitchFamily="34" charset="-120"/>
+                <a:cs typeface="Amiri" pitchFamily="2" charset="-78"/>
               </a:rPr>
               <a:t>ARABIC DEPARTMENT · MIFTAH ARABIC · IGCSE 0544</a:t>
             </a:r>
@@ -19076,8 +18733,7 @@
                   <a:srgbClr val="FFFFFF"/>
                 </a:solidFill>
                 <a:latin typeface="Calibri" pitchFamily="34" charset="0"/>
-                <a:ea typeface="Calibri" pitchFamily="34" charset="-122"/>
-                <a:cs typeface="Calibri" pitchFamily="34" charset="-120"/>
+                <a:cs typeface="Amiri" pitchFamily="2" charset="-78"/>
               </a:rPr>
               <a:t>P6-L06 · IGCSE Bridge</a:t>
             </a:r>
@@ -19142,8 +18798,7 @@
                   <a:srgbClr val="FFFFFF"/>
                 </a:solidFill>
                 <a:latin typeface="Calibri" pitchFamily="34" charset="0"/>
-                <a:ea typeface="Calibri" pitchFamily="34" charset="-122"/>
-                <a:cs typeface="Calibri" pitchFamily="34" charset="-120"/>
+                <a:cs typeface="Amiri" pitchFamily="2" charset="-78"/>
               </a:rPr>
               <a:t>PREPARATION · 2 MIN</a:t>
             </a:r>
@@ -19181,8 +18836,7 @@
                   <a:srgbClr val="C45A3C"/>
                 </a:solidFill>
                 <a:latin typeface="Calibri" pitchFamily="34" charset="0"/>
-                <a:ea typeface="Calibri" pitchFamily="34" charset="-122"/>
-                <a:cs typeface="Calibri" pitchFamily="34" charset="-120"/>
+                <a:cs typeface="Amiri" pitchFamily="2" charset="-78"/>
               </a:rPr>
               <a:t>PREPARATION FOR NEXT LESSON · ABOUT 10 MINUTES</a:t>
             </a:r>
@@ -19220,8 +18874,7 @@
                   <a:srgbClr val="1B3B6F"/>
                 </a:solidFill>
                 <a:latin typeface="Cambria" pitchFamily="34" charset="0"/>
-                <a:ea typeface="Cambria" pitchFamily="34" charset="-122"/>
-                <a:cs typeface="Cambria" pitchFamily="34" charset="-120"/>
+                <a:cs typeface="Amiri" pitchFamily="2" charset="-78"/>
               </a:rPr>
               <a:t>Before P6-L07: get ready at home</a:t>
             </a:r>
@@ -19258,9 +18911,8 @@
                 <a:solidFill>
                   <a:srgbClr val="8A6D1E"/>
                 </a:solidFill>
-                <a:latin typeface="Amiri" pitchFamily="34" charset="0"/>
-                <a:ea typeface="Amiri" pitchFamily="34" charset="-122"/>
-                <a:cs typeface="Amiri" pitchFamily="34" charset="-120"/>
+                <a:latin typeface="Amiri" pitchFamily="2" charset="-78"/>
+                <a:cs typeface="Amiri" pitchFamily="2" charset="-78"/>
               </a:rPr>
               <a:t>التَّحْضِيرُ لِلدَّرْسِ القَادِمِ</a:t>
             </a:r>
@@ -19298,8 +18950,7 @@
                   <a:srgbClr val="8A93A0"/>
                 </a:solidFill>
                 <a:latin typeface="Calibri" pitchFamily="34" charset="0"/>
-                <a:ea typeface="Calibri" pitchFamily="34" charset="-122"/>
-                <a:cs typeface="Calibri" pitchFamily="34" charset="-120"/>
+                <a:cs typeface="Amiri" pitchFamily="2" charset="-78"/>
               </a:rPr>
               <a:t>Miftah Arabic · Progression P6 · IGCSE Bridge · P6-L06</a:t>
             </a:r>
@@ -19420,8 +19071,7 @@
                   <a:srgbClr val="C45A3C"/>
                 </a:solidFill>
                 <a:latin typeface="Calibri" pitchFamily="34" charset="0"/>
-                <a:ea typeface="Calibri" pitchFamily="34" charset="-122"/>
-                <a:cs typeface="Calibri" pitchFamily="34" charset="-120"/>
+                <a:cs typeface="Amiri" pitchFamily="2" charset="-78"/>
               </a:rPr>
               <a:t>LEARN THESE 5 WORDS</a:t>
             </a:r>
@@ -19437,8 +19087,7 @@
                   <a:srgbClr val="5A6472"/>
                 </a:solidFill>
                 <a:latin typeface="Calibri" pitchFamily="34" charset="0"/>
-                <a:ea typeface="Calibri" pitchFamily="34" charset="-122"/>
-                <a:cs typeface="Calibri" pitchFamily="34" charset="-120"/>
+                <a:cs typeface="Amiri" pitchFamily="2" charset="-78"/>
               </a:rPr>
               <a:t>for P6-L07 · Paper 3 Topic Conversation — Extended Speaking at IGCSE Level</a:t>
             </a:r>
@@ -19475,9 +19124,8 @@
                 <a:solidFill>
                   <a:srgbClr val="1B3B6F"/>
                 </a:solidFill>
-                <a:latin typeface="Amiri" pitchFamily="34" charset="0"/>
-                <a:ea typeface="Amiri" pitchFamily="34" charset="-122"/>
-                <a:cs typeface="Amiri" pitchFamily="34" charset="-120"/>
+                <a:latin typeface="Amiri" pitchFamily="2" charset="-78"/>
+                <a:cs typeface="Amiri" pitchFamily="2" charset="-78"/>
               </a:rPr>
               <a:t>المُحَادَثَةُ المَوْضُوعِيَّةُ</a:t>
             </a:r>
@@ -19515,8 +19163,7 @@
                   <a:srgbClr val="1F2A37"/>
                 </a:solidFill>
                 <a:latin typeface="Calibri" pitchFamily="34" charset="0"/>
-                <a:ea typeface="Calibri" pitchFamily="34" charset="-122"/>
-                <a:cs typeface="Calibri" pitchFamily="34" charset="-120"/>
+                <a:cs typeface="Amiri" pitchFamily="2" charset="-78"/>
               </a:rPr>
               <a:t>topic conversation</a:t>
             </a:r>
@@ -19529,8 +19176,7 @@
                   <a:srgbClr val="5A6472"/>
                 </a:solidFill>
                 <a:latin typeface="Calibri" pitchFamily="34" charset="0"/>
-                <a:ea typeface="Calibri" pitchFamily="34" charset="-122"/>
-                <a:cs typeface="Calibri" pitchFamily="34" charset="-120"/>
+                <a:cs typeface="Amiri" pitchFamily="2" charset="-78"/>
               </a:rPr>
               <a:t>  —</a:t>
             </a:r>
@@ -19567,9 +19213,8 @@
                 <a:solidFill>
                   <a:srgbClr val="1B3B6F"/>
                 </a:solidFill>
-                <a:latin typeface="Amiri" pitchFamily="34" charset="0"/>
-                <a:ea typeface="Amiri" pitchFamily="34" charset="-122"/>
-                <a:cs typeface="Amiri" pitchFamily="34" charset="-120"/>
+                <a:latin typeface="Amiri" pitchFamily="2" charset="-78"/>
+                <a:cs typeface="Amiri" pitchFamily="2" charset="-78"/>
               </a:rPr>
               <a:t>التَّوْسِيعُ فِي الإِجَابَةِ</a:t>
             </a:r>
@@ -19607,8 +19252,7 @@
                   <a:srgbClr val="1F2A37"/>
                 </a:solidFill>
                 <a:latin typeface="Calibri" pitchFamily="34" charset="0"/>
-                <a:ea typeface="Calibri" pitchFamily="34" charset="-122"/>
-                <a:cs typeface="Calibri" pitchFamily="34" charset="-120"/>
+                <a:cs typeface="Amiri" pitchFamily="2" charset="-78"/>
               </a:rPr>
               <a:t>extending the answer</a:t>
             </a:r>
@@ -19621,8 +19265,7 @@
                   <a:srgbClr val="5A6472"/>
                 </a:solidFill>
                 <a:latin typeface="Calibri" pitchFamily="34" charset="0"/>
-                <a:ea typeface="Calibri" pitchFamily="34" charset="-122"/>
-                <a:cs typeface="Calibri" pitchFamily="34" charset="-120"/>
+                <a:cs typeface="Amiri" pitchFamily="2" charset="-78"/>
               </a:rPr>
               <a:t>  —</a:t>
             </a:r>
@@ -19659,9 +19302,8 @@
                 <a:solidFill>
                   <a:srgbClr val="1B3B6F"/>
                 </a:solidFill>
-                <a:latin typeface="Amiri" pitchFamily="34" charset="0"/>
-                <a:ea typeface="Amiri" pitchFamily="34" charset="-122"/>
-                <a:cs typeface="Amiri" pitchFamily="34" charset="-120"/>
+                <a:latin typeface="Amiri" pitchFamily="2" charset="-78"/>
+                <a:cs typeface="Amiri" pitchFamily="2" charset="-78"/>
               </a:rPr>
               <a:t>الرَّأْيُ مَعَ الأَسْبَابِ</a:t>
             </a:r>
@@ -19699,8 +19341,7 @@
                   <a:srgbClr val="1F2A37"/>
                 </a:solidFill>
                 <a:latin typeface="Calibri" pitchFamily="34" charset="0"/>
-                <a:ea typeface="Calibri" pitchFamily="34" charset="-122"/>
-                <a:cs typeface="Calibri" pitchFamily="34" charset="-120"/>
+                <a:cs typeface="Amiri" pitchFamily="2" charset="-78"/>
               </a:rPr>
               <a:t>opinion with reasons</a:t>
             </a:r>
@@ -19713,8 +19354,7 @@
                   <a:srgbClr val="5A6472"/>
                 </a:solidFill>
                 <a:latin typeface="Calibri" pitchFamily="34" charset="0"/>
-                <a:ea typeface="Calibri" pitchFamily="34" charset="-122"/>
-                <a:cs typeface="Calibri" pitchFamily="34" charset="-120"/>
+                <a:cs typeface="Amiri" pitchFamily="2" charset="-78"/>
               </a:rPr>
               <a:t>  —</a:t>
             </a:r>
@@ -19751,9 +19391,8 @@
                 <a:solidFill>
                   <a:srgbClr val="1B3B6F"/>
                 </a:solidFill>
-                <a:latin typeface="Amiri" pitchFamily="34" charset="0"/>
-                <a:ea typeface="Amiri" pitchFamily="34" charset="-122"/>
-                <a:cs typeface="Amiri" pitchFamily="34" charset="-120"/>
+                <a:latin typeface="Amiri" pitchFamily="2" charset="-78"/>
+                <a:cs typeface="Amiri" pitchFamily="2" charset="-78"/>
               </a:rPr>
               <a:t>لُغَةُ التَّوَقُّفِ وَالتَّفْكِيرِ</a:t>
             </a:r>
@@ -19791,8 +19430,7 @@
                   <a:srgbClr val="1F2A37"/>
                 </a:solidFill>
                 <a:latin typeface="Calibri" pitchFamily="34" charset="0"/>
-                <a:ea typeface="Calibri" pitchFamily="34" charset="-122"/>
-                <a:cs typeface="Calibri" pitchFamily="34" charset="-120"/>
+                <a:cs typeface="Amiri" pitchFamily="2" charset="-78"/>
               </a:rPr>
               <a:t>pause-and-think language</a:t>
             </a:r>
@@ -19805,8 +19443,7 @@
                   <a:srgbClr val="5A6472"/>
                 </a:solidFill>
                 <a:latin typeface="Calibri" pitchFamily="34" charset="0"/>
-                <a:ea typeface="Calibri" pitchFamily="34" charset="-122"/>
-                <a:cs typeface="Calibri" pitchFamily="34" charset="-120"/>
+                <a:cs typeface="Amiri" pitchFamily="2" charset="-78"/>
               </a:rPr>
               <a:t>  —</a:t>
             </a:r>
@@ -19843,9 +19480,8 @@
                 <a:solidFill>
                   <a:srgbClr val="1B3B6F"/>
                 </a:solidFill>
-                <a:latin typeface="Amiri" pitchFamily="34" charset="0"/>
-                <a:ea typeface="Amiri" pitchFamily="34" charset="-122"/>
-                <a:cs typeface="Amiri" pitchFamily="34" charset="-120"/>
+                <a:latin typeface="Amiri" pitchFamily="2" charset="-78"/>
+                <a:cs typeface="Amiri" pitchFamily="2" charset="-78"/>
               </a:rPr>
               <a:t>التَّعَافِي مِنَ الأَخْطَاءِ</a:t>
             </a:r>
@@ -19883,8 +19519,7 @@
                   <a:srgbClr val="1F2A37"/>
                 </a:solidFill>
                 <a:latin typeface="Calibri" pitchFamily="34" charset="0"/>
-                <a:ea typeface="Calibri" pitchFamily="34" charset="-122"/>
-                <a:cs typeface="Calibri" pitchFamily="34" charset="-120"/>
+                <a:cs typeface="Amiri" pitchFamily="2" charset="-78"/>
               </a:rPr>
               <a:t>recovering from errors</a:t>
             </a:r>
@@ -19897,8 +19532,7 @@
                   <a:srgbClr val="5A6472"/>
                 </a:solidFill>
                 <a:latin typeface="Calibri" pitchFamily="34" charset="0"/>
-                <a:ea typeface="Calibri" pitchFamily="34" charset="-122"/>
-                <a:cs typeface="Calibri" pitchFamily="34" charset="-120"/>
+                <a:cs typeface="Amiri" pitchFamily="2" charset="-78"/>
               </a:rPr>
               <a:t>  —</a:t>
             </a:r>
@@ -19936,8 +19570,7 @@
                   <a:srgbClr val="C45A3C"/>
                 </a:solidFill>
                 <a:latin typeface="Calibri" pitchFamily="34" charset="0"/>
-                <a:ea typeface="Calibri" pitchFamily="34" charset="-122"/>
-                <a:cs typeface="Calibri" pitchFamily="34" charset="-120"/>
+                <a:cs typeface="Amiri" pitchFamily="2" charset="-78"/>
               </a:rPr>
               <a:t>AND ANSWER ONE QUESTION</a:t>
             </a:r>
@@ -19975,8 +19608,7 @@
                   <a:srgbClr val="1F2A37"/>
                 </a:solidFill>
                 <a:latin typeface="Calibri" pitchFamily="34" charset="0"/>
-                <a:ea typeface="Calibri" pitchFamily="34" charset="-122"/>
-                <a:cs typeface="Calibri" pitchFamily="34" charset="-120"/>
+                <a:cs typeface="Amiri" pitchFamily="2" charset="-78"/>
               </a:rPr>
               <a:t>How can you make a one-sentence answer three times longer?</a:t>
             </a:r>
@@ -20016,9 +19648,8 @@
                 <a:solidFill>
                   <a:srgbClr val="1B3B6F"/>
                 </a:solidFill>
-                <a:latin typeface="Amiri" pitchFamily="34" charset="0"/>
-                <a:ea typeface="Amiri" pitchFamily="34" charset="-122"/>
-                <a:cs typeface="Amiri" pitchFamily="34" charset="-120"/>
+                <a:latin typeface="Amiri" pitchFamily="2" charset="-78"/>
+                <a:cs typeface="Amiri" pitchFamily="2" charset="-78"/>
               </a:rPr>
               <a:t>أَرَى أَنَّ ______ ، لِأَنَّ ______ ، فَمَثَلًا ______ .</a:t>
             </a:r>
@@ -20056,8 +19687,7 @@
                   <a:srgbClr val="1B3B6F"/>
                 </a:solidFill>
                 <a:latin typeface="Calibri" pitchFamily="34" charset="0"/>
-                <a:ea typeface="Calibri" pitchFamily="34" charset="-122"/>
-                <a:cs typeface="Calibri" pitchFamily="34" charset="-120"/>
+                <a:cs typeface="Amiri" pitchFamily="2" charset="-78"/>
               </a:rPr>
               <a:t>HOMEWORK — CHOOSE YOUR ROUTE</a:t>
             </a:r>
@@ -20156,8 +19786,7 @@
                   <a:srgbClr val="FFFFFF"/>
                 </a:solidFill>
                 <a:latin typeface="Calibri" pitchFamily="34" charset="0"/>
-                <a:ea typeface="Calibri" pitchFamily="34" charset="-122"/>
-                <a:cs typeface="Calibri" pitchFamily="34" charset="-120"/>
+                <a:cs typeface="Amiri" pitchFamily="2" charset="-78"/>
               </a:rPr>
               <a:t>CORE</a:t>
             </a:r>
@@ -20195,8 +19824,7 @@
                   <a:srgbClr val="1F2A37"/>
                 </a:solidFill>
                 <a:latin typeface="Calibri" pitchFamily="34" charset="0"/>
-                <a:ea typeface="Calibri" pitchFamily="34" charset="-122"/>
-                <a:cs typeface="Calibri" pitchFamily="34" charset="-120"/>
+                <a:cs typeface="Amiri" pitchFamily="2" charset="-78"/>
               </a:rPr>
               <a:t>Record yourself doing role plays 1–3 with the starts; learn the five words.</a:t>
             </a:r>
@@ -20295,8 +19923,7 @@
                   <a:srgbClr val="FFFFFF"/>
                 </a:solidFill>
                 <a:latin typeface="Calibri" pitchFamily="34" charset="0"/>
-                <a:ea typeface="Calibri" pitchFamily="34" charset="-122"/>
-                <a:cs typeface="Calibri" pitchFamily="34" charset="-120"/>
+                <a:cs typeface="Amiri" pitchFamily="2" charset="-78"/>
               </a:rPr>
               <a:t>DEVELOP</a:t>
             </a:r>
@@ -20334,8 +19961,7 @@
                   <a:srgbClr val="1F2A37"/>
                 </a:solidFill>
                 <a:latin typeface="Calibri" pitchFamily="34" charset="0"/>
-                <a:ea typeface="Calibri" pitchFamily="34" charset="-122"/>
-                <a:cs typeface="Calibri" pitchFamily="34" charset="-120"/>
+                <a:cs typeface="Amiri" pitchFamily="2" charset="-78"/>
               </a:rPr>
               <a:t>Record role play 4 without the starts; learn the five words.</a:t>
             </a:r>
@@ -20434,8 +20060,7 @@
                   <a:srgbClr val="FFFFFF"/>
                 </a:solidFill>
                 <a:latin typeface="Calibri" pitchFamily="34" charset="0"/>
-                <a:ea typeface="Calibri" pitchFamily="34" charset="-122"/>
-                <a:cs typeface="Calibri" pitchFamily="34" charset="-120"/>
+                <a:cs typeface="Amiri" pitchFamily="2" charset="-78"/>
               </a:rPr>
               <a:t>STRETCH</a:t>
             </a:r>
@@ -20473,8 +20098,7 @@
                   <a:srgbClr val="1F2A37"/>
                 </a:solidFill>
                 <a:latin typeface="Calibri" pitchFamily="34" charset="0"/>
-                <a:ea typeface="Calibri" pitchFamily="34" charset="-122"/>
-                <a:cs typeface="Calibri" pitchFamily="34" charset="-120"/>
+                <a:cs typeface="Amiri" pitchFamily="2" charset="-78"/>
               </a:rPr>
               <a:t>Record role play 5 with two or three sentences per prompt; learn the five words.</a:t>
             </a:r>
@@ -20512,8 +20136,7 @@
                   <a:srgbClr val="8A93A0"/>
                 </a:solidFill>
                 <a:latin typeface="Calibri" pitchFamily="34" charset="0"/>
-                <a:ea typeface="Calibri" pitchFamily="34" charset="-122"/>
-                <a:cs typeface="Calibri" pitchFamily="34" charset="-120"/>
+                <a:cs typeface="Amiri" pitchFamily="2" charset="-78"/>
               </a:rPr>
               <a:t>20 / 21</a:t>
             </a:r>
@@ -20657,8 +20280,7 @@
                   <a:srgbClr val="D4AF37"/>
                 </a:solidFill>
                 <a:latin typeface="Calibri" pitchFamily="34" charset="0"/>
-                <a:ea typeface="Calibri" pitchFamily="34" charset="-122"/>
-                <a:cs typeface="Calibri" pitchFamily="34" charset="-120"/>
+                <a:cs typeface="Amiri" pitchFamily="2" charset="-78"/>
               </a:rPr>
               <a:t>P6-L06 COMPLETE</a:t>
             </a:r>
@@ -20695,9 +20317,8 @@
                 <a:solidFill>
                   <a:srgbClr val="FFFFFF"/>
                 </a:solidFill>
-                <a:latin typeface="Amiri" pitchFamily="34" charset="0"/>
-                <a:ea typeface="Amiri" pitchFamily="34" charset="-122"/>
-                <a:cs typeface="Amiri" pitchFamily="34" charset="-120"/>
+                <a:latin typeface="Amiri" pitchFamily="2" charset="-78"/>
+                <a:cs typeface="Amiri" pitchFamily="2" charset="-78"/>
               </a:rPr>
               <a:t>أَحْسَنْتُمْ! إِلَى اللِّقَاءِ</a:t>
             </a:r>
@@ -20735,8 +20356,7 @@
                   <a:srgbClr val="C6D2E6"/>
                 </a:solidFill>
                 <a:latin typeface="Calibri" pitchFamily="34" charset="0"/>
-                <a:ea typeface="Calibri" pitchFamily="34" charset="-122"/>
-                <a:cs typeface="Calibri" pitchFamily="34" charset="-120"/>
+                <a:cs typeface="Amiri" pitchFamily="2" charset="-78"/>
               </a:rPr>
               <a:t>Well done — see you next lesson.</a:t>
             </a:r>
@@ -20774,8 +20394,7 @@
                   <a:srgbClr val="D4AF37"/>
                 </a:solidFill>
                 <a:latin typeface="Calibri" pitchFamily="34" charset="0"/>
-                <a:ea typeface="Calibri" pitchFamily="34" charset="-122"/>
-                <a:cs typeface="Calibri" pitchFamily="34" charset="-120"/>
+                <a:cs typeface="Amiri" pitchFamily="2" charset="-78"/>
               </a:rPr>
               <a:t>NEXT LESSON</a:t>
             </a:r>
@@ -20813,8 +20432,7 @@
                   <a:srgbClr val="FFFFFF"/>
                 </a:solidFill>
                 <a:latin typeface="Cambria" pitchFamily="34" charset="0"/>
-                <a:ea typeface="Cambria" pitchFamily="34" charset="-122"/>
-                <a:cs typeface="Cambria" pitchFamily="34" charset="-120"/>
+                <a:cs typeface="Amiri" pitchFamily="2" charset="-78"/>
               </a:rPr>
               <a:t>P6-L07 · Paper 3 Topic Conversation — Extended Speaking at IGCSE Level</a:t>
             </a:r>
@@ -20851,9 +20469,8 @@
                 <a:solidFill>
                   <a:srgbClr val="D4AF37"/>
                 </a:solidFill>
-                <a:latin typeface="Amiri" pitchFamily="34" charset="0"/>
-                <a:ea typeface="Amiri" pitchFamily="34" charset="-122"/>
-                <a:cs typeface="Amiri" pitchFamily="34" charset="-120"/>
+                <a:latin typeface="Amiri" pitchFamily="2" charset="-78"/>
+                <a:cs typeface="Amiri" pitchFamily="2" charset="-78"/>
               </a:rPr>
               <a:t>الوَرَقَةُ الثَّالِثَةُ — المُحَادَثَةُ</a:t>
             </a:r>
@@ -20891,8 +20508,7 @@
                   <a:srgbClr val="FFFFFF"/>
                 </a:solidFill>
                 <a:latin typeface="Calibri" pitchFamily="34" charset="0"/>
-                <a:ea typeface="Calibri" pitchFamily="34" charset="-122"/>
-                <a:cs typeface="Calibri" pitchFamily="34" charset="-120"/>
+                <a:cs typeface="Amiri" pitchFamily="2" charset="-78"/>
               </a:rPr>
               <a:t>Remember: one prompt = one mark — answer exactly what is asked, in full sentences, in the right tense; if you are lost, use a repair phrase, never silence.</a:t>
             </a:r>
@@ -20986,9 +20602,8 @@
                 <a:solidFill>
                   <a:srgbClr val="D4AF37"/>
                 </a:solidFill>
-                <a:latin typeface="Amiri" pitchFamily="34" charset="0"/>
-                <a:ea typeface="Amiri" pitchFamily="34" charset="-122"/>
-                <a:cs typeface="Amiri" pitchFamily="34" charset="-120"/>
+                <a:latin typeface="Amiri" pitchFamily="2" charset="-78"/>
+                <a:cs typeface="Amiri" pitchFamily="2" charset="-78"/>
               </a:rPr>
               <a:t>م</a:t>
             </a:r>
@@ -21026,8 +20641,7 @@
                   <a:srgbClr val="1B3B6F"/>
                 </a:solidFill>
                 <a:latin typeface="Cambria" pitchFamily="34" charset="0"/>
-                <a:ea typeface="Cambria" pitchFamily="34" charset="-122"/>
-                <a:cs typeface="Cambria" pitchFamily="34" charset="-120"/>
+                <a:cs typeface="Amiri" pitchFamily="2" charset="-78"/>
               </a:rPr>
               <a:t>Al Madina Online School</a:t>
             </a:r>
@@ -21065,8 +20679,7 @@
                   <a:srgbClr val="8A6D1E"/>
                 </a:solidFill>
                 <a:latin typeface="Calibri" pitchFamily="34" charset="0"/>
-                <a:ea typeface="Calibri" pitchFamily="34" charset="-122"/>
-                <a:cs typeface="Calibri" pitchFamily="34" charset="-120"/>
+                <a:cs typeface="Amiri" pitchFamily="2" charset="-78"/>
               </a:rPr>
               <a:t>ARABIC DEPARTMENT · MIFTAH ARABIC · IGCSE 0544</a:t>
             </a:r>
@@ -21131,8 +20744,7 @@
                   <a:srgbClr val="FFFFFF"/>
                 </a:solidFill>
                 <a:latin typeface="Calibri" pitchFamily="34" charset="0"/>
-                <a:ea typeface="Calibri" pitchFamily="34" charset="-122"/>
-                <a:cs typeface="Calibri" pitchFamily="34" charset="-120"/>
+                <a:cs typeface="Amiri" pitchFamily="2" charset="-78"/>
               </a:rPr>
               <a:t>P6-L06 · IGCSE Bridge</a:t>
             </a:r>
@@ -21197,8 +20809,7 @@
                   <a:srgbClr val="FFFFFF"/>
                 </a:solidFill>
                 <a:latin typeface="Calibri" pitchFamily="34" charset="0"/>
-                <a:ea typeface="Calibri" pitchFamily="34" charset="-122"/>
-                <a:cs typeface="Calibri" pitchFamily="34" charset="-120"/>
+                <a:cs typeface="Amiri" pitchFamily="2" charset="-78"/>
               </a:rPr>
               <a:t>WELCOME</a:t>
             </a:r>
@@ -21236,8 +20847,7 @@
                   <a:srgbClr val="5A6472"/>
                 </a:solidFill>
                 <a:latin typeface="Calibri" pitchFamily="34" charset="0"/>
-                <a:ea typeface="Calibri" pitchFamily="34" charset="-122"/>
-                <a:cs typeface="Calibri" pitchFamily="34" charset="-120"/>
+                <a:cs typeface="Amiri" pitchFamily="2" charset="-78"/>
               </a:rPr>
               <a:t>TODAY’S LESSON MAP</a:t>
             </a:r>
@@ -21275,8 +20885,7 @@
                   <a:srgbClr val="1B3B6F"/>
                 </a:solidFill>
                 <a:latin typeface="Cambria" pitchFamily="34" charset="0"/>
-                <a:ea typeface="Cambria" pitchFamily="34" charset="-122"/>
-                <a:cs typeface="Cambria" pitchFamily="34" charset="-120"/>
+                <a:cs typeface="Amiri" pitchFamily="2" charset="-78"/>
               </a:rPr>
               <a:t>Our lesson today, step by step</a:t>
             </a:r>
@@ -21313,9 +20922,8 @@
                 <a:solidFill>
                   <a:srgbClr val="8A6D1E"/>
                 </a:solidFill>
-                <a:latin typeface="Amiri" pitchFamily="34" charset="0"/>
-                <a:ea typeface="Amiri" pitchFamily="34" charset="-122"/>
-                <a:cs typeface="Amiri" pitchFamily="34" charset="-120"/>
+                <a:latin typeface="Amiri" pitchFamily="2" charset="-78"/>
+                <a:cs typeface="Amiri" pitchFamily="2" charset="-78"/>
               </a:rPr>
               <a:t>خَرِيطَةُ الدَّرْسِ</a:t>
             </a:r>
@@ -21353,8 +20961,7 @@
                   <a:srgbClr val="8A93A0"/>
                 </a:solidFill>
                 <a:latin typeface="Calibri" pitchFamily="34" charset="0"/>
-                <a:ea typeface="Calibri" pitchFamily="34" charset="-122"/>
-                <a:cs typeface="Calibri" pitchFamily="34" charset="-120"/>
+                <a:cs typeface="Amiri" pitchFamily="2" charset="-78"/>
               </a:rPr>
               <a:t>Miftah Arabic · Progression P6 · IGCSE Bridge · P6-L06</a:t>
             </a:r>
@@ -21453,8 +21060,7 @@
                   <a:srgbClr val="FFFFFF"/>
                 </a:solidFill>
                 <a:latin typeface="Calibri" pitchFamily="34" charset="0"/>
-                <a:ea typeface="Calibri" pitchFamily="34" charset="-122"/>
-                <a:cs typeface="Calibri" pitchFamily="34" charset="-120"/>
+                <a:cs typeface="Amiri" pitchFamily="2" charset="-78"/>
               </a:rPr>
               <a:t>DO NOW</a:t>
             </a:r>
@@ -21492,8 +21098,7 @@
                   <a:srgbClr val="E8EDF5"/>
                 </a:solidFill>
                 <a:latin typeface="Calibri" pitchFamily="34" charset="0"/>
-                <a:ea typeface="Calibri" pitchFamily="34" charset="-122"/>
-                <a:cs typeface="Calibri" pitchFamily="34" charset="-120"/>
+                <a:cs typeface="Amiri" pitchFamily="2" charset="-78"/>
               </a:rPr>
               <a:t>6 min</a:t>
             </a:r>
@@ -21556,8 +21161,7 @@
                   <a:srgbClr val="1B3B6F"/>
                 </a:solidFill>
                 <a:latin typeface="Calibri" pitchFamily="34" charset="0"/>
-                <a:ea typeface="Calibri" pitchFamily="34" charset="-122"/>
-                <a:cs typeface="Calibri" pitchFamily="34" charset="-120"/>
+                <a:cs typeface="Amiri" pitchFamily="2" charset="-78"/>
               </a:rPr>
               <a:t>1</a:t>
             </a:r>
@@ -21595,8 +21199,7 @@
                   <a:srgbClr val="1F2A37"/>
                 </a:solidFill>
                 <a:latin typeface="Calibri" pitchFamily="34" charset="0"/>
-                <a:ea typeface="Calibri" pitchFamily="34" charset="-122"/>
-                <a:cs typeface="Calibri" pitchFamily="34" charset="-120"/>
+                <a:cs typeface="Amiri" pitchFamily="2" charset="-78"/>
               </a:rPr>
               <a:t>Retrieval: role-play words and polite requests.</a:t>
             </a:r>
@@ -21633,9 +21236,8 @@
                 <a:solidFill>
                   <a:srgbClr val="0E7C86"/>
                 </a:solidFill>
-                <a:latin typeface="Amiri" pitchFamily="34" charset="0"/>
-                <a:ea typeface="Amiri" pitchFamily="34" charset="-122"/>
-                <a:cs typeface="Amiri" pitchFamily="34" charset="-120"/>
+                <a:latin typeface="Amiri" pitchFamily="2" charset="-78"/>
+                <a:cs typeface="Amiri" pitchFamily="2" charset="-78"/>
               </a:rPr>
               <a:t>اِبْدَأِ الآنَ</a:t>
             </a:r>
@@ -21734,8 +21336,7 @@
                   <a:srgbClr val="FFFFFF"/>
                 </a:solidFill>
                 <a:latin typeface="Calibri" pitchFamily="34" charset="0"/>
-                <a:ea typeface="Calibri" pitchFamily="34" charset="-122"/>
-                <a:cs typeface="Calibri" pitchFamily="34" charset="-120"/>
+                <a:cs typeface="Amiri" pitchFamily="2" charset="-78"/>
               </a:rPr>
               <a:t>TEACHER INSTRUCTION</a:t>
             </a:r>
@@ -21773,8 +21374,7 @@
                   <a:srgbClr val="E8EDF5"/>
                 </a:solidFill>
                 <a:latin typeface="Calibri" pitchFamily="34" charset="0"/>
-                <a:ea typeface="Calibri" pitchFamily="34" charset="-122"/>
-                <a:cs typeface="Calibri" pitchFamily="34" charset="-120"/>
+                <a:cs typeface="Amiri" pitchFamily="2" charset="-78"/>
               </a:rPr>
               <a:t>10 min</a:t>
             </a:r>
@@ -21837,8 +21437,7 @@
                   <a:srgbClr val="1B3B6F"/>
                 </a:solidFill>
                 <a:latin typeface="Calibri" pitchFamily="34" charset="0"/>
-                <a:ea typeface="Calibri" pitchFamily="34" charset="-122"/>
-                <a:cs typeface="Calibri" pitchFamily="34" charset="-120"/>
+                <a:cs typeface="Amiri" pitchFamily="2" charset="-78"/>
               </a:rPr>
               <a:t>2</a:t>
             </a:r>
@@ -21876,8 +21475,7 @@
                   <a:srgbClr val="1F2A37"/>
                 </a:solidFill>
                 <a:latin typeface="Calibri" pitchFamily="34" charset="0"/>
-                <a:ea typeface="Calibri" pitchFamily="34" charset="-122"/>
-                <a:cs typeface="Calibri" pitchFamily="34" charset="-120"/>
+                <a:cs typeface="Amiri" pitchFamily="2" charset="-78"/>
               </a:rPr>
               <a:t>The mark scheme, full Communication, repair phrases.</a:t>
             </a:r>
@@ -21914,9 +21512,8 @@
                 <a:solidFill>
                   <a:srgbClr val="1B3B6F"/>
                 </a:solidFill>
-                <a:latin typeface="Amiri" pitchFamily="34" charset="0"/>
-                <a:ea typeface="Amiri" pitchFamily="34" charset="-122"/>
-                <a:cs typeface="Amiri" pitchFamily="34" charset="-120"/>
+                <a:latin typeface="Amiri" pitchFamily="2" charset="-78"/>
+                <a:cs typeface="Amiri" pitchFamily="2" charset="-78"/>
               </a:rPr>
               <a:t>المَعَايِيرُ</a:t>
             </a:r>
@@ -22015,8 +21612,7 @@
                   <a:srgbClr val="FFFFFF"/>
                 </a:solidFill>
                 <a:latin typeface="Calibri" pitchFamily="34" charset="0"/>
-                <a:ea typeface="Calibri" pitchFamily="34" charset="-122"/>
-                <a:cs typeface="Calibri" pitchFamily="34" charset="-120"/>
+                <a:cs typeface="Amiri" pitchFamily="2" charset="-78"/>
               </a:rPr>
               <a:t>I DO</a:t>
             </a:r>
@@ -22054,8 +21650,7 @@
                   <a:srgbClr val="E8EDF5"/>
                 </a:solidFill>
                 <a:latin typeface="Calibri" pitchFamily="34" charset="0"/>
-                <a:ea typeface="Calibri" pitchFamily="34" charset="-122"/>
-                <a:cs typeface="Calibri" pitchFamily="34" charset="-120"/>
+                <a:cs typeface="Amiri" pitchFamily="2" charset="-78"/>
               </a:rPr>
               <a:t>4 min</a:t>
             </a:r>
@@ -22118,8 +21713,7 @@
                   <a:srgbClr val="1B3B6F"/>
                 </a:solidFill>
                 <a:latin typeface="Calibri" pitchFamily="34" charset="0"/>
-                <a:ea typeface="Calibri" pitchFamily="34" charset="-122"/>
-                <a:cs typeface="Calibri" pitchFamily="34" charset="-120"/>
+                <a:cs typeface="Amiri" pitchFamily="2" charset="-78"/>
               </a:rPr>
               <a:t>3</a:t>
             </a:r>
@@ -22157,8 +21751,7 @@
                   <a:srgbClr val="1F2A37"/>
                 </a:solidFill>
                 <a:latin typeface="Calibri" pitchFamily="34" charset="0"/>
-                <a:ea typeface="Calibri" pitchFamily="34" charset="-122"/>
-                <a:cs typeface="Calibri" pitchFamily="34" charset="-120"/>
+                <a:cs typeface="Amiri" pitchFamily="2" charset="-78"/>
               </a:rPr>
               <a:t>Watch me do role play 1.</a:t>
             </a:r>
@@ -22195,9 +21788,8 @@
                 <a:solidFill>
                   <a:srgbClr val="6B4C9A"/>
                 </a:solidFill>
-                <a:latin typeface="Amiri" pitchFamily="34" charset="0"/>
-                <a:ea typeface="Amiri" pitchFamily="34" charset="-122"/>
-                <a:cs typeface="Amiri" pitchFamily="34" charset="-120"/>
+                <a:latin typeface="Amiri" pitchFamily="2" charset="-78"/>
+                <a:cs typeface="Amiri" pitchFamily="2" charset="-78"/>
               </a:rPr>
               <a:t>شَاهِدْ</a:t>
             </a:r>
@@ -22296,8 +21888,7 @@
                   <a:srgbClr val="FFFFFF"/>
                 </a:solidFill>
                 <a:latin typeface="Calibri" pitchFamily="34" charset="0"/>
-                <a:ea typeface="Calibri" pitchFamily="34" charset="-122"/>
-                <a:cs typeface="Calibri" pitchFamily="34" charset="-120"/>
+                <a:cs typeface="Amiri" pitchFamily="2" charset="-78"/>
               </a:rPr>
               <a:t>YOU DO</a:t>
             </a:r>
@@ -22335,8 +21926,7 @@
                   <a:srgbClr val="E8EDF5"/>
                 </a:solidFill>
                 <a:latin typeface="Calibri" pitchFamily="34" charset="0"/>
-                <a:ea typeface="Calibri" pitchFamily="34" charset="-122"/>
-                <a:cs typeface="Calibri" pitchFamily="34" charset="-120"/>
+                <a:cs typeface="Amiri" pitchFamily="2" charset="-78"/>
               </a:rPr>
               <a:t>24 min</a:t>
             </a:r>
@@ -22399,8 +21989,7 @@
                   <a:srgbClr val="1B3B6F"/>
                 </a:solidFill>
                 <a:latin typeface="Calibri" pitchFamily="34" charset="0"/>
-                <a:ea typeface="Calibri" pitchFamily="34" charset="-122"/>
-                <a:cs typeface="Calibri" pitchFamily="34" charset="-120"/>
+                <a:cs typeface="Amiri" pitchFamily="2" charset="-78"/>
               </a:rPr>
               <a:t>4</a:t>
             </a:r>
@@ -22438,8 +22027,7 @@
                   <a:srgbClr val="1F2A37"/>
                 </a:solidFill>
                 <a:latin typeface="Calibri" pitchFamily="34" charset="0"/>
-                <a:ea typeface="Calibri" pitchFamily="34" charset="-122"/>
-                <a:cs typeface="Calibri" pitchFamily="34" charset="-120"/>
+                <a:cs typeface="Amiri" pitchFamily="2" charset="-78"/>
               </a:rPr>
               <a:t>Role plays 2–5 in pairs.</a:t>
             </a:r>
@@ -22476,9 +22064,8 @@
                 <a:solidFill>
                   <a:srgbClr val="1E6B52"/>
                 </a:solidFill>
-                <a:latin typeface="Amiri" pitchFamily="34" charset="0"/>
-                <a:ea typeface="Amiri" pitchFamily="34" charset="-122"/>
-                <a:cs typeface="Amiri" pitchFamily="34" charset="-120"/>
+                <a:latin typeface="Amiri" pitchFamily="2" charset="-78"/>
+                <a:cs typeface="Amiri" pitchFamily="2" charset="-78"/>
               </a:rPr>
               <a:t>تَمْثِيلُ الدَّوْرِ</a:t>
             </a:r>
@@ -22577,8 +22164,7 @@
                   <a:srgbClr val="FFFFFF"/>
                 </a:solidFill>
                 <a:latin typeface="Calibri" pitchFamily="34" charset="0"/>
-                <a:ea typeface="Calibri" pitchFamily="34" charset="-122"/>
-                <a:cs typeface="Calibri" pitchFamily="34" charset="-120"/>
+                <a:cs typeface="Amiri" pitchFamily="2" charset="-78"/>
               </a:rPr>
               <a:t>FEEDBACK</a:t>
             </a:r>
@@ -22616,8 +22202,7 @@
                   <a:srgbClr val="E8EDF5"/>
                 </a:solidFill>
                 <a:latin typeface="Calibri" pitchFamily="34" charset="0"/>
-                <a:ea typeface="Calibri" pitchFamily="34" charset="-122"/>
-                <a:cs typeface="Calibri" pitchFamily="34" charset="-120"/>
+                <a:cs typeface="Amiri" pitchFamily="2" charset="-78"/>
               </a:rPr>
               <a:t>8 min</a:t>
             </a:r>
@@ -22680,8 +22265,7 @@
                   <a:srgbClr val="1B3B6F"/>
                 </a:solidFill>
                 <a:latin typeface="Calibri" pitchFamily="34" charset="0"/>
-                <a:ea typeface="Calibri" pitchFamily="34" charset="-122"/>
-                <a:cs typeface="Calibri" pitchFamily="34" charset="-120"/>
+                <a:cs typeface="Amiri" pitchFamily="2" charset="-78"/>
               </a:rPr>
               <a:t>5</a:t>
             </a:r>
@@ -22719,8 +22303,7 @@
                   <a:srgbClr val="1F2A37"/>
                 </a:solidFill>
                 <a:latin typeface="Calibri" pitchFamily="34" charset="0"/>
-                <a:ea typeface="Calibri" pitchFamily="34" charset="-122"/>
-                <a:cs typeface="Calibri" pitchFamily="34" charset="-120"/>
+                <a:cs typeface="Amiri" pitchFamily="2" charset="-78"/>
               </a:rPr>
               <a:t>Communication analysis, reflection, self-check.</a:t>
             </a:r>
@@ -22757,9 +22340,8 @@
                 <a:solidFill>
                   <a:srgbClr val="8A6D1E"/>
                 </a:solidFill>
-                <a:latin typeface="Amiri" pitchFamily="34" charset="0"/>
-                <a:ea typeface="Amiri" pitchFamily="34" charset="-122"/>
-                <a:cs typeface="Amiri" pitchFamily="34" charset="-120"/>
+                <a:latin typeface="Amiri" pitchFamily="2" charset="-78"/>
+                <a:cs typeface="Amiri" pitchFamily="2" charset="-78"/>
               </a:rPr>
               <a:t>قَيِّمْ</a:t>
             </a:r>
@@ -22858,8 +22440,7 @@
                   <a:srgbClr val="FFFFFF"/>
                 </a:solidFill>
                 <a:latin typeface="Calibri" pitchFamily="34" charset="0"/>
-                <a:ea typeface="Calibri" pitchFamily="34" charset="-122"/>
-                <a:cs typeface="Calibri" pitchFamily="34" charset="-120"/>
+                <a:cs typeface="Amiri" pitchFamily="2" charset="-78"/>
               </a:rPr>
               <a:t>PREPARATION</a:t>
             </a:r>
@@ -22897,8 +22478,7 @@
                   <a:srgbClr val="E8EDF5"/>
                 </a:solidFill>
                 <a:latin typeface="Calibri" pitchFamily="34" charset="0"/>
-                <a:ea typeface="Calibri" pitchFamily="34" charset="-122"/>
-                <a:cs typeface="Calibri" pitchFamily="34" charset="-120"/>
+                <a:cs typeface="Amiri" pitchFamily="2" charset="-78"/>
               </a:rPr>
               <a:t>2 min</a:t>
             </a:r>
@@ -22961,8 +22541,7 @@
                   <a:srgbClr val="1B3B6F"/>
                 </a:solidFill>
                 <a:latin typeface="Calibri" pitchFamily="34" charset="0"/>
-                <a:ea typeface="Calibri" pitchFamily="34" charset="-122"/>
-                <a:cs typeface="Calibri" pitchFamily="34" charset="-120"/>
+                <a:cs typeface="Amiri" pitchFamily="2" charset="-78"/>
               </a:rPr>
               <a:t>6</a:t>
             </a:r>
@@ -23000,8 +22579,7 @@
                   <a:srgbClr val="1F2A37"/>
                 </a:solidFill>
                 <a:latin typeface="Calibri" pitchFamily="34" charset="0"/>
-                <a:ea typeface="Calibri" pitchFamily="34" charset="-122"/>
-                <a:cs typeface="Calibri" pitchFamily="34" charset="-120"/>
+                <a:cs typeface="Amiri" pitchFamily="2" charset="-78"/>
               </a:rPr>
               <a:t>Get ready for the topic conversation.</a:t>
             </a:r>
@@ -23038,9 +22616,8 @@
                 <a:solidFill>
                   <a:srgbClr val="C45A3C"/>
                 </a:solidFill>
-                <a:latin typeface="Amiri" pitchFamily="34" charset="0"/>
-                <a:ea typeface="Amiri" pitchFamily="34" charset="-122"/>
-                <a:cs typeface="Amiri" pitchFamily="34" charset="-120"/>
+                <a:latin typeface="Amiri" pitchFamily="2" charset="-78"/>
+                <a:cs typeface="Amiri" pitchFamily="2" charset="-78"/>
               </a:rPr>
               <a:t>اِسْتَعِدَّ</a:t>
             </a:r>
@@ -23112,8 +22689,7 @@
                   <a:srgbClr val="1E6B52"/>
                 </a:solidFill>
                 <a:latin typeface="Calibri" pitchFamily="34" charset="0"/>
-                <a:ea typeface="Calibri" pitchFamily="34" charset="-122"/>
-                <a:cs typeface="Calibri" pitchFamily="34" charset="-120"/>
+                <a:cs typeface="Amiri" pitchFamily="2" charset="-78"/>
               </a:rPr>
               <a:t>IF ARABIC FEELS HARD TODAY</a:t>
             </a:r>
@@ -23151,8 +22727,7 @@
                   <a:srgbClr val="1F2A37"/>
                 </a:solidFill>
                 <a:latin typeface="Calibri" pitchFamily="34" charset="0"/>
-                <a:ea typeface="Calibri" pitchFamily="34" charset="-122"/>
-                <a:cs typeface="Calibri" pitchFamily="34" charset="-120"/>
+                <a:cs typeface="Amiri" pitchFamily="2" charset="-78"/>
               </a:rPr>
               <a:t>This is an exam-preparation lesson. Every task uses the real IGCSE format — Core students use the green boxes, frames and English support; nobody is expected to get everything right first time.</a:t>
             </a:r>
@@ -23190,8 +22765,7 @@
                   <a:srgbClr val="8A93A0"/>
                 </a:solidFill>
                 <a:latin typeface="Calibri" pitchFamily="34" charset="0"/>
-                <a:ea typeface="Calibri" pitchFamily="34" charset="-122"/>
-                <a:cs typeface="Calibri" pitchFamily="34" charset="-120"/>
+                <a:cs typeface="Amiri" pitchFamily="2" charset="-78"/>
               </a:rPr>
               <a:t>3 / 21</a:t>
             </a:r>
@@ -23285,9 +22859,8 @@
                 <a:solidFill>
                   <a:srgbClr val="D4AF37"/>
                 </a:solidFill>
-                <a:latin typeface="Amiri" pitchFamily="34" charset="0"/>
-                <a:ea typeface="Amiri" pitchFamily="34" charset="-122"/>
-                <a:cs typeface="Amiri" pitchFamily="34" charset="-120"/>
+                <a:latin typeface="Amiri" pitchFamily="2" charset="-78"/>
+                <a:cs typeface="Amiri" pitchFamily="2" charset="-78"/>
               </a:rPr>
               <a:t>م</a:t>
             </a:r>
@@ -23325,8 +22898,7 @@
                   <a:srgbClr val="1B3B6F"/>
                 </a:solidFill>
                 <a:latin typeface="Cambria" pitchFamily="34" charset="0"/>
-                <a:ea typeface="Cambria" pitchFamily="34" charset="-122"/>
-                <a:cs typeface="Cambria" pitchFamily="34" charset="-120"/>
+                <a:cs typeface="Amiri" pitchFamily="2" charset="-78"/>
               </a:rPr>
               <a:t>Al Madina Online School</a:t>
             </a:r>
@@ -23364,8 +22936,7 @@
                   <a:srgbClr val="8A6D1E"/>
                 </a:solidFill>
                 <a:latin typeface="Calibri" pitchFamily="34" charset="0"/>
-                <a:ea typeface="Calibri" pitchFamily="34" charset="-122"/>
-                <a:cs typeface="Calibri" pitchFamily="34" charset="-120"/>
+                <a:cs typeface="Amiri" pitchFamily="2" charset="-78"/>
               </a:rPr>
               <a:t>ARABIC DEPARTMENT · MIFTAH ARABIC · IGCSE 0544</a:t>
             </a:r>
@@ -23430,8 +23001,7 @@
                   <a:srgbClr val="FFFFFF"/>
                 </a:solidFill>
                 <a:latin typeface="Calibri" pitchFamily="34" charset="0"/>
-                <a:ea typeface="Calibri" pitchFamily="34" charset="-122"/>
-                <a:cs typeface="Calibri" pitchFamily="34" charset="-120"/>
+                <a:cs typeface="Amiri" pitchFamily="2" charset="-78"/>
               </a:rPr>
               <a:t>P6-L06 · IGCSE Bridge</a:t>
             </a:r>
@@ -23496,8 +23066,7 @@
                   <a:srgbClr val="FFFFFF"/>
                 </a:solidFill>
                 <a:latin typeface="Calibri" pitchFamily="34" charset="0"/>
-                <a:ea typeface="Calibri" pitchFamily="34" charset="-122"/>
-                <a:cs typeface="Calibri" pitchFamily="34" charset="-120"/>
+                <a:cs typeface="Amiri" pitchFamily="2" charset="-78"/>
               </a:rPr>
               <a:t>DO NOW · 5 MIN</a:t>
             </a:r>
@@ -23535,8 +23104,7 @@
                   <a:srgbClr val="0E7C86"/>
                 </a:solidFill>
                 <a:latin typeface="Calibri" pitchFamily="34" charset="0"/>
-                <a:ea typeface="Calibri" pitchFamily="34" charset="-122"/>
-                <a:cs typeface="Calibri" pitchFamily="34" charset="-120"/>
+                <a:cs typeface="Amiri" pitchFamily="2" charset="-78"/>
               </a:rPr>
               <a:t>DO NOW · ON YOUR OWN · 5 MINUTES</a:t>
             </a:r>
@@ -23574,8 +23142,7 @@
                   <a:srgbClr val="1B3B6F"/>
                 </a:solidFill>
                 <a:latin typeface="Cambria" pitchFamily="34" charset="0"/>
-                <a:ea typeface="Cambria" pitchFamily="34" charset="-122"/>
-                <a:cs typeface="Cambria" pitchFamily="34" charset="-120"/>
+                <a:cs typeface="Amiri" pitchFamily="2" charset="-78"/>
               </a:rPr>
               <a:t>Retrieval: what do you remember?</a:t>
             </a:r>
@@ -23612,9 +23179,8 @@
                 <a:solidFill>
                   <a:srgbClr val="8A6D1E"/>
                 </a:solidFill>
-                <a:latin typeface="Amiri" pitchFamily="34" charset="0"/>
-                <a:ea typeface="Amiri" pitchFamily="34" charset="-122"/>
-                <a:cs typeface="Amiri" pitchFamily="34" charset="-120"/>
+                <a:latin typeface="Amiri" pitchFamily="2" charset="-78"/>
+                <a:cs typeface="Amiri" pitchFamily="2" charset="-78"/>
               </a:rPr>
               <a:t>اِبْدَأِ الآنَ</a:t>
             </a:r>
@@ -23652,8 +23218,7 @@
                   <a:srgbClr val="8A93A0"/>
                 </a:solidFill>
                 <a:latin typeface="Calibri" pitchFamily="34" charset="0"/>
-                <a:ea typeface="Calibri" pitchFamily="34" charset="-122"/>
-                <a:cs typeface="Calibri" pitchFamily="34" charset="-120"/>
+                <a:cs typeface="Amiri" pitchFamily="2" charset="-78"/>
               </a:rPr>
               <a:t>Miftah Arabic · Progression P6 · IGCSE Bridge · P6-L06</a:t>
             </a:r>
@@ -23750,8 +23315,7 @@
                   <a:srgbClr val="FFFFFF"/>
                 </a:solidFill>
                 <a:latin typeface="Calibri" pitchFamily="34" charset="0"/>
-                <a:ea typeface="Calibri" pitchFamily="34" charset="-122"/>
-                <a:cs typeface="Calibri" pitchFamily="34" charset="-120"/>
+                <a:cs typeface="Amiri" pitchFamily="2" charset="-78"/>
               </a:rPr>
               <a:t>1</a:t>
             </a:r>
@@ -23789,8 +23353,7 @@
                   <a:srgbClr val="1B3B6F"/>
                 </a:solidFill>
                 <a:latin typeface="Calibri" pitchFamily="34" charset="0"/>
-                <a:ea typeface="Calibri" pitchFamily="34" charset="-122"/>
-                <a:cs typeface="Calibri" pitchFamily="34" charset="-120"/>
+                <a:cs typeface="Amiri" pitchFamily="2" charset="-78"/>
               </a:rPr>
               <a:t>What does </a:t>
             </a:r>
@@ -23802,9 +23365,8 @@
                 <a:solidFill>
                   <a:srgbClr val="1B3B6F"/>
                 </a:solidFill>
-                <a:latin typeface="Amiri" pitchFamily="34" charset="0"/>
-                <a:ea typeface="Amiri" pitchFamily="34" charset="-122"/>
-                <a:cs typeface="Amiri" pitchFamily="34" charset="-120"/>
+                <a:latin typeface="Amiri" pitchFamily="2" charset="-78"/>
+                <a:cs typeface="Amiri" pitchFamily="2" charset="-78"/>
               </a:rPr>
               <a:t>تَمْثِيلُ الدَّوْرِ</a:t>
             </a:r>
@@ -23817,8 +23379,7 @@
                   <a:srgbClr val="1B3B6F"/>
                 </a:solidFill>
                 <a:latin typeface="Calibri" pitchFamily="34" charset="0"/>
-                <a:ea typeface="Calibri" pitchFamily="34" charset="-122"/>
-                <a:cs typeface="Calibri" pitchFamily="34" charset="-120"/>
+                <a:cs typeface="Amiri" pitchFamily="2" charset="-78"/>
               </a:rPr>
               <a:t> mean?</a:t>
             </a:r>
@@ -23881,8 +23442,7 @@
                   <a:srgbClr val="1B3B6F"/>
                 </a:solidFill>
                 <a:latin typeface="Calibri" pitchFamily="34" charset="0"/>
-                <a:ea typeface="Calibri" pitchFamily="34" charset="-122"/>
-                <a:cs typeface="Calibri" pitchFamily="34" charset="-120"/>
+                <a:cs typeface="Amiri" pitchFamily="2" charset="-78"/>
               </a:rPr>
               <a:t>A</a:t>
             </a:r>
@@ -23920,8 +23480,7 @@
                   <a:srgbClr val="1F2A37"/>
                 </a:solidFill>
                 <a:latin typeface="Calibri" pitchFamily="34" charset="0"/>
-                <a:ea typeface="Calibri" pitchFamily="34" charset="-122"/>
-                <a:cs typeface="Calibri" pitchFamily="34" charset="-120"/>
+                <a:cs typeface="Amiri" pitchFamily="2" charset="-78"/>
               </a:rPr>
               <a:t>a drama lesson</a:t>
             </a:r>
@@ -23984,8 +23543,7 @@
                   <a:srgbClr val="1B3B6F"/>
                 </a:solidFill>
                 <a:latin typeface="Calibri" pitchFamily="34" charset="0"/>
-                <a:ea typeface="Calibri" pitchFamily="34" charset="-122"/>
-                <a:cs typeface="Calibri" pitchFamily="34" charset="-120"/>
+                <a:cs typeface="Amiri" pitchFamily="2" charset="-78"/>
               </a:rPr>
               <a:t>B</a:t>
             </a:r>
@@ -24023,8 +23581,7 @@
                   <a:srgbClr val="1F2A37"/>
                 </a:solidFill>
                 <a:latin typeface="Calibri" pitchFamily="34" charset="0"/>
-                <a:ea typeface="Calibri" pitchFamily="34" charset="-122"/>
-                <a:cs typeface="Calibri" pitchFamily="34" charset="-120"/>
+                <a:cs typeface="Amiri" pitchFamily="2" charset="-78"/>
               </a:rPr>
               <a:t>role play</a:t>
             </a:r>
@@ -24087,8 +23644,7 @@
                   <a:srgbClr val="1B3B6F"/>
                 </a:solidFill>
                 <a:latin typeface="Calibri" pitchFamily="34" charset="0"/>
-                <a:ea typeface="Calibri" pitchFamily="34" charset="-122"/>
-                <a:cs typeface="Calibri" pitchFamily="34" charset="-120"/>
+                <a:cs typeface="Amiri" pitchFamily="2" charset="-78"/>
               </a:rPr>
               <a:t>C</a:t>
             </a:r>
@@ -24126,8 +23682,7 @@
                   <a:srgbClr val="1F2A37"/>
                 </a:solidFill>
                 <a:latin typeface="Calibri" pitchFamily="34" charset="0"/>
-                <a:ea typeface="Calibri" pitchFamily="34" charset="-122"/>
-                <a:cs typeface="Calibri" pitchFamily="34" charset="-120"/>
+                <a:cs typeface="Amiri" pitchFamily="2" charset="-78"/>
               </a:rPr>
               <a:t>a turn to speak</a:t>
             </a:r>
@@ -24224,8 +23779,7 @@
                   <a:srgbClr val="FFFFFF"/>
                 </a:solidFill>
                 <a:latin typeface="Calibri" pitchFamily="34" charset="0"/>
-                <a:ea typeface="Calibri" pitchFamily="34" charset="-122"/>
-                <a:cs typeface="Calibri" pitchFamily="34" charset="-120"/>
+                <a:cs typeface="Amiri" pitchFamily="2" charset="-78"/>
               </a:rPr>
               <a:t>2</a:t>
             </a:r>
@@ -24263,8 +23817,7 @@
                   <a:srgbClr val="1B3B6F"/>
                 </a:solidFill>
                 <a:latin typeface="Calibri" pitchFamily="34" charset="0"/>
-                <a:ea typeface="Calibri" pitchFamily="34" charset="-122"/>
-                <a:cs typeface="Calibri" pitchFamily="34" charset="-120"/>
+                <a:cs typeface="Amiri" pitchFamily="2" charset="-78"/>
               </a:rPr>
               <a:t>What does </a:t>
             </a:r>
@@ -24276,9 +23829,8 @@
                 <a:solidFill>
                   <a:srgbClr val="1B3B6F"/>
                 </a:solidFill>
-                <a:latin typeface="Amiri" pitchFamily="34" charset="0"/>
-                <a:ea typeface="Amiri" pitchFamily="34" charset="-122"/>
-                <a:cs typeface="Amiri" pitchFamily="34" charset="-120"/>
+                <a:latin typeface="Amiri" pitchFamily="2" charset="-78"/>
+                <a:cs typeface="Amiri" pitchFamily="2" charset="-78"/>
               </a:rPr>
               <a:t>طَلَبُ المَعْلُومَاتِ</a:t>
             </a:r>
@@ -24291,8 +23843,7 @@
                   <a:srgbClr val="1B3B6F"/>
                 </a:solidFill>
                 <a:latin typeface="Calibri" pitchFamily="34" charset="0"/>
-                <a:ea typeface="Calibri" pitchFamily="34" charset="-122"/>
-                <a:cs typeface="Calibri" pitchFamily="34" charset="-120"/>
+                <a:cs typeface="Amiri" pitchFamily="2" charset="-78"/>
               </a:rPr>
               <a:t> mean?</a:t>
             </a:r>
@@ -24355,8 +23906,7 @@
                   <a:srgbClr val="1B3B6F"/>
                 </a:solidFill>
                 <a:latin typeface="Calibri" pitchFamily="34" charset="0"/>
-                <a:ea typeface="Calibri" pitchFamily="34" charset="-122"/>
-                <a:cs typeface="Calibri" pitchFamily="34" charset="-120"/>
+                <a:cs typeface="Amiri" pitchFamily="2" charset="-78"/>
               </a:rPr>
               <a:t>A</a:t>
             </a:r>
@@ -24394,8 +23944,7 @@
                   <a:srgbClr val="1F2A37"/>
                 </a:solidFill>
                 <a:latin typeface="Calibri" pitchFamily="34" charset="0"/>
-                <a:ea typeface="Calibri" pitchFamily="34" charset="-122"/>
-                <a:cs typeface="Calibri" pitchFamily="34" charset="-120"/>
+                <a:cs typeface="Amiri" pitchFamily="2" charset="-78"/>
               </a:rPr>
               <a:t>requesting information</a:t>
             </a:r>
@@ -24458,8 +24007,7 @@
                   <a:srgbClr val="1B3B6F"/>
                 </a:solidFill>
                 <a:latin typeface="Calibri" pitchFamily="34" charset="0"/>
-                <a:ea typeface="Calibri" pitchFamily="34" charset="-122"/>
-                <a:cs typeface="Calibri" pitchFamily="34" charset="-120"/>
+                <a:cs typeface="Amiri" pitchFamily="2" charset="-78"/>
               </a:rPr>
               <a:t>B</a:t>
             </a:r>
@@ -24497,8 +24045,7 @@
                   <a:srgbClr val="1F2A37"/>
                 </a:solidFill>
                 <a:latin typeface="Calibri" pitchFamily="34" charset="0"/>
-                <a:ea typeface="Calibri" pitchFamily="34" charset="-122"/>
-                <a:cs typeface="Calibri" pitchFamily="34" charset="-120"/>
+                <a:cs typeface="Amiri" pitchFamily="2" charset="-78"/>
               </a:rPr>
               <a:t>giving information</a:t>
             </a:r>
@@ -24561,8 +24108,7 @@
                   <a:srgbClr val="1B3B6F"/>
                 </a:solidFill>
                 <a:latin typeface="Calibri" pitchFamily="34" charset="0"/>
-                <a:ea typeface="Calibri" pitchFamily="34" charset="-122"/>
-                <a:cs typeface="Calibri" pitchFamily="34" charset="-120"/>
+                <a:cs typeface="Amiri" pitchFamily="2" charset="-78"/>
               </a:rPr>
               <a:t>C</a:t>
             </a:r>
@@ -24600,8 +24146,7 @@
                   <a:srgbClr val="1F2A37"/>
                 </a:solidFill>
                 <a:latin typeface="Calibri" pitchFamily="34" charset="0"/>
-                <a:ea typeface="Calibri" pitchFamily="34" charset="-122"/>
-                <a:cs typeface="Calibri" pitchFamily="34" charset="-120"/>
+                <a:cs typeface="Amiri" pitchFamily="2" charset="-78"/>
               </a:rPr>
               <a:t>an information sheet</a:t>
             </a:r>
@@ -24698,8 +24243,7 @@
                   <a:srgbClr val="FFFFFF"/>
                 </a:solidFill>
                 <a:latin typeface="Calibri" pitchFamily="34" charset="0"/>
-                <a:ea typeface="Calibri" pitchFamily="34" charset="-122"/>
-                <a:cs typeface="Calibri" pitchFamily="34" charset="-120"/>
+                <a:cs typeface="Amiri" pitchFamily="2" charset="-78"/>
               </a:rPr>
               <a:t>3</a:t>
             </a:r>
@@ -24737,8 +24281,7 @@
                   <a:srgbClr val="1B3B6F"/>
                 </a:solidFill>
                 <a:latin typeface="Calibri" pitchFamily="34" charset="0"/>
-                <a:ea typeface="Calibri" pitchFamily="34" charset="-122"/>
-                <a:cs typeface="Calibri" pitchFamily="34" charset="-120"/>
+                <a:cs typeface="Amiri" pitchFamily="2" charset="-78"/>
               </a:rPr>
               <a:t>What does </a:t>
             </a:r>
@@ -24750,9 +24293,8 @@
                 <a:solidFill>
                   <a:srgbClr val="1B3B6F"/>
                 </a:solidFill>
-                <a:latin typeface="Amiri" pitchFamily="34" charset="0"/>
-                <a:ea typeface="Amiri" pitchFamily="34" charset="-122"/>
-                <a:cs typeface="Amiri" pitchFamily="34" charset="-120"/>
+                <a:latin typeface="Amiri" pitchFamily="2" charset="-78"/>
+                <a:cs typeface="Amiri" pitchFamily="2" charset="-78"/>
               </a:rPr>
               <a:t>التَّفَاوُضُ</a:t>
             </a:r>
@@ -24765,8 +24307,7 @@
                   <a:srgbClr val="1B3B6F"/>
                 </a:solidFill>
                 <a:latin typeface="Calibri" pitchFamily="34" charset="0"/>
-                <a:ea typeface="Calibri" pitchFamily="34" charset="-122"/>
-                <a:cs typeface="Calibri" pitchFamily="34" charset="-120"/>
+                <a:cs typeface="Amiri" pitchFamily="2" charset="-78"/>
               </a:rPr>
               <a:t> mean?</a:t>
             </a:r>
@@ -24829,8 +24370,7 @@
                   <a:srgbClr val="1B3B6F"/>
                 </a:solidFill>
                 <a:latin typeface="Calibri" pitchFamily="34" charset="0"/>
-                <a:ea typeface="Calibri" pitchFamily="34" charset="-122"/>
-                <a:cs typeface="Calibri" pitchFamily="34" charset="-120"/>
+                <a:cs typeface="Amiri" pitchFamily="2" charset="-78"/>
               </a:rPr>
               <a:t>A</a:t>
             </a:r>
@@ -24868,8 +24408,7 @@
                   <a:srgbClr val="1F2A37"/>
                 </a:solidFill>
                 <a:latin typeface="Calibri" pitchFamily="34" charset="0"/>
-                <a:ea typeface="Calibri" pitchFamily="34" charset="-122"/>
-                <a:cs typeface="Calibri" pitchFamily="34" charset="-120"/>
+                <a:cs typeface="Amiri" pitchFamily="2" charset="-78"/>
               </a:rPr>
               <a:t>a complaint</a:t>
             </a:r>
@@ -24932,8 +24471,7 @@
                   <a:srgbClr val="1B3B6F"/>
                 </a:solidFill>
                 <a:latin typeface="Calibri" pitchFamily="34" charset="0"/>
-                <a:ea typeface="Calibri" pitchFamily="34" charset="-122"/>
-                <a:cs typeface="Calibri" pitchFamily="34" charset="-120"/>
+                <a:cs typeface="Amiri" pitchFamily="2" charset="-78"/>
               </a:rPr>
               <a:t>B</a:t>
             </a:r>
@@ -24971,8 +24509,7 @@
                   <a:srgbClr val="1F2A37"/>
                 </a:solidFill>
                 <a:latin typeface="Calibri" pitchFamily="34" charset="0"/>
-                <a:ea typeface="Calibri" pitchFamily="34" charset="-122"/>
-                <a:cs typeface="Calibri" pitchFamily="34" charset="-120"/>
+                <a:cs typeface="Amiri" pitchFamily="2" charset="-78"/>
               </a:rPr>
               <a:t>a booking</a:t>
             </a:r>
@@ -25035,8 +24572,7 @@
                   <a:srgbClr val="1B3B6F"/>
                 </a:solidFill>
                 <a:latin typeface="Calibri" pitchFamily="34" charset="0"/>
-                <a:ea typeface="Calibri" pitchFamily="34" charset="-122"/>
-                <a:cs typeface="Calibri" pitchFamily="34" charset="-120"/>
+                <a:cs typeface="Amiri" pitchFamily="2" charset="-78"/>
               </a:rPr>
               <a:t>C</a:t>
             </a:r>
@@ -25074,8 +24610,7 @@
                   <a:srgbClr val="1F2A37"/>
                 </a:solidFill>
                 <a:latin typeface="Calibri" pitchFamily="34" charset="0"/>
-                <a:ea typeface="Calibri" pitchFamily="34" charset="-122"/>
-                <a:cs typeface="Calibri" pitchFamily="34" charset="-120"/>
+                <a:cs typeface="Amiri" pitchFamily="2" charset="-78"/>
               </a:rPr>
               <a:t>negotiation</a:t>
             </a:r>
@@ -25172,8 +24707,7 @@
                   <a:srgbClr val="FFFFFF"/>
                 </a:solidFill>
                 <a:latin typeface="Calibri" pitchFamily="34" charset="0"/>
-                <a:ea typeface="Calibri" pitchFamily="34" charset="-122"/>
-                <a:cs typeface="Calibri" pitchFamily="34" charset="-120"/>
+                <a:cs typeface="Amiri" pitchFamily="2" charset="-78"/>
               </a:rPr>
               <a:t>4</a:t>
             </a:r>
@@ -25211,8 +24745,7 @@
                   <a:srgbClr val="1B3B6F"/>
                 </a:solidFill>
                 <a:latin typeface="Calibri" pitchFamily="34" charset="0"/>
-                <a:ea typeface="Calibri" pitchFamily="34" charset="-122"/>
-                <a:cs typeface="Calibri" pitchFamily="34" charset="-120"/>
+                <a:cs typeface="Amiri" pitchFamily="2" charset="-78"/>
               </a:rPr>
               <a:t>Complete the polite request: </a:t>
             </a:r>
@@ -25224,9 +24757,8 @@
                 <a:solidFill>
                   <a:srgbClr val="1B3B6F"/>
                 </a:solidFill>
-                <a:latin typeface="Amiri" pitchFamily="34" charset="0"/>
-                <a:ea typeface="Amiri" pitchFamily="34" charset="-122"/>
-                <a:cs typeface="Amiri" pitchFamily="34" charset="-120"/>
+                <a:latin typeface="Amiri" pitchFamily="2" charset="-78"/>
+                <a:cs typeface="Amiri" pitchFamily="2" charset="-78"/>
               </a:rPr>
               <a:t>هَلْ يُمْكِنُ أَنْ</a:t>
             </a:r>
@@ -25239,8 +24771,7 @@
                   <a:srgbClr val="1B3B6F"/>
                 </a:solidFill>
                 <a:latin typeface="Calibri" pitchFamily="34" charset="0"/>
-                <a:ea typeface="Calibri" pitchFamily="34" charset="-122"/>
-                <a:cs typeface="Calibri" pitchFamily="34" charset="-120"/>
+                <a:cs typeface="Amiri" pitchFamily="2" charset="-78"/>
               </a:rPr>
               <a:t> ___ </a:t>
             </a:r>
@@ -25252,9 +24783,8 @@
                 <a:solidFill>
                   <a:srgbClr val="1B3B6F"/>
                 </a:solidFill>
-                <a:latin typeface="Amiri" pitchFamily="34" charset="0"/>
-                <a:ea typeface="Amiri" pitchFamily="34" charset="-122"/>
-                <a:cs typeface="Amiri" pitchFamily="34" charset="-120"/>
+                <a:latin typeface="Amiri" pitchFamily="2" charset="-78"/>
+                <a:cs typeface="Amiri" pitchFamily="2" charset="-78"/>
               </a:rPr>
               <a:t>مَوْعِدًا؟</a:t>
             </a:r>
@@ -25317,8 +24847,7 @@
                   <a:srgbClr val="1B3B6F"/>
                 </a:solidFill>
                 <a:latin typeface="Calibri" pitchFamily="34" charset="0"/>
-                <a:ea typeface="Calibri" pitchFamily="34" charset="-122"/>
-                <a:cs typeface="Calibri" pitchFamily="34" charset="-120"/>
+                <a:cs typeface="Amiri" pitchFamily="2" charset="-78"/>
               </a:rPr>
               <a:t>A</a:t>
             </a:r>
@@ -25355,9 +24884,8 @@
                 <a:solidFill>
                   <a:srgbClr val="1F2A37"/>
                 </a:solidFill>
-                <a:latin typeface="Amiri" pitchFamily="34" charset="0"/>
-                <a:ea typeface="Amiri" pitchFamily="34" charset="-122"/>
-                <a:cs typeface="Amiri" pitchFamily="34" charset="-120"/>
+                <a:latin typeface="Amiri" pitchFamily="2" charset="-78"/>
+                <a:cs typeface="Amiri" pitchFamily="2" charset="-78"/>
               </a:rPr>
               <a:t>أَحْجِزُ</a:t>
             </a:r>
@@ -25420,8 +24948,7 @@
                   <a:srgbClr val="1B3B6F"/>
                 </a:solidFill>
                 <a:latin typeface="Calibri" pitchFamily="34" charset="0"/>
-                <a:ea typeface="Calibri" pitchFamily="34" charset="-122"/>
-                <a:cs typeface="Calibri" pitchFamily="34" charset="-120"/>
+                <a:cs typeface="Amiri" pitchFamily="2" charset="-78"/>
               </a:rPr>
               <a:t>B</a:t>
             </a:r>
@@ -25458,9 +24985,8 @@
                 <a:solidFill>
                   <a:srgbClr val="1F2A37"/>
                 </a:solidFill>
-                <a:latin typeface="Amiri" pitchFamily="34" charset="0"/>
-                <a:ea typeface="Amiri" pitchFamily="34" charset="-122"/>
-                <a:cs typeface="Amiri" pitchFamily="34" charset="-120"/>
+                <a:latin typeface="Amiri" pitchFamily="2" charset="-78"/>
+                <a:cs typeface="Amiri" pitchFamily="2" charset="-78"/>
               </a:rPr>
               <a:t>حَجَزْتُ</a:t>
             </a:r>
@@ -25523,8 +25049,7 @@
                   <a:srgbClr val="1B3B6F"/>
                 </a:solidFill>
                 <a:latin typeface="Calibri" pitchFamily="34" charset="0"/>
-                <a:ea typeface="Calibri" pitchFamily="34" charset="-122"/>
-                <a:cs typeface="Calibri" pitchFamily="34" charset="-120"/>
+                <a:cs typeface="Amiri" pitchFamily="2" charset="-78"/>
               </a:rPr>
               <a:t>C</a:t>
             </a:r>
@@ -25561,9 +25086,8 @@
                 <a:solidFill>
                   <a:srgbClr val="1F2A37"/>
                 </a:solidFill>
-                <a:latin typeface="Amiri" pitchFamily="34" charset="0"/>
-                <a:ea typeface="Amiri" pitchFamily="34" charset="-122"/>
-                <a:cs typeface="Amiri" pitchFamily="34" charset="-120"/>
+                <a:latin typeface="Amiri" pitchFamily="2" charset="-78"/>
+                <a:cs typeface="Amiri" pitchFamily="2" charset="-78"/>
               </a:rPr>
               <a:t>أَحْجِزَ</a:t>
             </a:r>
@@ -25660,8 +25184,7 @@
                   <a:srgbClr val="FFFFFF"/>
                 </a:solidFill>
                 <a:latin typeface="Calibri" pitchFamily="34" charset="0"/>
-                <a:ea typeface="Calibri" pitchFamily="34" charset="-122"/>
-                <a:cs typeface="Calibri" pitchFamily="34" charset="-120"/>
+                <a:cs typeface="Amiri" pitchFamily="2" charset="-78"/>
               </a:rPr>
               <a:t>5</a:t>
             </a:r>
@@ -25699,8 +25222,7 @@
                   <a:srgbClr val="1B3B6F"/>
                 </a:solidFill>
                 <a:latin typeface="Calibri" pitchFamily="34" charset="0"/>
-                <a:ea typeface="Calibri" pitchFamily="34" charset="-122"/>
-                <a:cs typeface="Calibri" pitchFamily="34" charset="-120"/>
+                <a:cs typeface="Amiri" pitchFamily="2" charset="-78"/>
               </a:rPr>
               <a:t>Complete the past perfect: </a:t>
             </a:r>
@@ -25712,9 +25234,8 @@
                 <a:solidFill>
                   <a:srgbClr val="1B3B6F"/>
                 </a:solidFill>
-                <a:latin typeface="Amiri" pitchFamily="34" charset="0"/>
-                <a:ea typeface="Amiri" pitchFamily="34" charset="-122"/>
-                <a:cs typeface="Amiri" pitchFamily="34" charset="-120"/>
+                <a:latin typeface="Amiri" pitchFamily="2" charset="-78"/>
+                <a:cs typeface="Amiri" pitchFamily="2" charset="-78"/>
               </a:rPr>
               <a:t>كُنْتُ</a:t>
             </a:r>
@@ -25727,8 +25248,7 @@
                   <a:srgbClr val="1B3B6F"/>
                 </a:solidFill>
                 <a:latin typeface="Calibri" pitchFamily="34" charset="0"/>
-                <a:ea typeface="Calibri" pitchFamily="34" charset="-122"/>
-                <a:cs typeface="Calibri" pitchFamily="34" charset="-120"/>
+                <a:cs typeface="Amiri" pitchFamily="2" charset="-78"/>
               </a:rPr>
               <a:t> ___ </a:t>
             </a:r>
@@ -25740,9 +25260,8 @@
                 <a:solidFill>
                   <a:srgbClr val="1B3B6F"/>
                 </a:solidFill>
-                <a:latin typeface="Amiri" pitchFamily="34" charset="0"/>
-                <a:ea typeface="Amiri" pitchFamily="34" charset="-122"/>
-                <a:cs typeface="Amiri" pitchFamily="34" charset="-120"/>
+                <a:latin typeface="Amiri" pitchFamily="2" charset="-78"/>
+                <a:cs typeface="Amiri" pitchFamily="2" charset="-78"/>
               </a:rPr>
               <a:t>دَرَسْتُ العُلُومَ</a:t>
             </a:r>
@@ -25755,8 +25274,7 @@
                   <a:srgbClr val="1B3B6F"/>
                 </a:solidFill>
                 <a:latin typeface="Calibri" pitchFamily="34" charset="0"/>
-                <a:ea typeface="Calibri" pitchFamily="34" charset="-122"/>
-                <a:cs typeface="Calibri" pitchFamily="34" charset="-120"/>
+                <a:cs typeface="Amiri" pitchFamily="2" charset="-78"/>
               </a:rPr>
               <a:t>.</a:t>
             </a:r>
@@ -25819,8 +25337,7 @@
                   <a:srgbClr val="1B3B6F"/>
                 </a:solidFill>
                 <a:latin typeface="Calibri" pitchFamily="34" charset="0"/>
-                <a:ea typeface="Calibri" pitchFamily="34" charset="-122"/>
-                <a:cs typeface="Calibri" pitchFamily="34" charset="-120"/>
+                <a:cs typeface="Amiri" pitchFamily="2" charset="-78"/>
               </a:rPr>
               <a:t>A</a:t>
             </a:r>
@@ -25857,9 +25374,8 @@
                 <a:solidFill>
                   <a:srgbClr val="1F2A37"/>
                 </a:solidFill>
-                <a:latin typeface="Amiri" pitchFamily="34" charset="0"/>
-                <a:ea typeface="Amiri" pitchFamily="34" charset="-122"/>
-                <a:cs typeface="Amiri" pitchFamily="34" charset="-120"/>
+                <a:latin typeface="Amiri" pitchFamily="2" charset="-78"/>
+                <a:cs typeface="Amiri" pitchFamily="2" charset="-78"/>
               </a:rPr>
               <a:t>قَدْ</a:t>
             </a:r>
@@ -25922,8 +25438,7 @@
                   <a:srgbClr val="1B3B6F"/>
                 </a:solidFill>
                 <a:latin typeface="Calibri" pitchFamily="34" charset="0"/>
-                <a:ea typeface="Calibri" pitchFamily="34" charset="-122"/>
-                <a:cs typeface="Calibri" pitchFamily="34" charset="-120"/>
+                <a:cs typeface="Amiri" pitchFamily="2" charset="-78"/>
               </a:rPr>
               <a:t>B</a:t>
             </a:r>
@@ -25960,9 +25475,8 @@
                 <a:solidFill>
                   <a:srgbClr val="1F2A37"/>
                 </a:solidFill>
-                <a:latin typeface="Amiri" pitchFamily="34" charset="0"/>
-                <a:ea typeface="Amiri" pitchFamily="34" charset="-122"/>
-                <a:cs typeface="Amiri" pitchFamily="34" charset="-120"/>
+                <a:latin typeface="Amiri" pitchFamily="2" charset="-78"/>
+                <a:cs typeface="Amiri" pitchFamily="2" charset="-78"/>
               </a:rPr>
               <a:t>سَوْفَ</a:t>
             </a:r>
@@ -26025,8 +25539,7 @@
                   <a:srgbClr val="1B3B6F"/>
                 </a:solidFill>
                 <a:latin typeface="Calibri" pitchFamily="34" charset="0"/>
-                <a:ea typeface="Calibri" pitchFamily="34" charset="-122"/>
-                <a:cs typeface="Calibri" pitchFamily="34" charset="-120"/>
+                <a:cs typeface="Amiri" pitchFamily="2" charset="-78"/>
               </a:rPr>
               <a:t>C</a:t>
             </a:r>
@@ -26063,9 +25576,8 @@
                 <a:solidFill>
                   <a:srgbClr val="1F2A37"/>
                 </a:solidFill>
-                <a:latin typeface="Amiri" pitchFamily="34" charset="0"/>
-                <a:ea typeface="Amiri" pitchFamily="34" charset="-122"/>
-                <a:cs typeface="Amiri" pitchFamily="34" charset="-120"/>
+                <a:latin typeface="Amiri" pitchFamily="2" charset="-78"/>
+                <a:cs typeface="Amiri" pitchFamily="2" charset="-78"/>
               </a:rPr>
               <a:t>لَنْ</a:t>
             </a:r>
@@ -26137,8 +25649,7 @@
                   <a:srgbClr val="0E7C86"/>
                 </a:solidFill>
                 <a:latin typeface="Calibri" pitchFamily="34" charset="0"/>
-                <a:ea typeface="Calibri" pitchFamily="34" charset="-122"/>
-                <a:cs typeface="Calibri" pitchFamily="34" charset="-120"/>
+                <a:cs typeface="Amiri" pitchFamily="2" charset="-78"/>
               </a:rPr>
               <a:t>HOW TO ANSWER</a:t>
             </a:r>
@@ -26176,8 +25687,7 @@
                   <a:srgbClr val="1F2A37"/>
                 </a:solidFill>
                 <a:latin typeface="Calibri" pitchFamily="34" charset="0"/>
-                <a:ea typeface="Calibri" pitchFamily="34" charset="-122"/>
-                <a:cs typeface="Calibri" pitchFamily="34" charset="-120"/>
+                <a:cs typeface="Amiri" pitchFamily="2" charset="-78"/>
               </a:rPr>
               <a:t>Work on your own in silence.</a:t>
             </a:r>
@@ -26193,8 +25703,7 @@
                   <a:srgbClr val="1F2A37"/>
                 </a:solidFill>
                 <a:latin typeface="Calibri" pitchFamily="34" charset="0"/>
-                <a:ea typeface="Calibri" pitchFamily="34" charset="-122"/>
-                <a:cs typeface="Calibri" pitchFamily="34" charset="-120"/>
+                <a:cs typeface="Amiri" pitchFamily="2" charset="-78"/>
               </a:rPr>
               <a:t>When the timer ends, type in the chat:</a:t>
             </a:r>
@@ -26232,8 +25741,7 @@
                   <a:srgbClr val="1B3B6F"/>
                 </a:solidFill>
                 <a:latin typeface="Consolas" pitchFamily="34" charset="0"/>
-                <a:ea typeface="Consolas" pitchFamily="34" charset="-122"/>
-                <a:cs typeface="Consolas" pitchFamily="34" charset="-120"/>
+                <a:cs typeface="Amiri" pitchFamily="2" charset="-78"/>
               </a:rPr>
               <a:t>1_  2_  3_  4_  5_</a:t>
             </a:r>
@@ -26271,8 +25779,7 @@
                   <a:srgbClr val="0E7C86"/>
                 </a:solidFill>
                 <a:latin typeface="Calibri" pitchFamily="34" charset="0"/>
-                <a:ea typeface="Calibri" pitchFamily="34" charset="-122"/>
-                <a:cs typeface="Calibri" pitchFamily="34" charset="-120"/>
+                <a:cs typeface="Amiri" pitchFamily="2" charset="-78"/>
               </a:rPr>
               <a:t>⏱  5 : 00</a:t>
             </a:r>
@@ -26310,8 +25817,7 @@
                   <a:srgbClr val="8A93A0"/>
                 </a:solidFill>
                 <a:latin typeface="Calibri" pitchFamily="34" charset="0"/>
-                <a:ea typeface="Calibri" pitchFamily="34" charset="-122"/>
-                <a:cs typeface="Calibri" pitchFamily="34" charset="-120"/>
+                <a:cs typeface="Amiri" pitchFamily="2" charset="-78"/>
               </a:rPr>
               <a:t>4 / 21</a:t>
             </a:r>
@@ -26405,9 +25911,8 @@
                 <a:solidFill>
                   <a:srgbClr val="D4AF37"/>
                 </a:solidFill>
-                <a:latin typeface="Amiri" pitchFamily="34" charset="0"/>
-                <a:ea typeface="Amiri" pitchFamily="34" charset="-122"/>
-                <a:cs typeface="Amiri" pitchFamily="34" charset="-120"/>
+                <a:latin typeface="Amiri" pitchFamily="2" charset="-78"/>
+                <a:cs typeface="Amiri" pitchFamily="2" charset="-78"/>
               </a:rPr>
               <a:t>م</a:t>
             </a:r>
@@ -26445,8 +25950,7 @@
                   <a:srgbClr val="1B3B6F"/>
                 </a:solidFill>
                 <a:latin typeface="Cambria" pitchFamily="34" charset="0"/>
-                <a:ea typeface="Cambria" pitchFamily="34" charset="-122"/>
-                <a:cs typeface="Cambria" pitchFamily="34" charset="-120"/>
+                <a:cs typeface="Amiri" pitchFamily="2" charset="-78"/>
               </a:rPr>
               <a:t>Al Madina Online School</a:t>
             </a:r>
@@ -26484,8 +25988,7 @@
                   <a:srgbClr val="8A6D1E"/>
                 </a:solidFill>
                 <a:latin typeface="Calibri" pitchFamily="34" charset="0"/>
-                <a:ea typeface="Calibri" pitchFamily="34" charset="-122"/>
-                <a:cs typeface="Calibri" pitchFamily="34" charset="-120"/>
+                <a:cs typeface="Amiri" pitchFamily="2" charset="-78"/>
               </a:rPr>
               <a:t>ARABIC DEPARTMENT · MIFTAH ARABIC · IGCSE 0544</a:t>
             </a:r>
@@ -26550,8 +26053,7 @@
                   <a:srgbClr val="FFFFFF"/>
                 </a:solidFill>
                 <a:latin typeface="Calibri" pitchFamily="34" charset="0"/>
-                <a:ea typeface="Calibri" pitchFamily="34" charset="-122"/>
-                <a:cs typeface="Calibri" pitchFamily="34" charset="-120"/>
+                <a:cs typeface="Amiri" pitchFamily="2" charset="-78"/>
               </a:rPr>
               <a:t>P6-L06 · IGCSE Bridge</a:t>
             </a:r>
@@ -26616,8 +26118,7 @@
                   <a:srgbClr val="FFFFFF"/>
                 </a:solidFill>
                 <a:latin typeface="Calibri" pitchFamily="34" charset="0"/>
-                <a:ea typeface="Calibri" pitchFamily="34" charset="-122"/>
-                <a:cs typeface="Calibri" pitchFamily="34" charset="-120"/>
+                <a:cs typeface="Amiri" pitchFamily="2" charset="-78"/>
               </a:rPr>
               <a:t>DO NOW · 2 MIN</a:t>
             </a:r>
@@ -26655,8 +26156,7 @@
                   <a:srgbClr val="0E7C86"/>
                 </a:solidFill>
                 <a:latin typeface="Calibri" pitchFamily="34" charset="0"/>
-                <a:ea typeface="Calibri" pitchFamily="34" charset="-122"/>
-                <a:cs typeface="Calibri" pitchFamily="34" charset="-120"/>
+                <a:cs typeface="Amiri" pitchFamily="2" charset="-78"/>
               </a:rPr>
               <a:t>DO NOW · ANSWERS AND REASONS</a:t>
             </a:r>
@@ -26694,8 +26194,7 @@
                   <a:srgbClr val="1B3B6F"/>
                 </a:solidFill>
                 <a:latin typeface="Cambria" pitchFamily="34" charset="0"/>
-                <a:ea typeface="Cambria" pitchFamily="34" charset="-122"/>
-                <a:cs typeface="Cambria" pitchFamily="34" charset="-120"/>
+                <a:cs typeface="Amiri" pitchFamily="2" charset="-78"/>
               </a:rPr>
               <a:t>Let’s check — and explain why</a:t>
             </a:r>
@@ -26732,9 +26231,8 @@
                 <a:solidFill>
                   <a:srgbClr val="8A6D1E"/>
                 </a:solidFill>
-                <a:latin typeface="Amiri" pitchFamily="34" charset="0"/>
-                <a:ea typeface="Amiri" pitchFamily="34" charset="-122"/>
-                <a:cs typeface="Amiri" pitchFamily="34" charset="-120"/>
+                <a:latin typeface="Amiri" pitchFamily="2" charset="-78"/>
+                <a:cs typeface="Amiri" pitchFamily="2" charset="-78"/>
               </a:rPr>
               <a:t>الإِجَابَاتُ وَالتَّعْلِيلُ</a:t>
             </a:r>
@@ -26772,8 +26270,7 @@
                   <a:srgbClr val="8A93A0"/>
                 </a:solidFill>
                 <a:latin typeface="Calibri" pitchFamily="34" charset="0"/>
-                <a:ea typeface="Calibri" pitchFamily="34" charset="-122"/>
-                <a:cs typeface="Calibri" pitchFamily="34" charset="-120"/>
+                <a:cs typeface="Amiri" pitchFamily="2" charset="-78"/>
               </a:rPr>
               <a:t>Miftah Arabic · Progression P6 · IGCSE Bridge · P6-L06</a:t>
             </a:r>
@@ -26870,8 +26367,7 @@
                   <a:srgbClr val="FFFFFF"/>
                 </a:solidFill>
                 <a:latin typeface="Calibri" pitchFamily="34" charset="0"/>
-                <a:ea typeface="Calibri" pitchFamily="34" charset="-122"/>
-                <a:cs typeface="Calibri" pitchFamily="34" charset="-120"/>
+                <a:cs typeface="Amiri" pitchFamily="2" charset="-78"/>
               </a:rPr>
               <a:t>1</a:t>
             </a:r>
@@ -26909,8 +26405,7 @@
                   <a:srgbClr val="1B3B6F"/>
                 </a:solidFill>
                 <a:latin typeface="Calibri" pitchFamily="34" charset="0"/>
-                <a:ea typeface="Calibri" pitchFamily="34" charset="-122"/>
-                <a:cs typeface="Calibri" pitchFamily="34" charset="-120"/>
+                <a:cs typeface="Amiri" pitchFamily="2" charset="-78"/>
               </a:rPr>
               <a:t>What does </a:t>
             </a:r>
@@ -26922,9 +26417,8 @@
                 <a:solidFill>
                   <a:srgbClr val="1B3B6F"/>
                 </a:solidFill>
-                <a:latin typeface="Amiri" pitchFamily="34" charset="0"/>
-                <a:ea typeface="Amiri" pitchFamily="34" charset="-122"/>
-                <a:cs typeface="Amiri" pitchFamily="34" charset="-120"/>
+                <a:latin typeface="Amiri" pitchFamily="2" charset="-78"/>
+                <a:cs typeface="Amiri" pitchFamily="2" charset="-78"/>
               </a:rPr>
               <a:t>تَمْثِيلُ الدَّوْرِ</a:t>
             </a:r>
@@ -26937,8 +26431,7 @@
                   <a:srgbClr val="1B3B6F"/>
                 </a:solidFill>
                 <a:latin typeface="Calibri" pitchFamily="34" charset="0"/>
-                <a:ea typeface="Calibri" pitchFamily="34" charset="-122"/>
-                <a:cs typeface="Calibri" pitchFamily="34" charset="-120"/>
+                <a:cs typeface="Amiri" pitchFamily="2" charset="-78"/>
               </a:rPr>
               <a:t> mean?</a:t>
             </a:r>
@@ -27001,8 +26494,7 @@
                   <a:srgbClr val="1B3B6F"/>
                 </a:solidFill>
                 <a:latin typeface="Calibri" pitchFamily="34" charset="0"/>
-                <a:ea typeface="Calibri" pitchFamily="34" charset="-122"/>
-                <a:cs typeface="Calibri" pitchFamily="34" charset="-120"/>
+                <a:cs typeface="Amiri" pitchFamily="2" charset="-78"/>
               </a:rPr>
               <a:t>A</a:t>
             </a:r>
@@ -27040,8 +26532,7 @@
                   <a:srgbClr val="9AA1AB"/>
                 </a:solidFill>
                 <a:latin typeface="Calibri" pitchFamily="34" charset="0"/>
-                <a:ea typeface="Calibri" pitchFamily="34" charset="-122"/>
-                <a:cs typeface="Calibri" pitchFamily="34" charset="-120"/>
+                <a:cs typeface="Amiri" pitchFamily="2" charset="-78"/>
               </a:rPr>
               <a:t>a drama lesson</a:t>
             </a:r>
@@ -27131,8 +26622,7 @@
                   <a:srgbClr val="FFFFFF"/>
                 </a:solidFill>
                 <a:latin typeface="Calibri" pitchFamily="34" charset="0"/>
-                <a:ea typeface="Calibri" pitchFamily="34" charset="-122"/>
-                <a:cs typeface="Calibri" pitchFamily="34" charset="-120"/>
+                <a:cs typeface="Amiri" pitchFamily="2" charset="-78"/>
               </a:rPr>
               <a:t>B</a:t>
             </a:r>
@@ -27170,8 +26660,7 @@
                   <a:srgbClr val="1F2A37"/>
                 </a:solidFill>
                 <a:latin typeface="Calibri" pitchFamily="34" charset="0"/>
-                <a:ea typeface="Calibri" pitchFamily="34" charset="-122"/>
-                <a:cs typeface="Calibri" pitchFamily="34" charset="-120"/>
+                <a:cs typeface="Amiri" pitchFamily="2" charset="-78"/>
               </a:rPr>
               <a:t>role play</a:t>
             </a:r>
@@ -27234,8 +26723,7 @@
                   <a:srgbClr val="1B3B6F"/>
                 </a:solidFill>
                 <a:latin typeface="Calibri" pitchFamily="34" charset="0"/>
-                <a:ea typeface="Calibri" pitchFamily="34" charset="-122"/>
-                <a:cs typeface="Calibri" pitchFamily="34" charset="-120"/>
+                <a:cs typeface="Amiri" pitchFamily="2" charset="-78"/>
               </a:rPr>
               <a:t>C</a:t>
             </a:r>
@@ -27273,8 +26761,7 @@
                   <a:srgbClr val="9AA1AB"/>
                 </a:solidFill>
                 <a:latin typeface="Calibri" pitchFamily="34" charset="0"/>
-                <a:ea typeface="Calibri" pitchFamily="34" charset="-122"/>
-                <a:cs typeface="Calibri" pitchFamily="34" charset="-120"/>
+                <a:cs typeface="Amiri" pitchFamily="2" charset="-78"/>
               </a:rPr>
               <a:t>a turn to speak</a:t>
             </a:r>
@@ -27312,8 +26799,7 @@
                   <a:srgbClr val="8A6D1E"/>
                 </a:solidFill>
                 <a:latin typeface="Calibri" pitchFamily="34" charset="0"/>
-                <a:ea typeface="Calibri" pitchFamily="34" charset="-122"/>
-                <a:cs typeface="Calibri" pitchFamily="34" charset="-120"/>
+                <a:cs typeface="Amiri" pitchFamily="2" charset="-78"/>
               </a:rPr>
               <a:t>Prepared at home (P6-L05).</a:t>
             </a:r>
@@ -27410,8 +26896,7 @@
                   <a:srgbClr val="FFFFFF"/>
                 </a:solidFill>
                 <a:latin typeface="Calibri" pitchFamily="34" charset="0"/>
-                <a:ea typeface="Calibri" pitchFamily="34" charset="-122"/>
-                <a:cs typeface="Calibri" pitchFamily="34" charset="-120"/>
+                <a:cs typeface="Amiri" pitchFamily="2" charset="-78"/>
               </a:rPr>
               <a:t>2</a:t>
             </a:r>
@@ -27449,8 +26934,7 @@
                   <a:srgbClr val="1B3B6F"/>
                 </a:solidFill>
                 <a:latin typeface="Calibri" pitchFamily="34" charset="0"/>
-                <a:ea typeface="Calibri" pitchFamily="34" charset="-122"/>
-                <a:cs typeface="Calibri" pitchFamily="34" charset="-120"/>
+                <a:cs typeface="Amiri" pitchFamily="2" charset="-78"/>
               </a:rPr>
               <a:t>What does </a:t>
             </a:r>
@@ -27462,9 +26946,8 @@
                 <a:solidFill>
                   <a:srgbClr val="1B3B6F"/>
                 </a:solidFill>
-                <a:latin typeface="Amiri" pitchFamily="34" charset="0"/>
-                <a:ea typeface="Amiri" pitchFamily="34" charset="-122"/>
-                <a:cs typeface="Amiri" pitchFamily="34" charset="-120"/>
+                <a:latin typeface="Amiri" pitchFamily="2" charset="-78"/>
+                <a:cs typeface="Amiri" pitchFamily="2" charset="-78"/>
               </a:rPr>
               <a:t>طَلَبُ المَعْلُومَاتِ</a:t>
             </a:r>
@@ -27477,8 +26960,7 @@
                   <a:srgbClr val="1B3B6F"/>
                 </a:solidFill>
                 <a:latin typeface="Calibri" pitchFamily="34" charset="0"/>
-                <a:ea typeface="Calibri" pitchFamily="34" charset="-122"/>
-                <a:cs typeface="Calibri" pitchFamily="34" charset="-120"/>
+                <a:cs typeface="Amiri" pitchFamily="2" charset="-78"/>
               </a:rPr>
               <a:t> mean?</a:t>
             </a:r>
@@ -27568,8 +27050,7 @@
                   <a:srgbClr val="FFFFFF"/>
                 </a:solidFill>
                 <a:latin typeface="Calibri" pitchFamily="34" charset="0"/>
-                <a:ea typeface="Calibri" pitchFamily="34" charset="-122"/>
-                <a:cs typeface="Calibri" pitchFamily="34" charset="-120"/>
+                <a:cs typeface="Amiri" pitchFamily="2" charset="-78"/>
               </a:rPr>
               <a:t>A</a:t>
             </a:r>
@@ -27607,8 +27088,7 @@
                   <a:srgbClr val="1F2A37"/>
                 </a:solidFill>
                 <a:latin typeface="Calibri" pitchFamily="34" charset="0"/>
-                <a:ea typeface="Calibri" pitchFamily="34" charset="-122"/>
-                <a:cs typeface="Calibri" pitchFamily="34" charset="-120"/>
+                <a:cs typeface="Amiri" pitchFamily="2" charset="-78"/>
               </a:rPr>
               <a:t>requesting information</a:t>
             </a:r>
@@ -27671,8 +27151,7 @@
                   <a:srgbClr val="1B3B6F"/>
                 </a:solidFill>
                 <a:latin typeface="Calibri" pitchFamily="34" charset="0"/>
-                <a:ea typeface="Calibri" pitchFamily="34" charset="-122"/>
-                <a:cs typeface="Calibri" pitchFamily="34" charset="-120"/>
+                <a:cs typeface="Amiri" pitchFamily="2" charset="-78"/>
               </a:rPr>
               <a:t>B</a:t>
             </a:r>
@@ -27710,8 +27189,7 @@
                   <a:srgbClr val="9AA1AB"/>
                 </a:solidFill>
                 <a:latin typeface="Calibri" pitchFamily="34" charset="0"/>
-                <a:ea typeface="Calibri" pitchFamily="34" charset="-122"/>
-                <a:cs typeface="Calibri" pitchFamily="34" charset="-120"/>
+                <a:cs typeface="Amiri" pitchFamily="2" charset="-78"/>
               </a:rPr>
               <a:t>giving information</a:t>
             </a:r>
@@ -27774,8 +27252,7 @@
                   <a:srgbClr val="1B3B6F"/>
                 </a:solidFill>
                 <a:latin typeface="Calibri" pitchFamily="34" charset="0"/>
-                <a:ea typeface="Calibri" pitchFamily="34" charset="-122"/>
-                <a:cs typeface="Calibri" pitchFamily="34" charset="-120"/>
+                <a:cs typeface="Amiri" pitchFamily="2" charset="-78"/>
               </a:rPr>
               <a:t>C</a:t>
             </a:r>
@@ -27813,8 +27290,7 @@
                   <a:srgbClr val="9AA1AB"/>
                 </a:solidFill>
                 <a:latin typeface="Calibri" pitchFamily="34" charset="0"/>
-                <a:ea typeface="Calibri" pitchFamily="34" charset="-122"/>
-                <a:cs typeface="Calibri" pitchFamily="34" charset="-120"/>
+                <a:cs typeface="Amiri" pitchFamily="2" charset="-78"/>
               </a:rPr>
               <a:t>an information sheet</a:t>
             </a:r>
@@ -27852,8 +27328,7 @@
                   <a:srgbClr val="8A6D1E"/>
                 </a:solidFill>
                 <a:latin typeface="Calibri" pitchFamily="34" charset="0"/>
-                <a:ea typeface="Calibri" pitchFamily="34" charset="-122"/>
-                <a:cs typeface="Calibri" pitchFamily="34" charset="-120"/>
+                <a:cs typeface="Amiri" pitchFamily="2" charset="-78"/>
               </a:rPr>
               <a:t>Prepared at home (P6-L05).</a:t>
             </a:r>
@@ -27950,8 +27425,7 @@
                   <a:srgbClr val="FFFFFF"/>
                 </a:solidFill>
                 <a:latin typeface="Calibri" pitchFamily="34" charset="0"/>
-                <a:ea typeface="Calibri" pitchFamily="34" charset="-122"/>
-                <a:cs typeface="Calibri" pitchFamily="34" charset="-120"/>
+                <a:cs typeface="Amiri" pitchFamily="2" charset="-78"/>
               </a:rPr>
               <a:t>3</a:t>
             </a:r>
@@ -27989,8 +27463,7 @@
                   <a:srgbClr val="1B3B6F"/>
                 </a:solidFill>
                 <a:latin typeface="Calibri" pitchFamily="34" charset="0"/>
-                <a:ea typeface="Calibri" pitchFamily="34" charset="-122"/>
-                <a:cs typeface="Calibri" pitchFamily="34" charset="-120"/>
+                <a:cs typeface="Amiri" pitchFamily="2" charset="-78"/>
               </a:rPr>
               <a:t>What does </a:t>
             </a:r>
@@ -28002,9 +27475,8 @@
                 <a:solidFill>
                   <a:srgbClr val="1B3B6F"/>
                 </a:solidFill>
-                <a:latin typeface="Amiri" pitchFamily="34" charset="0"/>
-                <a:ea typeface="Amiri" pitchFamily="34" charset="-122"/>
-                <a:cs typeface="Amiri" pitchFamily="34" charset="-120"/>
+                <a:latin typeface="Amiri" pitchFamily="2" charset="-78"/>
+                <a:cs typeface="Amiri" pitchFamily="2" charset="-78"/>
               </a:rPr>
               <a:t>التَّفَاوُضُ</a:t>
             </a:r>
@@ -28017,8 +27489,7 @@
                   <a:srgbClr val="1B3B6F"/>
                 </a:solidFill>
                 <a:latin typeface="Calibri" pitchFamily="34" charset="0"/>
-                <a:ea typeface="Calibri" pitchFamily="34" charset="-122"/>
-                <a:cs typeface="Calibri" pitchFamily="34" charset="-120"/>
+                <a:cs typeface="Amiri" pitchFamily="2" charset="-78"/>
               </a:rPr>
               <a:t> mean?</a:t>
             </a:r>
@@ -28081,8 +27552,7 @@
                   <a:srgbClr val="1B3B6F"/>
                 </a:solidFill>
                 <a:latin typeface="Calibri" pitchFamily="34" charset="0"/>
-                <a:ea typeface="Calibri" pitchFamily="34" charset="-122"/>
-                <a:cs typeface="Calibri" pitchFamily="34" charset="-120"/>
+                <a:cs typeface="Amiri" pitchFamily="2" charset="-78"/>
               </a:rPr>
               <a:t>A</a:t>
             </a:r>
@@ -28120,8 +27590,7 @@
                   <a:srgbClr val="9AA1AB"/>
                 </a:solidFill>
                 <a:latin typeface="Calibri" pitchFamily="34" charset="0"/>
-                <a:ea typeface="Calibri" pitchFamily="34" charset="-122"/>
-                <a:cs typeface="Calibri" pitchFamily="34" charset="-120"/>
+                <a:cs typeface="Amiri" pitchFamily="2" charset="-78"/>
               </a:rPr>
               <a:t>a complaint</a:t>
             </a:r>
@@ -28184,8 +27653,7 @@
                   <a:srgbClr val="1B3B6F"/>
                 </a:solidFill>
                 <a:latin typeface="Calibri" pitchFamily="34" charset="0"/>
-                <a:ea typeface="Calibri" pitchFamily="34" charset="-122"/>
-                <a:cs typeface="Calibri" pitchFamily="34" charset="-120"/>
+                <a:cs typeface="Amiri" pitchFamily="2" charset="-78"/>
               </a:rPr>
               <a:t>B</a:t>
             </a:r>
@@ -28223,8 +27691,7 @@
                   <a:srgbClr val="9AA1AB"/>
                 </a:solidFill>
                 <a:latin typeface="Calibri" pitchFamily="34" charset="0"/>
-                <a:ea typeface="Calibri" pitchFamily="34" charset="-122"/>
-                <a:cs typeface="Calibri" pitchFamily="34" charset="-120"/>
+                <a:cs typeface="Amiri" pitchFamily="2" charset="-78"/>
               </a:rPr>
               <a:t>a booking</a:t>
             </a:r>
@@ -28314,8 +27781,7 @@
                   <a:srgbClr val="FFFFFF"/>
                 </a:solidFill>
                 <a:latin typeface="Calibri" pitchFamily="34" charset="0"/>
-                <a:ea typeface="Calibri" pitchFamily="34" charset="-122"/>
-                <a:cs typeface="Calibri" pitchFamily="34" charset="-120"/>
+                <a:cs typeface="Amiri" pitchFamily="2" charset="-78"/>
               </a:rPr>
               <a:t>C</a:t>
             </a:r>
@@ -28353,8 +27819,7 @@
                   <a:srgbClr val="1F2A37"/>
                 </a:solidFill>
                 <a:latin typeface="Calibri" pitchFamily="34" charset="0"/>
-                <a:ea typeface="Calibri" pitchFamily="34" charset="-122"/>
-                <a:cs typeface="Calibri" pitchFamily="34" charset="-120"/>
+                <a:cs typeface="Amiri" pitchFamily="2" charset="-78"/>
               </a:rPr>
               <a:t>negotiation</a:t>
             </a:r>
@@ -28392,8 +27857,7 @@
                   <a:srgbClr val="8A6D1E"/>
                 </a:solidFill>
                 <a:latin typeface="Calibri" pitchFamily="34" charset="0"/>
-                <a:ea typeface="Calibri" pitchFamily="34" charset="-122"/>
-                <a:cs typeface="Calibri" pitchFamily="34" charset="-120"/>
+                <a:cs typeface="Amiri" pitchFamily="2" charset="-78"/>
               </a:rPr>
               <a:t>Prepared at home (P6-L05).</a:t>
             </a:r>
@@ -28490,8 +27954,7 @@
                   <a:srgbClr val="FFFFFF"/>
                 </a:solidFill>
                 <a:latin typeface="Calibri" pitchFamily="34" charset="0"/>
-                <a:ea typeface="Calibri" pitchFamily="34" charset="-122"/>
-                <a:cs typeface="Calibri" pitchFamily="34" charset="-120"/>
+                <a:cs typeface="Amiri" pitchFamily="2" charset="-78"/>
               </a:rPr>
               <a:t>4</a:t>
             </a:r>
@@ -28529,8 +27992,7 @@
                   <a:srgbClr val="1B3B6F"/>
                 </a:solidFill>
                 <a:latin typeface="Calibri" pitchFamily="34" charset="0"/>
-                <a:ea typeface="Calibri" pitchFamily="34" charset="-122"/>
-                <a:cs typeface="Calibri" pitchFamily="34" charset="-120"/>
+                <a:cs typeface="Amiri" pitchFamily="2" charset="-78"/>
               </a:rPr>
               <a:t>Complete the polite request: </a:t>
             </a:r>
@@ -28542,9 +28004,8 @@
                 <a:solidFill>
                   <a:srgbClr val="1B3B6F"/>
                 </a:solidFill>
-                <a:latin typeface="Amiri" pitchFamily="34" charset="0"/>
-                <a:ea typeface="Amiri" pitchFamily="34" charset="-122"/>
-                <a:cs typeface="Amiri" pitchFamily="34" charset="-120"/>
+                <a:latin typeface="Amiri" pitchFamily="2" charset="-78"/>
+                <a:cs typeface="Amiri" pitchFamily="2" charset="-78"/>
               </a:rPr>
               <a:t>هَلْ يُمْكِنُ أَنْ</a:t>
             </a:r>
@@ -28557,8 +28018,7 @@
                   <a:srgbClr val="1B3B6F"/>
                 </a:solidFill>
                 <a:latin typeface="Calibri" pitchFamily="34" charset="0"/>
-                <a:ea typeface="Calibri" pitchFamily="34" charset="-122"/>
-                <a:cs typeface="Calibri" pitchFamily="34" charset="-120"/>
+                <a:cs typeface="Amiri" pitchFamily="2" charset="-78"/>
               </a:rPr>
               <a:t> ___ </a:t>
             </a:r>
@@ -28570,9 +28030,8 @@
                 <a:solidFill>
                   <a:srgbClr val="1B3B6F"/>
                 </a:solidFill>
-                <a:latin typeface="Amiri" pitchFamily="34" charset="0"/>
-                <a:ea typeface="Amiri" pitchFamily="34" charset="-122"/>
-                <a:cs typeface="Amiri" pitchFamily="34" charset="-120"/>
+                <a:latin typeface="Amiri" pitchFamily="2" charset="-78"/>
+                <a:cs typeface="Amiri" pitchFamily="2" charset="-78"/>
               </a:rPr>
               <a:t>مَوْعِدًا؟</a:t>
             </a:r>
@@ -28635,8 +28094,7 @@
                   <a:srgbClr val="1B3B6F"/>
                 </a:solidFill>
                 <a:latin typeface="Calibri" pitchFamily="34" charset="0"/>
-                <a:ea typeface="Calibri" pitchFamily="34" charset="-122"/>
-                <a:cs typeface="Calibri" pitchFamily="34" charset="-120"/>
+                <a:cs typeface="Amiri" pitchFamily="2" charset="-78"/>
               </a:rPr>
               <a:t>A</a:t>
             </a:r>
@@ -28673,9 +28131,8 @@
                 <a:solidFill>
                   <a:srgbClr val="9AA1AB"/>
                 </a:solidFill>
-                <a:latin typeface="Amiri" pitchFamily="34" charset="0"/>
-                <a:ea typeface="Amiri" pitchFamily="34" charset="-122"/>
-                <a:cs typeface="Amiri" pitchFamily="34" charset="-120"/>
+                <a:latin typeface="Amiri" pitchFamily="2" charset="-78"/>
+                <a:cs typeface="Amiri" pitchFamily="2" charset="-78"/>
               </a:rPr>
               <a:t>أَحْجِزُ</a:t>
             </a:r>
@@ -28738,8 +28195,7 @@
                   <a:srgbClr val="1B3B6F"/>
                 </a:solidFill>
                 <a:latin typeface="Calibri" pitchFamily="34" charset="0"/>
-                <a:ea typeface="Calibri" pitchFamily="34" charset="-122"/>
-                <a:cs typeface="Calibri" pitchFamily="34" charset="-120"/>
+                <a:cs typeface="Amiri" pitchFamily="2" charset="-78"/>
               </a:rPr>
               <a:t>B</a:t>
             </a:r>
@@ -28776,9 +28232,8 @@
                 <a:solidFill>
                   <a:srgbClr val="9AA1AB"/>
                 </a:solidFill>
-                <a:latin typeface="Amiri" pitchFamily="34" charset="0"/>
-                <a:ea typeface="Amiri" pitchFamily="34" charset="-122"/>
-                <a:cs typeface="Amiri" pitchFamily="34" charset="-120"/>
+                <a:latin typeface="Amiri" pitchFamily="2" charset="-78"/>
+                <a:cs typeface="Amiri" pitchFamily="2" charset="-78"/>
               </a:rPr>
               <a:t>حَجَزْتُ</a:t>
             </a:r>
@@ -28868,8 +28323,7 @@
                   <a:srgbClr val="FFFFFF"/>
                 </a:solidFill>
                 <a:latin typeface="Calibri" pitchFamily="34" charset="0"/>
-                <a:ea typeface="Calibri" pitchFamily="34" charset="-122"/>
-                <a:cs typeface="Calibri" pitchFamily="34" charset="-120"/>
+                <a:cs typeface="Amiri" pitchFamily="2" charset="-78"/>
               </a:rPr>
               <a:t>C</a:t>
             </a:r>
@@ -28906,9 +28360,8 @@
                 <a:solidFill>
                   <a:srgbClr val="1F2A37"/>
                 </a:solidFill>
-                <a:latin typeface="Amiri" pitchFamily="34" charset="0"/>
-                <a:ea typeface="Amiri" pitchFamily="34" charset="-122"/>
-                <a:cs typeface="Amiri" pitchFamily="34" charset="-120"/>
+                <a:latin typeface="Amiri" pitchFamily="2" charset="-78"/>
+                <a:cs typeface="Amiri" pitchFamily="2" charset="-78"/>
               </a:rPr>
               <a:t>أَحْجِزَ</a:t>
             </a:r>
@@ -28946,8 +28399,7 @@
                   <a:srgbClr val="8A6D1E"/>
                 </a:solidFill>
                 <a:latin typeface="Calibri" pitchFamily="34" charset="0"/>
-                <a:ea typeface="Calibri" pitchFamily="34" charset="-122"/>
-                <a:cs typeface="Calibri" pitchFamily="34" charset="-120"/>
+                <a:cs typeface="Amiri" pitchFamily="2" charset="-78"/>
               </a:rPr>
               <a:t>yumkinu an + a verb in -a.</a:t>
             </a:r>
@@ -29044,8 +28496,7 @@
                   <a:srgbClr val="FFFFFF"/>
                 </a:solidFill>
                 <a:latin typeface="Calibri" pitchFamily="34" charset="0"/>
-                <a:ea typeface="Calibri" pitchFamily="34" charset="-122"/>
-                <a:cs typeface="Calibri" pitchFamily="34" charset="-120"/>
+                <a:cs typeface="Amiri" pitchFamily="2" charset="-78"/>
               </a:rPr>
               <a:t>5</a:t>
             </a:r>
@@ -29083,8 +28534,7 @@
                   <a:srgbClr val="1B3B6F"/>
                 </a:solidFill>
                 <a:latin typeface="Calibri" pitchFamily="34" charset="0"/>
-                <a:ea typeface="Calibri" pitchFamily="34" charset="-122"/>
-                <a:cs typeface="Calibri" pitchFamily="34" charset="-120"/>
+                <a:cs typeface="Amiri" pitchFamily="2" charset="-78"/>
               </a:rPr>
               <a:t>Complete the past perfect: </a:t>
             </a:r>
@@ -29096,9 +28546,8 @@
                 <a:solidFill>
                   <a:srgbClr val="1B3B6F"/>
                 </a:solidFill>
-                <a:latin typeface="Amiri" pitchFamily="34" charset="0"/>
-                <a:ea typeface="Amiri" pitchFamily="34" charset="-122"/>
-                <a:cs typeface="Amiri" pitchFamily="34" charset="-120"/>
+                <a:latin typeface="Amiri" pitchFamily="2" charset="-78"/>
+                <a:cs typeface="Amiri" pitchFamily="2" charset="-78"/>
               </a:rPr>
               <a:t>كُنْتُ</a:t>
             </a:r>
@@ -29111,8 +28560,7 @@
                   <a:srgbClr val="1B3B6F"/>
                 </a:solidFill>
                 <a:latin typeface="Calibri" pitchFamily="34" charset="0"/>
-                <a:ea typeface="Calibri" pitchFamily="34" charset="-122"/>
-                <a:cs typeface="Calibri" pitchFamily="34" charset="-120"/>
+                <a:cs typeface="Amiri" pitchFamily="2" charset="-78"/>
               </a:rPr>
               <a:t> ___ </a:t>
             </a:r>
@@ -29124,9 +28572,8 @@
                 <a:solidFill>
                   <a:srgbClr val="1B3B6F"/>
                 </a:solidFill>
-                <a:latin typeface="Amiri" pitchFamily="34" charset="0"/>
-                <a:ea typeface="Amiri" pitchFamily="34" charset="-122"/>
-                <a:cs typeface="Amiri" pitchFamily="34" charset="-120"/>
+                <a:latin typeface="Amiri" pitchFamily="2" charset="-78"/>
+                <a:cs typeface="Amiri" pitchFamily="2" charset="-78"/>
               </a:rPr>
               <a:t>دَرَسْتُ العُلُومَ</a:t>
             </a:r>
@@ -29139,8 +28586,7 @@
                   <a:srgbClr val="1B3B6F"/>
                 </a:solidFill>
                 <a:latin typeface="Calibri" pitchFamily="34" charset="0"/>
-                <a:ea typeface="Calibri" pitchFamily="34" charset="-122"/>
-                <a:cs typeface="Calibri" pitchFamily="34" charset="-120"/>
+                <a:cs typeface="Amiri" pitchFamily="2" charset="-78"/>
               </a:rPr>
               <a:t>.</a:t>
             </a:r>
@@ -29230,8 +28676,7 @@
                   <a:srgbClr val="FFFFFF"/>
                 </a:solidFill>
                 <a:latin typeface="Calibri" pitchFamily="34" charset="0"/>
-                <a:ea typeface="Calibri" pitchFamily="34" charset="-122"/>
-                <a:cs typeface="Calibri" pitchFamily="34" charset="-120"/>
+                <a:cs typeface="Amiri" pitchFamily="2" charset="-78"/>
               </a:rPr>
               <a:t>A</a:t>
             </a:r>
@@ -29268,9 +28713,8 @@
                 <a:solidFill>
                   <a:srgbClr val="1F2A37"/>
                 </a:solidFill>
-                <a:latin typeface="Amiri" pitchFamily="34" charset="0"/>
-                <a:ea typeface="Amiri" pitchFamily="34" charset="-122"/>
-                <a:cs typeface="Amiri" pitchFamily="34" charset="-120"/>
+                <a:latin typeface="Amiri" pitchFamily="2" charset="-78"/>
+                <a:cs typeface="Amiri" pitchFamily="2" charset="-78"/>
               </a:rPr>
               <a:t>قَدْ</a:t>
             </a:r>
@@ -29333,8 +28777,7 @@
                   <a:srgbClr val="1B3B6F"/>
                 </a:solidFill>
                 <a:latin typeface="Calibri" pitchFamily="34" charset="0"/>
-                <a:ea typeface="Calibri" pitchFamily="34" charset="-122"/>
-                <a:cs typeface="Calibri" pitchFamily="34" charset="-120"/>
+                <a:cs typeface="Amiri" pitchFamily="2" charset="-78"/>
               </a:rPr>
               <a:t>B</a:t>
             </a:r>
@@ -29371,9 +28814,8 @@
                 <a:solidFill>
                   <a:srgbClr val="9AA1AB"/>
                 </a:solidFill>
-                <a:latin typeface="Amiri" pitchFamily="34" charset="0"/>
-                <a:ea typeface="Amiri" pitchFamily="34" charset="-122"/>
-                <a:cs typeface="Amiri" pitchFamily="34" charset="-120"/>
+                <a:latin typeface="Amiri" pitchFamily="2" charset="-78"/>
+                <a:cs typeface="Amiri" pitchFamily="2" charset="-78"/>
               </a:rPr>
               <a:t>سَوْفَ</a:t>
             </a:r>
@@ -29436,8 +28878,7 @@
                   <a:srgbClr val="1B3B6F"/>
                 </a:solidFill>
                 <a:latin typeface="Calibri" pitchFamily="34" charset="0"/>
-                <a:ea typeface="Calibri" pitchFamily="34" charset="-122"/>
-                <a:cs typeface="Calibri" pitchFamily="34" charset="-120"/>
+                <a:cs typeface="Amiri" pitchFamily="2" charset="-78"/>
               </a:rPr>
               <a:t>C</a:t>
             </a:r>
@@ -29474,9 +28915,8 @@
                 <a:solidFill>
                   <a:srgbClr val="9AA1AB"/>
                 </a:solidFill>
-                <a:latin typeface="Amiri" pitchFamily="34" charset="0"/>
-                <a:ea typeface="Amiri" pitchFamily="34" charset="-122"/>
-                <a:cs typeface="Amiri" pitchFamily="34" charset="-120"/>
+                <a:latin typeface="Amiri" pitchFamily="2" charset="-78"/>
+                <a:cs typeface="Amiri" pitchFamily="2" charset="-78"/>
               </a:rPr>
               <a:t>لَنْ</a:t>
             </a:r>
@@ -29514,8 +28954,7 @@
                   <a:srgbClr val="8A6D1E"/>
                 </a:solidFill>
                 <a:latin typeface="Calibri" pitchFamily="34" charset="0"/>
-                <a:ea typeface="Calibri" pitchFamily="34" charset="-122"/>
-                <a:cs typeface="Calibri" pitchFamily="34" charset="-120"/>
+                <a:cs typeface="Amiri" pitchFamily="2" charset="-78"/>
               </a:rPr>
               <a:t>P4–P5: kuntu qad + past.</a:t>
             </a:r>
@@ -29587,8 +29026,7 @@
                   <a:srgbClr val="8A6D1E"/>
                 </a:solidFill>
                 <a:latin typeface="Calibri" pitchFamily="34" charset="0"/>
-                <a:ea typeface="Calibri" pitchFamily="34" charset="-122"/>
-                <a:cs typeface="Calibri" pitchFamily="34" charset="-120"/>
+                <a:cs typeface="Amiri" pitchFamily="2" charset="-78"/>
               </a:rPr>
               <a:t>THE KEY IDEA FOR TODAY</a:t>
             </a:r>
@@ -29626,8 +29064,7 @@
                   <a:srgbClr val="1F2A37"/>
                 </a:solidFill>
                 <a:latin typeface="Calibri" pitchFamily="34" charset="0"/>
-                <a:ea typeface="Calibri" pitchFamily="34" charset="-122"/>
-                <a:cs typeface="Calibri" pitchFamily="34" charset="-120"/>
+                <a:cs typeface="Amiri" pitchFamily="2" charset="-78"/>
               </a:rPr>
               <a:t>One prompt = one mark: answer exactly what is asked, in a full sentence.</a:t>
             </a:r>
@@ -29667,9 +29104,8 @@
                 <a:solidFill>
                   <a:srgbClr val="1B3B6F"/>
                 </a:solidFill>
-                <a:latin typeface="Amiri" pitchFamily="34" charset="0"/>
-                <a:ea typeface="Amiri" pitchFamily="34" charset="-122"/>
-                <a:cs typeface="Amiri" pitchFamily="34" charset="-120"/>
+                <a:latin typeface="Amiri" pitchFamily="2" charset="-78"/>
+                <a:cs typeface="Amiri" pitchFamily="2" charset="-78"/>
               </a:rPr>
               <a:t>مَا الَّذِي تَشْكُو مِنْهُ؟ ← أَشْعُرُ بِصُدَاعٍ مُنْذُ أُسْبُوعٍ.</a:t>
             </a:r>
@@ -29707,8 +29143,7 @@
                   <a:srgbClr val="8A93A0"/>
                 </a:solidFill>
                 <a:latin typeface="Calibri" pitchFamily="34" charset="0"/>
-                <a:ea typeface="Calibri" pitchFamily="34" charset="-122"/>
-                <a:cs typeface="Calibri" pitchFamily="34" charset="-120"/>
+                <a:cs typeface="Amiri" pitchFamily="2" charset="-78"/>
               </a:rPr>
               <a:t>5 / 21</a:t>
             </a:r>
@@ -29802,9 +29237,8 @@
                 <a:solidFill>
                   <a:srgbClr val="D4AF37"/>
                 </a:solidFill>
-                <a:latin typeface="Amiri" pitchFamily="34" charset="0"/>
-                <a:ea typeface="Amiri" pitchFamily="34" charset="-122"/>
-                <a:cs typeface="Amiri" pitchFamily="34" charset="-120"/>
+                <a:latin typeface="Amiri" pitchFamily="2" charset="-78"/>
+                <a:cs typeface="Amiri" pitchFamily="2" charset="-78"/>
               </a:rPr>
               <a:t>م</a:t>
             </a:r>
@@ -29842,8 +29276,7 @@
                   <a:srgbClr val="1B3B6F"/>
                 </a:solidFill>
                 <a:latin typeface="Cambria" pitchFamily="34" charset="0"/>
-                <a:ea typeface="Cambria" pitchFamily="34" charset="-122"/>
-                <a:cs typeface="Cambria" pitchFamily="34" charset="-120"/>
+                <a:cs typeface="Amiri" pitchFamily="2" charset="-78"/>
               </a:rPr>
               <a:t>Al Madina Online School</a:t>
             </a:r>
@@ -29881,8 +29314,7 @@
                   <a:srgbClr val="8A6D1E"/>
                 </a:solidFill>
                 <a:latin typeface="Calibri" pitchFamily="34" charset="0"/>
-                <a:ea typeface="Calibri" pitchFamily="34" charset="-122"/>
-                <a:cs typeface="Calibri" pitchFamily="34" charset="-120"/>
+                <a:cs typeface="Amiri" pitchFamily="2" charset="-78"/>
               </a:rPr>
               <a:t>ARABIC DEPARTMENT · MIFTAH ARABIC · IGCSE 0544</a:t>
             </a:r>
@@ -29947,8 +29379,7 @@
                   <a:srgbClr val="FFFFFF"/>
                 </a:solidFill>
                 <a:latin typeface="Calibri" pitchFamily="34" charset="0"/>
-                <a:ea typeface="Calibri" pitchFamily="34" charset="-122"/>
-                <a:cs typeface="Calibri" pitchFamily="34" charset="-120"/>
+                <a:cs typeface="Amiri" pitchFamily="2" charset="-78"/>
               </a:rPr>
               <a:t>P6-L06 · IGCSE Bridge</a:t>
             </a:r>
@@ -30013,8 +29444,7 @@
                   <a:srgbClr val="FFFFFF"/>
                 </a:solidFill>
                 <a:latin typeface="Calibri" pitchFamily="34" charset="0"/>
-                <a:ea typeface="Calibri" pitchFamily="34" charset="-122"/>
-                <a:cs typeface="Calibri" pitchFamily="34" charset="-120"/>
+                <a:cs typeface="Amiri" pitchFamily="2" charset="-78"/>
               </a:rPr>
               <a:t>WELCOME · 1 MIN</a:t>
             </a:r>
@@ -30052,8 +29482,7 @@
                   <a:srgbClr val="5A6472"/>
                 </a:solidFill>
                 <a:latin typeface="Calibri" pitchFamily="34" charset="0"/>
-                <a:ea typeface="Calibri" pitchFamily="34" charset="-122"/>
-                <a:cs typeface="Calibri" pitchFamily="34" charset="-120"/>
+                <a:cs typeface="Amiri" pitchFamily="2" charset="-78"/>
               </a:rPr>
               <a:t>LESSON OBJECTIVES</a:t>
             </a:r>
@@ -30091,8 +29520,7 @@
                   <a:srgbClr val="1B3B6F"/>
                 </a:solidFill>
                 <a:latin typeface="Cambria" pitchFamily="34" charset="0"/>
-                <a:ea typeface="Cambria" pitchFamily="34" charset="-122"/>
-                <a:cs typeface="Cambria" pitchFamily="34" charset="-120"/>
+                <a:cs typeface="Amiri" pitchFamily="2" charset="-78"/>
               </a:rPr>
               <a:t>Objectives and success criteria</a:t>
             </a:r>
@@ -30129,9 +29557,8 @@
                 <a:solidFill>
                   <a:srgbClr val="8A6D1E"/>
                 </a:solidFill>
-                <a:latin typeface="Amiri" pitchFamily="34" charset="0"/>
-                <a:ea typeface="Amiri" pitchFamily="34" charset="-122"/>
-                <a:cs typeface="Amiri" pitchFamily="34" charset="-120"/>
+                <a:latin typeface="Amiri" pitchFamily="2" charset="-78"/>
+                <a:cs typeface="Amiri" pitchFamily="2" charset="-78"/>
               </a:rPr>
               <a:t>الأَهْدَافُ وَمَعَايِيرُ النَّجَاحِ</a:t>
             </a:r>
@@ -30169,8 +29596,7 @@
                   <a:srgbClr val="8A93A0"/>
                 </a:solidFill>
                 <a:latin typeface="Calibri" pitchFamily="34" charset="0"/>
-                <a:ea typeface="Calibri" pitchFamily="34" charset="-122"/>
-                <a:cs typeface="Calibri" pitchFamily="34" charset="-120"/>
+                <a:cs typeface="Amiri" pitchFamily="2" charset="-78"/>
               </a:rPr>
               <a:t>Miftah Arabic · Progression P6 · IGCSE Bridge · P6-L06</a:t>
             </a:r>
@@ -30242,8 +29668,7 @@
                   <a:srgbClr val="1B3B6F"/>
                 </a:solidFill>
                 <a:latin typeface="Calibri" pitchFamily="34" charset="0"/>
-                <a:ea typeface="Calibri" pitchFamily="34" charset="-122"/>
-                <a:cs typeface="Calibri" pitchFamily="34" charset="-120"/>
+                <a:cs typeface="Amiri" pitchFamily="2" charset="-78"/>
               </a:rPr>
               <a:t>TODAY YOU WILL</a:t>
             </a:r>
@@ -30280,9 +29705,8 @@
                 <a:solidFill>
                   <a:srgbClr val="8A6D1E"/>
                 </a:solidFill>
-                <a:latin typeface="Amiri" pitchFamily="34" charset="0"/>
-                <a:ea typeface="Amiri" pitchFamily="34" charset="-122"/>
-                <a:cs typeface="Amiri" pitchFamily="34" charset="-120"/>
+                <a:latin typeface="Amiri" pitchFamily="2" charset="-78"/>
+                <a:cs typeface="Amiri" pitchFamily="2" charset="-78"/>
               </a:rPr>
               <a:t>سَتَتَعَلَّمُ اليَوْمَ</a:t>
             </a:r>
@@ -30345,8 +29769,7 @@
                   <a:srgbClr val="D4AF37"/>
                 </a:solidFill>
                 <a:latin typeface="Calibri" pitchFamily="34" charset="0"/>
-                <a:ea typeface="Calibri" pitchFamily="34" charset="-122"/>
-                <a:cs typeface="Calibri" pitchFamily="34" charset="-120"/>
+                <a:cs typeface="Amiri" pitchFamily="2" charset="-78"/>
               </a:rPr>
               <a:t>1</a:t>
             </a:r>
@@ -30384,8 +29807,7 @@
                   <a:srgbClr val="1F2A37"/>
                 </a:solidFill>
                 <a:latin typeface="Calibri" pitchFamily="34" charset="0"/>
-                <a:ea typeface="Calibri" pitchFamily="34" charset="-122"/>
-                <a:cs typeface="Calibri" pitchFamily="34" charset="-120"/>
+                <a:cs typeface="Amiri" pitchFamily="2" charset="-78"/>
               </a:rPr>
               <a:t>Respond to every role-play prompt with relevant, sufficient language.</a:t>
             </a:r>
@@ -30448,8 +29870,7 @@
                   <a:srgbClr val="D4AF37"/>
                 </a:solidFill>
                 <a:latin typeface="Calibri" pitchFamily="34" charset="0"/>
-                <a:ea typeface="Calibri" pitchFamily="34" charset="-122"/>
-                <a:cs typeface="Calibri" pitchFamily="34" charset="-120"/>
+                <a:cs typeface="Amiri" pitchFamily="2" charset="-78"/>
               </a:rPr>
               <a:t>2</a:t>
             </a:r>
@@ -30487,8 +29908,7 @@
                   <a:srgbClr val="1F2A37"/>
                 </a:solidFill>
                 <a:latin typeface="Calibri" pitchFamily="34" charset="0"/>
-                <a:ea typeface="Calibri" pitchFamily="34" charset="-122"/>
-                <a:cs typeface="Calibri" pitchFamily="34" charset="-120"/>
+                <a:cs typeface="Amiri" pitchFamily="2" charset="-78"/>
               </a:rPr>
               <a:t>Use the right transactional language for each topic area.</a:t>
             </a:r>
@@ -30551,8 +29971,7 @@
                   <a:srgbClr val="D4AF37"/>
                 </a:solidFill>
                 <a:latin typeface="Calibri" pitchFamily="34" charset="0"/>
-                <a:ea typeface="Calibri" pitchFamily="34" charset="-122"/>
-                <a:cs typeface="Calibri" pitchFamily="34" charset="-120"/>
+                <a:cs typeface="Amiri" pitchFamily="2" charset="-78"/>
               </a:rPr>
               <a:t>3</a:t>
             </a:r>
@@ -30590,8 +30009,7 @@
                   <a:srgbClr val="1F2A37"/>
                 </a:solidFill>
                 <a:latin typeface="Calibri" pitchFamily="34" charset="0"/>
-                <a:ea typeface="Calibri" pitchFamily="34" charset="-122"/>
-                <a:cs typeface="Calibri" pitchFamily="34" charset="-120"/>
+                <a:cs typeface="Amiri" pitchFamily="2" charset="-78"/>
               </a:rPr>
               <a:t>Score Communication by answering exactly what each prompt asks.</a:t>
             </a:r>
@@ -30654,8 +30072,7 @@
                   <a:srgbClr val="D4AF37"/>
                 </a:solidFill>
                 <a:latin typeface="Calibri" pitchFamily="34" charset="0"/>
-                <a:ea typeface="Calibri" pitchFamily="34" charset="-122"/>
-                <a:cs typeface="Calibri" pitchFamily="34" charset="-120"/>
+                <a:cs typeface="Amiri" pitchFamily="2" charset="-78"/>
               </a:rPr>
               <a:t>4</a:t>
             </a:r>
@@ -30693,8 +30110,7 @@
                   <a:srgbClr val="1F2A37"/>
                 </a:solidFill>
                 <a:latin typeface="Calibri" pitchFamily="34" charset="0"/>
-                <a:ea typeface="Calibri" pitchFamily="34" charset="-122"/>
-                <a:cs typeface="Calibri" pitchFamily="34" charset="-120"/>
+                <a:cs typeface="Amiri" pitchFamily="2" charset="-78"/>
               </a:rPr>
               <a:t>Apply the role-play mark scheme to self-assess each task.</a:t>
             </a:r>
@@ -30786,8 +30202,7 @@
                   <a:srgbClr val="FFFFFF"/>
                 </a:solidFill>
                 <a:latin typeface="Calibri" pitchFamily="34" charset="0"/>
-                <a:ea typeface="Calibri" pitchFamily="34" charset="-122"/>
-                <a:cs typeface="Calibri" pitchFamily="34" charset="-120"/>
+                <a:cs typeface="Amiri" pitchFamily="2" charset="-78"/>
               </a:rPr>
               <a:t>CORE</a:t>
             </a:r>
@@ -30825,8 +30240,7 @@
                   <a:srgbClr val="2E8B57"/>
                 </a:solidFill>
                 <a:latin typeface="Calibri" pitchFamily="34" charset="0"/>
-                <a:ea typeface="Calibri" pitchFamily="34" charset="-122"/>
-                <a:cs typeface="Calibri" pitchFamily="34" charset="-120"/>
+                <a:cs typeface="Amiri" pitchFamily="2" charset="-78"/>
               </a:rPr>
               <a:t>Everyone</a:t>
             </a:r>
@@ -30864,8 +30278,7 @@
                   <a:srgbClr val="2E8B57"/>
                 </a:solidFill>
                 <a:latin typeface="Calibri" pitchFamily="34" charset="0"/>
-                <a:ea typeface="Calibri" pitchFamily="34" charset="-122"/>
-                <a:cs typeface="Calibri" pitchFamily="34" charset="-120"/>
+                <a:cs typeface="Amiri" pitchFamily="2" charset="-78"/>
               </a:rPr>
               <a:t>☐  I can answer each prompt with a full sentence.</a:t>
             </a:r>
@@ -30903,8 +30316,7 @@
                   <a:srgbClr val="2E8B57"/>
                 </a:solidFill>
                 <a:latin typeface="Calibri" pitchFamily="34" charset="0"/>
-                <a:ea typeface="Calibri" pitchFamily="34" charset="-122"/>
-                <a:cs typeface="Calibri" pitchFamily="34" charset="-120"/>
+                <a:cs typeface="Amiri" pitchFamily="2" charset="-78"/>
               </a:rPr>
               <a:t>☐  I can do role plays 1–3 with the starts.</a:t>
             </a:r>
@@ -30996,8 +30408,7 @@
                   <a:srgbClr val="FFFFFF"/>
                 </a:solidFill>
                 <a:latin typeface="Calibri" pitchFamily="34" charset="0"/>
-                <a:ea typeface="Calibri" pitchFamily="34" charset="-122"/>
-                <a:cs typeface="Calibri" pitchFamily="34" charset="-120"/>
+                <a:cs typeface="Amiri" pitchFamily="2" charset="-78"/>
               </a:rPr>
               <a:t>DEVELOP</a:t>
             </a:r>
@@ -31035,8 +30446,7 @@
                   <a:srgbClr val="C9780A"/>
                 </a:solidFill>
                 <a:latin typeface="Calibri" pitchFamily="34" charset="0"/>
-                <a:ea typeface="Calibri" pitchFamily="34" charset="-122"/>
-                <a:cs typeface="Calibri" pitchFamily="34" charset="-120"/>
+                <a:cs typeface="Amiri" pitchFamily="2" charset="-78"/>
               </a:rPr>
               <a:t>Most of us</a:t>
             </a:r>
@@ -31074,8 +30484,7 @@
                   <a:srgbClr val="C9780A"/>
                 </a:solidFill>
                 <a:latin typeface="Calibri" pitchFamily="34" charset="0"/>
-                <a:ea typeface="Calibri" pitchFamily="34" charset="-122"/>
-                <a:cs typeface="Calibri" pitchFamily="34" charset="-120"/>
+                <a:cs typeface="Amiri" pitchFamily="2" charset="-78"/>
               </a:rPr>
               <a:t>☐  I can answer exactly what each prompt asks.</a:t>
             </a:r>
@@ -31113,8 +30522,7 @@
                   <a:srgbClr val="C9780A"/>
                 </a:solidFill>
                 <a:latin typeface="Calibri" pitchFamily="34" charset="0"/>
-                <a:ea typeface="Calibri" pitchFamily="34" charset="-122"/>
-                <a:cs typeface="Calibri" pitchFamily="34" charset="-120"/>
+                <a:cs typeface="Amiri" pitchFamily="2" charset="-78"/>
               </a:rPr>
               <a:t>☐  I can use the right tense for each prompt.</a:t>
             </a:r>
@@ -31206,8 +30614,7 @@
                   <a:srgbClr val="FFFFFF"/>
                 </a:solidFill>
                 <a:latin typeface="Calibri" pitchFamily="34" charset="0"/>
-                <a:ea typeface="Calibri" pitchFamily="34" charset="-122"/>
-                <a:cs typeface="Calibri" pitchFamily="34" charset="-120"/>
+                <a:cs typeface="Amiri" pitchFamily="2" charset="-78"/>
               </a:rPr>
               <a:t>STRETCH</a:t>
             </a:r>
@@ -31245,8 +30652,7 @@
                   <a:srgbClr val="B83227"/>
                 </a:solidFill>
                 <a:latin typeface="Calibri" pitchFamily="34" charset="0"/>
-                <a:ea typeface="Calibri" pitchFamily="34" charset="-122"/>
-                <a:cs typeface="Calibri" pitchFamily="34" charset="-120"/>
+                <a:cs typeface="Amiri" pitchFamily="2" charset="-78"/>
               </a:rPr>
               <a:t>Aim high</a:t>
             </a:r>
@@ -31284,8 +30690,7 @@
                   <a:srgbClr val="B83227"/>
                 </a:solidFill>
                 <a:latin typeface="Calibri" pitchFamily="34" charset="0"/>
-                <a:ea typeface="Calibri" pitchFamily="34" charset="-122"/>
-                <a:cs typeface="Calibri" pitchFamily="34" charset="-120"/>
+                <a:cs typeface="Amiri" pitchFamily="2" charset="-78"/>
               </a:rPr>
               <a:t>☐  I can give two or three sentences per prompt.</a:t>
             </a:r>
@@ -31323,8 +30728,7 @@
                   <a:srgbClr val="B83227"/>
                 </a:solidFill>
                 <a:latin typeface="Calibri" pitchFamily="34" charset="0"/>
-                <a:ea typeface="Calibri" pitchFamily="34" charset="-122"/>
-                <a:cs typeface="Calibri" pitchFamily="34" charset="-120"/>
+                <a:cs typeface="Amiri" pitchFamily="2" charset="-78"/>
               </a:rPr>
               <a:t>☐  I can self-mark Communication and Accuracy.</a:t>
             </a:r>
@@ -31362,8 +30766,7 @@
                   <a:srgbClr val="8A93A0"/>
                 </a:solidFill>
                 <a:latin typeface="Calibri" pitchFamily="34" charset="0"/>
-                <a:ea typeface="Calibri" pitchFamily="34" charset="-122"/>
-                <a:cs typeface="Calibri" pitchFamily="34" charset="-120"/>
+                <a:cs typeface="Amiri" pitchFamily="2" charset="-78"/>
               </a:rPr>
               <a:t>6 / 21</a:t>
             </a:r>
@@ -31485,8 +30888,7 @@
                   <a:srgbClr val="0D1F3C"/>
                 </a:solidFill>
                 <a:latin typeface="Calibri" pitchFamily="34" charset="0"/>
-                <a:ea typeface="Calibri" pitchFamily="34" charset="-122"/>
-                <a:cs typeface="Calibri" pitchFamily="34" charset="-120"/>
+                <a:cs typeface="Amiri" pitchFamily="2" charset="-78"/>
               </a:rPr>
               <a:t>TEACHER INSTRUCTION · 7 MIN</a:t>
             </a:r>
@@ -31524,8 +30926,7 @@
                   <a:srgbClr val="FFFFFF"/>
                 </a:solidFill>
                 <a:latin typeface="Cambria" pitchFamily="34" charset="0"/>
-                <a:ea typeface="Cambria" pitchFamily="34" charset="-122"/>
-                <a:cs typeface="Cambria" pitchFamily="34" charset="-120"/>
+                <a:cs typeface="Amiri" pitchFamily="2" charset="-78"/>
               </a:rPr>
               <a:t>Key words for today</a:t>
             </a:r>
@@ -31562,9 +30963,8 @@
                 <a:solidFill>
                   <a:srgbClr val="D4AF37"/>
                 </a:solidFill>
-                <a:latin typeface="Amiri" pitchFamily="34" charset="0"/>
-                <a:ea typeface="Amiri" pitchFamily="34" charset="-122"/>
-                <a:cs typeface="Amiri" pitchFamily="34" charset="-120"/>
+                <a:latin typeface="Amiri" pitchFamily="2" charset="-78"/>
+                <a:cs typeface="Amiri" pitchFamily="2" charset="-78"/>
               </a:rPr>
               <a:t>كَلِمَاتُ الدَّرْسِ</a:t>
             </a:r>
@@ -31602,8 +31002,7 @@
                   <a:srgbClr val="C6D2E6"/>
                 </a:solidFill>
                 <a:latin typeface="Calibri" pitchFamily="34" charset="0"/>
-                <a:ea typeface="Calibri" pitchFamily="34" charset="-122"/>
-                <a:cs typeface="Calibri" pitchFamily="34" charset="-120"/>
+                <a:cs typeface="Amiri" pitchFamily="2" charset="-78"/>
               </a:rPr>
               <a:t>8 exam words from the website in one group. </a:t>
             </a:r>
@@ -31668,8 +31067,7 @@
                   <a:srgbClr val="D4AF37"/>
                 </a:solidFill>
                 <a:latin typeface="Calibri" pitchFamily="34" charset="0"/>
-                <a:ea typeface="Calibri" pitchFamily="34" charset="-122"/>
-                <a:cs typeface="Calibri" pitchFamily="34" charset="-120"/>
+                <a:cs typeface="Amiri" pitchFamily="2" charset="-78"/>
               </a:rPr>
               <a:t>GROUP 1</a:t>
             </a:r>
@@ -31685,8 +31083,7 @@
                   <a:srgbClr val="FFFFFF"/>
                 </a:solidFill>
                 <a:latin typeface="Calibri" pitchFamily="34" charset="0"/>
-                <a:ea typeface="Calibri" pitchFamily="34" charset="-122"/>
-                <a:cs typeface="Calibri" pitchFamily="34" charset="-120"/>
+                <a:cs typeface="Amiri" pitchFamily="2" charset="-78"/>
               </a:rPr>
               <a:t>Transactional language · 8</a:t>
             </a:r>
@@ -31751,8 +31148,7 @@
                   <a:srgbClr val="2E8B57"/>
                 </a:solidFill>
                 <a:latin typeface="Calibri" pitchFamily="34" charset="0"/>
-                <a:ea typeface="Calibri" pitchFamily="34" charset="-122"/>
-                <a:cs typeface="Calibri" pitchFamily="34" charset="-120"/>
+                <a:cs typeface="Amiri" pitchFamily="2" charset="-78"/>
               </a:rPr>
               <a:t>BRIDGE FROM URDU</a:t>
             </a:r>
@@ -31789,9 +31185,8 @@
                 <a:solidFill>
                   <a:srgbClr val="1B3B6F"/>
                 </a:solidFill>
-                <a:latin typeface="Amiri" pitchFamily="34" charset="0"/>
-                <a:ea typeface="Amiri" pitchFamily="34" charset="-122"/>
-                <a:cs typeface="Amiri" pitchFamily="34" charset="-120"/>
+                <a:latin typeface="Amiri" pitchFamily="2" charset="-78"/>
+                <a:cs typeface="Amiri" pitchFamily="2" charset="-78"/>
               </a:rPr>
               <a:t>عِلَاجٌ</a:t>
             </a:r>
@@ -31828,9 +31223,8 @@
                 <a:solidFill>
                   <a:srgbClr val="2E8B57"/>
                 </a:solidFill>
-                <a:latin typeface="Amiri" pitchFamily="34" charset="0"/>
-                <a:ea typeface="Amiri" pitchFamily="34" charset="-122"/>
-                <a:cs typeface="Amiri" pitchFamily="34" charset="-120"/>
+                <a:latin typeface="Amiri" pitchFamily="2" charset="-78"/>
+                <a:cs typeface="Amiri" pitchFamily="2" charset="-78"/>
               </a:rPr>
               <a:t>‎علاج‎ </a:t>
             </a:r>
@@ -31843,8 +31237,7 @@
                   <a:srgbClr val="2E8B57"/>
                 </a:solidFill>
                 <a:latin typeface="Calibri" pitchFamily="34" charset="0"/>
-                <a:ea typeface="Calibri" pitchFamily="34" charset="-122"/>
-                <a:cs typeface="Calibri" pitchFamily="34" charset="-120"/>
+                <a:cs typeface="Amiri" pitchFamily="2" charset="-78"/>
               </a:rPr>
               <a:t> ilāj · treatment</a:t>
             </a:r>
@@ -31881,9 +31274,8 @@
                 <a:solidFill>
                   <a:srgbClr val="1B3B6F"/>
                 </a:solidFill>
-                <a:latin typeface="Amiri" pitchFamily="34" charset="0"/>
-                <a:ea typeface="Amiri" pitchFamily="34" charset="-122"/>
-                <a:cs typeface="Amiri" pitchFamily="34" charset="-120"/>
+                <a:latin typeface="Amiri" pitchFamily="2" charset="-78"/>
+                <a:cs typeface="Amiri" pitchFamily="2" charset="-78"/>
               </a:rPr>
               <a:t>سَفَرٌ</a:t>
             </a:r>
@@ -31920,9 +31312,8 @@
                 <a:solidFill>
                   <a:srgbClr val="2E8B57"/>
                 </a:solidFill>
-                <a:latin typeface="Amiri" pitchFamily="34" charset="0"/>
-                <a:ea typeface="Amiri" pitchFamily="34" charset="-122"/>
-                <a:cs typeface="Amiri" pitchFamily="34" charset="-120"/>
+                <a:latin typeface="Amiri" pitchFamily="2" charset="-78"/>
+                <a:cs typeface="Amiri" pitchFamily="2" charset="-78"/>
               </a:rPr>
               <a:t>‎سفر‎ </a:t>
             </a:r>
@@ -31935,8 +31326,7 @@
                   <a:srgbClr val="2E8B57"/>
                 </a:solidFill>
                 <a:latin typeface="Calibri" pitchFamily="34" charset="0"/>
-                <a:ea typeface="Calibri" pitchFamily="34" charset="-122"/>
-                <a:cs typeface="Calibri" pitchFamily="34" charset="-120"/>
+                <a:cs typeface="Amiri" pitchFamily="2" charset="-78"/>
               </a:rPr>
               <a:t> safar · travel</a:t>
             </a:r>
@@ -31973,9 +31363,8 @@
                 <a:solidFill>
                   <a:srgbClr val="1B3B6F"/>
                 </a:solidFill>
-                <a:latin typeface="Amiri" pitchFamily="34" charset="0"/>
-                <a:ea typeface="Amiri" pitchFamily="34" charset="-122"/>
-                <a:cs typeface="Amiri" pitchFamily="34" charset="-120"/>
+                <a:latin typeface="Amiri" pitchFamily="2" charset="-78"/>
+                <a:cs typeface="Amiri" pitchFamily="2" charset="-78"/>
               </a:rPr>
               <a:t>إِقَامَةٌ</a:t>
             </a:r>
@@ -32012,9 +31401,8 @@
                 <a:solidFill>
                   <a:srgbClr val="2E8B57"/>
                 </a:solidFill>
-                <a:latin typeface="Amiri" pitchFamily="34" charset="0"/>
-                <a:ea typeface="Amiri" pitchFamily="34" charset="-122"/>
-                <a:cs typeface="Amiri" pitchFamily="34" charset="-120"/>
+                <a:latin typeface="Amiri" pitchFamily="2" charset="-78"/>
+                <a:cs typeface="Amiri" pitchFamily="2" charset="-78"/>
               </a:rPr>
               <a:t>‎اقامت‎ </a:t>
             </a:r>
@@ -32027,8 +31415,7 @@
                   <a:srgbClr val="2E8B57"/>
                 </a:solidFill>
                 <a:latin typeface="Calibri" pitchFamily="34" charset="0"/>
-                <a:ea typeface="Calibri" pitchFamily="34" charset="-122"/>
-                <a:cs typeface="Calibri" pitchFamily="34" charset="-120"/>
+                <a:cs typeface="Amiri" pitchFamily="2" charset="-78"/>
               </a:rPr>
               <a:t> iqāmat · accommodation, stay</a:t>
             </a:r>
@@ -32065,9 +31452,8 @@
                 <a:solidFill>
                   <a:srgbClr val="1B3B6F"/>
                 </a:solidFill>
-                <a:latin typeface="Amiri" pitchFamily="34" charset="0"/>
-                <a:ea typeface="Amiri" pitchFamily="34" charset="-122"/>
-                <a:cs typeface="Amiri" pitchFamily="34" charset="-120"/>
+                <a:latin typeface="Amiri" pitchFamily="2" charset="-78"/>
+                <a:cs typeface="Amiri" pitchFamily="2" charset="-78"/>
               </a:rPr>
               <a:t>مَوْعِدٌ</a:t>
             </a:r>
@@ -32104,9 +31490,8 @@
                 <a:solidFill>
                   <a:srgbClr val="2E8B57"/>
                 </a:solidFill>
-                <a:latin typeface="Amiri" pitchFamily="34" charset="0"/>
-                <a:ea typeface="Amiri" pitchFamily="34" charset="-122"/>
-                <a:cs typeface="Amiri" pitchFamily="34" charset="-120"/>
+                <a:latin typeface="Amiri" pitchFamily="2" charset="-78"/>
+                <a:cs typeface="Amiri" pitchFamily="2" charset="-78"/>
               </a:rPr>
               <a:t>‎وعدہ‎ </a:t>
             </a:r>
@@ -32119,8 +31504,7 @@
                   <a:srgbClr val="2E8B57"/>
                 </a:solidFill>
                 <a:latin typeface="Calibri" pitchFamily="34" charset="0"/>
-                <a:ea typeface="Calibri" pitchFamily="34" charset="-122"/>
-                <a:cs typeface="Calibri" pitchFamily="34" charset="-120"/>
+                <a:cs typeface="Amiri" pitchFamily="2" charset="-78"/>
               </a:rPr>
               <a:t> wada · Arabic: an appointment · Urdu: a promise</a:t>
             </a:r>
@@ -32157,9 +31541,8 @@
                 <a:solidFill>
                   <a:srgbClr val="1B3B6F"/>
                 </a:solidFill>
-                <a:latin typeface="Amiri" pitchFamily="34" charset="0"/>
-                <a:ea typeface="Amiri" pitchFamily="34" charset="-122"/>
-                <a:cs typeface="Amiri" pitchFamily="34" charset="-120"/>
+                <a:latin typeface="Amiri" pitchFamily="2" charset="-78"/>
+                <a:cs typeface="Amiri" pitchFamily="2" charset="-78"/>
               </a:rPr>
               <a:t>مُذَاكَرَةٌ</a:t>
             </a:r>
@@ -32196,9 +31579,8 @@
                 <a:solidFill>
                   <a:srgbClr val="2E8B57"/>
                 </a:solidFill>
-                <a:latin typeface="Amiri" pitchFamily="34" charset="0"/>
-                <a:ea typeface="Amiri" pitchFamily="34" charset="-122"/>
-                <a:cs typeface="Amiri" pitchFamily="34" charset="-120"/>
+                <a:latin typeface="Amiri" pitchFamily="2" charset="-78"/>
+                <a:cs typeface="Amiri" pitchFamily="2" charset="-78"/>
               </a:rPr>
               <a:t>‎مذاکرات‎ </a:t>
             </a:r>
@@ -32211,8 +31593,7 @@
                   <a:srgbClr val="2E8B57"/>
                 </a:solidFill>
                 <a:latin typeface="Calibri" pitchFamily="34" charset="0"/>
-                <a:ea typeface="Calibri" pitchFamily="34" charset="-122"/>
-                <a:cs typeface="Calibri" pitchFamily="34" charset="-120"/>
+                <a:cs typeface="Amiri" pitchFamily="2" charset="-78"/>
               </a:rPr>
               <a:t> muzākarāt · Arabic: studying · Urdu: negotiations</a:t>
             </a:r>
@@ -32250,8 +31631,7 @@
                   <a:srgbClr val="8A93A0"/>
                 </a:solidFill>
                 <a:latin typeface="Calibri" pitchFamily="34" charset="0"/>
-                <a:ea typeface="Calibri" pitchFamily="34" charset="-122"/>
-                <a:cs typeface="Calibri" pitchFamily="34" charset="-120"/>
+                <a:cs typeface="Amiri" pitchFamily="2" charset="-78"/>
               </a:rPr>
               <a:t>7 / 21</a:t>
             </a:r>
@@ -32345,9 +31725,8 @@
                 <a:solidFill>
                   <a:srgbClr val="D4AF37"/>
                 </a:solidFill>
-                <a:latin typeface="Amiri" pitchFamily="34" charset="0"/>
-                <a:ea typeface="Amiri" pitchFamily="34" charset="-122"/>
-                <a:cs typeface="Amiri" pitchFamily="34" charset="-120"/>
+                <a:latin typeface="Amiri" pitchFamily="2" charset="-78"/>
+                <a:cs typeface="Amiri" pitchFamily="2" charset="-78"/>
               </a:rPr>
               <a:t>م</a:t>
             </a:r>
@@ -32385,8 +31764,7 @@
                   <a:srgbClr val="1B3B6F"/>
                 </a:solidFill>
                 <a:latin typeface="Cambria" pitchFamily="34" charset="0"/>
-                <a:ea typeface="Cambria" pitchFamily="34" charset="-122"/>
-                <a:cs typeface="Cambria" pitchFamily="34" charset="-120"/>
+                <a:cs typeface="Amiri" pitchFamily="2" charset="-78"/>
               </a:rPr>
               <a:t>Al Madina Online School</a:t>
             </a:r>
@@ -32424,8 +31802,7 @@
                   <a:srgbClr val="8A6D1E"/>
                 </a:solidFill>
                 <a:latin typeface="Calibri" pitchFamily="34" charset="0"/>
-                <a:ea typeface="Calibri" pitchFamily="34" charset="-122"/>
-                <a:cs typeface="Calibri" pitchFamily="34" charset="-120"/>
+                <a:cs typeface="Amiri" pitchFamily="2" charset="-78"/>
               </a:rPr>
               <a:t>ARABIC DEPARTMENT · MIFTAH ARABIC · IGCSE 0544</a:t>
             </a:r>
@@ -32490,8 +31867,7 @@
                   <a:srgbClr val="FFFFFF"/>
                 </a:solidFill>
                 <a:latin typeface="Calibri" pitchFamily="34" charset="0"/>
-                <a:ea typeface="Calibri" pitchFamily="34" charset="-122"/>
-                <a:cs typeface="Calibri" pitchFamily="34" charset="-120"/>
+                <a:cs typeface="Amiri" pitchFamily="2" charset="-78"/>
               </a:rPr>
               <a:t>P6-L06 · IGCSE Bridge</a:t>
             </a:r>
@@ -32556,8 +31932,7 @@
                   <a:srgbClr val="FFFFFF"/>
                 </a:solidFill>
                 <a:latin typeface="Calibri" pitchFamily="34" charset="0"/>
-                <a:ea typeface="Calibri" pitchFamily="34" charset="-122"/>
-                <a:cs typeface="Calibri" pitchFamily="34" charset="-120"/>
+                <a:cs typeface="Amiri" pitchFamily="2" charset="-78"/>
               </a:rPr>
               <a:t>TEACHER INSTRUCTION · 2 MIN</a:t>
             </a:r>
@@ -32595,8 +31970,7 @@
                   <a:srgbClr val="1B3B6F"/>
                 </a:solidFill>
                 <a:latin typeface="Calibri" pitchFamily="34" charset="0"/>
-                <a:ea typeface="Calibri" pitchFamily="34" charset="-122"/>
-                <a:cs typeface="Calibri" pitchFamily="34" charset="-120"/>
+                <a:cs typeface="Amiri" pitchFamily="2" charset="-78"/>
               </a:rPr>
               <a:t>KEY WORDS · GROUP 1</a:t>
             </a:r>
@@ -32634,8 +32008,7 @@
                   <a:srgbClr val="1B3B6F"/>
                 </a:solidFill>
                 <a:latin typeface="Cambria" pitchFamily="34" charset="0"/>
-                <a:ea typeface="Cambria" pitchFamily="34" charset="-122"/>
-                <a:cs typeface="Cambria" pitchFamily="34" charset="-120"/>
+                <a:cs typeface="Amiri" pitchFamily="2" charset="-78"/>
               </a:rPr>
               <a:t>Transactional language (1 of 2)</a:t>
             </a:r>
@@ -32672,9 +32045,8 @@
                 <a:solidFill>
                   <a:srgbClr val="8A6D1E"/>
                 </a:solidFill>
-                <a:latin typeface="Amiri" pitchFamily="34" charset="0"/>
-                <a:ea typeface="Amiri" pitchFamily="34" charset="-122"/>
-                <a:cs typeface="Amiri" pitchFamily="34" charset="-120"/>
+                <a:latin typeface="Amiri" pitchFamily="2" charset="-78"/>
+                <a:cs typeface="Amiri" pitchFamily="2" charset="-78"/>
               </a:rPr>
               <a:t>كَلِمَاتُ الدَّرْسِ</a:t>
             </a:r>
@@ -32712,8 +32084,7 @@
                   <a:srgbClr val="8A93A0"/>
                 </a:solidFill>
                 <a:latin typeface="Calibri" pitchFamily="34" charset="0"/>
-                <a:ea typeface="Calibri" pitchFamily="34" charset="-122"/>
-                <a:cs typeface="Calibri" pitchFamily="34" charset="-120"/>
+                <a:cs typeface="Amiri" pitchFamily="2" charset="-78"/>
               </a:rPr>
               <a:t>Miftah Arabic · Progression P6 · IGCSE Bridge · P6-L06</a:t>
             </a:r>
@@ -32810,8 +32181,7 @@
                   <a:srgbClr val="1B3B6F"/>
                 </a:solidFill>
                 <a:latin typeface="Calibri" pitchFamily="34" charset="0"/>
-                <a:ea typeface="Calibri" pitchFamily="34" charset="-122"/>
-                <a:cs typeface="Calibri" pitchFamily="34" charset="-120"/>
+                <a:cs typeface="Amiri" pitchFamily="2" charset="-78"/>
               </a:rPr>
               <a:t>1</a:t>
             </a:r>
@@ -32876,8 +32246,7 @@
                   <a:srgbClr val="FFFFFF"/>
                 </a:solidFill>
                 <a:latin typeface="Calibri" pitchFamily="34" charset="0"/>
-                <a:ea typeface="Calibri" pitchFamily="34" charset="-122"/>
-                <a:cs typeface="Calibri" pitchFamily="34" charset="-120"/>
+                <a:cs typeface="Amiri" pitchFamily="2" charset="-78"/>
               </a:rPr>
               <a:t>CORE</a:t>
             </a:r>
@@ -32914,9 +32283,8 @@
                 <a:solidFill>
                   <a:srgbClr val="1B3B6F"/>
                 </a:solidFill>
-                <a:latin typeface="Amiri" pitchFamily="34" charset="0"/>
-                <a:ea typeface="Amiri" pitchFamily="34" charset="-122"/>
-                <a:cs typeface="Amiri" pitchFamily="34" charset="-120"/>
+                <a:latin typeface="Amiri" pitchFamily="2" charset="-78"/>
+                <a:cs typeface="Amiri" pitchFamily="2" charset="-78"/>
               </a:rPr>
               <a:t>تَمْثِيلُ الدَّوْرِ</a:t>
             </a:r>
@@ -32954,8 +32322,7 @@
                   <a:srgbClr val="1F2A37"/>
                 </a:solidFill>
                 <a:latin typeface="Calibri" pitchFamily="34" charset="0"/>
-                <a:ea typeface="Calibri" pitchFamily="34" charset="-122"/>
-                <a:cs typeface="Calibri" pitchFamily="34" charset="-120"/>
+                <a:cs typeface="Amiri" pitchFamily="2" charset="-78"/>
               </a:rPr>
               <a:t>role play</a:t>
             </a:r>
@@ -32971,8 +32338,7 @@
                   <a:srgbClr val="5A6472"/>
                 </a:solidFill>
                 <a:latin typeface="Calibri" pitchFamily="34" charset="0"/>
-                <a:ea typeface="Calibri" pitchFamily="34" charset="-122"/>
-                <a:cs typeface="Calibri" pitchFamily="34" charset="-120"/>
+                <a:cs typeface="Amiri" pitchFamily="2" charset="-78"/>
               </a:rPr>
               <a:t>tam-thī-lu ad-daw-ri</a:t>
             </a:r>
@@ -33069,8 +32435,7 @@
                   <a:srgbClr val="1B3B6F"/>
                 </a:solidFill>
                 <a:latin typeface="Calibri" pitchFamily="34" charset="0"/>
-                <a:ea typeface="Calibri" pitchFamily="34" charset="-122"/>
-                <a:cs typeface="Calibri" pitchFamily="34" charset="-120"/>
+                <a:cs typeface="Amiri" pitchFamily="2" charset="-78"/>
               </a:rPr>
               <a:t>2</a:t>
             </a:r>
@@ -33135,8 +32500,7 @@
                   <a:srgbClr val="8A6D1E"/>
                 </a:solidFill>
                 <a:latin typeface="Calibri" pitchFamily="34" charset="0"/>
-                <a:ea typeface="Calibri" pitchFamily="34" charset="-122"/>
-                <a:cs typeface="Calibri" pitchFamily="34" charset="-120"/>
+                <a:cs typeface="Amiri" pitchFamily="2" charset="-78"/>
               </a:rPr>
               <a:t>pl · sg</a:t>
             </a:r>
@@ -33201,8 +32565,7 @@
                   <a:srgbClr val="FFFFFF"/>
                 </a:solidFill>
                 <a:latin typeface="Calibri" pitchFamily="34" charset="0"/>
-                <a:ea typeface="Calibri" pitchFamily="34" charset="-122"/>
-                <a:cs typeface="Calibri" pitchFamily="34" charset="-120"/>
+                <a:cs typeface="Amiri" pitchFamily="2" charset="-78"/>
               </a:rPr>
               <a:t>CORE</a:t>
             </a:r>
@@ -33239,9 +32602,8 @@
                 <a:solidFill>
                   <a:srgbClr val="1B3B6F"/>
                 </a:solidFill>
-                <a:latin typeface="Amiri" pitchFamily="34" charset="0"/>
-                <a:ea typeface="Amiri" pitchFamily="34" charset="-122"/>
-                <a:cs typeface="Amiri" pitchFamily="34" charset="-120"/>
+                <a:latin typeface="Amiri" pitchFamily="2" charset="-78"/>
+                <a:cs typeface="Amiri" pitchFamily="2" charset="-78"/>
               </a:rPr>
               <a:t>الاسْتِجَابَةُ لِلْمُحَفِّزَاتِ</a:t>
             </a:r>
@@ -33279,8 +32641,7 @@
                   <a:srgbClr val="1F2A37"/>
                 </a:solidFill>
                 <a:latin typeface="Calibri" pitchFamily="34" charset="0"/>
-                <a:ea typeface="Calibri" pitchFamily="34" charset="-122"/>
-                <a:cs typeface="Calibri" pitchFamily="34" charset="-120"/>
+                <a:cs typeface="Amiri" pitchFamily="2" charset="-78"/>
               </a:rPr>
               <a:t>responding to prompts</a:t>
             </a:r>
@@ -33296,8 +32657,7 @@
                   <a:srgbClr val="5A6472"/>
                 </a:solidFill>
                 <a:latin typeface="Calibri" pitchFamily="34" charset="0"/>
-                <a:ea typeface="Calibri" pitchFamily="34" charset="-122"/>
-                <a:cs typeface="Calibri" pitchFamily="34" charset="-120"/>
+                <a:cs typeface="Amiri" pitchFamily="2" charset="-78"/>
               </a:rPr>
               <a:t>als-ti-jā-ba-tu lil-mu-ḥaf-fi-zā-ti</a:t>
             </a:r>
@@ -33362,8 +32722,7 @@
                   <a:srgbClr val="8A6D1E"/>
                 </a:solidFill>
                 <a:latin typeface="Calibri" pitchFamily="34" charset="0"/>
-                <a:ea typeface="Calibri" pitchFamily="34" charset="-122"/>
-                <a:cs typeface="Calibri" pitchFamily="34" charset="-120"/>
+                <a:cs typeface="Amiri" pitchFamily="2" charset="-78"/>
               </a:rPr>
               <a:t>sg.</a:t>
             </a:r>
@@ -33400,9 +32759,8 @@
                 <a:solidFill>
                   <a:srgbClr val="1B3B6F"/>
                 </a:solidFill>
-                <a:latin typeface="Amiri" pitchFamily="34" charset="0"/>
-                <a:ea typeface="Amiri" pitchFamily="34" charset="-122"/>
-                <a:cs typeface="Amiri" pitchFamily="34" charset="-120"/>
+                <a:latin typeface="Amiri" pitchFamily="2" charset="-78"/>
+                <a:cs typeface="Amiri" pitchFamily="2" charset="-78"/>
               </a:rPr>
               <a:t>مُحَفِّزٌ</a:t>
             </a:r>
@@ -33499,8 +32857,7 @@
                   <a:srgbClr val="1B3B6F"/>
                 </a:solidFill>
                 <a:latin typeface="Calibri" pitchFamily="34" charset="0"/>
-                <a:ea typeface="Calibri" pitchFamily="34" charset="-122"/>
-                <a:cs typeface="Calibri" pitchFamily="34" charset="-120"/>
+                <a:cs typeface="Amiri" pitchFamily="2" charset="-78"/>
               </a:rPr>
               <a:t>3</a:t>
             </a:r>
@@ -33537,9 +32894,8 @@
                 <a:solidFill>
                   <a:srgbClr val="1B3B6F"/>
                 </a:solidFill>
-                <a:latin typeface="Amiri" pitchFamily="34" charset="0"/>
-                <a:ea typeface="Amiri" pitchFamily="34" charset="-122"/>
-                <a:cs typeface="Amiri" pitchFamily="34" charset="-120"/>
+                <a:latin typeface="Amiri" pitchFamily="2" charset="-78"/>
+                <a:cs typeface="Amiri" pitchFamily="2" charset="-78"/>
               </a:rPr>
               <a:t>اللُّغَةُ التَّعَامُلِيَّةُ</a:t>
             </a:r>
@@ -33577,8 +32933,7 @@
                   <a:srgbClr val="1F2A37"/>
                 </a:solidFill>
                 <a:latin typeface="Calibri" pitchFamily="34" charset="0"/>
-                <a:ea typeface="Calibri" pitchFamily="34" charset="-122"/>
-                <a:cs typeface="Calibri" pitchFamily="34" charset="-120"/>
+                <a:cs typeface="Amiri" pitchFamily="2" charset="-78"/>
               </a:rPr>
               <a:t>transactional language</a:t>
             </a:r>
@@ -33594,8 +32949,7 @@
                   <a:srgbClr val="5A6472"/>
                 </a:solidFill>
                 <a:latin typeface="Calibri" pitchFamily="34" charset="0"/>
-                <a:ea typeface="Calibri" pitchFamily="34" charset="-122"/>
-                <a:cs typeface="Calibri" pitchFamily="34" charset="-120"/>
+                <a:cs typeface="Amiri" pitchFamily="2" charset="-78"/>
               </a:rPr>
               <a:t>all-lu-gha-tu at-ta-ʿā-mu-liy-ya-tu</a:t>
             </a:r>
@@ -33692,8 +33046,7 @@
                   <a:srgbClr val="1B3B6F"/>
                 </a:solidFill>
                 <a:latin typeface="Calibri" pitchFamily="34" charset="0"/>
-                <a:ea typeface="Calibri" pitchFamily="34" charset="-122"/>
-                <a:cs typeface="Calibri" pitchFamily="34" charset="-120"/>
+                <a:cs typeface="Amiri" pitchFamily="2" charset="-78"/>
               </a:rPr>
               <a:t>4</a:t>
             </a:r>
@@ -33758,8 +33111,7 @@
                   <a:srgbClr val="FFFFFF"/>
                 </a:solidFill>
                 <a:latin typeface="Calibri" pitchFamily="34" charset="0"/>
-                <a:ea typeface="Calibri" pitchFamily="34" charset="-122"/>
-                <a:cs typeface="Calibri" pitchFamily="34" charset="-120"/>
+                <a:cs typeface="Amiri" pitchFamily="2" charset="-78"/>
               </a:rPr>
               <a:t>CORE</a:t>
             </a:r>
@@ -33796,9 +33148,8 @@
                 <a:solidFill>
                   <a:srgbClr val="1B3B6F"/>
                 </a:solidFill>
-                <a:latin typeface="Amiri" pitchFamily="34" charset="0"/>
-                <a:ea typeface="Amiri" pitchFamily="34" charset="-122"/>
-                <a:cs typeface="Amiri" pitchFamily="34" charset="-120"/>
+                <a:latin typeface="Amiri" pitchFamily="2" charset="-78"/>
+                <a:cs typeface="Amiri" pitchFamily="2" charset="-78"/>
               </a:rPr>
               <a:t>إِعْطَاءُ المَعْلُومَاتِ</a:t>
             </a:r>
@@ -33836,8 +33187,7 @@
                   <a:srgbClr val="1F2A37"/>
                 </a:solidFill>
                 <a:latin typeface="Calibri" pitchFamily="34" charset="0"/>
-                <a:ea typeface="Calibri" pitchFamily="34" charset="-122"/>
-                <a:cs typeface="Calibri" pitchFamily="34" charset="-120"/>
+                <a:cs typeface="Amiri" pitchFamily="2" charset="-78"/>
               </a:rPr>
               <a:t>giving information</a:t>
             </a:r>
@@ -33853,8 +33203,7 @@
                   <a:srgbClr val="5A6472"/>
                 </a:solidFill>
                 <a:latin typeface="Calibri" pitchFamily="34" charset="0"/>
-                <a:ea typeface="Calibri" pitchFamily="34" charset="-122"/>
-                <a:cs typeface="Calibri" pitchFamily="34" charset="-120"/>
+                <a:cs typeface="Amiri" pitchFamily="2" charset="-78"/>
               </a:rPr>
               <a:t>iʿ-ṭā-ʾu al-maʿ-lū-mā-ti</a:t>
             </a:r>
@@ -33892,8 +33241,7 @@
                   <a:srgbClr val="8A93A0"/>
                 </a:solidFill>
                 <a:latin typeface="Calibri" pitchFamily="34" charset="0"/>
-                <a:ea typeface="Calibri" pitchFamily="34" charset="-122"/>
-                <a:cs typeface="Calibri" pitchFamily="34" charset="-120"/>
+                <a:cs typeface="Amiri" pitchFamily="2" charset="-78"/>
               </a:rPr>
               <a:t>8 / 21</a:t>
             </a:r>
@@ -33987,9 +33335,8 @@
                 <a:solidFill>
                   <a:srgbClr val="D4AF37"/>
                 </a:solidFill>
-                <a:latin typeface="Amiri" pitchFamily="34" charset="0"/>
-                <a:ea typeface="Amiri" pitchFamily="34" charset="-122"/>
-                <a:cs typeface="Amiri" pitchFamily="34" charset="-120"/>
+                <a:latin typeface="Amiri" pitchFamily="2" charset="-78"/>
+                <a:cs typeface="Amiri" pitchFamily="2" charset="-78"/>
               </a:rPr>
               <a:t>م</a:t>
             </a:r>
@@ -34027,8 +33374,7 @@
                   <a:srgbClr val="1B3B6F"/>
                 </a:solidFill>
                 <a:latin typeface="Cambria" pitchFamily="34" charset="0"/>
-                <a:ea typeface="Cambria" pitchFamily="34" charset="-122"/>
-                <a:cs typeface="Cambria" pitchFamily="34" charset="-120"/>
+                <a:cs typeface="Amiri" pitchFamily="2" charset="-78"/>
               </a:rPr>
               <a:t>Al Madina Online School</a:t>
             </a:r>
@@ -34066,8 +33412,7 @@
                   <a:srgbClr val="8A6D1E"/>
                 </a:solidFill>
                 <a:latin typeface="Calibri" pitchFamily="34" charset="0"/>
-                <a:ea typeface="Calibri" pitchFamily="34" charset="-122"/>
-                <a:cs typeface="Calibri" pitchFamily="34" charset="-120"/>
+                <a:cs typeface="Amiri" pitchFamily="2" charset="-78"/>
               </a:rPr>
               <a:t>ARABIC DEPARTMENT · MIFTAH ARABIC · IGCSE 0544</a:t>
             </a:r>
@@ -34132,8 +33477,7 @@
                   <a:srgbClr val="FFFFFF"/>
                 </a:solidFill>
                 <a:latin typeface="Calibri" pitchFamily="34" charset="0"/>
-                <a:ea typeface="Calibri" pitchFamily="34" charset="-122"/>
-                <a:cs typeface="Calibri" pitchFamily="34" charset="-120"/>
+                <a:cs typeface="Amiri" pitchFamily="2" charset="-78"/>
               </a:rPr>
               <a:t>P6-L06 · IGCSE Bridge</a:t>
             </a:r>
@@ -34198,8 +33542,7 @@
                   <a:srgbClr val="FFFFFF"/>
                 </a:solidFill>
                 <a:latin typeface="Calibri" pitchFamily="34" charset="0"/>
-                <a:ea typeface="Calibri" pitchFamily="34" charset="-122"/>
-                <a:cs typeface="Calibri" pitchFamily="34" charset="-120"/>
+                <a:cs typeface="Amiri" pitchFamily="2" charset="-78"/>
               </a:rPr>
               <a:t>TEACHER INSTRUCTION · 2 MIN</a:t>
             </a:r>
@@ -34237,8 +33580,7 @@
                   <a:srgbClr val="1B3B6F"/>
                 </a:solidFill>
                 <a:latin typeface="Calibri" pitchFamily="34" charset="0"/>
-                <a:ea typeface="Calibri" pitchFamily="34" charset="-122"/>
-                <a:cs typeface="Calibri" pitchFamily="34" charset="-120"/>
+                <a:cs typeface="Amiri" pitchFamily="2" charset="-78"/>
               </a:rPr>
               <a:t>KEY WORDS · GROUP 1</a:t>
             </a:r>
@@ -34276,8 +33618,7 @@
                   <a:srgbClr val="1B3B6F"/>
                 </a:solidFill>
                 <a:latin typeface="Cambria" pitchFamily="34" charset="0"/>
-                <a:ea typeface="Cambria" pitchFamily="34" charset="-122"/>
-                <a:cs typeface="Cambria" pitchFamily="34" charset="-120"/>
+                <a:cs typeface="Amiri" pitchFamily="2" charset="-78"/>
               </a:rPr>
               <a:t>Transactional language (2 of 2)</a:t>
             </a:r>
@@ -34314,9 +33655,8 @@
                 <a:solidFill>
                   <a:srgbClr val="8A6D1E"/>
                 </a:solidFill>
-                <a:latin typeface="Amiri" pitchFamily="34" charset="0"/>
-                <a:ea typeface="Amiri" pitchFamily="34" charset="-122"/>
-                <a:cs typeface="Amiri" pitchFamily="34" charset="-120"/>
+                <a:latin typeface="Amiri" pitchFamily="2" charset="-78"/>
+                <a:cs typeface="Amiri" pitchFamily="2" charset="-78"/>
               </a:rPr>
               <a:t>كَلِمَاتُ الدَّرْسِ</a:t>
             </a:r>
@@ -34354,8 +33694,7 @@
                   <a:srgbClr val="8A93A0"/>
                 </a:solidFill>
                 <a:latin typeface="Calibri" pitchFamily="34" charset="0"/>
-                <a:ea typeface="Calibri" pitchFamily="34" charset="-122"/>
-                <a:cs typeface="Calibri" pitchFamily="34" charset="-120"/>
+                <a:cs typeface="Amiri" pitchFamily="2" charset="-78"/>
               </a:rPr>
               <a:t>Miftah Arabic · Progression P6 · IGCSE Bridge · P6-L06</a:t>
             </a:r>
@@ -34452,8 +33791,7 @@
                   <a:srgbClr val="1B3B6F"/>
                 </a:solidFill>
                 <a:latin typeface="Calibri" pitchFamily="34" charset="0"/>
-                <a:ea typeface="Calibri" pitchFamily="34" charset="-122"/>
-                <a:cs typeface="Calibri" pitchFamily="34" charset="-120"/>
+                <a:cs typeface="Amiri" pitchFamily="2" charset="-78"/>
               </a:rPr>
               <a:t>5</a:t>
             </a:r>
@@ -34518,8 +33856,7 @@
                   <a:srgbClr val="FFFFFF"/>
                 </a:solidFill>
                 <a:latin typeface="Calibri" pitchFamily="34" charset="0"/>
-                <a:ea typeface="Calibri" pitchFamily="34" charset="-122"/>
-                <a:cs typeface="Calibri" pitchFamily="34" charset="-120"/>
+                <a:cs typeface="Amiri" pitchFamily="2" charset="-78"/>
               </a:rPr>
               <a:t>CORE</a:t>
             </a:r>
@@ -34556,9 +33893,8 @@
                 <a:solidFill>
                   <a:srgbClr val="1B3B6F"/>
                 </a:solidFill>
-                <a:latin typeface="Amiri" pitchFamily="34" charset="0"/>
-                <a:ea typeface="Amiri" pitchFamily="34" charset="-122"/>
-                <a:cs typeface="Amiri" pitchFamily="34" charset="-120"/>
+                <a:latin typeface="Amiri" pitchFamily="2" charset="-78"/>
+                <a:cs typeface="Amiri" pitchFamily="2" charset="-78"/>
               </a:rPr>
               <a:t>طَلَبُ المَعْلُومَاتِ</a:t>
             </a:r>
@@ -34596,8 +33932,7 @@
                   <a:srgbClr val="1F2A37"/>
                 </a:solidFill>
                 <a:latin typeface="Calibri" pitchFamily="34" charset="0"/>
-                <a:ea typeface="Calibri" pitchFamily="34" charset="-122"/>
-                <a:cs typeface="Calibri" pitchFamily="34" charset="-120"/>
+                <a:cs typeface="Amiri" pitchFamily="2" charset="-78"/>
               </a:rPr>
               <a:t>requesting information</a:t>
             </a:r>
@@ -34613,8 +33948,7 @@
                   <a:srgbClr val="5A6472"/>
                 </a:solidFill>
                 <a:latin typeface="Calibri" pitchFamily="34" charset="0"/>
-                <a:ea typeface="Calibri" pitchFamily="34" charset="-122"/>
-                <a:cs typeface="Calibri" pitchFamily="34" charset="-120"/>
+                <a:cs typeface="Amiri" pitchFamily="2" charset="-78"/>
               </a:rPr>
               <a:t>ṭa-la-bu al-maʿ-lū-mā-ti</a:t>
             </a:r>
@@ -34711,8 +34045,7 @@
                   <a:srgbClr val="1B3B6F"/>
                 </a:solidFill>
                 <a:latin typeface="Calibri" pitchFamily="34" charset="0"/>
-                <a:ea typeface="Calibri" pitchFamily="34" charset="-122"/>
-                <a:cs typeface="Calibri" pitchFamily="34" charset="-120"/>
+                <a:cs typeface="Amiri" pitchFamily="2" charset="-78"/>
               </a:rPr>
               <a:t>6</a:t>
             </a:r>
@@ -34777,8 +34110,7 @@
                   <a:srgbClr val="FFFFFF"/>
                 </a:solidFill>
                 <a:latin typeface="Calibri" pitchFamily="34" charset="0"/>
-                <a:ea typeface="Calibri" pitchFamily="34" charset="-122"/>
-                <a:cs typeface="Calibri" pitchFamily="34" charset="-120"/>
+                <a:cs typeface="Amiri" pitchFamily="2" charset="-78"/>
               </a:rPr>
               <a:t>CORE</a:t>
             </a:r>
@@ -34815,9 +34147,8 @@
                 <a:solidFill>
                   <a:srgbClr val="1B3B6F"/>
                 </a:solidFill>
-                <a:latin typeface="Amiri" pitchFamily="34" charset="0"/>
-                <a:ea typeface="Amiri" pitchFamily="34" charset="-122"/>
-                <a:cs typeface="Amiri" pitchFamily="34" charset="-120"/>
+                <a:latin typeface="Amiri" pitchFamily="2" charset="-78"/>
+                <a:cs typeface="Amiri" pitchFamily="2" charset="-78"/>
               </a:rPr>
               <a:t>التَّفَاوُضُ</a:t>
             </a:r>
@@ -34855,8 +34186,7 @@
                   <a:srgbClr val="1F2A37"/>
                 </a:solidFill>
                 <a:latin typeface="Calibri" pitchFamily="34" charset="0"/>
-                <a:ea typeface="Calibri" pitchFamily="34" charset="-122"/>
-                <a:cs typeface="Calibri" pitchFamily="34" charset="-120"/>
+                <a:cs typeface="Amiri" pitchFamily="2" charset="-78"/>
               </a:rPr>
               <a:t>negotiation</a:t>
             </a:r>
@@ -34872,8 +34202,7 @@
                   <a:srgbClr val="5A6472"/>
                 </a:solidFill>
                 <a:latin typeface="Calibri" pitchFamily="34" charset="0"/>
-                <a:ea typeface="Calibri" pitchFamily="34" charset="-122"/>
-                <a:cs typeface="Calibri" pitchFamily="34" charset="-120"/>
+                <a:cs typeface="Amiri" pitchFamily="2" charset="-78"/>
               </a:rPr>
               <a:t>at-ta-fā-wu-ḍu</a:t>
             </a:r>
@@ -34970,8 +34299,7 @@
                   <a:srgbClr val="1B3B6F"/>
                 </a:solidFill>
                 <a:latin typeface="Calibri" pitchFamily="34" charset="0"/>
-                <a:ea typeface="Calibri" pitchFamily="34" charset="-122"/>
-                <a:cs typeface="Calibri" pitchFamily="34" charset="-120"/>
+                <a:cs typeface="Amiri" pitchFamily="2" charset="-78"/>
               </a:rPr>
               <a:t>7</a:t>
             </a:r>
@@ -35008,9 +34336,8 @@
                 <a:solidFill>
                   <a:srgbClr val="1B3B6F"/>
                 </a:solidFill>
-                <a:latin typeface="Amiri" pitchFamily="34" charset="0"/>
-                <a:ea typeface="Amiri" pitchFamily="34" charset="-122"/>
-                <a:cs typeface="Amiri" pitchFamily="34" charset="-120"/>
+                <a:latin typeface="Amiri" pitchFamily="2" charset="-78"/>
+                <a:cs typeface="Amiri" pitchFamily="2" charset="-78"/>
               </a:rPr>
               <a:t>حَلُّ المُشْكِلَةِ</a:t>
             </a:r>
@@ -35048,8 +34375,7 @@
                   <a:srgbClr val="1F2A37"/>
                 </a:solidFill>
                 <a:latin typeface="Calibri" pitchFamily="34" charset="0"/>
-                <a:ea typeface="Calibri" pitchFamily="34" charset="-122"/>
-                <a:cs typeface="Calibri" pitchFamily="34" charset="-120"/>
+                <a:cs typeface="Amiri" pitchFamily="2" charset="-78"/>
               </a:rPr>
               <a:t>problem-solving</a:t>
             </a:r>
@@ -35065,8 +34391,7 @@
                   <a:srgbClr val="5A6472"/>
                 </a:solidFill>
                 <a:latin typeface="Calibri" pitchFamily="34" charset="0"/>
-                <a:ea typeface="Calibri" pitchFamily="34" charset="-122"/>
-                <a:cs typeface="Calibri" pitchFamily="34" charset="-120"/>
+                <a:cs typeface="Amiri" pitchFamily="2" charset="-78"/>
               </a:rPr>
               <a:t>ḥal-lu al-mush-ki-la-ti</a:t>
             </a:r>
@@ -35163,8 +34488,7 @@
                   <a:srgbClr val="1B3B6F"/>
                 </a:solidFill>
                 <a:latin typeface="Calibri" pitchFamily="34" charset="0"/>
-                <a:ea typeface="Calibri" pitchFamily="34" charset="-122"/>
-                <a:cs typeface="Calibri" pitchFamily="34" charset="-120"/>
+                <a:cs typeface="Amiri" pitchFamily="2" charset="-78"/>
               </a:rPr>
               <a:t>8</a:t>
             </a:r>
@@ -35229,8 +34553,7 @@
                   <a:srgbClr val="FFFFFF"/>
                 </a:solidFill>
                 <a:latin typeface="Calibri" pitchFamily="34" charset="0"/>
-                <a:ea typeface="Calibri" pitchFamily="34" charset="-122"/>
-                <a:cs typeface="Calibri" pitchFamily="34" charset="-120"/>
+                <a:cs typeface="Amiri" pitchFamily="2" charset="-78"/>
               </a:rPr>
               <a:t>CORE</a:t>
             </a:r>
@@ -35267,9 +34590,8 @@
                 <a:solidFill>
                   <a:srgbClr val="1B3B6F"/>
                 </a:solidFill>
-                <a:latin typeface="Amiri" pitchFamily="34" charset="0"/>
-                <a:ea typeface="Amiri" pitchFamily="34" charset="-122"/>
-                <a:cs typeface="Amiri" pitchFamily="34" charset="-120"/>
+                <a:latin typeface="Amiri" pitchFamily="2" charset="-78"/>
+                <a:cs typeface="Amiri" pitchFamily="2" charset="-78"/>
               </a:rPr>
               <a:t>التَّحَدُّثُ بِثِقَةٍ</a:t>
             </a:r>
@@ -35307,8 +34629,7 @@
                   <a:srgbClr val="1F2A37"/>
                 </a:solidFill>
                 <a:latin typeface="Calibri" pitchFamily="34" charset="0"/>
-                <a:ea typeface="Calibri" pitchFamily="34" charset="-122"/>
-                <a:cs typeface="Calibri" pitchFamily="34" charset="-120"/>
+                <a:cs typeface="Amiri" pitchFamily="2" charset="-78"/>
               </a:rPr>
               <a:t>speaking with confidence</a:t>
             </a:r>
@@ -35324,8 +34645,7 @@
                   <a:srgbClr val="5A6472"/>
                 </a:solidFill>
                 <a:latin typeface="Calibri" pitchFamily="34" charset="0"/>
-                <a:ea typeface="Calibri" pitchFamily="34" charset="-122"/>
-                <a:cs typeface="Calibri" pitchFamily="34" charset="-120"/>
+                <a:cs typeface="Amiri" pitchFamily="2" charset="-78"/>
               </a:rPr>
               <a:t>at-ta-ḥad-du-thu bi-thi-qa-tin</a:t>
             </a:r>
@@ -35363,8 +34683,7 @@
                   <a:srgbClr val="8A93A0"/>
                 </a:solidFill>
                 <a:latin typeface="Calibri" pitchFamily="34" charset="0"/>
-                <a:ea typeface="Calibri" pitchFamily="34" charset="-122"/>
-                <a:cs typeface="Calibri" pitchFamily="34" charset="-120"/>
+                <a:cs typeface="Amiri" pitchFamily="2" charset="-78"/>
               </a:rPr>
               <a:t>9 / 21</a:t>
             </a:r>

--- a/Progression_P6/P6-L06_Paper_3_Role_Play.pptx
+++ b/Progression_P6/P6-L06_Paper_3_Role_Play.pptx
@@ -708,7 +708,11 @@
           <a:lstStyle/>
           <a:p>
             <a:r>
-              <a:rPr lang="en-US" dirty="0"/>
+              <a:rPr lang="ar-SA" dirty="0">
+                <a:latin typeface="Amiri" pitchFamily="2" charset="-78"/>
+                <a:ea typeface="Amiri" pitchFamily="2" charset="-78"/>
+                <a:cs typeface="Amiri" pitchFamily="2" charset="-78"/>
+              </a:rPr>
               <a:t>TEACH (3 min) — the website panel, plus three teacher repair phrases (also used in P4-L12 / P5-L12). Choral repetition of the repair phrases. To a girl: تُعِيدِي (هَلْ يُمْكِنُ أَنْ تُعِيدِي السُّؤَالَ؟).
 WEBSITE PANEL “How to score full Communication”: Each prompt needs a relevant response with enough language to communicate the information clearly. Perfect grammar is not required for the Communication mark — but a serious error that causes misunderstanding loses that prompt. Give two to three sentences per prompt, delivered confidently.</a:t>
             </a:r>
@@ -797,7 +801,11 @@
           <a:lstStyle/>
           <a:p>
             <a:r>
-              <a:rPr lang="en-US" dirty="0"/>
+              <a:rPr lang="ar-SA" dirty="0">
+                <a:latin typeface="Amiri" pitchFamily="2" charset="-78"/>
+                <a:ea typeface="Amiri" pitchFamily="2" charset="-78"/>
+                <a:cs typeface="Amiri" pitchFamily="2" charset="-78"/>
+              </a:rPr>
               <a:t>ROLE PLAY 1 (website, 10 marks: Communication 6 · Accuracy 4). Pairs: A = examiner (reads the prompts as questions), B = candidate; then swap. 30–40 seconds per prompt. I DO: the teacher is the CANDIDATE first; a confident student reads the prompts as the doctor. Model prompt 1 with the website answer, then improve it to three sentences (… وَلَا أَسْتَطِيعُ أَنْ أُرَكِّزَ فِي دُرُوسِي.). Then pairs repeat it. Doctor’s questions: مَا الَّذِي تَشْكُو مِنْهُ؟ · مَاذَا تُرِيدُ أَنْ تَعْرِفَ؟
 WEBSITE MODEL: Examiner: مَا الَّذِي تَشْكُو مِنْهُ؟ (Prompt 1) · You: أَشْعُرُ بِصُدَاعٍ وَأُعَانِي مِنَ الأَرَقِ مُنْذُ أُسْبُوعٍ. (Full-sentence response)
 Website feedback prompt: Feedback note (which prompt was hardest? which structure worked?)</a:t>
@@ -887,7 +895,11 @@
           <a:lstStyle/>
           <a:p>
             <a:r>
-              <a:rPr lang="en-US" dirty="0"/>
+              <a:rPr lang="ar-SA" dirty="0">
+                <a:latin typeface="Amiri" pitchFamily="2" charset="-78"/>
+                <a:ea typeface="Amiri" pitchFamily="2" charset="-78"/>
+                <a:cs typeface="Amiri" pitchFamily="2" charset="-78"/>
+              </a:rPr>
               <a:t>ROLE PLAY 2 (website, 10 marks: Communication 6 · Accuracy 4). Pairs: A = examiner (reads the prompts as questions), B = candidate; then swap. 30–40 seconds per prompt. Prompt 4 (negotiate) is the hardest: model a polite counter-offer — هَلْ هُنَاكَ خَصْمٌ لِلطُّلَّابِ؟ (Is there a student discount?).
 Website feedback prompt: Feedback note (which prompt was hardest? which structure worked?)</a:t>
             </a:r>
@@ -1065,7 +1077,11 @@
           <a:lstStyle/>
           <a:p>
             <a:r>
-              <a:rPr lang="en-US" dirty="0"/>
+              <a:rPr lang="ar-SA" dirty="0">
+                <a:latin typeface="Amiri" pitchFamily="2" charset="-78"/>
+                <a:ea typeface="Amiri" pitchFamily="2" charset="-78"/>
+                <a:cs typeface="Amiri" pitchFamily="2" charset="-78"/>
+              </a:rPr>
               <a:t>ROLE PLAY 4 (website, 10 marks: Communication 6 · Accuracy 4). Pairs: A = examiner (reads the prompts as questions), B = candidate; then swap. 30–40 seconds per prompt. Develop and Stretch. Passives in prompt 1 (تُرْمَى · لُوِّثَ — P4-L05); an + passive -a in prompt 2 (أَنْ تُوضَعَ — P5-L03); a hope in prompt 4 (نَرْجُو أَنْ — P4).
 Website feedback prompt: Feedback note (which prompt was hardest? which structure worked?)</a:t>
             </a:r>
@@ -1510,7 +1526,11 @@
           <a:lstStyle/>
           <a:p>
             <a:r>
-              <a:rPr lang="en-US" dirty="0"/>
+              <a:rPr lang="ar-SA" dirty="0">
+                <a:latin typeface="Amiri" pitchFamily="2" charset="-78"/>
+                <a:ea typeface="Amiri" pitchFamily="2" charset="-78"/>
+                <a:cs typeface="Amiri" pitchFamily="2" charset="-78"/>
+              </a:rPr>
               <a:t>WELCOME (1 min) — while students join.
 • Greet each student by name as they arrive: السَّلَامُ عَلَيْكُمْ. Take the register (Pastoral Tracker: attendance 0/1).
 • 2-MINUTE CHECK-IN (SEND training): a private chat to any student who seemed unsettled last lesson — “Are you okay today? 👍 / 👎”.
@@ -2144,7 +2164,11 @@
           <a:lstStyle/>
           <a:p>
             <a:r>
-              <a:rPr lang="en-US" dirty="0"/>
+              <a:rPr lang="ar-SA" dirty="0">
+                <a:latin typeface="Amiri" pitchFamily="2" charset="-78"/>
+                <a:ea typeface="Amiri" pitchFamily="2" charset="-78"/>
+                <a:cs typeface="Amiri" pitchFamily="2" charset="-78"/>
+              </a:rPr>
               <a:t>KEY WORDS — HOW TO TEACH EACH GROUP (EAL pre-teaching routine, 7 min)
 1. HEAR IT: say the word twice, clearly, with a gesture where possible.
 2. SAY IT: choral repetition — “I say, you say” — then two volunteers.
@@ -2239,7 +2263,11 @@
           <a:lstStyle/>
           <a:p>
             <a:r>
-              <a:rPr lang="en-US" dirty="0"/>
+              <a:rPr lang="ar-SA" dirty="0">
+                <a:latin typeface="Amiri" pitchFamily="2" charset="-78"/>
+                <a:ea typeface="Amiri" pitchFamily="2" charset="-78"/>
+                <a:cs typeface="Amiri" pitchFamily="2" charset="-78"/>
+              </a:rPr>
               <a:t>KEY WORDS — Transactional language (website vocabulary (1 of 2)). Hear → Say → See → Use. Transliteration is printed for Core students (cover it for Develop/Stretch).
 The role play is TRANSACTIONAL (اللُّغَةُ التَّعَامُلِيَّةُ): you give information (إِعْطَاءُ المَعْلُومَاتِ), ask for it (طَلَبُ المَعْلُومَاتِ), negotiate (التَّفَاوُضُ) and solve a problem (حَلُّ المُشْكِلَةِ). Each prompt (مُحَفِّزٌ) tells you which one.</a:t>
             </a:r>
@@ -2328,7 +2356,11 @@
           <a:lstStyle/>
           <a:p>
             <a:r>
-              <a:rPr lang="en-US" dirty="0"/>
+              <a:rPr lang="ar-SA" dirty="0">
+                <a:latin typeface="Amiri" pitchFamily="2" charset="-78"/>
+                <a:ea typeface="Amiri" pitchFamily="2" charset="-78"/>
+                <a:cs typeface="Amiri" pitchFamily="2" charset="-78"/>
+              </a:rPr>
               <a:t>KEY WORDS — Transactional language (website vocabulary (2 of 2)). Hear → Say → See → Use. Transliteration is printed for Core students (cover it for Develop/Stretch).
 The role play is TRANSACTIONAL (اللُّغَةُ التَّعَامُلِيَّةُ): you give information (إِعْطَاءُ المَعْلُومَاتِ), ask for it (طَلَبُ المَعْلُومَاتِ), negotiate (التَّفَاوُضُ) and solve a problem (حَلُّ المُشْكِلَةِ). Each prompt (مُحَفِّزٌ) tells you which one.</a:t>
             </a:r>
@@ -2813,6 +2845,7 @@
                   <a:srgbClr val="D4AF37"/>
                 </a:solidFill>
                 <a:latin typeface="Amiri" pitchFamily="2" charset="-78"/>
+                <a:ea typeface="Amiri" pitchFamily="2" charset="-78"/>
                 <a:cs typeface="Amiri" pitchFamily="2" charset="-78"/>
               </a:rPr>
               <a:t>م</a:t>
@@ -3019,6 +3052,7 @@
                   <a:srgbClr val="D4AF37"/>
                 </a:solidFill>
                 <a:latin typeface="Amiri" pitchFamily="2" charset="-78"/>
+                <a:ea typeface="Amiri" pitchFamily="2" charset="-78"/>
                 <a:cs typeface="Amiri" pitchFamily="2" charset="-78"/>
               </a:rPr>
               <a:t>الوَرَقَةُ الثَّالِثَةُ — تَمْثِيلُ الدَّوْرِ: اللُّغَةُ التَّعَامُلِيَّةُ</a:t>
@@ -3476,6 +3510,7 @@
                   <a:srgbClr val="D4AF37"/>
                 </a:solidFill>
                 <a:latin typeface="Amiri" pitchFamily="2" charset="-78"/>
+                <a:ea typeface="Amiri" pitchFamily="2" charset="-78"/>
                 <a:cs typeface="Amiri" pitchFamily="2" charset="-78"/>
               </a:rPr>
               <a:t>م</a:t>
@@ -3796,6 +3831,7 @@
                   <a:srgbClr val="8A6D1E"/>
                 </a:solidFill>
                 <a:latin typeface="Amiri" pitchFamily="2" charset="-78"/>
+                <a:ea typeface="Amiri" pitchFamily="2" charset="-78"/>
                 <a:cs typeface="Amiri" pitchFamily="2" charset="-78"/>
               </a:rPr>
               <a:t>مِعْيَارُ التَّقْيِيمِ</a:t>
@@ -4319,6 +4355,7 @@
                   <a:srgbClr val="1B3B6F"/>
                 </a:solidFill>
                 <a:latin typeface="Amiri" pitchFamily="2" charset="-78"/>
+                <a:ea typeface="Amiri" pitchFamily="2" charset="-78"/>
                 <a:cs typeface="Amiri" pitchFamily="2" charset="-78"/>
               </a:rPr>
               <a:t>مُحَفِّزٌ وَاحِدٌ = دَرَجَةٌ وَاحِدَةٌ</a:t>
@@ -4418,6 +4455,7 @@
                   <a:srgbClr val="1B3B6F"/>
                 </a:solidFill>
                 <a:latin typeface="Amiri" pitchFamily="2" charset="-78"/>
+                <a:ea typeface="Amiri" pitchFamily="2" charset="-78"/>
                 <a:cs typeface="Amiri" pitchFamily="2" charset="-78"/>
               </a:rPr>
               <a:t>✗ «صُدَاعٌ.»</a:t>
@@ -4517,6 +4555,7 @@
                   <a:srgbClr val="1B3B6F"/>
                 </a:solidFill>
                 <a:latin typeface="Amiri" pitchFamily="2" charset="-78"/>
+                <a:ea typeface="Amiri" pitchFamily="2" charset="-78"/>
                 <a:cs typeface="Amiri" pitchFamily="2" charset="-78"/>
               </a:rPr>
               <a:t>✓ أَشْعُرُ بِصُدَاعٍ مُنْذُ أُسْبُوعٍ.</a:t>
@@ -4688,6 +4727,7 @@
                   <a:srgbClr val="D4AF37"/>
                 </a:solidFill>
                 <a:latin typeface="Amiri" pitchFamily="2" charset="-78"/>
+                <a:ea typeface="Amiri" pitchFamily="2" charset="-78"/>
                 <a:cs typeface="Amiri" pitchFamily="2" charset="-78"/>
               </a:rPr>
               <a:t>م</a:t>
@@ -5008,6 +5048,7 @@
                   <a:srgbClr val="8A6D1E"/>
                 </a:solidFill>
                 <a:latin typeface="Amiri" pitchFamily="2" charset="-78"/>
+                <a:ea typeface="Amiri" pitchFamily="2" charset="-78"/>
                 <a:cs typeface="Amiri" pitchFamily="2" charset="-78"/>
               </a:rPr>
               <a:t>التَّوَاصُلُ الكَامِلُ</a:t>
@@ -5632,6 +5673,7 @@
                   <a:srgbClr val="1B3B6F"/>
                 </a:solidFill>
                 <a:latin typeface="Amiri" pitchFamily="2" charset="-78"/>
+                <a:ea typeface="Amiri" pitchFamily="2" charset="-78"/>
                 <a:cs typeface="Amiri" pitchFamily="2" charset="-78"/>
               </a:rPr>
               <a:t>عَفْوًا، هَلْ يُمْكِنُ أَنْ تُعِيدَ السُّؤَالَ؟</a:t>
@@ -5731,6 +5773,7 @@
                   <a:srgbClr val="1B3B6F"/>
                 </a:solidFill>
                 <a:latin typeface="Amiri" pitchFamily="2" charset="-78"/>
+                <a:ea typeface="Amiri" pitchFamily="2" charset="-78"/>
                 <a:cs typeface="Amiri" pitchFamily="2" charset="-78"/>
               </a:rPr>
               <a:t>سُؤَالٌ مُهِمٌّ … دَعْنِي أُفَكِّرُ.</a:t>
@@ -5830,6 +5873,7 @@
                   <a:srgbClr val="1B3B6F"/>
                 </a:solidFill>
                 <a:latin typeface="Amiri" pitchFamily="2" charset="-78"/>
+                <a:ea typeface="Amiri" pitchFamily="2" charset="-78"/>
                 <a:cs typeface="Amiri" pitchFamily="2" charset="-78"/>
               </a:rPr>
               <a:t>عَفْوًا، أَقْصِدُ …</a:t>
@@ -6001,6 +6045,7 @@
                   <a:srgbClr val="D4AF37"/>
                 </a:solidFill>
                 <a:latin typeface="Amiri" pitchFamily="2" charset="-78"/>
+                <a:ea typeface="Amiri" pitchFamily="2" charset="-78"/>
                 <a:cs typeface="Amiri" pitchFamily="2" charset="-78"/>
               </a:rPr>
               <a:t>م</a:t>
@@ -6321,6 +6366,7 @@
                   <a:srgbClr val="8A6D1E"/>
                 </a:solidFill>
                 <a:latin typeface="Amiri" pitchFamily="2" charset="-78"/>
+                <a:ea typeface="Amiri" pitchFamily="2" charset="-78"/>
                 <a:cs typeface="Amiri" pitchFamily="2" charset="-78"/>
               </a:rPr>
               <a:t>فِي المَرْكَزِ الصِّحِّيِّ</a:t>
@@ -6563,6 +6609,7 @@
                   <a:srgbClr val="1B3B6F"/>
                 </a:solidFill>
                 <a:latin typeface="Amiri" pitchFamily="2" charset="-78"/>
+                <a:ea typeface="Amiri" pitchFamily="2" charset="-78"/>
                 <a:cs typeface="Amiri" pitchFamily="2" charset="-78"/>
               </a:rPr>
               <a:t>أَشْعُرُ بِصُدَاعٍ وَأُعَانِي مِنَ الأَرَقِ مُنْذُ أُسْبُوعٍ.</a:t>
@@ -6639,6 +6686,7 @@
                   <a:srgbClr val="1B3B6F"/>
                 </a:solidFill>
                 <a:latin typeface="Amiri" pitchFamily="2" charset="-78"/>
+                <a:ea typeface="Amiri" pitchFamily="2" charset="-78"/>
                 <a:cs typeface="Amiri" pitchFamily="2" charset="-78"/>
               </a:rPr>
               <a:t>صِفْ أَعْرَاضَكَ لِلطَّبِيبِ.</a:t>
@@ -6769,6 +6817,7 @@
                   <a:srgbClr val="1B3B6F"/>
                 </a:solidFill>
                 <a:latin typeface="Amiri" pitchFamily="2" charset="-78"/>
+                <a:ea typeface="Amiri" pitchFamily="2" charset="-78"/>
                 <a:cs typeface="Amiri" pitchFamily="2" charset="-78"/>
               </a:rPr>
               <a:t>مَا العِلَاجُ المُنَاسِبُ؟ هَلْ يَجِبُ أَنْ آخُذَ دَوَاءً؟</a:t>
@@ -6845,6 +6894,7 @@
                   <a:srgbClr val="1B3B6F"/>
                 </a:solidFill>
                 <a:latin typeface="Amiri" pitchFamily="2" charset="-78"/>
+                <a:ea typeface="Amiri" pitchFamily="2" charset="-78"/>
                 <a:cs typeface="Amiri" pitchFamily="2" charset="-78"/>
               </a:rPr>
               <a:t>اسْأَلْ عَنِ العِلَاجِ المُنَاسِبِ.</a:t>
@@ -6975,6 +7025,7 @@
                   <a:srgbClr val="1B3B6F"/>
                 </a:solidFill>
                 <a:latin typeface="Amiri" pitchFamily="2" charset="-78"/>
+                <a:ea typeface="Amiri" pitchFamily="2" charset="-78"/>
                 <a:cs typeface="Amiri" pitchFamily="2" charset="-78"/>
               </a:rPr>
               <a:t>مَاذَا يَنْبَغِي أَنْ أَفْعَلَ لِكَيْ لَا يَتَكَرَّرَ ذٰلِكَ؟</a:t>
@@ -7051,6 +7102,7 @@
                   <a:srgbClr val="1B3B6F"/>
                 </a:solidFill>
                 <a:latin typeface="Amiri" pitchFamily="2" charset="-78"/>
+                <a:ea typeface="Amiri" pitchFamily="2" charset="-78"/>
                 <a:cs typeface="Amiri" pitchFamily="2" charset="-78"/>
               </a:rPr>
               <a:t>اطْلُبْ نَصِيحَةً لِلْوِقَايَةِ.</a:t>
@@ -7181,6 +7233,7 @@
                   <a:srgbClr val="1B3B6F"/>
                 </a:solidFill>
                 <a:latin typeface="Amiri" pitchFamily="2" charset="-78"/>
+                <a:ea typeface="Amiri" pitchFamily="2" charset="-78"/>
                 <a:cs typeface="Amiri" pitchFamily="2" charset="-78"/>
               </a:rPr>
               <a:t>هَلْ يُمْكِنُ أَنْ أَحْجِزَ مَوْعِدًا يَوْمَ الخَمِيسِ؟</a:t>
@@ -7257,6 +7310,7 @@
                   <a:srgbClr val="1B3B6F"/>
                 </a:solidFill>
                 <a:latin typeface="Amiri" pitchFamily="2" charset="-78"/>
+                <a:ea typeface="Amiri" pitchFamily="2" charset="-78"/>
                 <a:cs typeface="Amiri" pitchFamily="2" charset="-78"/>
               </a:rPr>
               <a:t>اتَّفِقْ عَلَى مَوْعِدٍ لِلْمُتَابَعَةِ.</a:t>
@@ -7493,6 +7547,7 @@
                   <a:srgbClr val="D4AF37"/>
                 </a:solidFill>
                 <a:latin typeface="Amiri" pitchFamily="2" charset="-78"/>
+                <a:ea typeface="Amiri" pitchFamily="2" charset="-78"/>
                 <a:cs typeface="Amiri" pitchFamily="2" charset="-78"/>
               </a:rPr>
               <a:t>م</a:t>
@@ -7813,6 +7868,7 @@
                   <a:srgbClr val="8A6D1E"/>
                 </a:solidFill>
                 <a:latin typeface="Amiri" pitchFamily="2" charset="-78"/>
+                <a:ea typeface="Amiri" pitchFamily="2" charset="-78"/>
                 <a:cs typeface="Amiri" pitchFamily="2" charset="-78"/>
               </a:rPr>
               <a:t>فِي وَكَالَةِ السَّفَرِ</a:t>
@@ -8055,6 +8111,7 @@
                   <a:srgbClr val="1B3B6F"/>
                 </a:solidFill>
                 <a:latin typeface="Amiri" pitchFamily="2" charset="-78"/>
+                <a:ea typeface="Amiri" pitchFamily="2" charset="-78"/>
                 <a:cs typeface="Amiri" pitchFamily="2" charset="-78"/>
               </a:rPr>
               <a:t>أُرِيدُ أَنْ أَحْجِزَ رِحْلَةً إِلَى عَمَّانَ. مَتَى تُغَادِرُ الطَّائِرَةُ؟</a:t>
@@ -8131,6 +8188,7 @@
                   <a:srgbClr val="1B3B6F"/>
                 </a:solidFill>
                 <a:latin typeface="Amiri" pitchFamily="2" charset="-78"/>
+                <a:ea typeface="Amiri" pitchFamily="2" charset="-78"/>
                 <a:cs typeface="Amiri" pitchFamily="2" charset="-78"/>
               </a:rPr>
               <a:t>احْجِزْ رِحْلَةً وَاسْأَلْ عَنِ المَوَاعِيدِ.</a:t>
@@ -8261,6 +8319,7 @@
                   <a:srgbClr val="1B3B6F"/>
                 </a:solidFill>
                 <a:latin typeface="Amiri" pitchFamily="2" charset="-78"/>
+                <a:ea typeface="Amiri" pitchFamily="2" charset="-78"/>
                 <a:cs typeface="Amiri" pitchFamily="2" charset="-78"/>
               </a:rPr>
               <a:t>هَلْ تُوجَدُ فَنَادِقُ قَرِيبَةٌ مِنْ وَسَطِ المَدِينَةِ؟</a:t>
@@ -8337,6 +8396,7 @@
                   <a:srgbClr val="1B3B6F"/>
                 </a:solidFill>
                 <a:latin typeface="Amiri" pitchFamily="2" charset="-78"/>
+                <a:ea typeface="Amiri" pitchFamily="2" charset="-78"/>
                 <a:cs typeface="Amiri" pitchFamily="2" charset="-78"/>
               </a:rPr>
               <a:t>اسْأَلْ عَنْ خِيَارَاتِ الإِقَامَةِ.</a:t>
@@ -8467,6 +8527,7 @@
                   <a:srgbClr val="1B3B6F"/>
                 </a:solidFill>
                 <a:latin typeface="Amiri" pitchFamily="2" charset="-78"/>
+                <a:ea typeface="Amiri" pitchFamily="2" charset="-78"/>
                 <a:cs typeface="Amiri" pitchFamily="2" charset="-78"/>
               </a:rPr>
               <a:t>أُفَضِّلُ خِيَارًا صَدِيقًا لِلْبِيئَةِ، كَالقِطَارِ مَثَلًا.</a:t>
@@ -8543,6 +8604,7 @@
                   <a:srgbClr val="1B3B6F"/>
                 </a:solidFill>
                 <a:latin typeface="Amiri" pitchFamily="2" charset="-78"/>
+                <a:ea typeface="Amiri" pitchFamily="2" charset="-78"/>
                 <a:cs typeface="Amiri" pitchFamily="2" charset="-78"/>
               </a:rPr>
               <a:t>اطْلُبْ خِيَارًا صَدِيقًا لِلْبِيئَةِ.</a:t>
@@ -8608,6 +8670,7 @@
                   <a:srgbClr val="1B3B6F"/>
                 </a:solidFill>
                 <a:latin typeface="Amiri" pitchFamily="2" charset="-78"/>
+                <a:ea typeface="Amiri" pitchFamily="2" charset="-78"/>
                 <a:cs typeface="Amiri" pitchFamily="2" charset="-78"/>
               </a:rPr>
               <a:t>السِّعْرُ مُرْتَفِعٌ قَلِيلًا؛ هَلْ يُمْكِنُ أَنْ تُخَفِّضُوهُ؟</a:t>
@@ -8684,6 +8747,7 @@
                   <a:srgbClr val="1B3B6F"/>
                 </a:solidFill>
                 <a:latin typeface="Amiri" pitchFamily="2" charset="-78"/>
+                <a:ea typeface="Amiri" pitchFamily="2" charset="-78"/>
                 <a:cs typeface="Amiri" pitchFamily="2" charset="-78"/>
               </a:rPr>
               <a:t>تَفَاوَضْ عَلَى السِّعْرِ.</a:t>
@@ -8855,6 +8919,7 @@
                   <a:srgbClr val="D4AF37"/>
                 </a:solidFill>
                 <a:latin typeface="Amiri" pitchFamily="2" charset="-78"/>
+                <a:ea typeface="Amiri" pitchFamily="2" charset="-78"/>
                 <a:cs typeface="Amiri" pitchFamily="2" charset="-78"/>
               </a:rPr>
               <a:t>م</a:t>
@@ -9175,6 +9240,7 @@
                   <a:srgbClr val="8A6D1E"/>
                 </a:solidFill>
                 <a:latin typeface="Amiri" pitchFamily="2" charset="-78"/>
+                <a:ea typeface="Amiri" pitchFamily="2" charset="-78"/>
                 <a:cs typeface="Amiri" pitchFamily="2" charset="-78"/>
               </a:rPr>
               <a:t>فِي مَكْتَبِ القَبُولِ</a:t>
@@ -9417,6 +9483,7 @@
                   <a:srgbClr val="1B3B6F"/>
                 </a:solidFill>
                 <a:latin typeface="Amiri" pitchFamily="2" charset="-78"/>
+                <a:ea typeface="Amiri" pitchFamily="2" charset="-78"/>
                 <a:cs typeface="Amiri" pitchFamily="2" charset="-78"/>
               </a:rPr>
               <a:t>كُنْتُ قَدْ دَرَسْتُ العُلُومَ وَالعَرَبِيَّةَ فِي المَدْرَسَةِ الثَّانَوِيَّةِ.</a:t>
@@ -9493,6 +9560,7 @@
                   <a:srgbClr val="1B3B6F"/>
                 </a:solidFill>
                 <a:latin typeface="Amiri" pitchFamily="2" charset="-78"/>
+                <a:ea typeface="Amiri" pitchFamily="2" charset="-78"/>
                 <a:cs typeface="Amiri" pitchFamily="2" charset="-78"/>
               </a:rPr>
               <a:t>صِفْ خَلْفِيَّتَكَ الدِّرَاسِيَّةَ (المَاضِي التَّامُّ).</a:t>
@@ -9623,6 +9691,7 @@
                   <a:srgbClr val="1B3B6F"/>
                 </a:solidFill>
                 <a:latin typeface="Amiri" pitchFamily="2" charset="-78"/>
+                <a:ea typeface="Amiri" pitchFamily="2" charset="-78"/>
                 <a:cs typeface="Amiri" pitchFamily="2" charset="-78"/>
               </a:rPr>
               <a:t>مَا البَرَامِجُ المُتَاحَةُ فِي كُلِّيَّةِ الطِّبِّ؟</a:t>
@@ -9699,6 +9768,7 @@
                   <a:srgbClr val="1B3B6F"/>
                 </a:solidFill>
                 <a:latin typeface="Amiri" pitchFamily="2" charset="-78"/>
+                <a:ea typeface="Amiri" pitchFamily="2" charset="-78"/>
                 <a:cs typeface="Amiri" pitchFamily="2" charset="-78"/>
               </a:rPr>
               <a:t>اسْأَلْ عَنِ البَرَامِجِ المُتَاحَةِ.</a:t>
@@ -9829,6 +9899,7 @@
                   <a:srgbClr val="1B3B6F"/>
                 </a:solidFill>
                 <a:latin typeface="Amiri" pitchFamily="2" charset="-78"/>
+                <a:ea typeface="Amiri" pitchFamily="2" charset="-78"/>
                 <a:cs typeface="Amiri" pitchFamily="2" charset="-78"/>
               </a:rPr>
               <a:t>إِذَا قُبِلْتُ، سَأَدْرُسُ الطِّبَّ لِكَيْ أُسَاعِدَ النَّاسَ.</a:t>
@@ -9905,6 +9976,7 @@
                   <a:srgbClr val="1B3B6F"/>
                 </a:solidFill>
                 <a:latin typeface="Amiri" pitchFamily="2" charset="-78"/>
+                <a:ea typeface="Amiri" pitchFamily="2" charset="-78"/>
                 <a:cs typeface="Amiri" pitchFamily="2" charset="-78"/>
               </a:rPr>
               <a:t>تَحَدَّثْ عَنْ خُطَطِكَ المُسْتَقْبَلِيَّةِ (شَرْطٌ).</a:t>
@@ -9970,6 +10042,7 @@
                   <a:srgbClr val="1B3B6F"/>
                 </a:solidFill>
                 <a:latin typeface="Amiri" pitchFamily="2" charset="-78"/>
+                <a:ea typeface="Amiri" pitchFamily="2" charset="-78"/>
                 <a:cs typeface="Amiri" pitchFamily="2" charset="-78"/>
               </a:rPr>
               <a:t>هَلْ تُوجَدُ مِنَحٌ لِلطُّلَّابِ الدَّوْلِيِّينَ؟</a:t>
@@ -10046,6 +10119,7 @@
                   <a:srgbClr val="1B3B6F"/>
                 </a:solidFill>
                 <a:latin typeface="Amiri" pitchFamily="2" charset="-78"/>
+                <a:ea typeface="Amiri" pitchFamily="2" charset="-78"/>
                 <a:cs typeface="Amiri" pitchFamily="2" charset="-78"/>
               </a:rPr>
               <a:t>اطْلُبْ مَعْلُومَاتٍ عَنِ المِنَحِ.</a:t>
@@ -10217,6 +10291,7 @@
                   <a:srgbClr val="D4AF37"/>
                 </a:solidFill>
                 <a:latin typeface="Amiri" pitchFamily="2" charset="-78"/>
+                <a:ea typeface="Amiri" pitchFamily="2" charset="-78"/>
                 <a:cs typeface="Amiri" pitchFamily="2" charset="-78"/>
               </a:rPr>
               <a:t>م</a:t>
@@ -10537,6 +10612,7 @@
                   <a:srgbClr val="8A6D1E"/>
                 </a:solidFill>
                 <a:latin typeface="Amiri" pitchFamily="2" charset="-78"/>
+                <a:ea typeface="Amiri" pitchFamily="2" charset="-78"/>
                 <a:cs typeface="Amiri" pitchFamily="2" charset="-78"/>
               </a:rPr>
               <a:t>فِي اجْتِمَاعِ الحَيِّ</a:t>
@@ -10779,6 +10855,7 @@
                   <a:srgbClr val="1B3B6F"/>
                 </a:solidFill>
                 <a:latin typeface="Amiri" pitchFamily="2" charset="-78"/>
+                <a:ea typeface="Amiri" pitchFamily="2" charset="-78"/>
                 <a:cs typeface="Amiri" pitchFamily="2" charset="-78"/>
               </a:rPr>
               <a:t>تُرْمَى النُّفَايَاتُ فِي الحَدِيقَةِ، وَقَدْ لُوِّثَ النَّهْرُ.</a:t>
@@ -10855,6 +10932,7 @@
                   <a:srgbClr val="1B3B6F"/>
                 </a:solidFill>
                 <a:latin typeface="Amiri" pitchFamily="2" charset="-78"/>
+                <a:ea typeface="Amiri" pitchFamily="2" charset="-78"/>
                 <a:cs typeface="Amiri" pitchFamily="2" charset="-78"/>
               </a:rPr>
               <a:t>أَبْلِغْ عَنْ مُشْكِلَةٍ بِيئِيَّةٍ مَحَلِّيَّةٍ (المَبْنِيُّ لِلْمَجْهُولِ).</a:t>
@@ -10985,6 +11063,7 @@
                   <a:srgbClr val="1B3B6F"/>
                 </a:solidFill>
                 <a:latin typeface="Amiri" pitchFamily="2" charset="-78"/>
+                <a:ea typeface="Amiri" pitchFamily="2" charset="-78"/>
                 <a:cs typeface="Amiri" pitchFamily="2" charset="-78"/>
               </a:rPr>
               <a:t>أَقْتَرِحُ أَنْ تُوضَعَ حَاوِيَاتٌ لِإِعَادَةِ التَّدْوِيرِ.</a:t>
@@ -11061,6 +11140,7 @@
                   <a:srgbClr val="1B3B6F"/>
                 </a:solidFill>
                 <a:latin typeface="Amiri" pitchFamily="2" charset="-78"/>
+                <a:ea typeface="Amiri" pitchFamily="2" charset="-78"/>
                 <a:cs typeface="Amiri" pitchFamily="2" charset="-78"/>
               </a:rPr>
               <a:t>اقْتَرِحْ حُلُولًا (مُسَبِّبُ نَصْبٍ).</a:t>
@@ -11191,6 +11271,7 @@
                   <a:srgbClr val="1B3B6F"/>
                 </a:solidFill>
                 <a:latin typeface="Amiri" pitchFamily="2" charset="-78"/>
+                <a:ea typeface="Amiri" pitchFamily="2" charset="-78"/>
                 <a:cs typeface="Amiri" pitchFamily="2" charset="-78"/>
               </a:rPr>
               <a:t>مَا اللَّوَائِحُ الَّتِي تَمْنَعُ رَمْيَ النُّفَايَاتِ؟</a:t>
@@ -11267,6 +11348,7 @@
                   <a:srgbClr val="1B3B6F"/>
                 </a:solidFill>
                 <a:latin typeface="Amiri" pitchFamily="2" charset="-78"/>
+                <a:ea typeface="Amiri" pitchFamily="2" charset="-78"/>
                 <a:cs typeface="Amiri" pitchFamily="2" charset="-78"/>
               </a:rPr>
               <a:t>اسْأَلْ عَنِ اللَّوَائِحِ.</a:t>
@@ -11332,6 +11414,7 @@
                   <a:srgbClr val="1B3B6F"/>
                 </a:solidFill>
                 <a:latin typeface="Amiri" pitchFamily="2" charset="-78"/>
+                <a:ea typeface="Amiri" pitchFamily="2" charset="-78"/>
                 <a:cs typeface="Amiri" pitchFamily="2" charset="-78"/>
               </a:rPr>
               <a:t>نَرْجُو أَنْ تَدْعَمَ البَلَدِيَّةُ حَمْلَةَ تَنْظِيفٍ.</a:t>
@@ -11408,6 +11491,7 @@
                   <a:srgbClr val="1B3B6F"/>
                 </a:solidFill>
                 <a:latin typeface="Amiri" pitchFamily="2" charset="-78"/>
+                <a:ea typeface="Amiri" pitchFamily="2" charset="-78"/>
                 <a:cs typeface="Amiri" pitchFamily="2" charset="-78"/>
               </a:rPr>
               <a:t>اطْلُبْ دَعْمَ البَلَدِيَّةِ.</a:t>
@@ -11579,6 +11663,7 @@
                   <a:srgbClr val="D4AF37"/>
                 </a:solidFill>
                 <a:latin typeface="Amiri" pitchFamily="2" charset="-78"/>
+                <a:ea typeface="Amiri" pitchFamily="2" charset="-78"/>
                 <a:cs typeface="Amiri" pitchFamily="2" charset="-78"/>
               </a:rPr>
               <a:t>م</a:t>
@@ -11899,6 +11984,7 @@
                   <a:srgbClr val="8A6D1E"/>
                 </a:solidFill>
                 <a:latin typeface="Amiri" pitchFamily="2" charset="-78"/>
+                <a:ea typeface="Amiri" pitchFamily="2" charset="-78"/>
                 <a:cs typeface="Amiri" pitchFamily="2" charset="-78"/>
               </a:rPr>
               <a:t>فِي المُؤْتَمَرِ الدَّوْلِيِّ</a:t>
@@ -12141,6 +12227,7 @@
                   <a:srgbClr val="1B3B6F"/>
                 </a:solidFill>
                 <a:latin typeface="Amiri" pitchFamily="2" charset="-78"/>
+                <a:ea typeface="Amiri" pitchFamily="2" charset="-78"/>
                 <a:cs typeface="Amiri" pitchFamily="2" charset="-78"/>
               </a:rPr>
               <a:t>أَرَى أَنَّ الفَجْوَةَ الرَّقْمِيَّةَ تُعَمِّقُ عَدَمَ المُسَاوَاةِ.</a:t>
@@ -12217,6 +12304,7 @@
                   <a:srgbClr val="1B3B6F"/>
                 </a:solidFill>
                 <a:latin typeface="Amiri" pitchFamily="2" charset="-78"/>
+                <a:ea typeface="Amiri" pitchFamily="2" charset="-78"/>
                 <a:cs typeface="Amiri" pitchFamily="2" charset="-78"/>
               </a:rPr>
               <a:t>اعْرِضْ مَوْقِفَكَ مِنْ قَضِيَّةٍ اجْتِمَاعِيَّةٍ.</a:t>
@@ -12347,6 +12435,7 @@
                   <a:srgbClr val="1B3B6F"/>
                 </a:solidFill>
                 <a:latin typeface="Amiri" pitchFamily="2" charset="-78"/>
+                <a:ea typeface="Amiri" pitchFamily="2" charset="-78"/>
                 <a:cs typeface="Amiri" pitchFamily="2" charset="-78"/>
               </a:rPr>
               <a:t>صَحِيحٌ أَنَّ التِّقْنِيَّةَ تُوَفِّرُ فُرَصًا، غَيْرَ أَنَّ …</a:t>
@@ -12423,6 +12512,7 @@
                   <a:srgbClr val="1B3B6F"/>
                 </a:solidFill>
                 <a:latin typeface="Amiri" pitchFamily="2" charset="-78"/>
+                <a:ea typeface="Amiri" pitchFamily="2" charset="-78"/>
                 <a:cs typeface="Amiri" pitchFamily="2" charset="-78"/>
               </a:rPr>
               <a:t>سَلِّمْ بِرَأْيِ الطَّرَفِ الآخَرِ (صَحِيحٌ أَنَّ).</a:t>
@@ -12553,6 +12643,7 @@
                   <a:srgbClr val="1B3B6F"/>
                 </a:solidFill>
                 <a:latin typeface="Amiri" pitchFamily="2" charset="-78"/>
+                <a:ea typeface="Amiri" pitchFamily="2" charset="-78"/>
                 <a:cs typeface="Amiri" pitchFamily="2" charset="-78"/>
               </a:rPr>
               <a:t>يَتَطَلَّبُ الأَمْرُ أَنْ تُوَفِّرَ الحُكُومَاتُ الإِنْتِرْنِتَ لِلْجَمِيعِ.</a:t>
@@ -12629,6 +12720,7 @@
                   <a:srgbClr val="1B3B6F"/>
                 </a:solidFill>
                 <a:latin typeface="Amiri" pitchFamily="2" charset="-78"/>
+                <a:ea typeface="Amiri" pitchFamily="2" charset="-78"/>
                 <a:cs typeface="Amiri" pitchFamily="2" charset="-78"/>
               </a:rPr>
               <a:t>اطْلُبْ إِجْرَاءً (يَتَطَلَّبُ أَنْ).</a:t>
@@ -12694,6 +12786,7 @@
                   <a:srgbClr val="1B3B6F"/>
                 </a:solidFill>
                 <a:latin typeface="Amiri" pitchFamily="2" charset="-78"/>
+                <a:ea typeface="Amiri" pitchFamily="2" charset="-78"/>
                 <a:cs typeface="Amiri" pitchFamily="2" charset="-78"/>
               </a:rPr>
               <a:t>وَبِنَاءً عَلَى مَا سَبَقَ، أُوصِي بِأَنْ نَسْتَثْمِرَ فِي التَّعْلِيمِ.</a:t>
@@ -12770,6 +12863,7 @@
                   <a:srgbClr val="1B3B6F"/>
                 </a:solidFill>
                 <a:latin typeface="Amiri" pitchFamily="2" charset="-78"/>
+                <a:ea typeface="Amiri" pitchFamily="2" charset="-78"/>
                 <a:cs typeface="Amiri" pitchFamily="2" charset="-78"/>
               </a:rPr>
               <a:t>اخْتِمْ بِتَوْصِيَةٍ.</a:t>
@@ -12941,6 +13035,7 @@
                   <a:srgbClr val="D4AF37"/>
                 </a:solidFill>
                 <a:latin typeface="Amiri" pitchFamily="2" charset="-78"/>
+                <a:ea typeface="Amiri" pitchFamily="2" charset="-78"/>
                 <a:cs typeface="Amiri" pitchFamily="2" charset="-78"/>
               </a:rPr>
               <a:t>م</a:t>
@@ -13261,6 +13356,7 @@
                   <a:srgbClr val="8A6D1E"/>
                 </a:solidFill>
                 <a:latin typeface="Amiri" pitchFamily="2" charset="-78"/>
+                <a:ea typeface="Amiri" pitchFamily="2" charset="-78"/>
                 <a:cs typeface="Amiri" pitchFamily="2" charset="-78"/>
               </a:rPr>
               <a:t>تَحْلِيلُ التَّوَاصُلِ</a:t>
@@ -14173,6 +14269,7 @@
                   <a:srgbClr val="D4AF37"/>
                 </a:solidFill>
                 <a:latin typeface="Amiri" pitchFamily="2" charset="-78"/>
+                <a:ea typeface="Amiri" pitchFamily="2" charset="-78"/>
                 <a:cs typeface="Amiri" pitchFamily="2" charset="-78"/>
               </a:rPr>
               <a:t>م</a:t>
@@ -14493,6 +14590,7 @@
                   <a:srgbClr val="8A6D1E"/>
                 </a:solidFill>
                 <a:latin typeface="Amiri" pitchFamily="2" charset="-78"/>
+                <a:ea typeface="Amiri" pitchFamily="2" charset="-78"/>
                 <a:cs typeface="Amiri" pitchFamily="2" charset="-78"/>
               </a:rPr>
               <a:t>التَّأَمُّلُ</a:t>
@@ -14735,6 +14833,7 @@
                   <a:srgbClr val="1B3B6F"/>
                 </a:solidFill>
                 <a:latin typeface="Amiri" pitchFamily="2" charset="-78"/>
+                <a:ea typeface="Amiri" pitchFamily="2" charset="-78"/>
                 <a:cs typeface="Amiri" pitchFamily="2" charset="-78"/>
               </a:rPr>
               <a:t>هَلْ يُمْكِنُ أَنْ …؟</a:t>
@@ -15017,6 +15116,7 @@
                   <a:srgbClr val="1B3B6F"/>
                 </a:solidFill>
                 <a:latin typeface="Amiri" pitchFamily="2" charset="-78"/>
+                <a:ea typeface="Amiri" pitchFamily="2" charset="-78"/>
                 <a:cs typeface="Amiri" pitchFamily="2" charset="-78"/>
               </a:rPr>
               <a:t>أَطْلُبَ مَعْلُومَاتٍ</a:t>
@@ -15093,6 +15193,7 @@
                   <a:srgbClr val="1B3B6F"/>
                 </a:solidFill>
                 <a:latin typeface="Amiri" pitchFamily="2" charset="-78"/>
+                <a:ea typeface="Amiri" pitchFamily="2" charset="-78"/>
                 <a:cs typeface="Amiri" pitchFamily="2" charset="-78"/>
               </a:rPr>
               <a:t>أَسْتَطِيعُ الآنَ أَنْ ______ بِثِقَةٍ.</a:t>
@@ -15264,6 +15365,7 @@
                   <a:srgbClr val="D4AF37"/>
                 </a:solidFill>
                 <a:latin typeface="Amiri" pitchFamily="2" charset="-78"/>
+                <a:ea typeface="Amiri" pitchFamily="2" charset="-78"/>
                 <a:cs typeface="Amiri" pitchFamily="2" charset="-78"/>
               </a:rPr>
               <a:t>م</a:t>
@@ -15584,6 +15686,7 @@
                   <a:srgbClr val="8A6D1E"/>
                 </a:solidFill>
                 <a:latin typeface="Amiri" pitchFamily="2" charset="-78"/>
+                <a:ea typeface="Amiri" pitchFamily="2" charset="-78"/>
                 <a:cs typeface="Amiri" pitchFamily="2" charset="-78"/>
               </a:rPr>
               <a:t>قَيِّمْ عَمَلَكَ</a:t>
@@ -16741,6 +16844,7 @@
                   <a:srgbClr val="D4AF37"/>
                 </a:solidFill>
                 <a:latin typeface="Amiri" pitchFamily="2" charset="-78"/>
+                <a:ea typeface="Amiri" pitchFamily="2" charset="-78"/>
                 <a:cs typeface="Amiri" pitchFamily="2" charset="-78"/>
               </a:rPr>
               <a:t>م</a:t>
@@ -17061,6 +17165,7 @@
                   <a:srgbClr val="8A6D1E"/>
                 </a:solidFill>
                 <a:latin typeface="Amiri" pitchFamily="2" charset="-78"/>
+                <a:ea typeface="Amiri" pitchFamily="2" charset="-78"/>
                 <a:cs typeface="Amiri" pitchFamily="2" charset="-78"/>
               </a:rPr>
               <a:t>آدَابُ الصَّفِّ</a:t>
@@ -18592,6 +18697,7 @@
                   <a:srgbClr val="D4AF37"/>
                 </a:solidFill>
                 <a:latin typeface="Amiri" pitchFamily="2" charset="-78"/>
+                <a:ea typeface="Amiri" pitchFamily="2" charset="-78"/>
                 <a:cs typeface="Amiri" pitchFamily="2" charset="-78"/>
               </a:rPr>
               <a:t>م</a:t>
@@ -18912,6 +19018,7 @@
                   <a:srgbClr val="8A6D1E"/>
                 </a:solidFill>
                 <a:latin typeface="Amiri" pitchFamily="2" charset="-78"/>
+                <a:ea typeface="Amiri" pitchFamily="2" charset="-78"/>
                 <a:cs typeface="Amiri" pitchFamily="2" charset="-78"/>
               </a:rPr>
               <a:t>التَّحْضِيرُ لِلدَّرْسِ القَادِمِ</a:t>
@@ -19125,6 +19232,7 @@
                   <a:srgbClr val="1B3B6F"/>
                 </a:solidFill>
                 <a:latin typeface="Amiri" pitchFamily="2" charset="-78"/>
+                <a:ea typeface="Amiri" pitchFamily="2" charset="-78"/>
                 <a:cs typeface="Amiri" pitchFamily="2" charset="-78"/>
               </a:rPr>
               <a:t>المُحَادَثَةُ المَوْضُوعِيَّةُ</a:t>
@@ -19214,6 +19322,7 @@
                   <a:srgbClr val="1B3B6F"/>
                 </a:solidFill>
                 <a:latin typeface="Amiri" pitchFamily="2" charset="-78"/>
+                <a:ea typeface="Amiri" pitchFamily="2" charset="-78"/>
                 <a:cs typeface="Amiri" pitchFamily="2" charset="-78"/>
               </a:rPr>
               <a:t>التَّوْسِيعُ فِي الإِجَابَةِ</a:t>
@@ -19303,6 +19412,7 @@
                   <a:srgbClr val="1B3B6F"/>
                 </a:solidFill>
                 <a:latin typeface="Amiri" pitchFamily="2" charset="-78"/>
+                <a:ea typeface="Amiri" pitchFamily="2" charset="-78"/>
                 <a:cs typeface="Amiri" pitchFamily="2" charset="-78"/>
               </a:rPr>
               <a:t>الرَّأْيُ مَعَ الأَسْبَابِ</a:t>
@@ -19392,6 +19502,7 @@
                   <a:srgbClr val="1B3B6F"/>
                 </a:solidFill>
                 <a:latin typeface="Amiri" pitchFamily="2" charset="-78"/>
+                <a:ea typeface="Amiri" pitchFamily="2" charset="-78"/>
                 <a:cs typeface="Amiri" pitchFamily="2" charset="-78"/>
               </a:rPr>
               <a:t>لُغَةُ التَّوَقُّفِ وَالتَّفْكِيرِ</a:t>
@@ -19481,6 +19592,7 @@
                   <a:srgbClr val="1B3B6F"/>
                 </a:solidFill>
                 <a:latin typeface="Amiri" pitchFamily="2" charset="-78"/>
+                <a:ea typeface="Amiri" pitchFamily="2" charset="-78"/>
                 <a:cs typeface="Amiri" pitchFamily="2" charset="-78"/>
               </a:rPr>
               <a:t>التَّعَافِي مِنَ الأَخْطَاءِ</a:t>
@@ -19649,6 +19761,7 @@
                   <a:srgbClr val="1B3B6F"/>
                 </a:solidFill>
                 <a:latin typeface="Amiri" pitchFamily="2" charset="-78"/>
+                <a:ea typeface="Amiri" pitchFamily="2" charset="-78"/>
                 <a:cs typeface="Amiri" pitchFamily="2" charset="-78"/>
               </a:rPr>
               <a:t>أَرَى أَنَّ ______ ، لِأَنَّ ______ ، فَمَثَلًا ______ .</a:t>
@@ -20318,6 +20431,7 @@
                   <a:srgbClr val="FFFFFF"/>
                 </a:solidFill>
                 <a:latin typeface="Amiri" pitchFamily="2" charset="-78"/>
+                <a:ea typeface="Amiri" pitchFamily="2" charset="-78"/>
                 <a:cs typeface="Amiri" pitchFamily="2" charset="-78"/>
               </a:rPr>
               <a:t>أَحْسَنْتُمْ! إِلَى اللِّقَاءِ</a:t>
@@ -20470,6 +20584,7 @@
                   <a:srgbClr val="D4AF37"/>
                 </a:solidFill>
                 <a:latin typeface="Amiri" pitchFamily="2" charset="-78"/>
+                <a:ea typeface="Amiri" pitchFamily="2" charset="-78"/>
                 <a:cs typeface="Amiri" pitchFamily="2" charset="-78"/>
               </a:rPr>
               <a:t>الوَرَقَةُ الثَّالِثَةُ — المُحَادَثَةُ</a:t>
@@ -20603,6 +20718,7 @@
                   <a:srgbClr val="D4AF37"/>
                 </a:solidFill>
                 <a:latin typeface="Amiri" pitchFamily="2" charset="-78"/>
+                <a:ea typeface="Amiri" pitchFamily="2" charset="-78"/>
                 <a:cs typeface="Amiri" pitchFamily="2" charset="-78"/>
               </a:rPr>
               <a:t>م</a:t>
@@ -20923,6 +21039,7 @@
                   <a:srgbClr val="8A6D1E"/>
                 </a:solidFill>
                 <a:latin typeface="Amiri" pitchFamily="2" charset="-78"/>
+                <a:ea typeface="Amiri" pitchFamily="2" charset="-78"/>
                 <a:cs typeface="Amiri" pitchFamily="2" charset="-78"/>
               </a:rPr>
               <a:t>خَرِيطَةُ الدَّرْسِ</a:t>
@@ -21237,6 +21354,7 @@
                   <a:srgbClr val="0E7C86"/>
                 </a:solidFill>
                 <a:latin typeface="Amiri" pitchFamily="2" charset="-78"/>
+                <a:ea typeface="Amiri" pitchFamily="2" charset="-78"/>
                 <a:cs typeface="Amiri" pitchFamily="2" charset="-78"/>
               </a:rPr>
               <a:t>اِبْدَأِ الآنَ</a:t>
@@ -21513,6 +21631,7 @@
                   <a:srgbClr val="1B3B6F"/>
                 </a:solidFill>
                 <a:latin typeface="Amiri" pitchFamily="2" charset="-78"/>
+                <a:ea typeface="Amiri" pitchFamily="2" charset="-78"/>
                 <a:cs typeface="Amiri" pitchFamily="2" charset="-78"/>
               </a:rPr>
               <a:t>المَعَايِيرُ</a:t>
@@ -21789,6 +21908,7 @@
                   <a:srgbClr val="6B4C9A"/>
                 </a:solidFill>
                 <a:latin typeface="Amiri" pitchFamily="2" charset="-78"/>
+                <a:ea typeface="Amiri" pitchFamily="2" charset="-78"/>
                 <a:cs typeface="Amiri" pitchFamily="2" charset="-78"/>
               </a:rPr>
               <a:t>شَاهِدْ</a:t>
@@ -22065,6 +22185,7 @@
                   <a:srgbClr val="1E6B52"/>
                 </a:solidFill>
                 <a:latin typeface="Amiri" pitchFamily="2" charset="-78"/>
+                <a:ea typeface="Amiri" pitchFamily="2" charset="-78"/>
                 <a:cs typeface="Amiri" pitchFamily="2" charset="-78"/>
               </a:rPr>
               <a:t>تَمْثِيلُ الدَّوْرِ</a:t>
@@ -22341,6 +22462,7 @@
                   <a:srgbClr val="8A6D1E"/>
                 </a:solidFill>
                 <a:latin typeface="Amiri" pitchFamily="2" charset="-78"/>
+                <a:ea typeface="Amiri" pitchFamily="2" charset="-78"/>
                 <a:cs typeface="Amiri" pitchFamily="2" charset="-78"/>
               </a:rPr>
               <a:t>قَيِّمْ</a:t>
@@ -22617,6 +22739,7 @@
                   <a:srgbClr val="C45A3C"/>
                 </a:solidFill>
                 <a:latin typeface="Amiri" pitchFamily="2" charset="-78"/>
+                <a:ea typeface="Amiri" pitchFamily="2" charset="-78"/>
                 <a:cs typeface="Amiri" pitchFamily="2" charset="-78"/>
               </a:rPr>
               <a:t>اِسْتَعِدَّ</a:t>
@@ -22860,6 +22983,7 @@
                   <a:srgbClr val="D4AF37"/>
                 </a:solidFill>
                 <a:latin typeface="Amiri" pitchFamily="2" charset="-78"/>
+                <a:ea typeface="Amiri" pitchFamily="2" charset="-78"/>
                 <a:cs typeface="Amiri" pitchFamily="2" charset="-78"/>
               </a:rPr>
               <a:t>م</a:t>
@@ -23180,6 +23304,7 @@
                   <a:srgbClr val="8A6D1E"/>
                 </a:solidFill>
                 <a:latin typeface="Amiri" pitchFamily="2" charset="-78"/>
+                <a:ea typeface="Amiri" pitchFamily="2" charset="-78"/>
                 <a:cs typeface="Amiri" pitchFamily="2" charset="-78"/>
               </a:rPr>
               <a:t>اِبْدَأِ الآنَ</a:t>
@@ -23366,6 +23491,7 @@
                   <a:srgbClr val="1B3B6F"/>
                 </a:solidFill>
                 <a:latin typeface="Amiri" pitchFamily="2" charset="-78"/>
+                <a:ea typeface="Amiri" pitchFamily="2" charset="-78"/>
                 <a:cs typeface="Amiri" pitchFamily="2" charset="-78"/>
               </a:rPr>
               <a:t>تَمْثِيلُ الدَّوْرِ</a:t>
@@ -23830,6 +23956,7 @@
                   <a:srgbClr val="1B3B6F"/>
                 </a:solidFill>
                 <a:latin typeface="Amiri" pitchFamily="2" charset="-78"/>
+                <a:ea typeface="Amiri" pitchFamily="2" charset="-78"/>
                 <a:cs typeface="Amiri" pitchFamily="2" charset="-78"/>
               </a:rPr>
               <a:t>طَلَبُ المَعْلُومَاتِ</a:t>
@@ -24294,6 +24421,7 @@
                   <a:srgbClr val="1B3B6F"/>
                 </a:solidFill>
                 <a:latin typeface="Amiri" pitchFamily="2" charset="-78"/>
+                <a:ea typeface="Amiri" pitchFamily="2" charset="-78"/>
                 <a:cs typeface="Amiri" pitchFamily="2" charset="-78"/>
               </a:rPr>
               <a:t>التَّفَاوُضُ</a:t>
@@ -24758,6 +24886,7 @@
                   <a:srgbClr val="1B3B6F"/>
                 </a:solidFill>
                 <a:latin typeface="Amiri" pitchFamily="2" charset="-78"/>
+                <a:ea typeface="Amiri" pitchFamily="2" charset="-78"/>
                 <a:cs typeface="Amiri" pitchFamily="2" charset="-78"/>
               </a:rPr>
               <a:t>هَلْ يُمْكِنُ أَنْ</a:t>
@@ -24784,6 +24913,7 @@
                   <a:srgbClr val="1B3B6F"/>
                 </a:solidFill>
                 <a:latin typeface="Amiri" pitchFamily="2" charset="-78"/>
+                <a:ea typeface="Amiri" pitchFamily="2" charset="-78"/>
                 <a:cs typeface="Amiri" pitchFamily="2" charset="-78"/>
               </a:rPr>
               <a:t>مَوْعِدًا؟</a:t>
@@ -24885,6 +25015,7 @@
                   <a:srgbClr val="1F2A37"/>
                 </a:solidFill>
                 <a:latin typeface="Amiri" pitchFamily="2" charset="-78"/>
+                <a:ea typeface="Amiri" pitchFamily="2" charset="-78"/>
                 <a:cs typeface="Amiri" pitchFamily="2" charset="-78"/>
               </a:rPr>
               <a:t>أَحْجِزُ</a:t>
@@ -24986,6 +25117,7 @@
                   <a:srgbClr val="1F2A37"/>
                 </a:solidFill>
                 <a:latin typeface="Amiri" pitchFamily="2" charset="-78"/>
+                <a:ea typeface="Amiri" pitchFamily="2" charset="-78"/>
                 <a:cs typeface="Amiri" pitchFamily="2" charset="-78"/>
               </a:rPr>
               <a:t>حَجَزْتُ</a:t>
@@ -25087,6 +25219,7 @@
                   <a:srgbClr val="1F2A37"/>
                 </a:solidFill>
                 <a:latin typeface="Amiri" pitchFamily="2" charset="-78"/>
+                <a:ea typeface="Amiri" pitchFamily="2" charset="-78"/>
                 <a:cs typeface="Amiri" pitchFamily="2" charset="-78"/>
               </a:rPr>
               <a:t>أَحْجِزَ</a:t>
@@ -25235,6 +25368,7 @@
                   <a:srgbClr val="1B3B6F"/>
                 </a:solidFill>
                 <a:latin typeface="Amiri" pitchFamily="2" charset="-78"/>
+                <a:ea typeface="Amiri" pitchFamily="2" charset="-78"/>
                 <a:cs typeface="Amiri" pitchFamily="2" charset="-78"/>
               </a:rPr>
               <a:t>كُنْتُ</a:t>
@@ -25261,6 +25395,7 @@
                   <a:srgbClr val="1B3B6F"/>
                 </a:solidFill>
                 <a:latin typeface="Amiri" pitchFamily="2" charset="-78"/>
+                <a:ea typeface="Amiri" pitchFamily="2" charset="-78"/>
                 <a:cs typeface="Amiri" pitchFamily="2" charset="-78"/>
               </a:rPr>
               <a:t>دَرَسْتُ العُلُومَ</a:t>
@@ -25375,6 +25510,7 @@
                   <a:srgbClr val="1F2A37"/>
                 </a:solidFill>
                 <a:latin typeface="Amiri" pitchFamily="2" charset="-78"/>
+                <a:ea typeface="Amiri" pitchFamily="2" charset="-78"/>
                 <a:cs typeface="Amiri" pitchFamily="2" charset="-78"/>
               </a:rPr>
               <a:t>قَدْ</a:t>
@@ -25476,6 +25612,7 @@
                   <a:srgbClr val="1F2A37"/>
                 </a:solidFill>
                 <a:latin typeface="Amiri" pitchFamily="2" charset="-78"/>
+                <a:ea typeface="Amiri" pitchFamily="2" charset="-78"/>
                 <a:cs typeface="Amiri" pitchFamily="2" charset="-78"/>
               </a:rPr>
               <a:t>سَوْفَ</a:t>
@@ -25577,6 +25714,7 @@
                   <a:srgbClr val="1F2A37"/>
                 </a:solidFill>
                 <a:latin typeface="Amiri" pitchFamily="2" charset="-78"/>
+                <a:ea typeface="Amiri" pitchFamily="2" charset="-78"/>
                 <a:cs typeface="Amiri" pitchFamily="2" charset="-78"/>
               </a:rPr>
               <a:t>لَنْ</a:t>
@@ -25912,6 +26050,7 @@
                   <a:srgbClr val="D4AF37"/>
                 </a:solidFill>
                 <a:latin typeface="Amiri" pitchFamily="2" charset="-78"/>
+                <a:ea typeface="Amiri" pitchFamily="2" charset="-78"/>
                 <a:cs typeface="Amiri" pitchFamily="2" charset="-78"/>
               </a:rPr>
               <a:t>م</a:t>
@@ -26232,6 +26371,7 @@
                   <a:srgbClr val="8A6D1E"/>
                 </a:solidFill>
                 <a:latin typeface="Amiri" pitchFamily="2" charset="-78"/>
+                <a:ea typeface="Amiri" pitchFamily="2" charset="-78"/>
                 <a:cs typeface="Amiri" pitchFamily="2" charset="-78"/>
               </a:rPr>
               <a:t>الإِجَابَاتُ وَالتَّعْلِيلُ</a:t>
@@ -26418,6 +26558,7 @@
                   <a:srgbClr val="1B3B6F"/>
                 </a:solidFill>
                 <a:latin typeface="Amiri" pitchFamily="2" charset="-78"/>
+                <a:ea typeface="Amiri" pitchFamily="2" charset="-78"/>
                 <a:cs typeface="Amiri" pitchFamily="2" charset="-78"/>
               </a:rPr>
               <a:t>تَمْثِيلُ الدَّوْرِ</a:t>
@@ -26947,6 +27088,7 @@
                   <a:srgbClr val="1B3B6F"/>
                 </a:solidFill>
                 <a:latin typeface="Amiri" pitchFamily="2" charset="-78"/>
+                <a:ea typeface="Amiri" pitchFamily="2" charset="-78"/>
                 <a:cs typeface="Amiri" pitchFamily="2" charset="-78"/>
               </a:rPr>
               <a:t>طَلَبُ المَعْلُومَاتِ</a:t>
@@ -27476,6 +27618,7 @@
                   <a:srgbClr val="1B3B6F"/>
                 </a:solidFill>
                 <a:latin typeface="Amiri" pitchFamily="2" charset="-78"/>
+                <a:ea typeface="Amiri" pitchFamily="2" charset="-78"/>
                 <a:cs typeface="Amiri" pitchFamily="2" charset="-78"/>
               </a:rPr>
               <a:t>التَّفَاوُضُ</a:t>
@@ -28005,6 +28148,7 @@
                   <a:srgbClr val="1B3B6F"/>
                 </a:solidFill>
                 <a:latin typeface="Amiri" pitchFamily="2" charset="-78"/>
+                <a:ea typeface="Amiri" pitchFamily="2" charset="-78"/>
                 <a:cs typeface="Amiri" pitchFamily="2" charset="-78"/>
               </a:rPr>
               <a:t>هَلْ يُمْكِنُ أَنْ</a:t>
@@ -28031,6 +28175,7 @@
                   <a:srgbClr val="1B3B6F"/>
                 </a:solidFill>
                 <a:latin typeface="Amiri" pitchFamily="2" charset="-78"/>
+                <a:ea typeface="Amiri" pitchFamily="2" charset="-78"/>
                 <a:cs typeface="Amiri" pitchFamily="2" charset="-78"/>
               </a:rPr>
               <a:t>مَوْعِدًا؟</a:t>
@@ -28132,6 +28277,7 @@
                   <a:srgbClr val="9AA1AB"/>
                 </a:solidFill>
                 <a:latin typeface="Amiri" pitchFamily="2" charset="-78"/>
+                <a:ea typeface="Amiri" pitchFamily="2" charset="-78"/>
                 <a:cs typeface="Amiri" pitchFamily="2" charset="-78"/>
               </a:rPr>
               <a:t>أَحْجِزُ</a:t>
@@ -28233,6 +28379,7 @@
                   <a:srgbClr val="9AA1AB"/>
                 </a:solidFill>
                 <a:latin typeface="Amiri" pitchFamily="2" charset="-78"/>
+                <a:ea typeface="Amiri" pitchFamily="2" charset="-78"/>
                 <a:cs typeface="Amiri" pitchFamily="2" charset="-78"/>
               </a:rPr>
               <a:t>حَجَزْتُ</a:t>
@@ -28361,6 +28508,7 @@
                   <a:srgbClr val="1F2A37"/>
                 </a:solidFill>
                 <a:latin typeface="Amiri" pitchFamily="2" charset="-78"/>
+                <a:ea typeface="Amiri" pitchFamily="2" charset="-78"/>
                 <a:cs typeface="Amiri" pitchFamily="2" charset="-78"/>
               </a:rPr>
               <a:t>أَحْجِزَ</a:t>
@@ -28547,6 +28695,7 @@
                   <a:srgbClr val="1B3B6F"/>
                 </a:solidFill>
                 <a:latin typeface="Amiri" pitchFamily="2" charset="-78"/>
+                <a:ea typeface="Amiri" pitchFamily="2" charset="-78"/>
                 <a:cs typeface="Amiri" pitchFamily="2" charset="-78"/>
               </a:rPr>
               <a:t>كُنْتُ</a:t>
@@ -28573,6 +28722,7 @@
                   <a:srgbClr val="1B3B6F"/>
                 </a:solidFill>
                 <a:latin typeface="Amiri" pitchFamily="2" charset="-78"/>
+                <a:ea typeface="Amiri" pitchFamily="2" charset="-78"/>
                 <a:cs typeface="Amiri" pitchFamily="2" charset="-78"/>
               </a:rPr>
               <a:t>دَرَسْتُ العُلُومَ</a:t>
@@ -28714,6 +28864,7 @@
                   <a:srgbClr val="1F2A37"/>
                 </a:solidFill>
                 <a:latin typeface="Amiri" pitchFamily="2" charset="-78"/>
+                <a:ea typeface="Amiri" pitchFamily="2" charset="-78"/>
                 <a:cs typeface="Amiri" pitchFamily="2" charset="-78"/>
               </a:rPr>
               <a:t>قَدْ</a:t>
@@ -28815,6 +28966,7 @@
                   <a:srgbClr val="9AA1AB"/>
                 </a:solidFill>
                 <a:latin typeface="Amiri" pitchFamily="2" charset="-78"/>
+                <a:ea typeface="Amiri" pitchFamily="2" charset="-78"/>
                 <a:cs typeface="Amiri" pitchFamily="2" charset="-78"/>
               </a:rPr>
               <a:t>سَوْفَ</a:t>
@@ -28916,6 +29068,7 @@
                   <a:srgbClr val="9AA1AB"/>
                 </a:solidFill>
                 <a:latin typeface="Amiri" pitchFamily="2" charset="-78"/>
+                <a:ea typeface="Amiri" pitchFamily="2" charset="-78"/>
                 <a:cs typeface="Amiri" pitchFamily="2" charset="-78"/>
               </a:rPr>
               <a:t>لَنْ</a:t>
@@ -29105,6 +29258,7 @@
                   <a:srgbClr val="1B3B6F"/>
                 </a:solidFill>
                 <a:latin typeface="Amiri" pitchFamily="2" charset="-78"/>
+                <a:ea typeface="Amiri" pitchFamily="2" charset="-78"/>
                 <a:cs typeface="Amiri" pitchFamily="2" charset="-78"/>
               </a:rPr>
               <a:t>مَا الَّذِي تَشْكُو مِنْهُ؟ ← أَشْعُرُ بِصُدَاعٍ مُنْذُ أُسْبُوعٍ.</a:t>
@@ -29238,6 +29392,7 @@
                   <a:srgbClr val="D4AF37"/>
                 </a:solidFill>
                 <a:latin typeface="Amiri" pitchFamily="2" charset="-78"/>
+                <a:ea typeface="Amiri" pitchFamily="2" charset="-78"/>
                 <a:cs typeface="Amiri" pitchFamily="2" charset="-78"/>
               </a:rPr>
               <a:t>م</a:t>
@@ -29558,6 +29713,7 @@
                   <a:srgbClr val="8A6D1E"/>
                 </a:solidFill>
                 <a:latin typeface="Amiri" pitchFamily="2" charset="-78"/>
+                <a:ea typeface="Amiri" pitchFamily="2" charset="-78"/>
                 <a:cs typeface="Amiri" pitchFamily="2" charset="-78"/>
               </a:rPr>
               <a:t>الأَهْدَافُ وَمَعَايِيرُ النَّجَاحِ</a:t>
@@ -29706,6 +29862,7 @@
                   <a:srgbClr val="8A6D1E"/>
                 </a:solidFill>
                 <a:latin typeface="Amiri" pitchFamily="2" charset="-78"/>
+                <a:ea typeface="Amiri" pitchFamily="2" charset="-78"/>
                 <a:cs typeface="Amiri" pitchFamily="2" charset="-78"/>
               </a:rPr>
               <a:t>سَتَتَعَلَّمُ اليَوْمَ</a:t>
@@ -30964,6 +31121,7 @@
                   <a:srgbClr val="D4AF37"/>
                 </a:solidFill>
                 <a:latin typeface="Amiri" pitchFamily="2" charset="-78"/>
+                <a:ea typeface="Amiri" pitchFamily="2" charset="-78"/>
                 <a:cs typeface="Amiri" pitchFamily="2" charset="-78"/>
               </a:rPr>
               <a:t>كَلِمَاتُ الدَّرْسِ</a:t>
@@ -31186,6 +31344,7 @@
                   <a:srgbClr val="1B3B6F"/>
                 </a:solidFill>
                 <a:latin typeface="Amiri" pitchFamily="2" charset="-78"/>
+                <a:ea typeface="Amiri" pitchFamily="2" charset="-78"/>
                 <a:cs typeface="Amiri" pitchFamily="2" charset="-78"/>
               </a:rPr>
               <a:t>عِلَاجٌ</a:t>
@@ -31219,11 +31378,12 @@
               <a:buNone/>
             </a:pPr>
             <a:r>
-              <a:rPr lang="ur-PK" altLang="en-US" sz="1400" b="1" dirty="0">
+              <a:rPr lang="ar-SA" altLang="en-US" sz="1400" b="1" dirty="0">
                 <a:solidFill>
                   <a:srgbClr val="2E8B57"/>
                 </a:solidFill>
                 <a:latin typeface="Amiri" pitchFamily="2" charset="-78"/>
+                <a:ea typeface="Amiri" pitchFamily="2" charset="-78"/>
                 <a:cs typeface="Amiri" pitchFamily="2" charset="-78"/>
               </a:rPr>
               <a:t>‎علاج‎ </a:t>
@@ -31275,6 +31435,7 @@
                   <a:srgbClr val="1B3B6F"/>
                 </a:solidFill>
                 <a:latin typeface="Amiri" pitchFamily="2" charset="-78"/>
+                <a:ea typeface="Amiri" pitchFamily="2" charset="-78"/>
                 <a:cs typeface="Amiri" pitchFamily="2" charset="-78"/>
               </a:rPr>
               <a:t>سَفَرٌ</a:t>
@@ -31308,11 +31469,12 @@
               <a:buNone/>
             </a:pPr>
             <a:r>
-              <a:rPr lang="ur-PK" altLang="en-US" sz="1400" b="1" dirty="0">
+              <a:rPr lang="ar-SA" altLang="en-US" sz="1400" b="1" dirty="0">
                 <a:solidFill>
                   <a:srgbClr val="2E8B57"/>
                 </a:solidFill>
                 <a:latin typeface="Amiri" pitchFamily="2" charset="-78"/>
+                <a:ea typeface="Amiri" pitchFamily="2" charset="-78"/>
                 <a:cs typeface="Amiri" pitchFamily="2" charset="-78"/>
               </a:rPr>
               <a:t>‎سفر‎ </a:t>
@@ -31364,6 +31526,7 @@
                   <a:srgbClr val="1B3B6F"/>
                 </a:solidFill>
                 <a:latin typeface="Amiri" pitchFamily="2" charset="-78"/>
+                <a:ea typeface="Amiri" pitchFamily="2" charset="-78"/>
                 <a:cs typeface="Amiri" pitchFamily="2" charset="-78"/>
               </a:rPr>
               <a:t>إِقَامَةٌ</a:t>
@@ -31397,11 +31560,12 @@
               <a:buNone/>
             </a:pPr>
             <a:r>
-              <a:rPr lang="ur-PK" altLang="en-US" sz="1400" b="1" dirty="0">
+              <a:rPr lang="ar-SA" altLang="en-US" sz="1400" b="1" dirty="0">
                 <a:solidFill>
                   <a:srgbClr val="2E8B57"/>
                 </a:solidFill>
                 <a:latin typeface="Amiri" pitchFamily="2" charset="-78"/>
+                <a:ea typeface="Amiri" pitchFamily="2" charset="-78"/>
                 <a:cs typeface="Amiri" pitchFamily="2" charset="-78"/>
               </a:rPr>
               <a:t>‎اقامت‎ </a:t>
@@ -31453,6 +31617,7 @@
                   <a:srgbClr val="1B3B6F"/>
                 </a:solidFill>
                 <a:latin typeface="Amiri" pitchFamily="2" charset="-78"/>
+                <a:ea typeface="Amiri" pitchFamily="2" charset="-78"/>
                 <a:cs typeface="Amiri" pitchFamily="2" charset="-78"/>
               </a:rPr>
               <a:t>مَوْعِدٌ</a:t>
@@ -31486,11 +31651,12 @@
               <a:buNone/>
             </a:pPr>
             <a:r>
-              <a:rPr lang="ur-PK" altLang="en-US" sz="1400" b="1" dirty="0">
+              <a:rPr lang="ar-SA" altLang="en-US" sz="1400" b="1" dirty="0">
                 <a:solidFill>
                   <a:srgbClr val="2E8B57"/>
                 </a:solidFill>
                 <a:latin typeface="Amiri" pitchFamily="2" charset="-78"/>
+                <a:ea typeface="Amiri" pitchFamily="2" charset="-78"/>
                 <a:cs typeface="Amiri" pitchFamily="2" charset="-78"/>
               </a:rPr>
               <a:t>‎وعدہ‎ </a:t>
@@ -31542,6 +31708,7 @@
                   <a:srgbClr val="1B3B6F"/>
                 </a:solidFill>
                 <a:latin typeface="Amiri" pitchFamily="2" charset="-78"/>
+                <a:ea typeface="Amiri" pitchFamily="2" charset="-78"/>
                 <a:cs typeface="Amiri" pitchFamily="2" charset="-78"/>
               </a:rPr>
               <a:t>مُذَاكَرَةٌ</a:t>
@@ -31575,11 +31742,12 @@
               <a:buNone/>
             </a:pPr>
             <a:r>
-              <a:rPr lang="ur-PK" altLang="en-US" sz="1400" b="1" dirty="0">
+              <a:rPr lang="ar-SA" altLang="en-US" sz="1400" b="1" dirty="0">
                 <a:solidFill>
                   <a:srgbClr val="2E8B57"/>
                 </a:solidFill>
                 <a:latin typeface="Amiri" pitchFamily="2" charset="-78"/>
+                <a:ea typeface="Amiri" pitchFamily="2" charset="-78"/>
                 <a:cs typeface="Amiri" pitchFamily="2" charset="-78"/>
               </a:rPr>
               <a:t>‎مذاکرات‎ </a:t>
@@ -31726,6 +31894,7 @@
                   <a:srgbClr val="D4AF37"/>
                 </a:solidFill>
                 <a:latin typeface="Amiri" pitchFamily="2" charset="-78"/>
+                <a:ea typeface="Amiri" pitchFamily="2" charset="-78"/>
                 <a:cs typeface="Amiri" pitchFamily="2" charset="-78"/>
               </a:rPr>
               <a:t>م</a:t>
@@ -32046,6 +32215,7 @@
                   <a:srgbClr val="8A6D1E"/>
                 </a:solidFill>
                 <a:latin typeface="Amiri" pitchFamily="2" charset="-78"/>
+                <a:ea typeface="Amiri" pitchFamily="2" charset="-78"/>
                 <a:cs typeface="Amiri" pitchFamily="2" charset="-78"/>
               </a:rPr>
               <a:t>كَلِمَاتُ الدَّرْسِ</a:t>
@@ -32284,6 +32454,7 @@
                   <a:srgbClr val="1B3B6F"/>
                 </a:solidFill>
                 <a:latin typeface="Amiri" pitchFamily="2" charset="-78"/>
+                <a:ea typeface="Amiri" pitchFamily="2" charset="-78"/>
                 <a:cs typeface="Amiri" pitchFamily="2" charset="-78"/>
               </a:rPr>
               <a:t>تَمْثِيلُ الدَّوْرِ</a:t>
@@ -32603,6 +32774,7 @@
                   <a:srgbClr val="1B3B6F"/>
                 </a:solidFill>
                 <a:latin typeface="Amiri" pitchFamily="2" charset="-78"/>
+                <a:ea typeface="Amiri" pitchFamily="2" charset="-78"/>
                 <a:cs typeface="Amiri" pitchFamily="2" charset="-78"/>
               </a:rPr>
               <a:t>الاسْتِجَابَةُ لِلْمُحَفِّزَاتِ</a:t>
@@ -32760,6 +32932,7 @@
                   <a:srgbClr val="1B3B6F"/>
                 </a:solidFill>
                 <a:latin typeface="Amiri" pitchFamily="2" charset="-78"/>
+                <a:ea typeface="Amiri" pitchFamily="2" charset="-78"/>
                 <a:cs typeface="Amiri" pitchFamily="2" charset="-78"/>
               </a:rPr>
               <a:t>مُحَفِّزٌ</a:t>
@@ -32895,6 +33068,7 @@
                   <a:srgbClr val="1B3B6F"/>
                 </a:solidFill>
                 <a:latin typeface="Amiri" pitchFamily="2" charset="-78"/>
+                <a:ea typeface="Amiri" pitchFamily="2" charset="-78"/>
                 <a:cs typeface="Amiri" pitchFamily="2" charset="-78"/>
               </a:rPr>
               <a:t>اللُّغَةُ التَّعَامُلِيَّةُ</a:t>
@@ -33149,6 +33323,7 @@
                   <a:srgbClr val="1B3B6F"/>
                 </a:solidFill>
                 <a:latin typeface="Amiri" pitchFamily="2" charset="-78"/>
+                <a:ea typeface="Amiri" pitchFamily="2" charset="-78"/>
                 <a:cs typeface="Amiri" pitchFamily="2" charset="-78"/>
               </a:rPr>
               <a:t>إِعْطَاءُ المَعْلُومَاتِ</a:t>
@@ -33336,6 +33511,7 @@
                   <a:srgbClr val="D4AF37"/>
                 </a:solidFill>
                 <a:latin typeface="Amiri" pitchFamily="2" charset="-78"/>
+                <a:ea typeface="Amiri" pitchFamily="2" charset="-78"/>
                 <a:cs typeface="Amiri" pitchFamily="2" charset="-78"/>
               </a:rPr>
               <a:t>م</a:t>
@@ -33656,6 +33832,7 @@
                   <a:srgbClr val="8A6D1E"/>
                 </a:solidFill>
                 <a:latin typeface="Amiri" pitchFamily="2" charset="-78"/>
+                <a:ea typeface="Amiri" pitchFamily="2" charset="-78"/>
                 <a:cs typeface="Amiri" pitchFamily="2" charset="-78"/>
               </a:rPr>
               <a:t>كَلِمَاتُ الدَّرْسِ</a:t>
@@ -33894,6 +34071,7 @@
                   <a:srgbClr val="1B3B6F"/>
                 </a:solidFill>
                 <a:latin typeface="Amiri" pitchFamily="2" charset="-78"/>
+                <a:ea typeface="Amiri" pitchFamily="2" charset="-78"/>
                 <a:cs typeface="Amiri" pitchFamily="2" charset="-78"/>
               </a:rPr>
               <a:t>طَلَبُ المَعْلُومَاتِ</a:t>
@@ -34148,6 +34326,7 @@
                   <a:srgbClr val="1B3B6F"/>
                 </a:solidFill>
                 <a:latin typeface="Amiri" pitchFamily="2" charset="-78"/>
+                <a:ea typeface="Amiri" pitchFamily="2" charset="-78"/>
                 <a:cs typeface="Amiri" pitchFamily="2" charset="-78"/>
               </a:rPr>
               <a:t>التَّفَاوُضُ</a:t>
@@ -34337,6 +34516,7 @@
                   <a:srgbClr val="1B3B6F"/>
                 </a:solidFill>
                 <a:latin typeface="Amiri" pitchFamily="2" charset="-78"/>
+                <a:ea typeface="Amiri" pitchFamily="2" charset="-78"/>
                 <a:cs typeface="Amiri" pitchFamily="2" charset="-78"/>
               </a:rPr>
               <a:t>حَلُّ المُشْكِلَةِ</a:t>
@@ -34591,6 +34771,7 @@
                   <a:srgbClr val="1B3B6F"/>
                 </a:solidFill>
                 <a:latin typeface="Amiri" pitchFamily="2" charset="-78"/>
+                <a:ea typeface="Amiri" pitchFamily="2" charset="-78"/>
                 <a:cs typeface="Amiri" pitchFamily="2" charset="-78"/>
               </a:rPr>
               <a:t>التَّحَدُّثُ بِثِقَةٍ</a:t>
@@ -34743,13 +34924,9 @@
     <a:fontScheme name="Office">
       <a:majorFont>
         <a:latin typeface="Calibri Light" panose="020F0302020204030204"/>
-        <a:ea typeface=""/>
-        <a:cs typeface=""/>
-        <a:font script="Jpan" typeface="游ゴシック Light"/>
-        <a:font script="Hang" typeface="맑은 고딕"/>
-        <a:font script="Hans" typeface="等线 Light"/>
-        <a:font script="Hant" typeface="新細明體"/>
-        <a:font script="Arab" typeface="Times New Roman"/>
+        <a:ea typeface="Amiri" pitchFamily="2" charset="-78"/>
+        <a:cs typeface="Amiri" pitchFamily="2" charset="-78"/>
+        <a:font script="Arab" typeface="Amiri"/>
         <a:font script="Hebr" typeface="Times New Roman"/>
         <a:font script="Thai" typeface="Angsana New"/>
         <a:font script="Ethi" typeface="Nyala"/>
@@ -34795,13 +34972,9 @@
       </a:majorFont>
       <a:minorFont>
         <a:latin typeface="Calibri" panose="020F0502020204030204"/>
-        <a:ea typeface=""/>
-        <a:cs typeface=""/>
-        <a:font script="Jpan" typeface="游ゴシック"/>
-        <a:font script="Hang" typeface="맑은 고딕"/>
-        <a:font script="Hans" typeface="等线"/>
-        <a:font script="Hant" typeface="新細明體"/>
-        <a:font script="Arab" typeface="Arial"/>
+        <a:ea typeface="Amiri" pitchFamily="2" charset="-78"/>
+        <a:cs typeface="Amiri" pitchFamily="2" charset="-78"/>
+        <a:font script="Arab" typeface="Amiri"/>
         <a:font script="Hebr" typeface="Arial"/>
         <a:font script="Thai" typeface="Cordia New"/>
         <a:font script="Ethi" typeface="Nyala"/>
